--- a/presentation/MAOR_EQUITY_Presentation.pptx
+++ b/presentation/MAOR_EQUITY_Presentation.pptx
@@ -2957,10 +2957,10 @@
             <a:tbl>
               <a:tblPr/>
               <a:tblGrid>
-                <a:gridCol w="1188720"/>
-                <a:gridCol w="530352"/>
+                <a:gridCol w="1115568"/>
+                <a:gridCol w="548640"/>
                 <a:gridCol w="566928"/>
-                <a:gridCol w="502920"/>
+                <a:gridCol w="557784"/>
               </a:tblGrid>
               <a:tr h="256032">
                 <a:tc>
@@ -4339,7 +4339,7 @@
         <p:spPr>
           <a:xfrm>
             <a:off x="3246120" y="1280160"/>
-            <a:ext cx="1170432" cy="1280160"/>
+            <a:ext cx="2788920" cy="658368"/>
           </a:xfrm>
           <a:prstGeom prst="rect">
             <a:avLst/>
@@ -4370,8 +4370,8 @@
         </p:nvSpPr>
         <p:spPr>
           <a:xfrm>
-            <a:off x="3246120" y="1371600"/>
-            <a:ext cx="1170432" cy="685800"/>
+            <a:off x="3246120" y="1280160"/>
+            <a:ext cx="914400" cy="658368"/>
           </a:xfrm>
           <a:prstGeom prst="rect">
             <a:avLst/>
@@ -4387,14 +4387,14 @@
               <a:buNone/>
             </a:pPr>
             <a:r>
-              <a:rPr lang="en-US" sz="3800" b="1" dirty="0">
+              <a:rPr lang="en-US" sz="3600" b="1" dirty="0">
                 <a:solidFill>
                   <a:srgbClr val="028090"/>
                 </a:solidFill>
               </a:rPr>
               <a:t>48%</a:t>
             </a:r>
-            <a:endParaRPr lang="en-US" sz="3800" dirty="0"/>
+            <a:endParaRPr lang="en-US" sz="3600" dirty="0"/>
           </a:p>
         </p:txBody>
       </p:sp>
@@ -4406,8 +4406,8 @@
         </p:nvSpPr>
         <p:spPr>
           <a:xfrm>
-            <a:off x="3246120" y="2057400"/>
-            <a:ext cx="1170432" cy="438912"/>
+            <a:off x="4187952" y="1280160"/>
+            <a:ext cx="1847088" cy="658368"/>
           </a:xfrm>
           <a:prstGeom prst="rect">
             <a:avLst/>
@@ -4419,32 +4419,18 @@
           <a:bodyPr wrap="square" lIns="0" tIns="0" rIns="0" bIns="0" rtlCol="0" anchor="ctr"/>
           <a:lstStyle/>
           <a:p>
-            <a:pPr algn="ctr" indent="0" marL="0">
+            <a:pPr algn="l" indent="0" marL="0">
               <a:buNone/>
             </a:pPr>
             <a:r>
-              <a:rPr lang="en-US" sz="900" dirty="0">
+              <a:rPr lang="en-US" sz="1000" dirty="0">
                 <a:solidFill>
                   <a:srgbClr val="9DB8D4"/>
                 </a:solidFill>
               </a:rPr>
-              <a:t>divergence</a:t>
+              <a:t>divergence vs scalar B3</a:t>
             </a:r>
-            <a:endParaRPr lang="en-US" sz="900" dirty="0"/>
-          </a:p>
-          <a:p>
-            <a:pPr algn="ctr" indent="0" marL="0">
-              <a:buNone/>
-            </a:pPr>
-            <a:r>
-              <a:rPr lang="en-US" sz="900" dirty="0">
-                <a:solidFill>
-                  <a:srgbClr val="9DB8D4"/>
-                </a:solidFill>
-              </a:rPr>
-              <a:t>vs scalar B3</a:t>
-            </a:r>
-            <a:endParaRPr lang="en-US" sz="900" dirty="0"/>
+            <a:endParaRPr lang="en-US" sz="1000" dirty="0"/>
           </a:p>
         </p:txBody>
       </p:sp>
@@ -4463,19 +4449,19 @@
           </p:nvPr>
         </p:nvGraphicFramePr>
         <p:xfrm>
-          <a:off x="4480560" y="1280160"/>
-          <a:ext cx="1554480" cy="1280160"/>
+          <a:off x="3246120" y="1975104"/>
+          <a:ext cx="2788920" cy="969264"/>
         </p:xfrm>
         <a:graphic>
           <a:graphicData uri="http://schemas.openxmlformats.org/drawingml/2006/table">
             <a:tbl>
               <a:tblPr/>
               <a:tblGrid>
-                <a:gridCol w="804672"/>
-                <a:gridCol w="365760"/>
-                <a:gridCol w="384048"/>
+                <a:gridCol w="1508760"/>
+                <a:gridCol w="640080"/>
+                <a:gridCol w="640080"/>
               </a:tblGrid>
-              <a:tr h="320040">
+              <a:tr h="242316">
                 <a:tc>
                   <a:txBody>
                     <a:bodyPr/>
@@ -4485,14 +4471,14 @@
                         <a:buNone/>
                       </a:pPr>
                       <a:r>
-                        <a:rPr lang="en-US" sz="850" b="1" dirty="0">
+                        <a:rPr lang="en-US" sz="880" b="1" dirty="0">
                           <a:solidFill>
                             <a:srgbClr val="FFFFFF"/>
                           </a:solidFill>
                         </a:rPr>
                         <a:t>Scenario</a:t>
                       </a:r>
-                      <a:endParaRPr lang="en-US" sz="850" dirty="0"/>
+                      <a:endParaRPr lang="en-US" sz="880" dirty="0"/>
                     </a:p>
                   </a:txBody>
                   <a:tcPr marL="91440" marR="91440" marT="45720" marB="45720">
@@ -4546,14 +4532,14 @@
                         <a:buNone/>
                       </a:pPr>
                       <a:r>
-                        <a:rPr lang="en-US" sz="850" b="1" dirty="0">
+                        <a:rPr lang="en-US" sz="880" b="1" dirty="0">
                           <a:solidFill>
                             <a:srgbClr val="FFFFFF"/>
                           </a:solidFill>
                         </a:rPr>
                         <a:t>Scalar</a:t>
                       </a:r>
-                      <a:endParaRPr lang="en-US" sz="850" dirty="0"/>
+                      <a:endParaRPr lang="en-US" sz="880" dirty="0"/>
                     </a:p>
                   </a:txBody>
                   <a:tcPr marL="91440" marR="91440" marT="45720" marB="45720">
@@ -4607,14 +4593,14 @@
                         <a:buNone/>
                       </a:pPr>
                       <a:r>
-                        <a:rPr lang="en-US" sz="850" b="1" dirty="0">
+                        <a:rPr lang="en-US" sz="880" b="1" dirty="0">
                           <a:solidFill>
                             <a:srgbClr val="FFFFFF"/>
                           </a:solidFill>
                         </a:rPr>
                         <a:t>3-D</a:t>
                       </a:r>
-                      <a:endParaRPr lang="en-US" sz="850" dirty="0"/>
+                      <a:endParaRPr lang="en-US" sz="880" dirty="0"/>
                     </a:p>
                   </a:txBody>
                   <a:tcPr marL="91440" marR="91440" marT="45720" marB="45720">
@@ -4660,7 +4646,7 @@
                   </a:tcPr>
                 </a:tc>
               </a:tr>
-              <a:tr h="320040">
+              <a:tr h="242316">
                 <a:tc>
                   <a:txBody>
                     <a:bodyPr/>
@@ -4670,14 +4656,14 @@
                         <a:buNone/>
                       </a:pPr>
                       <a:r>
-                        <a:rPr lang="en-US" sz="850" dirty="0">
+                        <a:rPr lang="en-US" sz="880" dirty="0">
                           <a:solidFill>
                             <a:srgbClr val="374151"/>
                           </a:solidFill>
                         </a:rPr>
                         <a:t>Earnings beat + SEC fine</a:t>
                       </a:r>
-                      <a:endParaRPr lang="en-US" sz="850" dirty="0"/>
+                      <a:endParaRPr lang="en-US" sz="880" dirty="0"/>
                     </a:p>
                   </a:txBody>
                   <a:tcPr marL="91440" marR="91440" marT="45720" marB="45720">
@@ -4731,14 +4717,14 @@
                         <a:buNone/>
                       </a:pPr>
                       <a:r>
-                        <a:rPr lang="en-US" sz="850" dirty="0">
+                        <a:rPr lang="en-US" sz="880" dirty="0">
                           <a:solidFill>
                             <a:srgbClr val="7F1D1D"/>
                           </a:solidFill>
                         </a:rPr>
                         <a:t>BUY</a:t>
                       </a:r>
-                      <a:endParaRPr lang="en-US" sz="850" dirty="0"/>
+                      <a:endParaRPr lang="en-US" sz="880" dirty="0"/>
                     </a:p>
                   </a:txBody>
                   <a:tcPr marL="91440" marR="91440" marT="45720" marB="45720">
@@ -4792,14 +4778,14 @@
                         <a:buNone/>
                       </a:pPr>
                       <a:r>
-                        <a:rPr lang="en-US" sz="850" dirty="0">
+                        <a:rPr lang="en-US" sz="880" dirty="0">
                           <a:solidFill>
                             <a:srgbClr val="065F46"/>
                           </a:solidFill>
                         </a:rPr>
                         <a:t>HOLD ✔</a:t>
                       </a:r>
-                      <a:endParaRPr lang="en-US" sz="850" dirty="0"/>
+                      <a:endParaRPr lang="en-US" sz="880" dirty="0"/>
                     </a:p>
                   </a:txBody>
                   <a:tcPr marL="91440" marR="91440" marT="45720" marB="45720">
@@ -4845,7 +4831,7 @@
                   </a:tcPr>
                 </a:tc>
               </a:tr>
-              <a:tr h="320040">
+              <a:tr h="242316">
                 <a:tc>
                   <a:txBody>
                     <a:bodyPr/>
@@ -4855,14 +4841,14 @@
                         <a:buNone/>
                       </a:pPr>
                       <a:r>
-                        <a:rPr lang="en-US" sz="850" dirty="0">
+                        <a:rPr lang="en-US" sz="880" dirty="0">
                           <a:solidFill>
                             <a:srgbClr val="374151"/>
                           </a:solidFill>
                         </a:rPr>
                         <a:t>Weak quarter + bullish guide</a:t>
                       </a:r>
-                      <a:endParaRPr lang="en-US" sz="850" dirty="0"/>
+                      <a:endParaRPr lang="en-US" sz="880" dirty="0"/>
                     </a:p>
                   </a:txBody>
                   <a:tcPr marL="91440" marR="91440" marT="45720" marB="45720">
@@ -4916,14 +4902,14 @@
                         <a:buNone/>
                       </a:pPr>
                       <a:r>
-                        <a:rPr lang="en-US" sz="850" dirty="0">
+                        <a:rPr lang="en-US" sz="880" dirty="0">
                           <a:solidFill>
                             <a:srgbClr val="7F1D1D"/>
                           </a:solidFill>
                         </a:rPr>
                         <a:t>SELL</a:t>
                       </a:r>
-                      <a:endParaRPr lang="en-US" sz="850" dirty="0"/>
+                      <a:endParaRPr lang="en-US" sz="880" dirty="0"/>
                     </a:p>
                   </a:txBody>
                   <a:tcPr marL="91440" marR="91440" marT="45720" marB="45720">
@@ -4977,14 +4963,14 @@
                         <a:buNone/>
                       </a:pPr>
                       <a:r>
-                        <a:rPr lang="en-US" sz="850" dirty="0">
+                        <a:rPr lang="en-US" sz="880" dirty="0">
                           <a:solidFill>
                             <a:srgbClr val="065F46"/>
                           </a:solidFill>
                         </a:rPr>
                         <a:t>HOLD ✔</a:t>
                       </a:r>
-                      <a:endParaRPr lang="en-US" sz="850" dirty="0"/>
+                      <a:endParaRPr lang="en-US" sz="880" dirty="0"/>
                     </a:p>
                   </a:txBody>
                   <a:tcPr marL="91440" marR="91440" marT="45720" marB="45720">
@@ -5030,7 +5016,7 @@
                   </a:tcPr>
                 </a:tc>
               </a:tr>
-              <a:tr h="320040">
+              <a:tr h="242316">
                 <a:tc>
                   <a:txBody>
                     <a:bodyPr/>
@@ -5040,14 +5026,14 @@
                         <a:buNone/>
                       </a:pPr>
                       <a:r>
-                        <a:rPr lang="en-US" sz="850" dirty="0">
+                        <a:rPr lang="en-US" sz="880" dirty="0">
                           <a:solidFill>
                             <a:srgbClr val="374151"/>
                           </a:solidFill>
                         </a:rPr>
                         <a:t>Neutral + litigation risk</a:t>
                       </a:r>
-                      <a:endParaRPr lang="en-US" sz="850" dirty="0"/>
+                      <a:endParaRPr lang="en-US" sz="880" dirty="0"/>
                     </a:p>
                   </a:txBody>
                   <a:tcPr marL="91440" marR="91440" marT="45720" marB="45720">
@@ -5101,14 +5087,14 @@
                         <a:buNone/>
                       </a:pPr>
                       <a:r>
-                        <a:rPr lang="en-US" sz="850" dirty="0">
+                        <a:rPr lang="en-US" sz="880" dirty="0">
                           <a:solidFill>
                             <a:srgbClr val="B45309"/>
                           </a:solidFill>
                         </a:rPr>
                         <a:t>HOLD</a:t>
                       </a:r>
-                      <a:endParaRPr lang="en-US" sz="850" dirty="0"/>
+                      <a:endParaRPr lang="en-US" sz="880" dirty="0"/>
                     </a:p>
                   </a:txBody>
                   <a:tcPr marL="91440" marR="91440" marT="45720" marB="45720">
@@ -5162,14 +5148,14 @@
                         <a:buNone/>
                       </a:pPr>
                       <a:r>
-                        <a:rPr lang="en-US" sz="850" dirty="0">
+                        <a:rPr lang="en-US" sz="880" dirty="0">
                           <a:solidFill>
                             <a:srgbClr val="065F46"/>
                           </a:solidFill>
                         </a:rPr>
                         <a:t>SELL ✔</a:t>
                       </a:r>
-                      <a:endParaRPr lang="en-US" sz="850" dirty="0"/>
+                      <a:endParaRPr lang="en-US" sz="880" dirty="0"/>
                     </a:p>
                   </a:txBody>
                   <a:tcPr marL="91440" marR="91440" marT="45720" marB="45720">
@@ -5227,8 +5213,8 @@
         </p:nvSpPr>
         <p:spPr>
           <a:xfrm>
-            <a:off x="3246120" y="2596896"/>
-            <a:ext cx="2788920" cy="347472"/>
+            <a:off x="3246120" y="2980944"/>
+            <a:ext cx="2788920" cy="256032"/>
           </a:xfrm>
           <a:prstGeom prst="rect">
             <a:avLst/>
@@ -5270,8 +5256,8 @@
         </p:blipFill>
         <p:spPr>
           <a:xfrm>
-            <a:off x="3246120" y="2980944"/>
-            <a:ext cx="2788920" cy="1664208"/>
+            <a:off x="3246120" y="3273552"/>
+            <a:ext cx="2788920" cy="1371600"/>
           </a:xfrm>
           <a:prstGeom prst="rect">
             <a:avLst/>

--- a/presentation/MAOR_EQUITY_Presentation.pptx
+++ b/presentation/MAOR_EQUITY_Presentation.pptx
@@ -4,6 +4,9 @@
   <p:sldMasterIdLst>
     <p:sldMasterId id="2147483648" r:id="rId1"/>
   </p:sldMasterIdLst>
+  <p:notesMasterIdLst>
+    <p:notesMasterId r:id="rId14"/>
+  </p:notesMasterIdLst>
   <p:sldIdLst>
     <p:sldId id="256" r:id="rId2"/>
     <p:sldId id="257" r:id="rId3"/>
@@ -18,10 +21,7 @@
     <p:sldId id="266" r:id="rId12"/>
     <p:sldId id="267" r:id="rId13"/>
   </p:sldIdLst>
-  <p:notesMasterIdLst>
-    <p:notesMasterId r:id="rId14"/>
-  </p:notesMasterIdLst>
-  <p:sldSz cx="9144000" cy="5143500"/>
+  <p:sldSz cx="9144000" cy="5143500" type="screen16x9"/>
   <p:notesSz cx="5143500" cy="9144000"/>
   <p:defaultTextStyle>
     <a:lvl1pPr marL="0" algn="l" defTabSz="914400" rtl="0" eaLnBrk="1" latinLnBrk="0" hangingPunct="1">
@@ -115,7 +115,111 @@
       </a:defRPr>
     </a:lvl9pPr>
   </p:defaultTextStyle>
+  <p:extLst>
+    <p:ext uri="{EFAFB233-063F-42B5-8137-9DF3F51BA10A}">
+      <p15:sldGuideLst xmlns:p15="http://schemas.microsoft.com/office/powerpoint/2012/main"/>
+    </p:ext>
+  </p:extLst>
 </p:presentation>
+</file>
+
+<file path=ppt/changesInfos/changesInfo1.xml><?xml version="1.0" encoding="utf-8"?>
+<pc:chgInfo xmlns:a="http://schemas.openxmlformats.org/drawingml/2006/main" xmlns:r="http://schemas.openxmlformats.org/officeDocument/2006/relationships" xmlns:ac="http://schemas.microsoft.com/office/drawing/2013/main/command" xmlns:pc="http://schemas.microsoft.com/office/powerpoint/2013/main/command">
+  <pc:docChgLst>
+    <pc:chgData name="Shahoud Shahid" userId="3c9cab93-14e5-4819-b0da-9c888b27567f" providerId="ADAL" clId="{F3DB6A94-22EA-4126-B191-698C38F207E8}"/>
+    <pc:docChg chg="undo custSel modSld">
+      <pc:chgData name="Shahoud Shahid" userId="3c9cab93-14e5-4819-b0da-9c888b27567f" providerId="ADAL" clId="{F3DB6A94-22EA-4126-B191-698C38F207E8}" dt="2026-05-02T17:15:24.893" v="41" actId="21"/>
+      <pc:docMkLst>
+        <pc:docMk/>
+      </pc:docMkLst>
+      <pc:sldChg chg="modSp mod">
+        <pc:chgData name="Shahoud Shahid" userId="3c9cab93-14e5-4819-b0da-9c888b27567f" providerId="ADAL" clId="{F3DB6A94-22EA-4126-B191-698C38F207E8}" dt="2026-05-02T16:52:07.533" v="31" actId="14100"/>
+        <pc:sldMkLst>
+          <pc:docMk/>
+          <pc:sldMk cId="0" sldId="262"/>
+        </pc:sldMkLst>
+        <pc:spChg chg="mod">
+          <ac:chgData name="Shahoud Shahid" userId="3c9cab93-14e5-4819-b0da-9c888b27567f" providerId="ADAL" clId="{F3DB6A94-22EA-4126-B191-698C38F207E8}" dt="2026-05-02T16:52:00.493" v="29" actId="14100"/>
+          <ac:spMkLst>
+            <pc:docMk/>
+            <pc:sldMk cId="0" sldId="262"/>
+            <ac:spMk id="12" creationId="{00000000-0000-0000-0000-000000000000}"/>
+          </ac:spMkLst>
+        </pc:spChg>
+        <pc:graphicFrameChg chg="mod modGraphic">
+          <ac:chgData name="Shahoud Shahid" userId="3c9cab93-14e5-4819-b0da-9c888b27567f" providerId="ADAL" clId="{F3DB6A94-22EA-4126-B191-698C38F207E8}" dt="2026-05-02T16:52:07.533" v="31" actId="14100"/>
+          <ac:graphicFrameMkLst>
+            <pc:docMk/>
+            <pc:sldMk cId="0" sldId="262"/>
+            <ac:graphicFrameMk id="15" creationId="{00000000-0000-0000-0000-000000000000}"/>
+          </ac:graphicFrameMkLst>
+        </pc:graphicFrameChg>
+      </pc:sldChg>
+      <pc:sldChg chg="addSp delSp modSp mod">
+        <pc:chgData name="Shahoud Shahid" userId="3c9cab93-14e5-4819-b0da-9c888b27567f" providerId="ADAL" clId="{F3DB6A94-22EA-4126-B191-698C38F207E8}" dt="2026-05-02T17:15:24.893" v="41" actId="21"/>
+        <pc:sldMkLst>
+          <pc:docMk/>
+          <pc:sldMk cId="0" sldId="263"/>
+        </pc:sldMkLst>
+        <pc:picChg chg="add del mod">
+          <ac:chgData name="Shahoud Shahid" userId="3c9cab93-14e5-4819-b0da-9c888b27567f" providerId="ADAL" clId="{F3DB6A94-22EA-4126-B191-698C38F207E8}" dt="2026-05-02T17:15:24.893" v="41" actId="21"/>
+          <ac:picMkLst>
+            <pc:docMk/>
+            <pc:sldMk cId="0" sldId="263"/>
+            <ac:picMk id="11" creationId="{00000000-0000-0000-0000-000000000000}"/>
+          </ac:picMkLst>
+        </pc:picChg>
+        <pc:picChg chg="add del mod">
+          <ac:chgData name="Shahoud Shahid" userId="3c9cab93-14e5-4819-b0da-9c888b27567f" providerId="ADAL" clId="{F3DB6A94-22EA-4126-B191-698C38F207E8}" dt="2026-05-02T17:15:24.215" v="40" actId="931"/>
+          <ac:picMkLst>
+            <pc:docMk/>
+            <pc:sldMk cId="0" sldId="263"/>
+            <ac:picMk id="13" creationId="{9FA184D3-D7B4-5F99-2D7A-E2A4821ADFD1}"/>
+          </ac:picMkLst>
+        </pc:picChg>
+      </pc:sldChg>
+      <pc:sldChg chg="modSp mod">
+        <pc:chgData name="Shahoud Shahid" userId="3c9cab93-14e5-4819-b0da-9c888b27567f" providerId="ADAL" clId="{F3DB6A94-22EA-4126-B191-698C38F207E8}" dt="2026-05-02T16:50:11.117" v="26" actId="14100"/>
+        <pc:sldMkLst>
+          <pc:docMk/>
+          <pc:sldMk cId="0" sldId="265"/>
+        </pc:sldMkLst>
+        <pc:spChg chg="mod">
+          <ac:chgData name="Shahoud Shahid" userId="3c9cab93-14e5-4819-b0da-9c888b27567f" providerId="ADAL" clId="{F3DB6A94-22EA-4126-B191-698C38F207E8}" dt="2026-05-02T16:49:47.469" v="19" actId="1076"/>
+          <ac:spMkLst>
+            <pc:docMk/>
+            <pc:sldMk cId="0" sldId="265"/>
+            <ac:spMk id="11" creationId="{00000000-0000-0000-0000-000000000000}"/>
+          </ac:spMkLst>
+        </pc:spChg>
+        <pc:spChg chg="mod">
+          <ac:chgData name="Shahoud Shahid" userId="3c9cab93-14e5-4819-b0da-9c888b27567f" providerId="ADAL" clId="{F3DB6A94-22EA-4126-B191-698C38F207E8}" dt="2026-05-02T16:50:11.117" v="26" actId="14100"/>
+          <ac:spMkLst>
+            <pc:docMk/>
+            <pc:sldMk cId="0" sldId="265"/>
+            <ac:spMk id="12" creationId="{00000000-0000-0000-0000-000000000000}"/>
+          </ac:spMkLst>
+        </pc:spChg>
+        <pc:spChg chg="mod">
+          <ac:chgData name="Shahoud Shahid" userId="3c9cab93-14e5-4819-b0da-9c888b27567f" providerId="ADAL" clId="{F3DB6A94-22EA-4126-B191-698C38F207E8}" dt="2026-05-02T16:49:38.944" v="18" actId="1076"/>
+          <ac:spMkLst>
+            <pc:docMk/>
+            <pc:sldMk cId="0" sldId="265"/>
+            <ac:spMk id="13" creationId="{00000000-0000-0000-0000-000000000000}"/>
+          </ac:spMkLst>
+        </pc:spChg>
+        <pc:spChg chg="mod">
+          <ac:chgData name="Shahoud Shahid" userId="3c9cab93-14e5-4819-b0da-9c888b27567f" providerId="ADAL" clId="{F3DB6A94-22EA-4126-B191-698C38F207E8}" dt="2026-05-02T16:50:02.769" v="23" actId="14100"/>
+          <ac:spMkLst>
+            <pc:docMk/>
+            <pc:sldMk cId="0" sldId="265"/>
+            <ac:spMk id="14" creationId="{00000000-0000-0000-0000-000000000000}"/>
+          </ac:spMkLst>
+        </pc:spChg>
+      </pc:sldChg>
+    </pc:docChg>
+  </pc:docChgLst>
+</pc:chgInfo>
 </file>
 
 <file path=ppt/notesMasters/notesMaster1.xml><?xml version="1.0" encoding="utf-8"?>
@@ -140,234 +244,10 @@
           <a:chExt cx="0" cy="0"/>
         </a:xfrm>
       </p:grpSpPr>
-      <p:sp>
-        <p:nvSpPr>
-          <p:cNvPr id="2" name="Header Placeholder 1"/>
-          <p:cNvSpPr>
-            <a:spLocks noGrp="1"/>
-          </p:cNvSpPr>
-          <p:nvPr>
-            <p:ph type="hdr" sz="quarter"/>
-          </p:nvPr>
-        </p:nvSpPr>
-        <p:spPr>
-          <a:xfrm>
-            <a:off x="0" y="0"/>
-            <a:ext cx="2971800" cy="458788"/>
-          </a:xfrm>
-          <a:prstGeom prst="rect">
-            <a:avLst/>
-          </a:prstGeom>
-        </p:spPr>
-        <p:txBody>
-          <a:bodyPr vert="horz" lIns="91440" tIns="45720" rIns="91440" bIns="45720" rtlCol="0"/>
-          <a:lstStyle>
-            <a:lvl1pPr algn="l">
-              <a:defRPr sz="1200"/>
-            </a:lvl1pPr>
-          </a:lstStyle>
-          <a:p>
-            <a:endParaRPr lang="en-US"/>
-          </a:p>
-        </p:txBody>
-      </p:sp>
-      <p:sp>
-        <p:nvSpPr>
-          <p:cNvPr id="3" name="Date Placeholder 2"/>
-          <p:cNvSpPr>
-            <a:spLocks noGrp="1"/>
-          </p:cNvSpPr>
-          <p:nvPr>
-            <p:ph type="dt" idx="1"/>
-          </p:nvPr>
-        </p:nvSpPr>
-        <p:spPr>
-          <a:xfrm>
-            <a:off x="3884613" y="0"/>
-            <a:ext cx="2971800" cy="458788"/>
-          </a:xfrm>
-          <a:prstGeom prst="rect">
-            <a:avLst/>
-          </a:prstGeom>
-        </p:spPr>
-        <p:txBody>
-          <a:bodyPr vert="horz" lIns="91440" tIns="45720" rIns="91440" bIns="45720" rtlCol="0"/>
-          <a:lstStyle>
-            <a:lvl1pPr algn="r">
-              <a:defRPr sz="1200"/>
-            </a:lvl1pPr>
-          </a:lstStyle>
-          <a:p>
-            <a:fld id="{5282F153-3F37-0F45-9E97-73ACFA13230C}" type="datetimeFigureOut">
-              <a:rPr lang="en-US"/>
-              <a:t>7/23/19</a:t>
-            </a:fld>
-            <a:endParaRPr lang="en-US"/>
-          </a:p>
-        </p:txBody>
-      </p:sp>
-      <p:sp>
-        <p:nvSpPr>
-          <p:cNvPr id="4" name="Slide Image Placeholder 3"/>
-          <p:cNvSpPr>
-            <a:spLocks noGrp="1" noRot="1" noChangeAspect="1"/>
-          </p:cNvSpPr>
-          <p:nvPr>
-            <p:ph type="sldImg" idx="2"/>
-          </p:nvPr>
-        </p:nvSpPr>
-        <p:spPr>
-          <a:xfrm>
-            <a:off x="685800" y="1143000"/>
-            <a:ext cx="5486400" cy="3086100"/>
-          </a:xfrm>
-          <a:prstGeom prst="rect">
-            <a:avLst/>
-          </a:prstGeom>
-          <a:noFill/>
-          <a:ln w="12700">
-            <a:solidFill>
-              <a:prstClr val="black"/>
-            </a:solidFill>
-          </a:ln>
-        </p:spPr>
-        <p:txBody>
-          <a:bodyPr vert="horz" lIns="91440" tIns="45720" rIns="91440" bIns="45720" rtlCol="0" anchor="ctr"/>
-          <a:lstStyle/>
-          <a:p>
-            <a:endParaRPr lang="en-US"/>
-          </a:p>
-        </p:txBody>
-      </p:sp>
-      <p:sp>
-        <p:nvSpPr>
-          <p:cNvPr id="5" name="Notes Placeholder 4"/>
-          <p:cNvSpPr>
-            <a:spLocks noGrp="1"/>
-          </p:cNvSpPr>
-          <p:nvPr>
-            <p:ph type="body" sz="quarter" idx="3"/>
-          </p:nvPr>
-        </p:nvSpPr>
-        <p:spPr>
-          <a:xfrm>
-            <a:off x="685800" y="4400550"/>
-            <a:ext cx="5486400" cy="3600450"/>
-          </a:xfrm>
-          <a:prstGeom prst="rect">
-            <a:avLst/>
-          </a:prstGeom>
-        </p:spPr>
-        <p:txBody>
-          <a:bodyPr vert="horz" lIns="91440" tIns="45720" rIns="91440" bIns="45720" rtlCol="0"/>
-          <a:lstStyle/>
-          <a:p>
-            <a:pPr lvl="0"/>
-            <a:r>
-              <a:rPr lang="en-US"/>
-              <a:t>Click to edit Master text styles</a:t>
-            </a:r>
-          </a:p>
-          <a:p>
-            <a:pPr lvl="1"/>
-            <a:r>
-              <a:rPr lang="en-US"/>
-              <a:t>Second level</a:t>
-            </a:r>
-          </a:p>
-          <a:p>
-            <a:pPr lvl="2"/>
-            <a:r>
-              <a:rPr lang="en-US"/>
-              <a:t>Third level</a:t>
-            </a:r>
-          </a:p>
-          <a:p>
-            <a:pPr lvl="3"/>
-            <a:r>
-              <a:rPr lang="en-US"/>
-              <a:t>Fourth level</a:t>
-            </a:r>
-          </a:p>
-          <a:p>
-            <a:pPr lvl="4"/>
-            <a:r>
-              <a:rPr lang="en-US"/>
-              <a:t>Fifth level</a:t>
-            </a:r>
-          </a:p>
-        </p:txBody>
-      </p:sp>
-      <p:sp>
-        <p:nvSpPr>
-          <p:cNvPr id="6" name="Footer Placeholder 5"/>
-          <p:cNvSpPr>
-            <a:spLocks noGrp="1"/>
-          </p:cNvSpPr>
-          <p:nvPr>
-            <p:ph type="ftr" sz="quarter" idx="4"/>
-          </p:nvPr>
-        </p:nvSpPr>
-        <p:spPr>
-          <a:xfrm>
-            <a:off x="0" y="8685213"/>
-            <a:ext cx="2971800" cy="458787"/>
-          </a:xfrm>
-          <a:prstGeom prst="rect">
-            <a:avLst/>
-          </a:prstGeom>
-        </p:spPr>
-        <p:txBody>
-          <a:bodyPr vert="horz" lIns="91440" tIns="45720" rIns="91440" bIns="45720" rtlCol="0" anchor="b"/>
-          <a:lstStyle>
-            <a:lvl1pPr algn="l">
-              <a:defRPr sz="1200"/>
-            </a:lvl1pPr>
-          </a:lstStyle>
-          <a:p>
-            <a:endParaRPr lang="en-US"/>
-          </a:p>
-        </p:txBody>
-      </p:sp>
-      <p:sp>
-        <p:nvSpPr>
-          <p:cNvPr id="7" name="Slide Number Placeholder 6"/>
-          <p:cNvSpPr>
-            <a:spLocks noGrp="1"/>
-          </p:cNvSpPr>
-          <p:nvPr>
-            <p:ph type="sldNum" sz="quarter" idx="5"/>
-          </p:nvPr>
-        </p:nvSpPr>
-        <p:spPr>
-          <a:xfrm>
-            <a:off x="3884613" y="8685213"/>
-            <a:ext cx="2971800" cy="458787"/>
-          </a:xfrm>
-          <a:prstGeom prst="rect">
-            <a:avLst/>
-          </a:prstGeom>
-        </p:spPr>
-        <p:txBody>
-          <a:bodyPr vert="horz" lIns="91440" tIns="45720" rIns="91440" bIns="45720" rtlCol="0" anchor="b"/>
-          <a:lstStyle>
-            <a:lvl1pPr algn="r">
-              <a:defRPr sz="1200"/>
-            </a:lvl1pPr>
-          </a:lstStyle>
-          <a:p>
-            <a:fld id="{CE5E9CC1-C706-0F49-92D6-E571CC5EEA8F}" type="slidenum">
-              <a:rPr lang="en-US"/>
-              <a:t>‹#›</a:t>
-            </a:fld>
-            <a:endParaRPr lang="en-US"/>
-          </a:p>
-        </p:txBody>
-      </p:sp>
     </p:spTree>
     <p:extLst>
       <p:ext uri="{BB962C8B-B14F-4D97-AF65-F5344CB8AC3E}">
-        <p14:creationId xmlns:p14="http://schemas.microsoft.com/office/powerpoint/2010/main" val="1024086991"/>
+        <p14:creationId xmlns:p14="http://schemas.microsoft.com/office/powerpoint/2010/main" val="1071394085"/>
       </p:ext>
     </p:extLst>
   </p:cSld>
@@ -511,10 +391,6 @@
           <a:bodyPr/>
           <a:lstStyle/>
           <a:p>
-            <a:r>
-              <a:rPr lang="en-US" dirty="0"/>
-              <a:t/>
-            </a:r>
             <a:endParaRPr lang="en-US" dirty="0"/>
           </a:p>
         </p:txBody>
@@ -599,10 +475,6 @@
           <a:bodyPr/>
           <a:lstStyle/>
           <a:p>
-            <a:r>
-              <a:rPr lang="en-US" dirty="0"/>
-              <a:t/>
-            </a:r>
             <a:endParaRPr lang="en-US" dirty="0"/>
           </a:p>
         </p:txBody>
@@ -687,10 +559,6 @@
           <a:bodyPr/>
           <a:lstStyle/>
           <a:p>
-            <a:r>
-              <a:rPr lang="en-US" dirty="0"/>
-              <a:t/>
-            </a:r>
             <a:endParaRPr lang="en-US" dirty="0"/>
           </a:p>
         </p:txBody>
@@ -775,10 +643,6 @@
           <a:bodyPr/>
           <a:lstStyle/>
           <a:p>
-            <a:r>
-              <a:rPr lang="en-US" dirty="0"/>
-              <a:t/>
-            </a:r>
             <a:endParaRPr lang="en-US" dirty="0"/>
           </a:p>
         </p:txBody>
@@ -863,10 +727,6 @@
           <a:bodyPr/>
           <a:lstStyle/>
           <a:p>
-            <a:r>
-              <a:rPr lang="en-US" dirty="0"/>
-              <a:t/>
-            </a:r>
             <a:endParaRPr lang="en-US" dirty="0"/>
           </a:p>
         </p:txBody>
@@ -951,10 +811,6 @@
           <a:bodyPr/>
           <a:lstStyle/>
           <a:p>
-            <a:r>
-              <a:rPr lang="en-US" dirty="0"/>
-              <a:t/>
-            </a:r>
             <a:endParaRPr lang="en-US" dirty="0"/>
           </a:p>
         </p:txBody>
@@ -1039,10 +895,6 @@
           <a:bodyPr/>
           <a:lstStyle/>
           <a:p>
-            <a:r>
-              <a:rPr lang="en-US" dirty="0"/>
-              <a:t/>
-            </a:r>
             <a:endParaRPr lang="en-US" dirty="0"/>
           </a:p>
         </p:txBody>
@@ -1127,10 +979,6 @@
           <a:bodyPr/>
           <a:lstStyle/>
           <a:p>
-            <a:r>
-              <a:rPr lang="en-US" dirty="0"/>
-              <a:t/>
-            </a:r>
             <a:endParaRPr lang="en-US" dirty="0"/>
           </a:p>
         </p:txBody>
@@ -1215,10 +1063,6 @@
           <a:bodyPr/>
           <a:lstStyle/>
           <a:p>
-            <a:r>
-              <a:rPr lang="en-US" dirty="0"/>
-              <a:t/>
-            </a:r>
             <a:endParaRPr lang="en-US" dirty="0"/>
           </a:p>
         </p:txBody>
@@ -1303,10 +1147,6 @@
           <a:bodyPr/>
           <a:lstStyle/>
           <a:p>
-            <a:r>
-              <a:rPr lang="en-US" dirty="0"/>
-              <a:t/>
-            </a:r>
             <a:endParaRPr lang="en-US" dirty="0"/>
           </a:p>
         </p:txBody>
@@ -1391,10 +1231,6 @@
           <a:bodyPr/>
           <a:lstStyle/>
           <a:p>
-            <a:r>
-              <a:rPr lang="en-US" dirty="0"/>
-              <a:t/>
-            </a:r>
             <a:endParaRPr lang="en-US" dirty="0"/>
           </a:p>
         </p:txBody>
@@ -1479,10 +1315,6 @@
           <a:bodyPr/>
           <a:lstStyle/>
           <a:p>
-            <a:r>
-              <a:rPr lang="en-US" dirty="0"/>
-              <a:t/>
-            </a:r>
             <a:endParaRPr lang="en-US" dirty="0"/>
           </a:p>
         </p:txBody>
@@ -1556,6 +1388,11 @@
 <file path=ppt/slideMasters/slideMaster1.xml><?xml version="1.0" encoding="utf-8"?>
 <p:sldMaster xmlns:a="http://schemas.openxmlformats.org/drawingml/2006/main" xmlns:r="http://schemas.openxmlformats.org/officeDocument/2006/relationships" xmlns:p="http://schemas.openxmlformats.org/presentationml/2006/main">
   <p:cSld>
+    <p:bg>
+      <p:bgRef idx="1001">
+        <a:schemeClr val="bg1"/>
+      </p:bgRef>
+    </p:bg>
     <p:spTree>
       <p:nvGrpSpPr>
         <p:cNvPr id="1" name=""/>
@@ -1838,6 +1675,7 @@
         <a:solidFill>
           <a:srgbClr val="0D1F3C"/>
         </a:solidFill>
+        <a:effectLst/>
       </p:bgPr>
     </p:bg>
     <p:spTree>
@@ -1878,6 +1716,13 @@
             <a:prstDash val="solid"/>
           </a:ln>
         </p:spPr>
+        <p:txBody>
+          <a:bodyPr/>
+          <a:lstStyle/>
+          <a:p>
+            <a:endParaRPr lang="en-PK"/>
+          </a:p>
+        </p:txBody>
       </p:sp>
       <p:sp>
         <p:nvSpPr>
@@ -1903,6 +1748,13 @@
             <a:prstDash val="solid"/>
           </a:ln>
         </p:spPr>
+        <p:txBody>
+          <a:bodyPr/>
+          <a:lstStyle/>
+          <a:p>
+            <a:endParaRPr lang="en-PK"/>
+          </a:p>
+        </p:txBody>
       </p:sp>
       <p:sp>
         <p:nvSpPr>
@@ -1928,6 +1780,13 @@
             <a:prstDash val="solid"/>
           </a:ln>
         </p:spPr>
+        <p:txBody>
+          <a:bodyPr/>
+          <a:lstStyle/>
+          <a:p>
+            <a:endParaRPr lang="en-PK"/>
+          </a:p>
+        </p:txBody>
       </p:sp>
       <p:sp>
         <p:nvSpPr>
@@ -1950,11 +1809,11 @@
           <a:bodyPr wrap="square" lIns="0" tIns="0" rIns="0" bIns="0" rtlCol="0" anchor="ctr"/>
           <a:lstStyle/>
           <a:p>
-            <a:pPr algn="ctr" indent="0" marL="0">
+            <a:pPr marL="0" indent="0" algn="ctr">
               <a:buNone/>
             </a:pPr>
             <a:r>
-              <a:rPr lang="en-US" sz="850" b="1" spc="150" kern="0" dirty="0">
+              <a:rPr lang="en-US" sz="850" b="1" kern="0" spc="150" dirty="0">
                 <a:solidFill>
                   <a:srgbClr val="6B9ABE"/>
                 </a:solidFill>
@@ -1986,7 +1845,7 @@
           <a:bodyPr wrap="square" lIns="0" tIns="0" rIns="0" bIns="0" rtlCol="0" anchor="ctr"/>
           <a:lstStyle/>
           <a:p>
-            <a:pPr algn="l" indent="0" marL="0">
+            <a:pPr marL="0" indent="0" algn="l">
               <a:buNone/>
             </a:pPr>
             <a:r>
@@ -2022,7 +1881,7 @@
           <a:bodyPr wrap="square" lIns="0" tIns="0" rIns="0" bIns="0" rtlCol="0" anchor="ctr"/>
           <a:lstStyle/>
           <a:p>
-            <a:pPr algn="l" indent="0" marL="0">
+            <a:pPr marL="0" indent="0" algn="l">
               <a:buNone/>
             </a:pPr>
             <a:r>
@@ -2061,6 +1920,13 @@
             <a:prstDash val="solid"/>
           </a:ln>
         </p:spPr>
+        <p:txBody>
+          <a:bodyPr/>
+          <a:lstStyle/>
+          <a:p>
+            <a:endParaRPr lang="en-PK"/>
+          </a:p>
+        </p:txBody>
       </p:sp>
       <p:sp>
         <p:nvSpPr>
@@ -2083,7 +1949,7 @@
           <a:bodyPr wrap="square" lIns="0" tIns="0" rIns="0" bIns="0" rtlCol="0" anchor="ctr"/>
           <a:lstStyle/>
           <a:p>
-            <a:pPr algn="l" indent="0" marL="0">
+            <a:pPr marL="0" indent="0" algn="l">
               <a:buNone/>
             </a:pPr>
             <a:r>
@@ -2122,13 +1988,20 @@
             <a:prstDash val="solid"/>
           </a:ln>
           <a:effectLst>
-            <a:outerShdw sx="100000" sy="100000" kx="0" ky="0" algn="bl" rotWithShape="0" blurRad="127000" dist="25400" dir="8100000">
+            <a:outerShdw blurRad="127000" dist="25400" dir="8100000" algn="bl" rotWithShape="0">
               <a:srgbClr val="000000">
                 <a:alpha val="13000"/>
               </a:srgbClr>
             </a:outerShdw>
           </a:effectLst>
         </p:spPr>
+        <p:txBody>
+          <a:bodyPr/>
+          <a:lstStyle/>
+          <a:p>
+            <a:endParaRPr lang="en-PK"/>
+          </a:p>
+        </p:txBody>
       </p:sp>
       <p:sp>
         <p:nvSpPr>
@@ -2151,7 +2024,7 @@
           <a:bodyPr wrap="square" lIns="0" tIns="0" rIns="0" bIns="0" rtlCol="0" anchor="ctr"/>
           <a:lstStyle/>
           <a:p>
-            <a:pPr algn="l" indent="0" marL="0">
+            <a:pPr marL="0" indent="0" algn="l">
               <a:buNone/>
             </a:pPr>
             <a:r>
@@ -2187,7 +2060,7 @@
           <a:bodyPr wrap="square" lIns="0" tIns="0" rIns="0" bIns="0" rtlCol="0" anchor="ctr"/>
           <a:lstStyle/>
           <a:p>
-            <a:pPr algn="l" indent="0" marL="0">
+            <a:pPr marL="0" indent="0" algn="l">
               <a:buNone/>
             </a:pPr>
             <a:r>
@@ -2226,13 +2099,20 @@
             <a:prstDash val="solid"/>
           </a:ln>
           <a:effectLst>
-            <a:outerShdw sx="100000" sy="100000" kx="0" ky="0" algn="bl" rotWithShape="0" blurRad="127000" dist="25400" dir="8100000">
+            <a:outerShdw blurRad="127000" dist="25400" dir="8100000" algn="bl" rotWithShape="0">
               <a:srgbClr val="000000">
                 <a:alpha val="13000"/>
               </a:srgbClr>
             </a:outerShdw>
           </a:effectLst>
         </p:spPr>
+        <p:txBody>
+          <a:bodyPr/>
+          <a:lstStyle/>
+          <a:p>
+            <a:endParaRPr lang="en-PK"/>
+          </a:p>
+        </p:txBody>
       </p:sp>
       <p:sp>
         <p:nvSpPr>
@@ -2255,7 +2135,7 @@
           <a:bodyPr wrap="square" lIns="0" tIns="0" rIns="0" bIns="0" rtlCol="0" anchor="ctr"/>
           <a:lstStyle/>
           <a:p>
-            <a:pPr algn="l" indent="0" marL="0">
+            <a:pPr marL="0" indent="0" algn="l">
               <a:buNone/>
             </a:pPr>
             <a:r>
@@ -2291,7 +2171,7 @@
           <a:bodyPr wrap="square" lIns="0" tIns="0" rIns="0" bIns="0" rtlCol="0" anchor="ctr"/>
           <a:lstStyle/>
           <a:p>
-            <a:pPr algn="l" indent="0" marL="0">
+            <a:pPr marL="0" indent="0" algn="l">
               <a:buNone/>
             </a:pPr>
             <a:r>
@@ -2327,7 +2207,7 @@
           <a:bodyPr wrap="square" lIns="0" tIns="0" rIns="0" bIns="0" rtlCol="0" anchor="ctr"/>
           <a:lstStyle/>
           <a:p>
-            <a:pPr algn="l" indent="0" marL="0">
+            <a:pPr marL="0" indent="0" algn="l">
               <a:buNone/>
             </a:pPr>
             <a:r>
@@ -2366,6 +2246,13 @@
             <a:prstDash val="solid"/>
           </a:ln>
         </p:spPr>
+        <p:txBody>
+          <a:bodyPr/>
+          <a:lstStyle/>
+          <a:p>
+            <a:endParaRPr lang="en-PK"/>
+          </a:p>
+        </p:txBody>
       </p:sp>
       <p:sp>
         <p:nvSpPr>
@@ -2388,7 +2275,7 @@
           <a:bodyPr wrap="square" lIns="0" tIns="0" rIns="0" bIns="0" rtlCol="0" anchor="ctr"/>
           <a:lstStyle/>
           <a:p>
-            <a:pPr algn="ctr" indent="0" marL="0">
+            <a:pPr marL="0" indent="0" algn="ctr">
               <a:buNone/>
             </a:pPr>
             <a:r>
@@ -2399,15 +2286,12 @@
               </a:rPr>
               <a:t>GitHub: </a:t>
             </a:r>
-            <a:pPr algn="ctr" indent="0" marL="0">
-              <a:buNone/>
-            </a:pPr>
             <a:r>
               <a:rPr lang="en-US" sz="850" u="sng" dirty="0">
                 <a:solidFill>
                   <a:srgbClr val="5BA4CF"/>
                 </a:solidFill>
-                <a:hlinkClick r:id="rId1" invalidUrl="" action="" tgtFrame="" tooltip="" history="1" highlightClick="0" endSnd="0">
+                <a:hlinkClick r:id="rId3">
                   <a:extLst>
                     <a:ext uri="{A12FA001-AC4F-418D-AE19-62706E023703}">
                       <ahyp:hlinkClr xmlns:ahyp="http://schemas.microsoft.com/office/drawing/2018/hyperlinkcolor" val="tx"/>
@@ -2437,6 +2321,7 @@
         <a:solidFill>
           <a:srgbClr val="EFF6FF"/>
         </a:solidFill>
+        <a:effectLst/>
       </p:bgPr>
     </p:bg>
     <p:spTree>
@@ -2477,6 +2362,13 @@
             <a:prstDash val="solid"/>
           </a:ln>
         </p:spPr>
+        <p:txBody>
+          <a:bodyPr/>
+          <a:lstStyle/>
+          <a:p>
+            <a:endParaRPr lang="en-PK"/>
+          </a:p>
+        </p:txBody>
       </p:sp>
       <p:sp>
         <p:nvSpPr>
@@ -2499,11 +2391,11 @@
           <a:bodyPr wrap="square" lIns="0" tIns="0" rIns="0" bIns="0" rtlCol="0" anchor="ctr"/>
           <a:lstStyle/>
           <a:p>
-            <a:pPr algn="ctr" indent="0" marL="0">
+            <a:pPr marL="0" indent="0" algn="ctr">
               <a:buNone/>
             </a:pPr>
             <a:r>
-              <a:rPr lang="en-US" sz="850" b="1" spc="150" kern="0" dirty="0">
+              <a:rPr lang="en-US" sz="850" b="1" kern="0" spc="150" dirty="0">
                 <a:solidFill>
                   <a:srgbClr val="FFFFFF"/>
                 </a:solidFill>
@@ -2538,6 +2430,13 @@
             <a:prstDash val="solid"/>
           </a:ln>
         </p:spPr>
+        <p:txBody>
+          <a:bodyPr/>
+          <a:lstStyle/>
+          <a:p>
+            <a:endParaRPr lang="en-PK"/>
+          </a:p>
+        </p:txBody>
       </p:sp>
       <p:sp>
         <p:nvSpPr>
@@ -2560,7 +2459,7 @@
           <a:bodyPr wrap="square" lIns="0" tIns="0" rIns="0" bIns="0" rtlCol="0" anchor="ctr"/>
           <a:lstStyle/>
           <a:p>
-            <a:pPr algn="ctr" indent="0" marL="0">
+            <a:pPr marL="0" indent="0" algn="ctr">
               <a:buNone/>
             </a:pPr>
             <a:r>
@@ -2571,15 +2470,12 @@
               </a:rPr>
               <a:t>GitHub: </a:t>
             </a:r>
-            <a:pPr algn="ctr" indent="0" marL="0">
-              <a:buNone/>
-            </a:pPr>
             <a:r>
               <a:rPr lang="en-US" sz="850" u="sng" dirty="0">
                 <a:solidFill>
                   <a:srgbClr val="5BA4CF"/>
                 </a:solidFill>
-                <a:hlinkClick r:id="rId1" invalidUrl="" action="" tgtFrame="" tooltip="" history="1" highlightClick="0" endSnd="0">
+                <a:hlinkClick r:id="rId3">
                   <a:extLst>
                     <a:ext uri="{A12FA001-AC4F-418D-AE19-62706E023703}">
                       <ahyp:hlinkClr xmlns:ahyp="http://schemas.microsoft.com/office/drawing/2018/hyperlinkcolor" val="tx"/>
@@ -2617,6 +2513,13 @@
             <a:prstDash val="solid"/>
           </a:ln>
         </p:spPr>
+        <p:txBody>
+          <a:bodyPr/>
+          <a:lstStyle/>
+          <a:p>
+            <a:endParaRPr lang="en-PK"/>
+          </a:p>
+        </p:txBody>
       </p:sp>
       <p:sp>
         <p:nvSpPr>
@@ -2639,7 +2542,7 @@
           <a:bodyPr wrap="square" lIns="0" tIns="0" rIns="0" bIns="0" rtlCol="0" anchor="ctr"/>
           <a:lstStyle/>
           <a:p>
-            <a:pPr algn="ctr" indent="0" marL="0">
+            <a:pPr marL="0" indent="0" algn="ctr">
               <a:buNone/>
             </a:pPr>
             <a:r>
@@ -2678,6 +2581,13 @@
             <a:prstDash val="solid"/>
           </a:ln>
         </p:spPr>
+        <p:txBody>
+          <a:bodyPr/>
+          <a:lstStyle/>
+          <a:p>
+            <a:endParaRPr lang="en-PK"/>
+          </a:p>
+        </p:txBody>
       </p:sp>
       <p:sp>
         <p:nvSpPr>
@@ -2700,7 +2610,7 @@
           <a:bodyPr wrap="square" lIns="0" tIns="0" rIns="0" bIns="0" rtlCol="0" anchor="ctr"/>
           <a:lstStyle/>
           <a:p>
-            <a:pPr algn="l" indent="0" marL="0">
+            <a:pPr marL="0" indent="0" algn="l">
               <a:buNone/>
             </a:pPr>
             <a:r>
@@ -2736,7 +2646,7 @@
           <a:bodyPr wrap="square" lIns="0" tIns="0" rIns="0" bIns="0" rtlCol="0" anchor="t"/>
           <a:lstStyle/>
           <a:p>
-            <a:pPr algn="l" indent="0" marL="0">
+            <a:pPr marL="0" indent="0" algn="l">
               <a:buNone/>
             </a:pPr>
             <a:r>
@@ -2759,8 +2669,8 @@
         </p:nvSpPr>
         <p:spPr>
           <a:xfrm>
-            <a:off x="5669280" y="310896"/>
-            <a:ext cx="1188720" cy="347472"/>
+            <a:off x="6181344" y="312420"/>
+            <a:ext cx="726948" cy="347472"/>
           </a:xfrm>
           <a:prstGeom prst="rect">
             <a:avLst/>
@@ -2775,6 +2685,13 @@
             <a:prstDash val="solid"/>
           </a:ln>
         </p:spPr>
+        <p:txBody>
+          <a:bodyPr/>
+          <a:lstStyle/>
+          <a:p>
+            <a:endParaRPr lang="en-PK"/>
+          </a:p>
+        </p:txBody>
       </p:sp>
       <p:sp>
         <p:nvSpPr>
@@ -2784,8 +2701,8 @@
         </p:nvSpPr>
         <p:spPr>
           <a:xfrm>
-            <a:off x="5669280" y="310896"/>
-            <a:ext cx="1188720" cy="347472"/>
+            <a:off x="6172200" y="292608"/>
+            <a:ext cx="736092" cy="367284"/>
           </a:xfrm>
           <a:prstGeom prst="rect">
             <a:avLst/>
@@ -2797,7 +2714,7 @@
           <a:bodyPr wrap="square" lIns="0" tIns="0" rIns="0" bIns="0" rtlCol="0" anchor="ctr"/>
           <a:lstStyle/>
           <a:p>
-            <a:pPr algn="ctr" indent="0" marL="0">
+            <a:pPr marL="0" indent="0" algn="ctr">
               <a:buNone/>
             </a:pPr>
             <a:r>
@@ -2820,8 +2737,8 @@
         </p:nvSpPr>
         <p:spPr>
           <a:xfrm>
-            <a:off x="6949440" y="310896"/>
-            <a:ext cx="1188720" cy="347472"/>
+            <a:off x="6981444" y="301752"/>
+            <a:ext cx="726948" cy="347472"/>
           </a:xfrm>
           <a:prstGeom prst="rect">
             <a:avLst/>
@@ -2836,6 +2753,13 @@
             <a:prstDash val="solid"/>
           </a:ln>
         </p:spPr>
+        <p:txBody>
+          <a:bodyPr/>
+          <a:lstStyle/>
+          <a:p>
+            <a:endParaRPr lang="en-PK" dirty="0"/>
+          </a:p>
+        </p:txBody>
       </p:sp>
       <p:sp>
         <p:nvSpPr>
@@ -2845,8 +2769,8 @@
         </p:nvSpPr>
         <p:spPr>
           <a:xfrm>
-            <a:off x="6949440" y="310896"/>
-            <a:ext cx="1188720" cy="347472"/>
+            <a:off x="6981444" y="301752"/>
+            <a:ext cx="726948" cy="347472"/>
           </a:xfrm>
           <a:prstGeom prst="rect">
             <a:avLst/>
@@ -2858,7 +2782,7 @@
           <a:bodyPr wrap="square" lIns="0" tIns="0" rIns="0" bIns="0" rtlCol="0" anchor="ctr"/>
           <a:lstStyle/>
           <a:p>
-            <a:pPr algn="ctr" indent="0" marL="0">
+            <a:pPr marL="0" indent="0" algn="ctr">
               <a:buNone/>
             </a:pPr>
             <a:r>
@@ -2897,6 +2821,13 @@
             <a:prstDash val="solid"/>
           </a:ln>
         </p:spPr>
+        <p:txBody>
+          <a:bodyPr/>
+          <a:lstStyle/>
+          <a:p>
+            <a:endParaRPr lang="en-PK"/>
+          </a:p>
+        </p:txBody>
       </p:sp>
       <p:sp>
         <p:nvSpPr>
@@ -2919,7 +2850,7 @@
           <a:bodyPr wrap="square" lIns="0" tIns="0" rIns="0" bIns="0" rtlCol="0" anchor="ctr"/>
           <a:lstStyle/>
           <a:p>
-            <a:pPr algn="l" indent="0" marL="0">
+            <a:pPr marL="0" indent="0" algn="l">
               <a:buNone/>
             </a:pPr>
             <a:r>
@@ -2936,7 +2867,7 @@
       </p:sp>
       <p:graphicFrame>
         <p:nvGraphicFramePr>
-          <p:cNvPr id="11" name="Table 0"/>
+          <p:cNvPr id="17" name="Table 0"/>
           <p:cNvGraphicFramePr>
             <a:graphicFrameLocks noGrp="1"/>
           </p:cNvGraphicFramePr>
@@ -2950,17 +2881,41 @@
         </p:nvGraphicFramePr>
         <p:xfrm>
           <a:off x="320040" y="1280160"/>
-          <a:ext cx="2788920" cy="1280160"/>
+          <a:ext cx="2788920" cy="1420368"/>
         </p:xfrm>
         <a:graphic>
           <a:graphicData uri="http://schemas.openxmlformats.org/drawingml/2006/table">
             <a:tbl>
               <a:tblPr/>
               <a:tblGrid>
-                <a:gridCol w="1115568"/>
-                <a:gridCol w="548640"/>
-                <a:gridCol w="566928"/>
-                <a:gridCol w="557784"/>
+                <a:gridCol w="1115568">
+                  <a:extLst>
+                    <a:ext uri="{9D8B030D-6E8A-4147-A177-3AD203B41FA5}">
+                      <a16:colId xmlns:a16="http://schemas.microsoft.com/office/drawing/2014/main" val="20000"/>
+                    </a:ext>
+                  </a:extLst>
+                </a:gridCol>
+                <a:gridCol w="548640">
+                  <a:extLst>
+                    <a:ext uri="{9D8B030D-6E8A-4147-A177-3AD203B41FA5}">
+                      <a16:colId xmlns:a16="http://schemas.microsoft.com/office/drawing/2014/main" val="20001"/>
+                    </a:ext>
+                  </a:extLst>
+                </a:gridCol>
+                <a:gridCol w="566928">
+                  <a:extLst>
+                    <a:ext uri="{9D8B030D-6E8A-4147-A177-3AD203B41FA5}">
+                      <a16:colId xmlns:a16="http://schemas.microsoft.com/office/drawing/2014/main" val="20002"/>
+                    </a:ext>
+                  </a:extLst>
+                </a:gridCol>
+                <a:gridCol w="557784">
+                  <a:extLst>
+                    <a:ext uri="{9D8B030D-6E8A-4147-A177-3AD203B41FA5}">
+                      <a16:colId xmlns:a16="http://schemas.microsoft.com/office/drawing/2014/main" val="20003"/>
+                    </a:ext>
+                  </a:extLst>
+                </a:gridCol>
               </a:tblGrid>
               <a:tr h="256032">
                 <a:tc>
@@ -2968,7 +2923,7 @@
                     <a:bodyPr/>
                     <a:lstStyle/>
                     <a:p>
-                      <a:pPr indent="0" marL="0">
+                      <a:pPr marL="0" indent="0">
                         <a:buNone/>
                       </a:pPr>
                       <a:r>
@@ -2982,7 +2937,7 @@
                       <a:endParaRPr lang="en-US" sz="1000" dirty="0"/>
                     </a:p>
                   </a:txBody>
-                  <a:tcPr marL="91440" marR="91440" marT="45720" marB="45720">
+                  <a:tcPr>
                     <a:lnL w="6350" cap="flat" cmpd="sng" algn="ctr">
                       <a:solidFill>
                         <a:srgbClr val="CBD5E1"/>
@@ -3029,7 +2984,7 @@
                     <a:bodyPr/>
                     <a:lstStyle/>
                     <a:p>
-                      <a:pPr indent="0" marL="0">
+                      <a:pPr marL="0" indent="0">
                         <a:buNone/>
                       </a:pPr>
                       <a:r>
@@ -3043,7 +2998,7 @@
                       <a:endParaRPr lang="en-US" sz="1000" dirty="0"/>
                     </a:p>
                   </a:txBody>
-                  <a:tcPr marL="91440" marR="91440" marT="45720" marB="45720">
+                  <a:tcPr>
                     <a:lnL w="6350" cap="flat" cmpd="sng" algn="ctr">
                       <a:solidFill>
                         <a:srgbClr val="CBD5E1"/>
@@ -3090,7 +3045,7 @@
                     <a:bodyPr/>
                     <a:lstStyle/>
                     <a:p>
-                      <a:pPr indent="0" marL="0">
+                      <a:pPr marL="0" indent="0">
                         <a:buNone/>
                       </a:pPr>
                       <a:r>
@@ -3104,7 +3059,7 @@
                       <a:endParaRPr lang="en-US" sz="1000" dirty="0"/>
                     </a:p>
                   </a:txBody>
-                  <a:tcPr marL="91440" marR="91440" marT="45720" marB="45720">
+                  <a:tcPr>
                     <a:lnL w="6350" cap="flat" cmpd="sng" algn="ctr">
                       <a:solidFill>
                         <a:srgbClr val="CBD5E1"/>
@@ -3151,7 +3106,7 @@
                     <a:bodyPr/>
                     <a:lstStyle/>
                     <a:p>
-                      <a:pPr indent="0" marL="0">
+                      <a:pPr marL="0" indent="0">
                         <a:buNone/>
                       </a:pPr>
                       <a:r>
@@ -3165,7 +3120,7 @@
                       <a:endParaRPr lang="en-US" sz="1000" dirty="0"/>
                     </a:p>
                   </a:txBody>
-                  <a:tcPr marL="91440" marR="91440" marT="45720" marB="45720">
+                  <a:tcPr>
                     <a:lnL w="6350" cap="flat" cmpd="sng" algn="ctr">
                       <a:solidFill>
                         <a:srgbClr val="CBD5E1"/>
@@ -3207,6 +3162,11 @@
                     </a:solidFill>
                   </a:tcPr>
                 </a:tc>
+                <a:extLst>
+                  <a:ext uri="{0D108BD9-81ED-4DB2-BD59-A6C34878D82A}">
+                    <a16:rowId xmlns:a16="http://schemas.microsoft.com/office/drawing/2014/main" val="10000"/>
+                  </a:ext>
+                </a:extLst>
               </a:tr>
               <a:tr h="256032">
                 <a:tc>
@@ -3214,7 +3174,7 @@
                     <a:bodyPr/>
                     <a:lstStyle/>
                     <a:p>
-                      <a:pPr indent="0" marL="0">
+                      <a:pPr marL="0" indent="0">
                         <a:buNone/>
                       </a:pPr>
                       <a:r>
@@ -3228,7 +3188,7 @@
                       <a:endParaRPr lang="en-US" sz="1000" dirty="0"/>
                     </a:p>
                   </a:txBody>
-                  <a:tcPr marL="91440" marR="91440" marT="45720" marB="45720">
+                  <a:tcPr>
                     <a:lnL w="6350" cap="flat" cmpd="sng" algn="ctr">
                       <a:solidFill>
                         <a:srgbClr val="CBD5E1"/>
@@ -3275,7 +3235,7 @@
                     <a:bodyPr/>
                     <a:lstStyle/>
                     <a:p>
-                      <a:pPr indent="0" marL="0">
+                      <a:pPr marL="0" indent="0">
                         <a:buNone/>
                       </a:pPr>
                       <a:r>
@@ -3289,7 +3249,7 @@
                       <a:endParaRPr lang="en-US" sz="1000" dirty="0"/>
                     </a:p>
                   </a:txBody>
-                  <a:tcPr marL="91440" marR="91440" marT="45720" marB="45720">
+                  <a:tcPr>
                     <a:lnL w="6350" cap="flat" cmpd="sng" algn="ctr">
                       <a:solidFill>
                         <a:srgbClr val="CBD5E1"/>
@@ -3336,7 +3296,7 @@
                     <a:bodyPr/>
                     <a:lstStyle/>
                     <a:p>
-                      <a:pPr indent="0" marL="0">
+                      <a:pPr marL="0" indent="0">
                         <a:buNone/>
                       </a:pPr>
                       <a:r>
@@ -3350,7 +3310,7 @@
                       <a:endParaRPr lang="en-US" sz="1000" dirty="0"/>
                     </a:p>
                   </a:txBody>
-                  <a:tcPr marL="91440" marR="91440" marT="45720" marB="45720">
+                  <a:tcPr>
                     <a:lnL w="6350" cap="flat" cmpd="sng" algn="ctr">
                       <a:solidFill>
                         <a:srgbClr val="CBD5E1"/>
@@ -3397,7 +3357,7 @@
                     <a:bodyPr/>
                     <a:lstStyle/>
                     <a:p>
-                      <a:pPr indent="0" marL="0">
+                      <a:pPr marL="0" indent="0">
                         <a:buNone/>
                       </a:pPr>
                       <a:r>
@@ -3411,7 +3371,7 @@
                       <a:endParaRPr lang="en-US" sz="1000" dirty="0"/>
                     </a:p>
                   </a:txBody>
-                  <a:tcPr marL="91440" marR="91440" marT="45720" marB="45720">
+                  <a:tcPr>
                     <a:lnL w="6350" cap="flat" cmpd="sng" algn="ctr">
                       <a:solidFill>
                         <a:srgbClr val="CBD5E1"/>
@@ -3453,6 +3413,11 @@
                     </a:solidFill>
                   </a:tcPr>
                 </a:tc>
+                <a:extLst>
+                  <a:ext uri="{0D108BD9-81ED-4DB2-BD59-A6C34878D82A}">
+                    <a16:rowId xmlns:a16="http://schemas.microsoft.com/office/drawing/2014/main" val="10001"/>
+                  </a:ext>
+                </a:extLst>
               </a:tr>
               <a:tr h="256032">
                 <a:tc>
@@ -3460,7 +3425,7 @@
                     <a:bodyPr/>
                     <a:lstStyle/>
                     <a:p>
-                      <a:pPr indent="0" marL="0">
+                      <a:pPr marL="0" indent="0">
                         <a:buNone/>
                       </a:pPr>
                       <a:r>
@@ -3474,7 +3439,7 @@
                       <a:endParaRPr lang="en-US" sz="1000" dirty="0"/>
                     </a:p>
                   </a:txBody>
-                  <a:tcPr marL="91440" marR="91440" marT="45720" marB="45720">
+                  <a:tcPr>
                     <a:lnL w="6350" cap="flat" cmpd="sng" algn="ctr">
                       <a:solidFill>
                         <a:srgbClr val="CBD5E1"/>
@@ -3521,7 +3486,7 @@
                     <a:bodyPr/>
                     <a:lstStyle/>
                     <a:p>
-                      <a:pPr indent="0" marL="0">
+                      <a:pPr marL="0" indent="0">
                         <a:buNone/>
                       </a:pPr>
                       <a:r>
@@ -3535,7 +3500,7 @@
                       <a:endParaRPr lang="en-US" sz="1000" dirty="0"/>
                     </a:p>
                   </a:txBody>
-                  <a:tcPr marL="91440" marR="91440" marT="45720" marB="45720">
+                  <a:tcPr>
                     <a:lnL w="6350" cap="flat" cmpd="sng" algn="ctr">
                       <a:solidFill>
                         <a:srgbClr val="CBD5E1"/>
@@ -3582,7 +3547,7 @@
                     <a:bodyPr/>
                     <a:lstStyle/>
                     <a:p>
-                      <a:pPr indent="0" marL="0">
+                      <a:pPr marL="0" indent="0">
                         <a:buNone/>
                       </a:pPr>
                       <a:r>
@@ -3596,7 +3561,7 @@
                       <a:endParaRPr lang="en-US" sz="1000" dirty="0"/>
                     </a:p>
                   </a:txBody>
-                  <a:tcPr marL="91440" marR="91440" marT="45720" marB="45720">
+                  <a:tcPr>
                     <a:lnL w="6350" cap="flat" cmpd="sng" algn="ctr">
                       <a:solidFill>
                         <a:srgbClr val="CBD5E1"/>
@@ -3643,7 +3608,7 @@
                     <a:bodyPr/>
                     <a:lstStyle/>
                     <a:p>
-                      <a:pPr indent="0" marL="0">
+                      <a:pPr marL="0" indent="0">
                         <a:buNone/>
                       </a:pPr>
                       <a:r>
@@ -3657,7 +3622,7 @@
                       <a:endParaRPr lang="en-US" sz="1000" dirty="0"/>
                     </a:p>
                   </a:txBody>
-                  <a:tcPr marL="91440" marR="91440" marT="45720" marB="45720">
+                  <a:tcPr>
                     <a:lnL w="6350" cap="flat" cmpd="sng" algn="ctr">
                       <a:solidFill>
                         <a:srgbClr val="CBD5E1"/>
@@ -3699,6 +3664,11 @@
                     </a:solidFill>
                   </a:tcPr>
                 </a:tc>
+                <a:extLst>
+                  <a:ext uri="{0D108BD9-81ED-4DB2-BD59-A6C34878D82A}">
+                    <a16:rowId xmlns:a16="http://schemas.microsoft.com/office/drawing/2014/main" val="10002"/>
+                  </a:ext>
+                </a:extLst>
               </a:tr>
               <a:tr h="256032">
                 <a:tc>
@@ -3706,7 +3676,7 @@
                     <a:bodyPr/>
                     <a:lstStyle/>
                     <a:p>
-                      <a:pPr indent="0" marL="0">
+                      <a:pPr marL="0" indent="0">
                         <a:buNone/>
                       </a:pPr>
                       <a:r>
@@ -3720,7 +3690,7 @@
                       <a:endParaRPr lang="en-US" sz="1000" dirty="0"/>
                     </a:p>
                   </a:txBody>
-                  <a:tcPr marL="91440" marR="91440" marT="45720" marB="45720">
+                  <a:tcPr>
                     <a:lnL w="6350" cap="flat" cmpd="sng" algn="ctr">
                       <a:solidFill>
                         <a:srgbClr val="CBD5E1"/>
@@ -3767,7 +3737,7 @@
                     <a:bodyPr/>
                     <a:lstStyle/>
                     <a:p>
-                      <a:pPr indent="0" marL="0">
+                      <a:pPr marL="0" indent="0">
                         <a:buNone/>
                       </a:pPr>
                       <a:r>
@@ -3781,7 +3751,7 @@
                       <a:endParaRPr lang="en-US" sz="1000" dirty="0"/>
                     </a:p>
                   </a:txBody>
-                  <a:tcPr marL="91440" marR="91440" marT="45720" marB="45720">
+                  <a:tcPr>
                     <a:lnL w="6350" cap="flat" cmpd="sng" algn="ctr">
                       <a:solidFill>
                         <a:srgbClr val="CBD5E1"/>
@@ -3828,7 +3798,7 @@
                     <a:bodyPr/>
                     <a:lstStyle/>
                     <a:p>
-                      <a:pPr indent="0" marL="0">
+                      <a:pPr marL="0" indent="0">
                         <a:buNone/>
                       </a:pPr>
                       <a:r>
@@ -3842,7 +3812,7 @@
                       <a:endParaRPr lang="en-US" sz="1000" dirty="0"/>
                     </a:p>
                   </a:txBody>
-                  <a:tcPr marL="91440" marR="91440" marT="45720" marB="45720">
+                  <a:tcPr>
                     <a:lnL w="6350" cap="flat" cmpd="sng" algn="ctr">
                       <a:solidFill>
                         <a:srgbClr val="CBD5E1"/>
@@ -3889,7 +3859,7 @@
                     <a:bodyPr/>
                     <a:lstStyle/>
                     <a:p>
-                      <a:pPr indent="0" marL="0">
+                      <a:pPr marL="0" indent="0">
                         <a:buNone/>
                       </a:pPr>
                       <a:r>
@@ -3903,7 +3873,7 @@
                       <a:endParaRPr lang="en-US" sz="1000" dirty="0"/>
                     </a:p>
                   </a:txBody>
-                  <a:tcPr marL="91440" marR="91440" marT="45720" marB="45720">
+                  <a:tcPr>
                     <a:lnL w="6350" cap="flat" cmpd="sng" algn="ctr">
                       <a:solidFill>
                         <a:srgbClr val="CBD5E1"/>
@@ -3945,6 +3915,11 @@
                     </a:solidFill>
                   </a:tcPr>
                 </a:tc>
+                <a:extLst>
+                  <a:ext uri="{0D108BD9-81ED-4DB2-BD59-A6C34878D82A}">
+                    <a16:rowId xmlns:a16="http://schemas.microsoft.com/office/drawing/2014/main" val="10003"/>
+                  </a:ext>
+                </a:extLst>
               </a:tr>
               <a:tr h="256032">
                 <a:tc>
@@ -3952,7 +3927,7 @@
                     <a:bodyPr/>
                     <a:lstStyle/>
                     <a:p>
-                      <a:pPr indent="0" marL="0">
+                      <a:pPr marL="0" indent="0">
                         <a:buNone/>
                       </a:pPr>
                       <a:r>
@@ -3966,7 +3941,7 @@
                       <a:endParaRPr lang="en-US" sz="1000" dirty="0"/>
                     </a:p>
                   </a:txBody>
-                  <a:tcPr marL="91440" marR="91440" marT="45720" marB="45720">
+                  <a:tcPr>
                     <a:lnL w="6350" cap="flat" cmpd="sng" algn="ctr">
                       <a:solidFill>
                         <a:srgbClr val="CBD5E1"/>
@@ -4013,7 +3988,7 @@
                     <a:bodyPr/>
                     <a:lstStyle/>
                     <a:p>
-                      <a:pPr indent="0" marL="0">
+                      <a:pPr marL="0" indent="0">
                         <a:buNone/>
                       </a:pPr>
                       <a:r>
@@ -4027,7 +4002,7 @@
                       <a:endParaRPr lang="en-US" sz="1000" dirty="0"/>
                     </a:p>
                   </a:txBody>
-                  <a:tcPr marL="91440" marR="91440" marT="45720" marB="45720">
+                  <a:tcPr>
                     <a:lnL w="6350" cap="flat" cmpd="sng" algn="ctr">
                       <a:solidFill>
                         <a:srgbClr val="CBD5E1"/>
@@ -4074,7 +4049,7 @@
                     <a:bodyPr/>
                     <a:lstStyle/>
                     <a:p>
-                      <a:pPr indent="0" marL="0">
+                      <a:pPr marL="0" indent="0">
                         <a:buNone/>
                       </a:pPr>
                       <a:r>
@@ -4088,7 +4063,7 @@
                       <a:endParaRPr lang="en-US" sz="1000" dirty="0"/>
                     </a:p>
                   </a:txBody>
-                  <a:tcPr marL="91440" marR="91440" marT="45720" marB="45720">
+                  <a:tcPr>
                     <a:lnL w="6350" cap="flat" cmpd="sng" algn="ctr">
                       <a:solidFill>
                         <a:srgbClr val="CBD5E1"/>
@@ -4135,7 +4110,7 @@
                     <a:bodyPr/>
                     <a:lstStyle/>
                     <a:p>
-                      <a:pPr indent="0" marL="0">
+                      <a:pPr marL="0" indent="0">
                         <a:buNone/>
                       </a:pPr>
                       <a:r>
@@ -4149,7 +4124,7 @@
                       <a:endParaRPr lang="en-US" sz="1000" dirty="0"/>
                     </a:p>
                   </a:txBody>
-                  <a:tcPr marL="91440" marR="91440" marT="45720" marB="45720">
+                  <a:tcPr>
                     <a:lnL w="6350" cap="flat" cmpd="sng" algn="ctr">
                       <a:solidFill>
                         <a:srgbClr val="CBD5E1"/>
@@ -4191,6 +4166,11 @@
                     </a:solidFill>
                   </a:tcPr>
                 </a:tc>
+                <a:extLst>
+                  <a:ext uri="{0D108BD9-81ED-4DB2-BD59-A6C34878D82A}">
+                    <a16:rowId xmlns:a16="http://schemas.microsoft.com/office/drawing/2014/main" val="10004"/>
+                  </a:ext>
+                </a:extLst>
               </a:tr>
             </a:tbl>
           </a:graphicData>
@@ -4217,7 +4197,7 @@
           <a:bodyPr wrap="square" lIns="0" tIns="0" rIns="0" bIns="0" rtlCol="0" anchor="ctr"/>
           <a:lstStyle/>
           <a:p>
-            <a:pPr indent="0" marL="0">
+            <a:pPr marL="0" indent="0">
               <a:buNone/>
             </a:pPr>
             <a:r>
@@ -4231,7 +4211,7 @@
             <a:endParaRPr lang="en-US" sz="850" dirty="0"/>
           </a:p>
           <a:p>
-            <a:pPr indent="0" marL="0">
+            <a:pPr marL="0" indent="0">
               <a:buNone/>
             </a:pPr>
             <a:r>
@@ -4248,15 +4228,15 @@
       </p:sp>
       <p:pic>
         <p:nvPicPr>
-          <p:cNvPr id="19" name="Image 0" descr="C:\Users\shaho\OneDrive - FAST National University\Attachments\@Fast\Semester 6\PDC + NLP\maor-equity\figures\fig5_rouge_comparison.png">    </p:cNvPr>
+          <p:cNvPr id="19" name="Image 0" descr="C:\Users\shaho\OneDrive - FAST National University\Attachments\@Fast\Semester 6\PDC + NLP\maor-equity\figures\fig5_rouge_comparison.png"/>
           <p:cNvPicPr>
             <a:picLocks noChangeAspect="1"/>
           </p:cNvPicPr>
           <p:nvPr/>
         </p:nvPicPr>
         <p:blipFill>
-          <a:blip r:embed="rId2"/>
-          <a:srcRect l="0" r="0" t="0" b="0"/>
+          <a:blip r:embed="rId4"/>
+          <a:srcRect/>
           <a:stretch/>
         </p:blipFill>
         <p:spPr>
@@ -4293,6 +4273,13 @@
             <a:prstDash val="solid"/>
           </a:ln>
         </p:spPr>
+        <p:txBody>
+          <a:bodyPr/>
+          <a:lstStyle/>
+          <a:p>
+            <a:endParaRPr lang="en-PK"/>
+          </a:p>
+        </p:txBody>
       </p:sp>
       <p:sp>
         <p:nvSpPr>
@@ -4315,7 +4302,7 @@
           <a:bodyPr wrap="square" lIns="0" tIns="0" rIns="0" bIns="0" rtlCol="0" anchor="ctr"/>
           <a:lstStyle/>
           <a:p>
-            <a:pPr algn="l" indent="0" marL="0">
+            <a:pPr marL="0" indent="0" algn="l">
               <a:buNone/>
             </a:pPr>
             <a:r>
@@ -4354,13 +4341,20 @@
             <a:prstDash val="solid"/>
           </a:ln>
           <a:effectLst>
-            <a:outerShdw sx="100000" sy="100000" kx="0" ky="0" algn="bl" rotWithShape="0" blurRad="76200" dist="12700" dir="8100000">
+            <a:outerShdw blurRad="76200" dist="12700" dir="8100000" algn="bl" rotWithShape="0">
               <a:srgbClr val="000000">
                 <a:alpha val="8000"/>
               </a:srgbClr>
             </a:outerShdw>
           </a:effectLst>
         </p:spPr>
+        <p:txBody>
+          <a:bodyPr/>
+          <a:lstStyle/>
+          <a:p>
+            <a:endParaRPr lang="en-PK"/>
+          </a:p>
+        </p:txBody>
       </p:sp>
       <p:sp>
         <p:nvSpPr>
@@ -4383,7 +4377,7 @@
           <a:bodyPr wrap="square" lIns="0" tIns="0" rIns="0" bIns="0" rtlCol="0" anchor="ctr"/>
           <a:lstStyle/>
           <a:p>
-            <a:pPr algn="ctr" indent="0" marL="0">
+            <a:pPr marL="0" indent="0" algn="ctr">
               <a:buNone/>
             </a:pPr>
             <a:r>
@@ -4419,7 +4413,7 @@
           <a:bodyPr wrap="square" lIns="0" tIns="0" rIns="0" bIns="0" rtlCol="0" anchor="ctr"/>
           <a:lstStyle/>
           <a:p>
-            <a:pPr algn="l" indent="0" marL="0">
+            <a:pPr marL="0" indent="0" algn="l">
               <a:buNone/>
             </a:pPr>
             <a:r>
@@ -4436,7 +4430,7 @@
       </p:sp>
       <p:graphicFrame>
         <p:nvGraphicFramePr>
-          <p:cNvPr id="21" name="Table 1"/>
+          <p:cNvPr id="25" name="Table 1"/>
           <p:cNvGraphicFramePr>
             <a:graphicFrameLocks noGrp="1"/>
           </p:cNvGraphicFramePr>
@@ -4457,9 +4451,27 @@
             <a:tbl>
               <a:tblPr/>
               <a:tblGrid>
-                <a:gridCol w="1508760"/>
-                <a:gridCol w="640080"/>
-                <a:gridCol w="640080"/>
+                <a:gridCol w="1508760">
+                  <a:extLst>
+                    <a:ext uri="{9D8B030D-6E8A-4147-A177-3AD203B41FA5}">
+                      <a16:colId xmlns:a16="http://schemas.microsoft.com/office/drawing/2014/main" val="20000"/>
+                    </a:ext>
+                  </a:extLst>
+                </a:gridCol>
+                <a:gridCol w="640080">
+                  <a:extLst>
+                    <a:ext uri="{9D8B030D-6E8A-4147-A177-3AD203B41FA5}">
+                      <a16:colId xmlns:a16="http://schemas.microsoft.com/office/drawing/2014/main" val="20001"/>
+                    </a:ext>
+                  </a:extLst>
+                </a:gridCol>
+                <a:gridCol w="640080">
+                  <a:extLst>
+                    <a:ext uri="{9D8B030D-6E8A-4147-A177-3AD203B41FA5}">
+                      <a16:colId xmlns:a16="http://schemas.microsoft.com/office/drawing/2014/main" val="20002"/>
+                    </a:ext>
+                  </a:extLst>
+                </a:gridCol>
               </a:tblGrid>
               <a:tr h="242316">
                 <a:tc>
@@ -4467,7 +4479,7 @@
                     <a:bodyPr/>
                     <a:lstStyle/>
                     <a:p>
-                      <a:pPr indent="0" marL="0">
+                      <a:pPr marL="0" indent="0">
                         <a:buNone/>
                       </a:pPr>
                       <a:r>
@@ -4481,7 +4493,7 @@
                       <a:endParaRPr lang="en-US" sz="880" dirty="0"/>
                     </a:p>
                   </a:txBody>
-                  <a:tcPr marL="91440" marR="91440" marT="45720" marB="45720">
+                  <a:tcPr>
                     <a:lnL w="6350" cap="flat" cmpd="sng" algn="ctr">
                       <a:solidFill>
                         <a:srgbClr val="CBD5E1"/>
@@ -4528,7 +4540,7 @@
                     <a:bodyPr/>
                     <a:lstStyle/>
                     <a:p>
-                      <a:pPr indent="0" marL="0">
+                      <a:pPr marL="0" indent="0">
                         <a:buNone/>
                       </a:pPr>
                       <a:r>
@@ -4542,7 +4554,7 @@
                       <a:endParaRPr lang="en-US" sz="880" dirty="0"/>
                     </a:p>
                   </a:txBody>
-                  <a:tcPr marL="91440" marR="91440" marT="45720" marB="45720">
+                  <a:tcPr>
                     <a:lnL w="6350" cap="flat" cmpd="sng" algn="ctr">
                       <a:solidFill>
                         <a:srgbClr val="CBD5E1"/>
@@ -4589,7 +4601,7 @@
                     <a:bodyPr/>
                     <a:lstStyle/>
                     <a:p>
-                      <a:pPr indent="0" marL="0">
+                      <a:pPr marL="0" indent="0">
                         <a:buNone/>
                       </a:pPr>
                       <a:r>
@@ -4603,7 +4615,7 @@
                       <a:endParaRPr lang="en-US" sz="880" dirty="0"/>
                     </a:p>
                   </a:txBody>
-                  <a:tcPr marL="91440" marR="91440" marT="45720" marB="45720">
+                  <a:tcPr>
                     <a:lnL w="6350" cap="flat" cmpd="sng" algn="ctr">
                       <a:solidFill>
                         <a:srgbClr val="CBD5E1"/>
@@ -4645,6 +4657,11 @@
                     </a:solidFill>
                   </a:tcPr>
                 </a:tc>
+                <a:extLst>
+                  <a:ext uri="{0D108BD9-81ED-4DB2-BD59-A6C34878D82A}">
+                    <a16:rowId xmlns:a16="http://schemas.microsoft.com/office/drawing/2014/main" val="10000"/>
+                  </a:ext>
+                </a:extLst>
               </a:tr>
               <a:tr h="242316">
                 <a:tc>
@@ -4652,7 +4669,7 @@
                     <a:bodyPr/>
                     <a:lstStyle/>
                     <a:p>
-                      <a:pPr indent="0" marL="0">
+                      <a:pPr marL="0" indent="0">
                         <a:buNone/>
                       </a:pPr>
                       <a:r>
@@ -4666,7 +4683,7 @@
                       <a:endParaRPr lang="en-US" sz="880" dirty="0"/>
                     </a:p>
                   </a:txBody>
-                  <a:tcPr marL="91440" marR="91440" marT="45720" marB="45720">
+                  <a:tcPr>
                     <a:lnL w="6350" cap="flat" cmpd="sng" algn="ctr">
                       <a:solidFill>
                         <a:srgbClr val="CBD5E1"/>
@@ -4713,7 +4730,7 @@
                     <a:bodyPr/>
                     <a:lstStyle/>
                     <a:p>
-                      <a:pPr indent="0" marL="0">
+                      <a:pPr marL="0" indent="0">
                         <a:buNone/>
                       </a:pPr>
                       <a:r>
@@ -4727,7 +4744,7 @@
                       <a:endParaRPr lang="en-US" sz="880" dirty="0"/>
                     </a:p>
                   </a:txBody>
-                  <a:tcPr marL="91440" marR="91440" marT="45720" marB="45720">
+                  <a:tcPr>
                     <a:lnL w="6350" cap="flat" cmpd="sng" algn="ctr">
                       <a:solidFill>
                         <a:srgbClr val="CBD5E1"/>
@@ -4774,7 +4791,7 @@
                     <a:bodyPr/>
                     <a:lstStyle/>
                     <a:p>
-                      <a:pPr indent="0" marL="0">
+                      <a:pPr marL="0" indent="0">
                         <a:buNone/>
                       </a:pPr>
                       <a:r>
@@ -4788,7 +4805,7 @@
                       <a:endParaRPr lang="en-US" sz="880" dirty="0"/>
                     </a:p>
                   </a:txBody>
-                  <a:tcPr marL="91440" marR="91440" marT="45720" marB="45720">
+                  <a:tcPr>
                     <a:lnL w="6350" cap="flat" cmpd="sng" algn="ctr">
                       <a:solidFill>
                         <a:srgbClr val="CBD5E1"/>
@@ -4830,6 +4847,11 @@
                     </a:solidFill>
                   </a:tcPr>
                 </a:tc>
+                <a:extLst>
+                  <a:ext uri="{0D108BD9-81ED-4DB2-BD59-A6C34878D82A}">
+                    <a16:rowId xmlns:a16="http://schemas.microsoft.com/office/drawing/2014/main" val="10001"/>
+                  </a:ext>
+                </a:extLst>
               </a:tr>
               <a:tr h="242316">
                 <a:tc>
@@ -4837,7 +4859,7 @@
                     <a:bodyPr/>
                     <a:lstStyle/>
                     <a:p>
-                      <a:pPr indent="0" marL="0">
+                      <a:pPr marL="0" indent="0">
                         <a:buNone/>
                       </a:pPr>
                       <a:r>
@@ -4851,7 +4873,7 @@
                       <a:endParaRPr lang="en-US" sz="880" dirty="0"/>
                     </a:p>
                   </a:txBody>
-                  <a:tcPr marL="91440" marR="91440" marT="45720" marB="45720">
+                  <a:tcPr>
                     <a:lnL w="6350" cap="flat" cmpd="sng" algn="ctr">
                       <a:solidFill>
                         <a:srgbClr val="CBD5E1"/>
@@ -4898,7 +4920,7 @@
                     <a:bodyPr/>
                     <a:lstStyle/>
                     <a:p>
-                      <a:pPr indent="0" marL="0">
+                      <a:pPr marL="0" indent="0">
                         <a:buNone/>
                       </a:pPr>
                       <a:r>
@@ -4912,7 +4934,7 @@
                       <a:endParaRPr lang="en-US" sz="880" dirty="0"/>
                     </a:p>
                   </a:txBody>
-                  <a:tcPr marL="91440" marR="91440" marT="45720" marB="45720">
+                  <a:tcPr>
                     <a:lnL w="6350" cap="flat" cmpd="sng" algn="ctr">
                       <a:solidFill>
                         <a:srgbClr val="CBD5E1"/>
@@ -4959,7 +4981,7 @@
                     <a:bodyPr/>
                     <a:lstStyle/>
                     <a:p>
-                      <a:pPr indent="0" marL="0">
+                      <a:pPr marL="0" indent="0">
                         <a:buNone/>
                       </a:pPr>
                       <a:r>
@@ -4973,7 +4995,7 @@
                       <a:endParaRPr lang="en-US" sz="880" dirty="0"/>
                     </a:p>
                   </a:txBody>
-                  <a:tcPr marL="91440" marR="91440" marT="45720" marB="45720">
+                  <a:tcPr>
                     <a:lnL w="6350" cap="flat" cmpd="sng" algn="ctr">
                       <a:solidFill>
                         <a:srgbClr val="CBD5E1"/>
@@ -5015,6 +5037,11 @@
                     </a:solidFill>
                   </a:tcPr>
                 </a:tc>
+                <a:extLst>
+                  <a:ext uri="{0D108BD9-81ED-4DB2-BD59-A6C34878D82A}">
+                    <a16:rowId xmlns:a16="http://schemas.microsoft.com/office/drawing/2014/main" val="10002"/>
+                  </a:ext>
+                </a:extLst>
               </a:tr>
               <a:tr h="242316">
                 <a:tc>
@@ -5022,7 +5049,7 @@
                     <a:bodyPr/>
                     <a:lstStyle/>
                     <a:p>
-                      <a:pPr indent="0" marL="0">
+                      <a:pPr marL="0" indent="0">
                         <a:buNone/>
                       </a:pPr>
                       <a:r>
@@ -5036,7 +5063,7 @@
                       <a:endParaRPr lang="en-US" sz="880" dirty="0"/>
                     </a:p>
                   </a:txBody>
-                  <a:tcPr marL="91440" marR="91440" marT="45720" marB="45720">
+                  <a:tcPr>
                     <a:lnL w="6350" cap="flat" cmpd="sng" algn="ctr">
                       <a:solidFill>
                         <a:srgbClr val="CBD5E1"/>
@@ -5083,7 +5110,7 @@
                     <a:bodyPr/>
                     <a:lstStyle/>
                     <a:p>
-                      <a:pPr indent="0" marL="0">
+                      <a:pPr marL="0" indent="0">
                         <a:buNone/>
                       </a:pPr>
                       <a:r>
@@ -5097,7 +5124,7 @@
                       <a:endParaRPr lang="en-US" sz="880" dirty="0"/>
                     </a:p>
                   </a:txBody>
-                  <a:tcPr marL="91440" marR="91440" marT="45720" marB="45720">
+                  <a:tcPr>
                     <a:lnL w="6350" cap="flat" cmpd="sng" algn="ctr">
                       <a:solidFill>
                         <a:srgbClr val="CBD5E1"/>
@@ -5144,7 +5171,7 @@
                     <a:bodyPr/>
                     <a:lstStyle/>
                     <a:p>
-                      <a:pPr indent="0" marL="0">
+                      <a:pPr marL="0" indent="0">
                         <a:buNone/>
                       </a:pPr>
                       <a:r>
@@ -5158,7 +5185,7 @@
                       <a:endParaRPr lang="en-US" sz="880" dirty="0"/>
                     </a:p>
                   </a:txBody>
-                  <a:tcPr marL="91440" marR="91440" marT="45720" marB="45720">
+                  <a:tcPr>
                     <a:lnL w="6350" cap="flat" cmpd="sng" algn="ctr">
                       <a:solidFill>
                         <a:srgbClr val="CBD5E1"/>
@@ -5200,6 +5227,11 @@
                     </a:solidFill>
                   </a:tcPr>
                 </a:tc>
+                <a:extLst>
+                  <a:ext uri="{0D108BD9-81ED-4DB2-BD59-A6C34878D82A}">
+                    <a16:rowId xmlns:a16="http://schemas.microsoft.com/office/drawing/2014/main" val="10003"/>
+                  </a:ext>
+                </a:extLst>
               </a:tr>
             </a:tbl>
           </a:graphicData>
@@ -5226,7 +5258,7 @@
           <a:bodyPr wrap="square" lIns="0" tIns="0" rIns="0" bIns="0" rtlCol="0" anchor="ctr"/>
           <a:lstStyle/>
           <a:p>
-            <a:pPr indent="0" marL="0">
+            <a:pPr marL="0" indent="0">
               <a:buNone/>
             </a:pPr>
             <a:r>
@@ -5243,15 +5275,15 @@
       </p:sp>
       <p:pic>
         <p:nvPicPr>
-          <p:cNvPr id="27" name="Image 1" descr="C:\Users\shaho\OneDrive - FAST National University\Attachments\@Fast\Semester 6\PDC + NLP\maor-equity\figures\fig6_h3_sentiment.png">    </p:cNvPr>
+          <p:cNvPr id="27" name="Image 1" descr="C:\Users\shaho\OneDrive - FAST National University\Attachments\@Fast\Semester 6\PDC + NLP\maor-equity\figures\fig6_h3_sentiment.png"/>
           <p:cNvPicPr>
             <a:picLocks noChangeAspect="1"/>
           </p:cNvPicPr>
           <p:nvPr/>
         </p:nvPicPr>
         <p:blipFill>
-          <a:blip r:embed="rId3"/>
-          <a:srcRect l="0" r="0" t="0" b="0"/>
+          <a:blip r:embed="rId5"/>
+          <a:srcRect/>
           <a:stretch/>
         </p:blipFill>
         <p:spPr>
@@ -5288,6 +5320,13 @@
             <a:prstDash val="solid"/>
           </a:ln>
         </p:spPr>
+        <p:txBody>
+          <a:bodyPr/>
+          <a:lstStyle/>
+          <a:p>
+            <a:endParaRPr lang="en-PK"/>
+          </a:p>
+        </p:txBody>
       </p:sp>
       <p:sp>
         <p:nvSpPr>
@@ -5310,7 +5349,7 @@
           <a:bodyPr wrap="square" lIns="0" tIns="0" rIns="0" bIns="0" rtlCol="0" anchor="ctr"/>
           <a:lstStyle/>
           <a:p>
-            <a:pPr algn="l" indent="0" marL="0">
+            <a:pPr marL="0" indent="0" algn="l">
               <a:buNone/>
             </a:pPr>
             <a:r>
@@ -5341,16 +5380,34 @@
         </p:nvGraphicFramePr>
         <p:xfrm>
           <a:off x="6172200" y="1280160"/>
-          <a:ext cx="2624328" cy="1280160"/>
+          <a:ext cx="2624328" cy="1405128"/>
         </p:xfrm>
         <a:graphic>
           <a:graphicData uri="http://schemas.openxmlformats.org/drawingml/2006/table">
             <a:tbl>
               <a:tblPr/>
               <a:tblGrid>
-                <a:gridCol w="1298448"/>
-                <a:gridCol w="749808"/>
-                <a:gridCol w="576072"/>
+                <a:gridCol w="1298448">
+                  <a:extLst>
+                    <a:ext uri="{9D8B030D-6E8A-4147-A177-3AD203B41FA5}">
+                      <a16:colId xmlns:a16="http://schemas.microsoft.com/office/drawing/2014/main" val="20000"/>
+                    </a:ext>
+                  </a:extLst>
+                </a:gridCol>
+                <a:gridCol w="749808">
+                  <a:extLst>
+                    <a:ext uri="{9D8B030D-6E8A-4147-A177-3AD203B41FA5}">
+                      <a16:colId xmlns:a16="http://schemas.microsoft.com/office/drawing/2014/main" val="20001"/>
+                    </a:ext>
+                  </a:extLst>
+                </a:gridCol>
+                <a:gridCol w="576072">
+                  <a:extLst>
+                    <a:ext uri="{9D8B030D-6E8A-4147-A177-3AD203B41FA5}">
+                      <a16:colId xmlns:a16="http://schemas.microsoft.com/office/drawing/2014/main" val="20002"/>
+                    </a:ext>
+                  </a:extLst>
+                </a:gridCol>
               </a:tblGrid>
               <a:tr h="256032">
                 <a:tc>
@@ -5358,7 +5415,7 @@
                     <a:bodyPr/>
                     <a:lstStyle/>
                     <a:p>
-                      <a:pPr indent="0" marL="0">
+                      <a:pPr marL="0" indent="0">
                         <a:buNone/>
                       </a:pPr>
                       <a:r>
@@ -5372,7 +5429,7 @@
                       <a:endParaRPr lang="en-US" sz="950" dirty="0"/>
                     </a:p>
                   </a:txBody>
-                  <a:tcPr marL="91440" marR="91440" marT="45720" marB="45720">
+                  <a:tcPr>
                     <a:lnL w="6350" cap="flat" cmpd="sng" algn="ctr">
                       <a:solidFill>
                         <a:srgbClr val="CBD5E1"/>
@@ -5419,7 +5476,7 @@
                     <a:bodyPr/>
                     <a:lstStyle/>
                     <a:p>
-                      <a:pPr indent="0" marL="0">
+                      <a:pPr marL="0" indent="0">
                         <a:buNone/>
                       </a:pPr>
                       <a:r>
@@ -5433,7 +5490,7 @@
                       <a:endParaRPr lang="en-US" sz="950" dirty="0"/>
                     </a:p>
                   </a:txBody>
-                  <a:tcPr marL="91440" marR="91440" marT="45720" marB="45720">
+                  <a:tcPr>
                     <a:lnL w="6350" cap="flat" cmpd="sng" algn="ctr">
                       <a:solidFill>
                         <a:srgbClr val="CBD5E1"/>
@@ -5480,7 +5537,7 @@
                     <a:bodyPr/>
                     <a:lstStyle/>
                     <a:p>
-                      <a:pPr indent="0" marL="0">
+                      <a:pPr marL="0" indent="0">
                         <a:buNone/>
                       </a:pPr>
                       <a:r>
@@ -5494,7 +5551,7 @@
                       <a:endParaRPr lang="en-US" sz="950" dirty="0"/>
                     </a:p>
                   </a:txBody>
-                  <a:tcPr marL="91440" marR="91440" marT="45720" marB="45720">
+                  <a:tcPr>
                     <a:lnL w="6350" cap="flat" cmpd="sng" algn="ctr">
                       <a:solidFill>
                         <a:srgbClr val="CBD5E1"/>
@@ -5536,6 +5593,11 @@
                     </a:solidFill>
                   </a:tcPr>
                 </a:tc>
+                <a:extLst>
+                  <a:ext uri="{0D108BD9-81ED-4DB2-BD59-A6C34878D82A}">
+                    <a16:rowId xmlns:a16="http://schemas.microsoft.com/office/drawing/2014/main" val="10000"/>
+                  </a:ext>
+                </a:extLst>
               </a:tr>
               <a:tr h="256032">
                 <a:tc>
@@ -5543,7 +5605,7 @@
                     <a:bodyPr/>
                     <a:lstStyle/>
                     <a:p>
-                      <a:pPr indent="0" marL="0">
+                      <a:pPr marL="0" indent="0">
                         <a:buNone/>
                       </a:pPr>
                       <a:r>
@@ -5557,7 +5619,7 @@
                       <a:endParaRPr lang="en-US" sz="950" dirty="0"/>
                     </a:p>
                   </a:txBody>
-                  <a:tcPr marL="91440" marR="91440" marT="45720" marB="45720">
+                  <a:tcPr>
                     <a:lnL w="6350" cap="flat" cmpd="sng" algn="ctr">
                       <a:solidFill>
                         <a:srgbClr val="CBD5E1"/>
@@ -5604,7 +5666,7 @@
                     <a:bodyPr/>
                     <a:lstStyle/>
                     <a:p>
-                      <a:pPr indent="0" marL="0">
+                      <a:pPr marL="0" indent="0">
                         <a:buNone/>
                       </a:pPr>
                       <a:r>
@@ -5618,7 +5680,7 @@
                       <a:endParaRPr lang="en-US" sz="950" dirty="0"/>
                     </a:p>
                   </a:txBody>
-                  <a:tcPr marL="91440" marR="91440" marT="45720" marB="45720">
+                  <a:tcPr>
                     <a:lnL w="6350" cap="flat" cmpd="sng" algn="ctr">
                       <a:solidFill>
                         <a:srgbClr val="CBD5E1"/>
@@ -5665,7 +5727,7 @@
                     <a:bodyPr/>
                     <a:lstStyle/>
                     <a:p>
-                      <a:pPr indent="0" marL="0">
+                      <a:pPr marL="0" indent="0">
                         <a:buNone/>
                       </a:pPr>
                       <a:r>
@@ -5679,7 +5741,7 @@
                       <a:endParaRPr lang="en-US" sz="950" dirty="0"/>
                     </a:p>
                   </a:txBody>
-                  <a:tcPr marL="91440" marR="91440" marT="45720" marB="45720">
+                  <a:tcPr>
                     <a:lnL w="6350" cap="flat" cmpd="sng" algn="ctr">
                       <a:solidFill>
                         <a:srgbClr val="CBD5E1"/>
@@ -5721,6 +5783,11 @@
                     </a:solidFill>
                   </a:tcPr>
                 </a:tc>
+                <a:extLst>
+                  <a:ext uri="{0D108BD9-81ED-4DB2-BD59-A6C34878D82A}">
+                    <a16:rowId xmlns:a16="http://schemas.microsoft.com/office/drawing/2014/main" val="10001"/>
+                  </a:ext>
+                </a:extLst>
               </a:tr>
               <a:tr h="256032">
                 <a:tc>
@@ -5728,7 +5795,7 @@
                     <a:bodyPr/>
                     <a:lstStyle/>
                     <a:p>
-                      <a:pPr indent="0" marL="0">
+                      <a:pPr marL="0" indent="0">
                         <a:buNone/>
                       </a:pPr>
                       <a:r>
@@ -5742,7 +5809,7 @@
                       <a:endParaRPr lang="en-US" sz="950" dirty="0"/>
                     </a:p>
                   </a:txBody>
-                  <a:tcPr marL="91440" marR="91440" marT="45720" marB="45720">
+                  <a:tcPr>
                     <a:lnL w="6350" cap="flat" cmpd="sng" algn="ctr">
                       <a:solidFill>
                         <a:srgbClr val="CBD5E1"/>
@@ -5789,7 +5856,7 @@
                     <a:bodyPr/>
                     <a:lstStyle/>
                     <a:p>
-                      <a:pPr indent="0" marL="0">
+                      <a:pPr marL="0" indent="0">
                         <a:buNone/>
                       </a:pPr>
                       <a:r>
@@ -5803,7 +5870,7 @@
                       <a:endParaRPr lang="en-US" sz="950" dirty="0"/>
                     </a:p>
                   </a:txBody>
-                  <a:tcPr marL="91440" marR="91440" marT="45720" marB="45720">
+                  <a:tcPr>
                     <a:lnL w="6350" cap="flat" cmpd="sng" algn="ctr">
                       <a:solidFill>
                         <a:srgbClr val="CBD5E1"/>
@@ -5850,7 +5917,7 @@
                     <a:bodyPr/>
                     <a:lstStyle/>
                     <a:p>
-                      <a:pPr indent="0" marL="0">
+                      <a:pPr marL="0" indent="0">
                         <a:buNone/>
                       </a:pPr>
                       <a:r>
@@ -5864,7 +5931,7 @@
                       <a:endParaRPr lang="en-US" sz="950" dirty="0"/>
                     </a:p>
                   </a:txBody>
-                  <a:tcPr marL="91440" marR="91440" marT="45720" marB="45720">
+                  <a:tcPr>
                     <a:lnL w="6350" cap="flat" cmpd="sng" algn="ctr">
                       <a:solidFill>
                         <a:srgbClr val="CBD5E1"/>
@@ -5906,6 +5973,11 @@
                     </a:solidFill>
                   </a:tcPr>
                 </a:tc>
+                <a:extLst>
+                  <a:ext uri="{0D108BD9-81ED-4DB2-BD59-A6C34878D82A}">
+                    <a16:rowId xmlns:a16="http://schemas.microsoft.com/office/drawing/2014/main" val="10002"/>
+                  </a:ext>
+                </a:extLst>
               </a:tr>
               <a:tr h="256032">
                 <a:tc>
@@ -5913,7 +5985,7 @@
                     <a:bodyPr/>
                     <a:lstStyle/>
                     <a:p>
-                      <a:pPr indent="0" marL="0">
+                      <a:pPr marL="0" indent="0">
                         <a:buNone/>
                       </a:pPr>
                       <a:r>
@@ -5927,7 +5999,7 @@
                       <a:endParaRPr lang="en-US" sz="950" dirty="0"/>
                     </a:p>
                   </a:txBody>
-                  <a:tcPr marL="91440" marR="91440" marT="45720" marB="45720">
+                  <a:tcPr>
                     <a:lnL w="6350" cap="flat" cmpd="sng" algn="ctr">
                       <a:solidFill>
                         <a:srgbClr val="CBD5E1"/>
@@ -5974,7 +6046,7 @@
                     <a:bodyPr/>
                     <a:lstStyle/>
                     <a:p>
-                      <a:pPr indent="0" marL="0">
+                      <a:pPr marL="0" indent="0">
                         <a:buNone/>
                       </a:pPr>
                       <a:r>
@@ -5988,7 +6060,7 @@
                       <a:endParaRPr lang="en-US" sz="950" dirty="0"/>
                     </a:p>
                   </a:txBody>
-                  <a:tcPr marL="91440" marR="91440" marT="45720" marB="45720">
+                  <a:tcPr>
                     <a:lnL w="6350" cap="flat" cmpd="sng" algn="ctr">
                       <a:solidFill>
                         <a:srgbClr val="CBD5E1"/>
@@ -6035,7 +6107,7 @@
                     <a:bodyPr/>
                     <a:lstStyle/>
                     <a:p>
-                      <a:pPr indent="0" marL="0">
+                      <a:pPr marL="0" indent="0">
                         <a:buNone/>
                       </a:pPr>
                       <a:r>
@@ -6049,7 +6121,7 @@
                       <a:endParaRPr lang="en-US" sz="950" dirty="0"/>
                     </a:p>
                   </a:txBody>
-                  <a:tcPr marL="91440" marR="91440" marT="45720" marB="45720">
+                  <a:tcPr>
                     <a:lnL w="6350" cap="flat" cmpd="sng" algn="ctr">
                       <a:solidFill>
                         <a:srgbClr val="CBD5E1"/>
@@ -6091,6 +6163,11 @@
                     </a:solidFill>
                   </a:tcPr>
                 </a:tc>
+                <a:extLst>
+                  <a:ext uri="{0D108BD9-81ED-4DB2-BD59-A6C34878D82A}">
+                    <a16:rowId xmlns:a16="http://schemas.microsoft.com/office/drawing/2014/main" val="10003"/>
+                  </a:ext>
+                </a:extLst>
               </a:tr>
               <a:tr h="256032">
                 <a:tc>
@@ -6098,7 +6175,7 @@
                     <a:bodyPr/>
                     <a:lstStyle/>
                     <a:p>
-                      <a:pPr indent="0" marL="0">
+                      <a:pPr marL="0" indent="0">
                         <a:buNone/>
                       </a:pPr>
                       <a:r>
@@ -6112,7 +6189,7 @@
                       <a:endParaRPr lang="en-US" sz="950" dirty="0"/>
                     </a:p>
                   </a:txBody>
-                  <a:tcPr marL="91440" marR="91440" marT="45720" marB="45720">
+                  <a:tcPr>
                     <a:lnL w="6350" cap="flat" cmpd="sng" algn="ctr">
                       <a:solidFill>
                         <a:srgbClr val="CBD5E1"/>
@@ -6159,7 +6236,7 @@
                     <a:bodyPr/>
                     <a:lstStyle/>
                     <a:p>
-                      <a:pPr indent="0" marL="0">
+                      <a:pPr marL="0" indent="0">
                         <a:buNone/>
                       </a:pPr>
                       <a:r>
@@ -6173,7 +6250,7 @@
                       <a:endParaRPr lang="en-US" sz="950" dirty="0"/>
                     </a:p>
                   </a:txBody>
-                  <a:tcPr marL="91440" marR="91440" marT="45720" marB="45720">
+                  <a:tcPr>
                     <a:lnL w="6350" cap="flat" cmpd="sng" algn="ctr">
                       <a:solidFill>
                         <a:srgbClr val="CBD5E1"/>
@@ -6220,7 +6297,7 @@
                     <a:bodyPr/>
                     <a:lstStyle/>
                     <a:p>
-                      <a:pPr indent="0" marL="0">
+                      <a:pPr marL="0" indent="0">
                         <a:buNone/>
                       </a:pPr>
                       <a:r>
@@ -6234,7 +6311,7 @@
                       <a:endParaRPr lang="en-US" sz="950" dirty="0"/>
                     </a:p>
                   </a:txBody>
-                  <a:tcPr marL="91440" marR="91440" marT="45720" marB="45720">
+                  <a:tcPr>
                     <a:lnL w="6350" cap="flat" cmpd="sng" algn="ctr">
                       <a:solidFill>
                         <a:srgbClr val="CBD5E1"/>
@@ -6276,6 +6353,11 @@
                     </a:solidFill>
                   </a:tcPr>
                 </a:tc>
+                <a:extLst>
+                  <a:ext uri="{0D108BD9-81ED-4DB2-BD59-A6C34878D82A}">
+                    <a16:rowId xmlns:a16="http://schemas.microsoft.com/office/drawing/2014/main" val="10004"/>
+                  </a:ext>
+                </a:extLst>
               </a:tr>
             </a:tbl>
           </a:graphicData>
@@ -6283,7 +6365,7 @@
       </p:graphicFrame>
       <p:sp>
         <p:nvSpPr>
-          <p:cNvPr id="31" name="Text 24"/>
+          <p:cNvPr id="30" name="Text 24"/>
           <p:cNvSpPr/>
           <p:nvPr/>
         </p:nvSpPr>
@@ -6302,7 +6384,7 @@
           <a:bodyPr wrap="square" lIns="0" tIns="0" rIns="0" bIns="0" rtlCol="0" anchor="ctr"/>
           <a:lstStyle/>
           <a:p>
-            <a:pPr indent="0" marL="0">
+            <a:pPr marL="0" indent="0">
               <a:buNone/>
             </a:pPr>
             <a:r>
@@ -6316,7 +6398,7 @@
             <a:endParaRPr lang="en-US" sz="850" dirty="0"/>
           </a:p>
           <a:p>
-            <a:pPr indent="0" marL="0">
+            <a:pPr marL="0" indent="0">
               <a:buNone/>
             </a:pPr>
             <a:r>
@@ -6333,15 +6415,15 @@
       </p:sp>
       <p:pic>
         <p:nvPicPr>
-          <p:cNvPr id="32" name="Image 2" descr="C:\Users\shaho\OneDrive - FAST National University\Attachments\@Fast\Semester 6\PDC + NLP\maor-equity\figures\fig8_chunk_filter.png">    </p:cNvPr>
+          <p:cNvPr id="32" name="Image 2" descr="C:\Users\shaho\OneDrive - FAST National University\Attachments\@Fast\Semester 6\PDC + NLP\maor-equity\figures\fig8_chunk_filter.png"/>
           <p:cNvPicPr>
             <a:picLocks noChangeAspect="1"/>
           </p:cNvPicPr>
           <p:nvPr/>
         </p:nvPicPr>
         <p:blipFill>
-          <a:blip r:embed="rId4"/>
-          <a:srcRect l="0" r="0" t="0" b="0"/>
+          <a:blip r:embed="rId6"/>
+          <a:srcRect/>
           <a:stretch/>
         </p:blipFill>
         <p:spPr>
@@ -6370,6 +6452,7 @@
         <a:solidFill>
           <a:srgbClr val="0D1F3C"/>
         </a:solidFill>
+        <a:effectLst/>
       </p:bgPr>
     </p:bg>
     <p:spTree>
@@ -6410,6 +6493,13 @@
             <a:prstDash val="solid"/>
           </a:ln>
         </p:spPr>
+        <p:txBody>
+          <a:bodyPr/>
+          <a:lstStyle/>
+          <a:p>
+            <a:endParaRPr lang="en-PK"/>
+          </a:p>
+        </p:txBody>
       </p:sp>
       <p:sp>
         <p:nvSpPr>
@@ -6432,11 +6522,11 @@
           <a:bodyPr wrap="square" lIns="0" tIns="0" rIns="0" bIns="0" rtlCol="0" anchor="ctr"/>
           <a:lstStyle/>
           <a:p>
-            <a:pPr algn="ctr" indent="0" marL="0">
+            <a:pPr marL="0" indent="0" algn="ctr">
               <a:buNone/>
             </a:pPr>
             <a:r>
-              <a:rPr lang="en-US" sz="850" b="1" spc="150" kern="0" dirty="0">
+              <a:rPr lang="en-US" sz="850" b="1" kern="0" spc="150" dirty="0">
                 <a:solidFill>
                   <a:srgbClr val="6B9ABE"/>
                 </a:solidFill>
@@ -6471,6 +6561,13 @@
             <a:prstDash val="solid"/>
           </a:ln>
         </p:spPr>
+        <p:txBody>
+          <a:bodyPr/>
+          <a:lstStyle/>
+          <a:p>
+            <a:endParaRPr lang="en-PK"/>
+          </a:p>
+        </p:txBody>
       </p:sp>
       <p:sp>
         <p:nvSpPr>
@@ -6493,7 +6590,7 @@
           <a:bodyPr wrap="square" lIns="0" tIns="0" rIns="0" bIns="0" rtlCol="0" anchor="ctr"/>
           <a:lstStyle/>
           <a:p>
-            <a:pPr algn="l" indent="0" marL="0">
+            <a:pPr marL="0" indent="0" algn="l">
               <a:buNone/>
             </a:pPr>
             <a:r>
@@ -6532,13 +6629,20 @@
             <a:prstDash val="solid"/>
           </a:ln>
           <a:effectLst>
-            <a:outerShdw sx="100000" sy="100000" kx="0" ky="0" algn="bl" rotWithShape="0" blurRad="127000" dist="25400" dir="8100000">
+            <a:outerShdw blurRad="127000" dist="25400" dir="8100000" algn="bl" rotWithShape="0">
               <a:srgbClr val="000000">
                 <a:alpha val="13000"/>
               </a:srgbClr>
             </a:outerShdw>
           </a:effectLst>
         </p:spPr>
+        <p:txBody>
+          <a:bodyPr/>
+          <a:lstStyle/>
+          <a:p>
+            <a:endParaRPr lang="en-PK"/>
+          </a:p>
+        </p:txBody>
       </p:sp>
       <p:sp>
         <p:nvSpPr>
@@ -6564,6 +6668,13 @@
             <a:prstDash val="solid"/>
           </a:ln>
         </p:spPr>
+        <p:txBody>
+          <a:bodyPr/>
+          <a:lstStyle/>
+          <a:p>
+            <a:endParaRPr lang="en-PK"/>
+          </a:p>
+        </p:txBody>
       </p:sp>
       <p:sp>
         <p:nvSpPr>
@@ -6586,7 +6697,7 @@
           <a:bodyPr wrap="square" lIns="0" tIns="0" rIns="0" bIns="0" rtlCol="0" anchor="ctr"/>
           <a:lstStyle/>
           <a:p>
-            <a:pPr algn="l" indent="0" marL="0">
+            <a:pPr marL="0" indent="0" algn="l">
               <a:buNone/>
             </a:pPr>
             <a:r>
@@ -6622,7 +6733,7 @@
           <a:bodyPr wrap="square" lIns="0" tIns="0" rIns="0" bIns="0" rtlCol="0" anchor="ctr"/>
           <a:lstStyle/>
           <a:p>
-            <a:pPr algn="ctr" indent="0" marL="0">
+            <a:pPr marL="0" indent="0" algn="ctr">
               <a:buNone/>
             </a:pPr>
             <a:r>
@@ -6658,7 +6769,7 @@
           <a:bodyPr wrap="square" lIns="0" tIns="0" rIns="0" bIns="0" rtlCol="0" anchor="ctr"/>
           <a:lstStyle/>
           <a:p>
-            <a:pPr algn="ctr" indent="0" marL="0">
+            <a:pPr marL="0" indent="0" algn="ctr">
               <a:buNone/>
             </a:pPr>
             <a:r>
@@ -6694,7 +6805,7 @@
           <a:bodyPr wrap="square" lIns="0" tIns="0" rIns="0" bIns="0" rtlCol="0" anchor="ctr"/>
           <a:lstStyle/>
           <a:p>
-            <a:pPr algn="ctr" indent="0" marL="0">
+            <a:pPr marL="0" indent="0" algn="ctr">
               <a:buNone/>
             </a:pPr>
             <a:r>
@@ -6733,13 +6844,20 @@
             <a:prstDash val="solid"/>
           </a:ln>
           <a:effectLst>
-            <a:outerShdw sx="100000" sy="100000" kx="0" ky="0" algn="bl" rotWithShape="0" blurRad="127000" dist="25400" dir="8100000">
+            <a:outerShdw blurRad="127000" dist="25400" dir="8100000" algn="bl" rotWithShape="0">
               <a:srgbClr val="000000">
                 <a:alpha val="13000"/>
               </a:srgbClr>
             </a:outerShdw>
           </a:effectLst>
         </p:spPr>
+        <p:txBody>
+          <a:bodyPr/>
+          <a:lstStyle/>
+          <a:p>
+            <a:endParaRPr lang="en-PK"/>
+          </a:p>
+        </p:txBody>
       </p:sp>
       <p:sp>
         <p:nvSpPr>
@@ -6765,6 +6883,13 @@
             <a:prstDash val="solid"/>
           </a:ln>
         </p:spPr>
+        <p:txBody>
+          <a:bodyPr/>
+          <a:lstStyle/>
+          <a:p>
+            <a:endParaRPr lang="en-PK"/>
+          </a:p>
+        </p:txBody>
       </p:sp>
       <p:sp>
         <p:nvSpPr>
@@ -6787,7 +6912,7 @@
           <a:bodyPr wrap="square" lIns="0" tIns="0" rIns="0" bIns="0" rtlCol="0" anchor="ctr"/>
           <a:lstStyle/>
           <a:p>
-            <a:pPr algn="l" indent="0" marL="0">
+            <a:pPr marL="0" indent="0" algn="l">
               <a:buNone/>
             </a:pPr>
             <a:r>
@@ -6823,7 +6948,7 @@
           <a:bodyPr wrap="square" lIns="0" tIns="0" rIns="0" bIns="0" rtlCol="0" anchor="ctr"/>
           <a:lstStyle/>
           <a:p>
-            <a:pPr algn="ctr" indent="0" marL="0">
+            <a:pPr marL="0" indent="0" algn="ctr">
               <a:buNone/>
             </a:pPr>
             <a:r>
@@ -6859,7 +6984,7 @@
           <a:bodyPr wrap="square" lIns="0" tIns="0" rIns="0" bIns="0" rtlCol="0" anchor="ctr"/>
           <a:lstStyle/>
           <a:p>
-            <a:pPr algn="ctr" indent="0" marL="0">
+            <a:pPr marL="0" indent="0" algn="ctr">
               <a:buNone/>
             </a:pPr>
             <a:r>
@@ -6895,7 +7020,7 @@
           <a:bodyPr wrap="square" lIns="0" tIns="0" rIns="0" bIns="0" rtlCol="0" anchor="ctr"/>
           <a:lstStyle/>
           <a:p>
-            <a:pPr algn="ctr" indent="0" marL="0">
+            <a:pPr marL="0" indent="0" algn="ctr">
               <a:buNone/>
             </a:pPr>
             <a:r>
@@ -6934,13 +7059,20 @@
             <a:prstDash val="solid"/>
           </a:ln>
           <a:effectLst>
-            <a:outerShdw sx="100000" sy="100000" kx="0" ky="0" algn="bl" rotWithShape="0" blurRad="127000" dist="25400" dir="8100000">
+            <a:outerShdw blurRad="127000" dist="25400" dir="8100000" algn="bl" rotWithShape="0">
               <a:srgbClr val="000000">
                 <a:alpha val="13000"/>
               </a:srgbClr>
             </a:outerShdw>
           </a:effectLst>
         </p:spPr>
+        <p:txBody>
+          <a:bodyPr/>
+          <a:lstStyle/>
+          <a:p>
+            <a:endParaRPr lang="en-PK"/>
+          </a:p>
+        </p:txBody>
       </p:sp>
       <p:sp>
         <p:nvSpPr>
@@ -6966,6 +7098,13 @@
             <a:prstDash val="solid"/>
           </a:ln>
         </p:spPr>
+        <p:txBody>
+          <a:bodyPr/>
+          <a:lstStyle/>
+          <a:p>
+            <a:endParaRPr lang="en-PK"/>
+          </a:p>
+        </p:txBody>
       </p:sp>
       <p:sp>
         <p:nvSpPr>
@@ -6988,7 +7127,7 @@
           <a:bodyPr wrap="square" lIns="0" tIns="0" rIns="0" bIns="0" rtlCol="0" anchor="ctr"/>
           <a:lstStyle/>
           <a:p>
-            <a:pPr algn="l" indent="0" marL="0">
+            <a:pPr marL="0" indent="0" algn="l">
               <a:buNone/>
             </a:pPr>
             <a:r>
@@ -7024,7 +7163,7 @@
           <a:bodyPr wrap="square" lIns="0" tIns="0" rIns="0" bIns="0" rtlCol="0" anchor="ctr"/>
           <a:lstStyle/>
           <a:p>
-            <a:pPr algn="ctr" indent="0" marL="0">
+            <a:pPr marL="0" indent="0" algn="ctr">
               <a:buNone/>
             </a:pPr>
             <a:r>
@@ -7060,7 +7199,7 @@
           <a:bodyPr wrap="square" lIns="0" tIns="0" rIns="0" bIns="0" rtlCol="0" anchor="ctr"/>
           <a:lstStyle/>
           <a:p>
-            <a:pPr algn="ctr" indent="0" marL="0">
+            <a:pPr marL="0" indent="0" algn="ctr">
               <a:buNone/>
             </a:pPr>
             <a:r>
@@ -7096,7 +7235,7 @@
           <a:bodyPr wrap="square" lIns="0" tIns="0" rIns="0" bIns="0" rtlCol="0" anchor="ctr"/>
           <a:lstStyle/>
           <a:p>
-            <a:pPr algn="ctr" indent="0" marL="0">
+            <a:pPr marL="0" indent="0" algn="ctr">
               <a:buNone/>
             </a:pPr>
             <a:r>
@@ -7132,7 +7271,7 @@
           <a:bodyPr wrap="square" lIns="0" tIns="0" rIns="0" bIns="0" rtlCol="0" anchor="ctr"/>
           <a:lstStyle/>
           <a:p>
-            <a:pPr indent="0" marL="0">
+            <a:pPr marL="0" indent="0">
               <a:buNone/>
             </a:pPr>
             <a:r>
@@ -7168,13 +7307,13 @@
           <a:bodyPr wrap="square" lIns="0" tIns="0" rIns="0" bIns="0" rtlCol="0" anchor="t"/>
           <a:lstStyle/>
           <a:p>
-            <a:pPr algn="l" marL="342900" indent="-342900">
+            <a:pPr marL="342900" indent="-342900" algn="l">
               <a:spcAft>
                 <a:spcPts val="500"/>
               </a:spcAft>
               <a:buSzPct val="100000"/>
               <a:buFont typeface="+mj-lt"/>
-              <a:buAutoNum type="arabicPeriod" startAt="1"/>
+              <a:buAutoNum type="arabicPeriod"/>
             </a:pPr>
             <a:r>
               <a:rPr lang="en-US" sz="1200" dirty="0">
@@ -7187,13 +7326,13 @@
             <a:endParaRPr lang="en-US" sz="1200" dirty="0"/>
           </a:p>
           <a:p>
-            <a:pPr algn="l" marL="342900" indent="-342900">
+            <a:pPr marL="342900" indent="-342900" algn="l">
               <a:spcAft>
                 <a:spcPts val="500"/>
               </a:spcAft>
               <a:buSzPct val="100000"/>
               <a:buFont typeface="+mj-lt"/>
-              <a:buAutoNum type="arabicPeriod" startAt="1"/>
+              <a:buAutoNum type="arabicPeriod"/>
             </a:pPr>
             <a:r>
               <a:rPr lang="en-US" sz="1200" dirty="0">
@@ -7206,13 +7345,13 @@
             <a:endParaRPr lang="en-US" sz="1200" dirty="0"/>
           </a:p>
           <a:p>
-            <a:pPr algn="l" marL="342900" indent="-342900">
+            <a:pPr marL="342900" indent="-342900" algn="l">
               <a:spcAft>
                 <a:spcPts val="500"/>
               </a:spcAft>
               <a:buSzPct val="100000"/>
               <a:buFont typeface="+mj-lt"/>
-              <a:buAutoNum type="arabicPeriod" startAt="1"/>
+              <a:buAutoNum type="arabicPeriod"/>
             </a:pPr>
             <a:r>
               <a:rPr lang="en-US" sz="1200" dirty="0">
@@ -7225,10 +7364,10 @@
             <a:endParaRPr lang="en-US" sz="1200" dirty="0"/>
           </a:p>
           <a:p>
-            <a:pPr algn="l" marL="342900" indent="-342900">
+            <a:pPr marL="342900" indent="-342900" algn="l">
               <a:buSzPct val="100000"/>
               <a:buFont typeface="+mj-lt"/>
-              <a:buAutoNum type="arabicPeriod" startAt="1"/>
+              <a:buAutoNum type="arabicPeriod"/>
             </a:pPr>
             <a:r>
               <a:rPr lang="en-US" sz="1200" dirty="0">
@@ -7263,7 +7402,7 @@
           <a:bodyPr wrap="square" lIns="0" tIns="0" rIns="0" bIns="0" rtlCol="0" anchor="ctr"/>
           <a:lstStyle/>
           <a:p>
-            <a:pPr algn="ctr" indent="0" marL="0">
+            <a:pPr marL="0" indent="0" algn="ctr">
               <a:buNone/>
             </a:pPr>
             <a:r>
@@ -7302,6 +7441,13 @@
             <a:prstDash val="solid"/>
           </a:ln>
         </p:spPr>
+        <p:txBody>
+          <a:bodyPr/>
+          <a:lstStyle/>
+          <a:p>
+            <a:endParaRPr lang="en-PK"/>
+          </a:p>
+        </p:txBody>
       </p:sp>
       <p:sp>
         <p:nvSpPr>
@@ -7324,7 +7470,7 @@
           <a:bodyPr wrap="square" lIns="0" tIns="0" rIns="0" bIns="0" rtlCol="0" anchor="ctr"/>
           <a:lstStyle/>
           <a:p>
-            <a:pPr algn="ctr" indent="0" marL="0">
+            <a:pPr marL="0" indent="0" algn="ctr">
               <a:buNone/>
             </a:pPr>
             <a:r>
@@ -7335,15 +7481,12 @@
               </a:rPr>
               <a:t>GitHub: </a:t>
             </a:r>
-            <a:pPr algn="ctr" indent="0" marL="0">
-              <a:buNone/>
-            </a:pPr>
             <a:r>
               <a:rPr lang="en-US" sz="850" u="sng" dirty="0">
                 <a:solidFill>
                   <a:srgbClr val="5BA4CF"/>
                 </a:solidFill>
-                <a:hlinkClick r:id="rId1" invalidUrl="" action="" tgtFrame="" tooltip="" history="1" highlightClick="0" endSnd="0">
+                <a:hlinkClick r:id="rId3">
                   <a:extLst>
                     <a:ext uri="{A12FA001-AC4F-418D-AE19-62706E023703}">
                       <ahyp:hlinkClr xmlns:ahyp="http://schemas.microsoft.com/office/drawing/2018/hyperlinkcolor" val="tx"/>
@@ -7373,6 +7516,7 @@
         <a:solidFill>
           <a:srgbClr val="EFF6FF"/>
         </a:solidFill>
+        <a:effectLst/>
       </p:bgPr>
     </p:bg>
     <p:spTree>
@@ -7413,6 +7557,13 @@
             <a:prstDash val="solid"/>
           </a:ln>
         </p:spPr>
+        <p:txBody>
+          <a:bodyPr/>
+          <a:lstStyle/>
+          <a:p>
+            <a:endParaRPr lang="en-PK"/>
+          </a:p>
+        </p:txBody>
       </p:sp>
       <p:sp>
         <p:nvSpPr>
@@ -7435,11 +7586,11 @@
           <a:bodyPr wrap="square" lIns="0" tIns="0" rIns="0" bIns="0" rtlCol="0" anchor="ctr"/>
           <a:lstStyle/>
           <a:p>
-            <a:pPr algn="ctr" indent="0" marL="0">
+            <a:pPr marL="0" indent="0" algn="ctr">
               <a:buNone/>
             </a:pPr>
             <a:r>
-              <a:rPr lang="en-US" sz="850" b="1" spc="150" kern="0" dirty="0">
+              <a:rPr lang="en-US" sz="850" b="1" kern="0" spc="150" dirty="0">
                 <a:solidFill>
                   <a:srgbClr val="FFFFFF"/>
                 </a:solidFill>
@@ -7474,6 +7625,13 @@
             <a:prstDash val="solid"/>
           </a:ln>
         </p:spPr>
+        <p:txBody>
+          <a:bodyPr/>
+          <a:lstStyle/>
+          <a:p>
+            <a:endParaRPr lang="en-PK"/>
+          </a:p>
+        </p:txBody>
       </p:sp>
       <p:sp>
         <p:nvSpPr>
@@ -7496,7 +7654,7 @@
           <a:bodyPr wrap="square" lIns="0" tIns="0" rIns="0" bIns="0" rtlCol="0" anchor="ctr"/>
           <a:lstStyle/>
           <a:p>
-            <a:pPr algn="ctr" indent="0" marL="0">
+            <a:pPr marL="0" indent="0" algn="ctr">
               <a:buNone/>
             </a:pPr>
             <a:r>
@@ -7507,15 +7665,12 @@
               </a:rPr>
               <a:t>GitHub: </a:t>
             </a:r>
-            <a:pPr algn="ctr" indent="0" marL="0">
-              <a:buNone/>
-            </a:pPr>
             <a:r>
               <a:rPr lang="en-US" sz="850" u="sng" dirty="0">
                 <a:solidFill>
                   <a:srgbClr val="5BA4CF"/>
                 </a:solidFill>
-                <a:hlinkClick r:id="rId1" invalidUrl="" action="" tgtFrame="" tooltip="" history="1" highlightClick="0" endSnd="0">
+                <a:hlinkClick r:id="rId3">
                   <a:extLst>
                     <a:ext uri="{A12FA001-AC4F-418D-AE19-62706E023703}">
                       <ahyp:hlinkClr xmlns:ahyp="http://schemas.microsoft.com/office/drawing/2018/hyperlinkcolor" val="tx"/>
@@ -7553,6 +7708,13 @@
             <a:prstDash val="solid"/>
           </a:ln>
         </p:spPr>
+        <p:txBody>
+          <a:bodyPr/>
+          <a:lstStyle/>
+          <a:p>
+            <a:endParaRPr lang="en-PK"/>
+          </a:p>
+        </p:txBody>
       </p:sp>
       <p:sp>
         <p:nvSpPr>
@@ -7575,7 +7737,7 @@
           <a:bodyPr wrap="square" lIns="0" tIns="0" rIns="0" bIns="0" rtlCol="0" anchor="ctr"/>
           <a:lstStyle/>
           <a:p>
-            <a:pPr algn="ctr" indent="0" marL="0">
+            <a:pPr marL="0" indent="0" algn="ctr">
               <a:buNone/>
             </a:pPr>
             <a:r>
@@ -7614,6 +7776,13 @@
             <a:prstDash val="solid"/>
           </a:ln>
         </p:spPr>
+        <p:txBody>
+          <a:bodyPr/>
+          <a:lstStyle/>
+          <a:p>
+            <a:endParaRPr lang="en-PK"/>
+          </a:p>
+        </p:txBody>
       </p:sp>
       <p:sp>
         <p:nvSpPr>
@@ -7636,7 +7805,7 @@
           <a:bodyPr wrap="square" lIns="0" tIns="0" rIns="0" bIns="0" rtlCol="0" anchor="ctr"/>
           <a:lstStyle/>
           <a:p>
-            <a:pPr algn="l" indent="0" marL="0">
+            <a:pPr marL="0" indent="0" algn="l">
               <a:buNone/>
             </a:pPr>
             <a:r>
@@ -7672,7 +7841,7 @@
           <a:bodyPr wrap="square" lIns="0" tIns="0" rIns="0" bIns="0" rtlCol="0" anchor="t"/>
           <a:lstStyle/>
           <a:p>
-            <a:pPr algn="l" indent="0" marL="0">
+            <a:pPr marL="0" indent="0" algn="l">
               <a:buNone/>
             </a:pPr>
             <a:r>
@@ -7703,17 +7872,41 @@
         </p:nvGraphicFramePr>
         <p:xfrm>
           <a:off x="320040" y="987552"/>
-          <a:ext cx="8503920" cy="3703320"/>
+          <a:ext cx="8503920" cy="3703328"/>
         </p:xfrm>
         <a:graphic>
           <a:graphicData uri="http://schemas.openxmlformats.org/drawingml/2006/table">
             <a:tbl>
               <a:tblPr/>
               <a:tblGrid>
-                <a:gridCol w="310896"/>
-                <a:gridCol w="1481328"/>
-                <a:gridCol w="5138928"/>
-                <a:gridCol w="1572768"/>
+                <a:gridCol w="310896">
+                  <a:extLst>
+                    <a:ext uri="{9D8B030D-6E8A-4147-A177-3AD203B41FA5}">
+                      <a16:colId xmlns:a16="http://schemas.microsoft.com/office/drawing/2014/main" val="20000"/>
+                    </a:ext>
+                  </a:extLst>
+                </a:gridCol>
+                <a:gridCol w="1481328">
+                  <a:extLst>
+                    <a:ext uri="{9D8B030D-6E8A-4147-A177-3AD203B41FA5}">
+                      <a16:colId xmlns:a16="http://schemas.microsoft.com/office/drawing/2014/main" val="20001"/>
+                    </a:ext>
+                  </a:extLst>
+                </a:gridCol>
+                <a:gridCol w="5138928">
+                  <a:extLst>
+                    <a:ext uri="{9D8B030D-6E8A-4147-A177-3AD203B41FA5}">
+                      <a16:colId xmlns:a16="http://schemas.microsoft.com/office/drawing/2014/main" val="20002"/>
+                    </a:ext>
+                  </a:extLst>
+                </a:gridCol>
+                <a:gridCol w="1572768">
+                  <a:extLst>
+                    <a:ext uri="{9D8B030D-6E8A-4147-A177-3AD203B41FA5}">
+                      <a16:colId xmlns:a16="http://schemas.microsoft.com/office/drawing/2014/main" val="20003"/>
+                    </a:ext>
+                  </a:extLst>
+                </a:gridCol>
               </a:tblGrid>
               <a:tr h="231458">
                 <a:tc>
@@ -7721,7 +7914,7 @@
                     <a:bodyPr/>
                     <a:lstStyle/>
                     <a:p>
-                      <a:pPr indent="0" marL="0">
+                      <a:pPr marL="0" indent="0">
                         <a:buNone/>
                       </a:pPr>
                       <a:r>
@@ -7735,7 +7928,7 @@
                       <a:endParaRPr lang="en-US" sz="880" dirty="0"/>
                     </a:p>
                   </a:txBody>
-                  <a:tcPr marL="91440" marR="91440" marT="45720" marB="45720">
+                  <a:tcPr>
                     <a:lnL w="6350" cap="flat" cmpd="sng" algn="ctr">
                       <a:solidFill>
                         <a:srgbClr val="CBD5E1"/>
@@ -7782,7 +7975,7 @@
                     <a:bodyPr/>
                     <a:lstStyle/>
                     <a:p>
-                      <a:pPr indent="0" marL="0">
+                      <a:pPr marL="0" indent="0">
                         <a:buNone/>
                       </a:pPr>
                       <a:r>
@@ -7796,7 +7989,7 @@
                       <a:endParaRPr lang="en-US" sz="880" dirty="0"/>
                     </a:p>
                   </a:txBody>
-                  <a:tcPr marL="91440" marR="91440" marT="45720" marB="45720">
+                  <a:tcPr>
                     <a:lnL w="6350" cap="flat" cmpd="sng" algn="ctr">
                       <a:solidFill>
                         <a:srgbClr val="CBD5E1"/>
@@ -7843,7 +8036,7 @@
                     <a:bodyPr/>
                     <a:lstStyle/>
                     <a:p>
-                      <a:pPr indent="0" marL="0">
+                      <a:pPr marL="0" indent="0">
                         <a:buNone/>
                       </a:pPr>
                       <a:r>
@@ -7857,7 +8050,7 @@
                       <a:endParaRPr lang="en-US" sz="880" dirty="0"/>
                     </a:p>
                   </a:txBody>
-                  <a:tcPr marL="91440" marR="91440" marT="45720" marB="45720">
+                  <a:tcPr>
                     <a:lnL w="6350" cap="flat" cmpd="sng" algn="ctr">
                       <a:solidFill>
                         <a:srgbClr val="CBD5E1"/>
@@ -7904,7 +8097,7 @@
                     <a:bodyPr/>
                     <a:lstStyle/>
                     <a:p>
-                      <a:pPr indent="0" marL="0">
+                      <a:pPr marL="0" indent="0">
                         <a:buNone/>
                       </a:pPr>
                       <a:r>
@@ -7918,7 +8111,7 @@
                       <a:endParaRPr lang="en-US" sz="880" dirty="0"/>
                     </a:p>
                   </a:txBody>
-                  <a:tcPr marL="91440" marR="91440" marT="45720" marB="45720">
+                  <a:tcPr>
                     <a:lnL w="6350" cap="flat" cmpd="sng" algn="ctr">
                       <a:solidFill>
                         <a:srgbClr val="CBD5E1"/>
@@ -7960,6 +8153,11 @@
                     </a:solidFill>
                   </a:tcPr>
                 </a:tc>
+                <a:extLst>
+                  <a:ext uri="{0D108BD9-81ED-4DB2-BD59-A6C34878D82A}">
+                    <a16:rowId xmlns:a16="http://schemas.microsoft.com/office/drawing/2014/main" val="10000"/>
+                  </a:ext>
+                </a:extLst>
               </a:tr>
               <a:tr h="231458">
                 <a:tc>
@@ -7967,7 +8165,7 @@
                     <a:bodyPr/>
                     <a:lstStyle/>
                     <a:p>
-                      <a:pPr indent="0" marL="0">
+                      <a:pPr marL="0" indent="0">
                         <a:buNone/>
                       </a:pPr>
                       <a:r>
@@ -7981,7 +8179,7 @@
                       <a:endParaRPr lang="en-US" sz="880" dirty="0"/>
                     </a:p>
                   </a:txBody>
-                  <a:tcPr marL="91440" marR="91440" marT="45720" marB="45720">
+                  <a:tcPr>
                     <a:lnL w="6350" cap="flat" cmpd="sng" algn="ctr">
                       <a:solidFill>
                         <a:srgbClr val="CBD5E1"/>
@@ -8028,7 +8226,7 @@
                     <a:bodyPr/>
                     <a:lstStyle/>
                     <a:p>
-                      <a:pPr indent="0" marL="0">
+                      <a:pPr marL="0" indent="0">
                         <a:buNone/>
                       </a:pPr>
                       <a:r>
@@ -8042,7 +8240,7 @@
                       <a:endParaRPr lang="en-US" sz="880" dirty="0"/>
                     </a:p>
                   </a:txBody>
-                  <a:tcPr marL="91440" marR="91440" marT="45720" marB="45720">
+                  <a:tcPr>
                     <a:lnL w="6350" cap="flat" cmpd="sng" algn="ctr">
                       <a:solidFill>
                         <a:srgbClr val="CBD5E1"/>
@@ -8089,7 +8287,7 @@
                     <a:bodyPr/>
                     <a:lstStyle/>
                     <a:p>
-                      <a:pPr indent="0" marL="0">
+                      <a:pPr marL="0" indent="0">
                         <a:buNone/>
                       </a:pPr>
                       <a:r>
@@ -8103,7 +8301,7 @@
                       <a:endParaRPr lang="en-US" sz="880" dirty="0"/>
                     </a:p>
                   </a:txBody>
-                  <a:tcPr marL="91440" marR="91440" marT="45720" marB="45720">
+                  <a:tcPr>
                     <a:lnL w="6350" cap="flat" cmpd="sng" algn="ctr">
                       <a:solidFill>
                         <a:srgbClr val="CBD5E1"/>
@@ -8150,7 +8348,7 @@
                     <a:bodyPr/>
                     <a:lstStyle/>
                     <a:p>
-                      <a:pPr indent="0" marL="0">
+                      <a:pPr marL="0" indent="0">
                         <a:buNone/>
                       </a:pPr>
                       <a:r>
@@ -8164,7 +8362,7 @@
                       <a:endParaRPr lang="en-US" sz="880" dirty="0"/>
                     </a:p>
                   </a:txBody>
-                  <a:tcPr marL="91440" marR="91440" marT="45720" marB="45720">
+                  <a:tcPr>
                     <a:lnL w="6350" cap="flat" cmpd="sng" algn="ctr">
                       <a:solidFill>
                         <a:srgbClr val="CBD5E1"/>
@@ -8206,6 +8404,11 @@
                     </a:solidFill>
                   </a:tcPr>
                 </a:tc>
+                <a:extLst>
+                  <a:ext uri="{0D108BD9-81ED-4DB2-BD59-A6C34878D82A}">
+                    <a16:rowId xmlns:a16="http://schemas.microsoft.com/office/drawing/2014/main" val="10001"/>
+                  </a:ext>
+                </a:extLst>
               </a:tr>
               <a:tr h="231458">
                 <a:tc>
@@ -8213,7 +8416,7 @@
                     <a:bodyPr/>
                     <a:lstStyle/>
                     <a:p>
-                      <a:pPr indent="0" marL="0">
+                      <a:pPr marL="0" indent="0">
                         <a:buNone/>
                       </a:pPr>
                       <a:r>
@@ -8227,7 +8430,7 @@
                       <a:endParaRPr lang="en-US" sz="880" dirty="0"/>
                     </a:p>
                   </a:txBody>
-                  <a:tcPr marL="91440" marR="91440" marT="45720" marB="45720">
+                  <a:tcPr>
                     <a:lnL w="6350" cap="flat" cmpd="sng" algn="ctr">
                       <a:solidFill>
                         <a:srgbClr val="CBD5E1"/>
@@ -8274,7 +8477,7 @@
                     <a:bodyPr/>
                     <a:lstStyle/>
                     <a:p>
-                      <a:pPr indent="0" marL="0">
+                      <a:pPr marL="0" indent="0">
                         <a:buNone/>
                       </a:pPr>
                       <a:r>
@@ -8288,7 +8491,7 @@
                       <a:endParaRPr lang="en-US" sz="880" dirty="0"/>
                     </a:p>
                   </a:txBody>
-                  <a:tcPr marL="91440" marR="91440" marT="45720" marB="45720">
+                  <a:tcPr>
                     <a:lnL w="6350" cap="flat" cmpd="sng" algn="ctr">
                       <a:solidFill>
                         <a:srgbClr val="CBD5E1"/>
@@ -8335,7 +8538,7 @@
                     <a:bodyPr/>
                     <a:lstStyle/>
                     <a:p>
-                      <a:pPr indent="0" marL="0">
+                      <a:pPr marL="0" indent="0">
                         <a:buNone/>
                       </a:pPr>
                       <a:r>
@@ -8349,7 +8552,7 @@
                       <a:endParaRPr lang="en-US" sz="880" dirty="0"/>
                     </a:p>
                   </a:txBody>
-                  <a:tcPr marL="91440" marR="91440" marT="45720" marB="45720">
+                  <a:tcPr>
                     <a:lnL w="6350" cap="flat" cmpd="sng" algn="ctr">
                       <a:solidFill>
                         <a:srgbClr val="CBD5E1"/>
@@ -8396,7 +8599,7 @@
                     <a:bodyPr/>
                     <a:lstStyle/>
                     <a:p>
-                      <a:pPr indent="0" marL="0">
+                      <a:pPr marL="0" indent="0">
                         <a:buNone/>
                       </a:pPr>
                       <a:r>
@@ -8410,7 +8613,7 @@
                       <a:endParaRPr lang="en-US" sz="880" dirty="0"/>
                     </a:p>
                   </a:txBody>
-                  <a:tcPr marL="91440" marR="91440" marT="45720" marB="45720">
+                  <a:tcPr>
                     <a:lnL w="6350" cap="flat" cmpd="sng" algn="ctr">
                       <a:solidFill>
                         <a:srgbClr val="CBD5E1"/>
@@ -8452,6 +8655,11 @@
                     </a:solidFill>
                   </a:tcPr>
                 </a:tc>
+                <a:extLst>
+                  <a:ext uri="{0D108BD9-81ED-4DB2-BD59-A6C34878D82A}">
+                    <a16:rowId xmlns:a16="http://schemas.microsoft.com/office/drawing/2014/main" val="10002"/>
+                  </a:ext>
+                </a:extLst>
               </a:tr>
               <a:tr h="231458">
                 <a:tc>
@@ -8459,7 +8667,7 @@
                     <a:bodyPr/>
                     <a:lstStyle/>
                     <a:p>
-                      <a:pPr indent="0" marL="0">
+                      <a:pPr marL="0" indent="0">
                         <a:buNone/>
                       </a:pPr>
                       <a:r>
@@ -8473,7 +8681,7 @@
                       <a:endParaRPr lang="en-US" sz="880" dirty="0"/>
                     </a:p>
                   </a:txBody>
-                  <a:tcPr marL="91440" marR="91440" marT="45720" marB="45720">
+                  <a:tcPr>
                     <a:lnL w="6350" cap="flat" cmpd="sng" algn="ctr">
                       <a:solidFill>
                         <a:srgbClr val="CBD5E1"/>
@@ -8520,7 +8728,7 @@
                     <a:bodyPr/>
                     <a:lstStyle/>
                     <a:p>
-                      <a:pPr indent="0" marL="0">
+                      <a:pPr marL="0" indent="0">
                         <a:buNone/>
                       </a:pPr>
                       <a:r>
@@ -8534,7 +8742,7 @@
                       <a:endParaRPr lang="en-US" sz="880" dirty="0"/>
                     </a:p>
                   </a:txBody>
-                  <a:tcPr marL="91440" marR="91440" marT="45720" marB="45720">
+                  <a:tcPr>
                     <a:lnL w="6350" cap="flat" cmpd="sng" algn="ctr">
                       <a:solidFill>
                         <a:srgbClr val="CBD5E1"/>
@@ -8581,7 +8789,7 @@
                     <a:bodyPr/>
                     <a:lstStyle/>
                     <a:p>
-                      <a:pPr indent="0" marL="0">
+                      <a:pPr marL="0" indent="0">
                         <a:buNone/>
                       </a:pPr>
                       <a:r>
@@ -8595,7 +8803,7 @@
                       <a:endParaRPr lang="en-US" sz="880" dirty="0"/>
                     </a:p>
                   </a:txBody>
-                  <a:tcPr marL="91440" marR="91440" marT="45720" marB="45720">
+                  <a:tcPr>
                     <a:lnL w="6350" cap="flat" cmpd="sng" algn="ctr">
                       <a:solidFill>
                         <a:srgbClr val="CBD5E1"/>
@@ -8642,7 +8850,7 @@
                     <a:bodyPr/>
                     <a:lstStyle/>
                     <a:p>
-                      <a:pPr indent="0" marL="0">
+                      <a:pPr marL="0" indent="0">
                         <a:buNone/>
                       </a:pPr>
                       <a:r>
@@ -8656,7 +8864,7 @@
                       <a:endParaRPr lang="en-US" sz="880" dirty="0"/>
                     </a:p>
                   </a:txBody>
-                  <a:tcPr marL="91440" marR="91440" marT="45720" marB="45720">
+                  <a:tcPr>
                     <a:lnL w="6350" cap="flat" cmpd="sng" algn="ctr">
                       <a:solidFill>
                         <a:srgbClr val="CBD5E1"/>
@@ -8698,6 +8906,11 @@
                     </a:solidFill>
                   </a:tcPr>
                 </a:tc>
+                <a:extLst>
+                  <a:ext uri="{0D108BD9-81ED-4DB2-BD59-A6C34878D82A}">
+                    <a16:rowId xmlns:a16="http://schemas.microsoft.com/office/drawing/2014/main" val="10003"/>
+                  </a:ext>
+                </a:extLst>
               </a:tr>
               <a:tr h="231458">
                 <a:tc>
@@ -8705,7 +8918,7 @@
                     <a:bodyPr/>
                     <a:lstStyle/>
                     <a:p>
-                      <a:pPr indent="0" marL="0">
+                      <a:pPr marL="0" indent="0">
                         <a:buNone/>
                       </a:pPr>
                       <a:r>
@@ -8719,7 +8932,7 @@
                       <a:endParaRPr lang="en-US" sz="880" dirty="0"/>
                     </a:p>
                   </a:txBody>
-                  <a:tcPr marL="91440" marR="91440" marT="45720" marB="45720">
+                  <a:tcPr>
                     <a:lnL w="6350" cap="flat" cmpd="sng" algn="ctr">
                       <a:solidFill>
                         <a:srgbClr val="CBD5E1"/>
@@ -8766,7 +8979,7 @@
                     <a:bodyPr/>
                     <a:lstStyle/>
                     <a:p>
-                      <a:pPr indent="0" marL="0">
+                      <a:pPr marL="0" indent="0">
                         <a:buNone/>
                       </a:pPr>
                       <a:r>
@@ -8780,7 +8993,7 @@
                       <a:endParaRPr lang="en-US" sz="880" dirty="0"/>
                     </a:p>
                   </a:txBody>
-                  <a:tcPr marL="91440" marR="91440" marT="45720" marB="45720">
+                  <a:tcPr>
                     <a:lnL w="6350" cap="flat" cmpd="sng" algn="ctr">
                       <a:solidFill>
                         <a:srgbClr val="CBD5E1"/>
@@ -8827,7 +9040,7 @@
                     <a:bodyPr/>
                     <a:lstStyle/>
                     <a:p>
-                      <a:pPr indent="0" marL="0">
+                      <a:pPr marL="0" indent="0">
                         <a:buNone/>
                       </a:pPr>
                       <a:r>
@@ -8841,7 +9054,7 @@
                       <a:endParaRPr lang="en-US" sz="880" dirty="0"/>
                     </a:p>
                   </a:txBody>
-                  <a:tcPr marL="91440" marR="91440" marT="45720" marB="45720">
+                  <a:tcPr>
                     <a:lnL w="6350" cap="flat" cmpd="sng" algn="ctr">
                       <a:solidFill>
                         <a:srgbClr val="CBD5E1"/>
@@ -8888,7 +9101,7 @@
                     <a:bodyPr/>
                     <a:lstStyle/>
                     <a:p>
-                      <a:pPr indent="0" marL="0">
+                      <a:pPr marL="0" indent="0">
                         <a:buNone/>
                       </a:pPr>
                       <a:r>
@@ -8902,7 +9115,7 @@
                       <a:endParaRPr lang="en-US" sz="880" dirty="0"/>
                     </a:p>
                   </a:txBody>
-                  <a:tcPr marL="91440" marR="91440" marT="45720" marB="45720">
+                  <a:tcPr>
                     <a:lnL w="6350" cap="flat" cmpd="sng" algn="ctr">
                       <a:solidFill>
                         <a:srgbClr val="CBD5E1"/>
@@ -8944,6 +9157,11 @@
                     </a:solidFill>
                   </a:tcPr>
                 </a:tc>
+                <a:extLst>
+                  <a:ext uri="{0D108BD9-81ED-4DB2-BD59-A6C34878D82A}">
+                    <a16:rowId xmlns:a16="http://schemas.microsoft.com/office/drawing/2014/main" val="10004"/>
+                  </a:ext>
+                </a:extLst>
               </a:tr>
               <a:tr h="231458">
                 <a:tc>
@@ -8951,7 +9169,7 @@
                     <a:bodyPr/>
                     <a:lstStyle/>
                     <a:p>
-                      <a:pPr indent="0" marL="0">
+                      <a:pPr marL="0" indent="0">
                         <a:buNone/>
                       </a:pPr>
                       <a:r>
@@ -8965,7 +9183,7 @@
                       <a:endParaRPr lang="en-US" sz="880" dirty="0"/>
                     </a:p>
                   </a:txBody>
-                  <a:tcPr marL="91440" marR="91440" marT="45720" marB="45720">
+                  <a:tcPr>
                     <a:lnL w="6350" cap="flat" cmpd="sng" algn="ctr">
                       <a:solidFill>
                         <a:srgbClr val="CBD5E1"/>
@@ -9012,7 +9230,7 @@
                     <a:bodyPr/>
                     <a:lstStyle/>
                     <a:p>
-                      <a:pPr indent="0" marL="0">
+                      <a:pPr marL="0" indent="0">
                         <a:buNone/>
                       </a:pPr>
                       <a:r>
@@ -9026,7 +9244,7 @@
                       <a:endParaRPr lang="en-US" sz="880" dirty="0"/>
                     </a:p>
                   </a:txBody>
-                  <a:tcPr marL="91440" marR="91440" marT="45720" marB="45720">
+                  <a:tcPr>
                     <a:lnL w="6350" cap="flat" cmpd="sng" algn="ctr">
                       <a:solidFill>
                         <a:srgbClr val="CBD5E1"/>
@@ -9073,7 +9291,7 @@
                     <a:bodyPr/>
                     <a:lstStyle/>
                     <a:p>
-                      <a:pPr indent="0" marL="0">
+                      <a:pPr marL="0" indent="0">
                         <a:buNone/>
                       </a:pPr>
                       <a:r>
@@ -9087,7 +9305,7 @@
                       <a:endParaRPr lang="en-US" sz="880" dirty="0"/>
                     </a:p>
                   </a:txBody>
-                  <a:tcPr marL="91440" marR="91440" marT="45720" marB="45720">
+                  <a:tcPr>
                     <a:lnL w="6350" cap="flat" cmpd="sng" algn="ctr">
                       <a:solidFill>
                         <a:srgbClr val="CBD5E1"/>
@@ -9134,7 +9352,7 @@
                     <a:bodyPr/>
                     <a:lstStyle/>
                     <a:p>
-                      <a:pPr indent="0" marL="0">
+                      <a:pPr marL="0" indent="0">
                         <a:buNone/>
                       </a:pPr>
                       <a:r>
@@ -9148,7 +9366,7 @@
                       <a:endParaRPr lang="en-US" sz="880" dirty="0"/>
                     </a:p>
                   </a:txBody>
-                  <a:tcPr marL="91440" marR="91440" marT="45720" marB="45720">
+                  <a:tcPr>
                     <a:lnL w="6350" cap="flat" cmpd="sng" algn="ctr">
                       <a:solidFill>
                         <a:srgbClr val="CBD5E1"/>
@@ -9190,6 +9408,11 @@
                     </a:solidFill>
                   </a:tcPr>
                 </a:tc>
+                <a:extLst>
+                  <a:ext uri="{0D108BD9-81ED-4DB2-BD59-A6C34878D82A}">
+                    <a16:rowId xmlns:a16="http://schemas.microsoft.com/office/drawing/2014/main" val="10005"/>
+                  </a:ext>
+                </a:extLst>
               </a:tr>
               <a:tr h="231458">
                 <a:tc>
@@ -9197,7 +9420,7 @@
                     <a:bodyPr/>
                     <a:lstStyle/>
                     <a:p>
-                      <a:pPr indent="0" marL="0">
+                      <a:pPr marL="0" indent="0">
                         <a:buNone/>
                       </a:pPr>
                       <a:r>
@@ -9211,7 +9434,7 @@
                       <a:endParaRPr lang="en-US" sz="880" dirty="0"/>
                     </a:p>
                   </a:txBody>
-                  <a:tcPr marL="91440" marR="91440" marT="45720" marB="45720">
+                  <a:tcPr>
                     <a:lnL w="6350" cap="flat" cmpd="sng" algn="ctr">
                       <a:solidFill>
                         <a:srgbClr val="CBD5E1"/>
@@ -9258,7 +9481,7 @@
                     <a:bodyPr/>
                     <a:lstStyle/>
                     <a:p>
-                      <a:pPr indent="0" marL="0">
+                      <a:pPr marL="0" indent="0">
                         <a:buNone/>
                       </a:pPr>
                       <a:r>
@@ -9272,7 +9495,7 @@
                       <a:endParaRPr lang="en-US" sz="880" dirty="0"/>
                     </a:p>
                   </a:txBody>
-                  <a:tcPr marL="91440" marR="91440" marT="45720" marB="45720">
+                  <a:tcPr>
                     <a:lnL w="6350" cap="flat" cmpd="sng" algn="ctr">
                       <a:solidFill>
                         <a:srgbClr val="CBD5E1"/>
@@ -9319,7 +9542,7 @@
                     <a:bodyPr/>
                     <a:lstStyle/>
                     <a:p>
-                      <a:pPr indent="0" marL="0">
+                      <a:pPr marL="0" indent="0">
                         <a:buNone/>
                       </a:pPr>
                       <a:r>
@@ -9333,7 +9556,7 @@
                       <a:endParaRPr lang="en-US" sz="880" dirty="0"/>
                     </a:p>
                   </a:txBody>
-                  <a:tcPr marL="91440" marR="91440" marT="45720" marB="45720">
+                  <a:tcPr>
                     <a:lnL w="6350" cap="flat" cmpd="sng" algn="ctr">
                       <a:solidFill>
                         <a:srgbClr val="CBD5E1"/>
@@ -9380,7 +9603,7 @@
                     <a:bodyPr/>
                     <a:lstStyle/>
                     <a:p>
-                      <a:pPr indent="0" marL="0">
+                      <a:pPr marL="0" indent="0">
                         <a:buNone/>
                       </a:pPr>
                       <a:r>
@@ -9394,7 +9617,7 @@
                       <a:endParaRPr lang="en-US" sz="880" dirty="0"/>
                     </a:p>
                   </a:txBody>
-                  <a:tcPr marL="91440" marR="91440" marT="45720" marB="45720">
+                  <a:tcPr>
                     <a:lnL w="6350" cap="flat" cmpd="sng" algn="ctr">
                       <a:solidFill>
                         <a:srgbClr val="CBD5E1"/>
@@ -9436,6 +9659,11 @@
                     </a:solidFill>
                   </a:tcPr>
                 </a:tc>
+                <a:extLst>
+                  <a:ext uri="{0D108BD9-81ED-4DB2-BD59-A6C34878D82A}">
+                    <a16:rowId xmlns:a16="http://schemas.microsoft.com/office/drawing/2014/main" val="10006"/>
+                  </a:ext>
+                </a:extLst>
               </a:tr>
               <a:tr h="231458">
                 <a:tc>
@@ -9443,7 +9671,7 @@
                     <a:bodyPr/>
                     <a:lstStyle/>
                     <a:p>
-                      <a:pPr indent="0" marL="0">
+                      <a:pPr marL="0" indent="0">
                         <a:buNone/>
                       </a:pPr>
                       <a:r>
@@ -9457,7 +9685,7 @@
                       <a:endParaRPr lang="en-US" sz="880" dirty="0"/>
                     </a:p>
                   </a:txBody>
-                  <a:tcPr marL="91440" marR="91440" marT="45720" marB="45720">
+                  <a:tcPr>
                     <a:lnL w="6350" cap="flat" cmpd="sng" algn="ctr">
                       <a:solidFill>
                         <a:srgbClr val="CBD5E1"/>
@@ -9504,7 +9732,7 @@
                     <a:bodyPr/>
                     <a:lstStyle/>
                     <a:p>
-                      <a:pPr indent="0" marL="0">
+                      <a:pPr marL="0" indent="0">
                         <a:buNone/>
                       </a:pPr>
                       <a:r>
@@ -9518,7 +9746,7 @@
                       <a:endParaRPr lang="en-US" sz="880" dirty="0"/>
                     </a:p>
                   </a:txBody>
-                  <a:tcPr marL="91440" marR="91440" marT="45720" marB="45720">
+                  <a:tcPr>
                     <a:lnL w="6350" cap="flat" cmpd="sng" algn="ctr">
                       <a:solidFill>
                         <a:srgbClr val="CBD5E1"/>
@@ -9565,7 +9793,7 @@
                     <a:bodyPr/>
                     <a:lstStyle/>
                     <a:p>
-                      <a:pPr indent="0" marL="0">
+                      <a:pPr marL="0" indent="0">
                         <a:buNone/>
                       </a:pPr>
                       <a:r>
@@ -9579,7 +9807,7 @@
                       <a:endParaRPr lang="en-US" sz="880" dirty="0"/>
                     </a:p>
                   </a:txBody>
-                  <a:tcPr marL="91440" marR="91440" marT="45720" marB="45720">
+                  <a:tcPr>
                     <a:lnL w="6350" cap="flat" cmpd="sng" algn="ctr">
                       <a:solidFill>
                         <a:srgbClr val="CBD5E1"/>
@@ -9626,7 +9854,7 @@
                     <a:bodyPr/>
                     <a:lstStyle/>
                     <a:p>
-                      <a:pPr indent="0" marL="0">
+                      <a:pPr marL="0" indent="0">
                         <a:buNone/>
                       </a:pPr>
                       <a:r>
@@ -9640,7 +9868,7 @@
                       <a:endParaRPr lang="en-US" sz="880" dirty="0"/>
                     </a:p>
                   </a:txBody>
-                  <a:tcPr marL="91440" marR="91440" marT="45720" marB="45720">
+                  <a:tcPr>
                     <a:lnL w="6350" cap="flat" cmpd="sng" algn="ctr">
                       <a:solidFill>
                         <a:srgbClr val="CBD5E1"/>
@@ -9682,6 +9910,11 @@
                     </a:solidFill>
                   </a:tcPr>
                 </a:tc>
+                <a:extLst>
+                  <a:ext uri="{0D108BD9-81ED-4DB2-BD59-A6C34878D82A}">
+                    <a16:rowId xmlns:a16="http://schemas.microsoft.com/office/drawing/2014/main" val="10007"/>
+                  </a:ext>
+                </a:extLst>
               </a:tr>
               <a:tr h="231458">
                 <a:tc>
@@ -9689,7 +9922,7 @@
                     <a:bodyPr/>
                     <a:lstStyle/>
                     <a:p>
-                      <a:pPr indent="0" marL="0">
+                      <a:pPr marL="0" indent="0">
                         <a:buNone/>
                       </a:pPr>
                       <a:r>
@@ -9703,7 +9936,7 @@
                       <a:endParaRPr lang="en-US" sz="880" dirty="0"/>
                     </a:p>
                   </a:txBody>
-                  <a:tcPr marL="91440" marR="91440" marT="45720" marB="45720">
+                  <a:tcPr>
                     <a:lnL w="6350" cap="flat" cmpd="sng" algn="ctr">
                       <a:solidFill>
                         <a:srgbClr val="CBD5E1"/>
@@ -9750,7 +9983,7 @@
                     <a:bodyPr/>
                     <a:lstStyle/>
                     <a:p>
-                      <a:pPr indent="0" marL="0">
+                      <a:pPr marL="0" indent="0">
                         <a:buNone/>
                       </a:pPr>
                       <a:r>
@@ -9764,7 +9997,7 @@
                       <a:endParaRPr lang="en-US" sz="880" dirty="0"/>
                     </a:p>
                   </a:txBody>
-                  <a:tcPr marL="91440" marR="91440" marT="45720" marB="45720">
+                  <a:tcPr>
                     <a:lnL w="6350" cap="flat" cmpd="sng" algn="ctr">
                       <a:solidFill>
                         <a:srgbClr val="CBD5E1"/>
@@ -9811,7 +10044,7 @@
                     <a:bodyPr/>
                     <a:lstStyle/>
                     <a:p>
-                      <a:pPr indent="0" marL="0">
+                      <a:pPr marL="0" indent="0">
                         <a:buNone/>
                       </a:pPr>
                       <a:r>
@@ -9825,7 +10058,7 @@
                       <a:endParaRPr lang="en-US" sz="880" dirty="0"/>
                     </a:p>
                   </a:txBody>
-                  <a:tcPr marL="91440" marR="91440" marT="45720" marB="45720">
+                  <a:tcPr>
                     <a:lnL w="6350" cap="flat" cmpd="sng" algn="ctr">
                       <a:solidFill>
                         <a:srgbClr val="CBD5E1"/>
@@ -9872,7 +10105,7 @@
                     <a:bodyPr/>
                     <a:lstStyle/>
                     <a:p>
-                      <a:pPr indent="0" marL="0">
+                      <a:pPr marL="0" indent="0">
                         <a:buNone/>
                       </a:pPr>
                       <a:r>
@@ -9886,7 +10119,7 @@
                       <a:endParaRPr lang="en-US" sz="880" dirty="0"/>
                     </a:p>
                   </a:txBody>
-                  <a:tcPr marL="91440" marR="91440" marT="45720" marB="45720">
+                  <a:tcPr>
                     <a:lnL w="6350" cap="flat" cmpd="sng" algn="ctr">
                       <a:solidFill>
                         <a:srgbClr val="CBD5E1"/>
@@ -9928,6 +10161,11 @@
                     </a:solidFill>
                   </a:tcPr>
                 </a:tc>
+                <a:extLst>
+                  <a:ext uri="{0D108BD9-81ED-4DB2-BD59-A6C34878D82A}">
+                    <a16:rowId xmlns:a16="http://schemas.microsoft.com/office/drawing/2014/main" val="10008"/>
+                  </a:ext>
+                </a:extLst>
               </a:tr>
               <a:tr h="231458">
                 <a:tc>
@@ -9935,7 +10173,7 @@
                     <a:bodyPr/>
                     <a:lstStyle/>
                     <a:p>
-                      <a:pPr indent="0" marL="0">
+                      <a:pPr marL="0" indent="0">
                         <a:buNone/>
                       </a:pPr>
                       <a:r>
@@ -9949,7 +10187,7 @@
                       <a:endParaRPr lang="en-US" sz="880" dirty="0"/>
                     </a:p>
                   </a:txBody>
-                  <a:tcPr marL="91440" marR="91440" marT="45720" marB="45720">
+                  <a:tcPr>
                     <a:lnL w="6350" cap="flat" cmpd="sng" algn="ctr">
                       <a:solidFill>
                         <a:srgbClr val="CBD5E1"/>
@@ -9996,7 +10234,7 @@
                     <a:bodyPr/>
                     <a:lstStyle/>
                     <a:p>
-                      <a:pPr indent="0" marL="0">
+                      <a:pPr marL="0" indent="0">
                         <a:buNone/>
                       </a:pPr>
                       <a:r>
@@ -10010,7 +10248,7 @@
                       <a:endParaRPr lang="en-US" sz="880" dirty="0"/>
                     </a:p>
                   </a:txBody>
-                  <a:tcPr marL="91440" marR="91440" marT="45720" marB="45720">
+                  <a:tcPr>
                     <a:lnL w="6350" cap="flat" cmpd="sng" algn="ctr">
                       <a:solidFill>
                         <a:srgbClr val="CBD5E1"/>
@@ -10057,7 +10295,7 @@
                     <a:bodyPr/>
                     <a:lstStyle/>
                     <a:p>
-                      <a:pPr indent="0" marL="0">
+                      <a:pPr marL="0" indent="0">
                         <a:buNone/>
                       </a:pPr>
                       <a:r>
@@ -10071,7 +10309,7 @@
                       <a:endParaRPr lang="en-US" sz="880" dirty="0"/>
                     </a:p>
                   </a:txBody>
-                  <a:tcPr marL="91440" marR="91440" marT="45720" marB="45720">
+                  <a:tcPr>
                     <a:lnL w="6350" cap="flat" cmpd="sng" algn="ctr">
                       <a:solidFill>
                         <a:srgbClr val="CBD5E1"/>
@@ -10118,7 +10356,7 @@
                     <a:bodyPr/>
                     <a:lstStyle/>
                     <a:p>
-                      <a:pPr indent="0" marL="0">
+                      <a:pPr marL="0" indent="0">
                         <a:buNone/>
                       </a:pPr>
                       <a:r>
@@ -10132,7 +10370,7 @@
                       <a:endParaRPr lang="en-US" sz="880" dirty="0"/>
                     </a:p>
                   </a:txBody>
-                  <a:tcPr marL="91440" marR="91440" marT="45720" marB="45720">
+                  <a:tcPr>
                     <a:lnL w="6350" cap="flat" cmpd="sng" algn="ctr">
                       <a:solidFill>
                         <a:srgbClr val="CBD5E1"/>
@@ -10174,6 +10412,11 @@
                     </a:solidFill>
                   </a:tcPr>
                 </a:tc>
+                <a:extLst>
+                  <a:ext uri="{0D108BD9-81ED-4DB2-BD59-A6C34878D82A}">
+                    <a16:rowId xmlns:a16="http://schemas.microsoft.com/office/drawing/2014/main" val="10009"/>
+                  </a:ext>
+                </a:extLst>
               </a:tr>
               <a:tr h="231458">
                 <a:tc>
@@ -10181,7 +10424,7 @@
                     <a:bodyPr/>
                     <a:lstStyle/>
                     <a:p>
-                      <a:pPr indent="0" marL="0">
+                      <a:pPr marL="0" indent="0">
                         <a:buNone/>
                       </a:pPr>
                       <a:r>
@@ -10195,7 +10438,7 @@
                       <a:endParaRPr lang="en-US" sz="880" dirty="0"/>
                     </a:p>
                   </a:txBody>
-                  <a:tcPr marL="91440" marR="91440" marT="45720" marB="45720">
+                  <a:tcPr>
                     <a:lnL w="6350" cap="flat" cmpd="sng" algn="ctr">
                       <a:solidFill>
                         <a:srgbClr val="CBD5E1"/>
@@ -10242,7 +10485,7 @@
                     <a:bodyPr/>
                     <a:lstStyle/>
                     <a:p>
-                      <a:pPr indent="0" marL="0">
+                      <a:pPr marL="0" indent="0">
                         <a:buNone/>
                       </a:pPr>
                       <a:r>
@@ -10256,7 +10499,7 @@
                       <a:endParaRPr lang="en-US" sz="880" dirty="0"/>
                     </a:p>
                   </a:txBody>
-                  <a:tcPr marL="91440" marR="91440" marT="45720" marB="45720">
+                  <a:tcPr>
                     <a:lnL w="6350" cap="flat" cmpd="sng" algn="ctr">
                       <a:solidFill>
                         <a:srgbClr val="CBD5E1"/>
@@ -10303,7 +10546,7 @@
                     <a:bodyPr/>
                     <a:lstStyle/>
                     <a:p>
-                      <a:pPr indent="0" marL="0">
+                      <a:pPr marL="0" indent="0">
                         <a:buNone/>
                       </a:pPr>
                       <a:r>
@@ -10317,7 +10560,7 @@
                       <a:endParaRPr lang="en-US" sz="880" dirty="0"/>
                     </a:p>
                   </a:txBody>
-                  <a:tcPr marL="91440" marR="91440" marT="45720" marB="45720">
+                  <a:tcPr>
                     <a:lnL w="6350" cap="flat" cmpd="sng" algn="ctr">
                       <a:solidFill>
                         <a:srgbClr val="CBD5E1"/>
@@ -10364,7 +10607,7 @@
                     <a:bodyPr/>
                     <a:lstStyle/>
                     <a:p>
-                      <a:pPr indent="0" marL="0">
+                      <a:pPr marL="0" indent="0">
                         <a:buNone/>
                       </a:pPr>
                       <a:r>
@@ -10378,7 +10621,7 @@
                       <a:endParaRPr lang="en-US" sz="880" dirty="0"/>
                     </a:p>
                   </a:txBody>
-                  <a:tcPr marL="91440" marR="91440" marT="45720" marB="45720">
+                  <a:tcPr>
                     <a:lnL w="6350" cap="flat" cmpd="sng" algn="ctr">
                       <a:solidFill>
                         <a:srgbClr val="CBD5E1"/>
@@ -10420,6 +10663,11 @@
                     </a:solidFill>
                   </a:tcPr>
                 </a:tc>
+                <a:extLst>
+                  <a:ext uri="{0D108BD9-81ED-4DB2-BD59-A6C34878D82A}">
+                    <a16:rowId xmlns:a16="http://schemas.microsoft.com/office/drawing/2014/main" val="10010"/>
+                  </a:ext>
+                </a:extLst>
               </a:tr>
               <a:tr h="231458">
                 <a:tc>
@@ -10427,7 +10675,7 @@
                     <a:bodyPr/>
                     <a:lstStyle/>
                     <a:p>
-                      <a:pPr indent="0" marL="0">
+                      <a:pPr marL="0" indent="0">
                         <a:buNone/>
                       </a:pPr>
                       <a:r>
@@ -10441,7 +10689,7 @@
                       <a:endParaRPr lang="en-US" sz="880" dirty="0"/>
                     </a:p>
                   </a:txBody>
-                  <a:tcPr marL="91440" marR="91440" marT="45720" marB="45720">
+                  <a:tcPr>
                     <a:lnL w="6350" cap="flat" cmpd="sng" algn="ctr">
                       <a:solidFill>
                         <a:srgbClr val="CBD5E1"/>
@@ -10488,7 +10736,7 @@
                     <a:bodyPr/>
                     <a:lstStyle/>
                     <a:p>
-                      <a:pPr indent="0" marL="0">
+                      <a:pPr marL="0" indent="0">
                         <a:buNone/>
                       </a:pPr>
                       <a:r>
@@ -10502,7 +10750,7 @@
                       <a:endParaRPr lang="en-US" sz="880" dirty="0"/>
                     </a:p>
                   </a:txBody>
-                  <a:tcPr marL="91440" marR="91440" marT="45720" marB="45720">
+                  <a:tcPr>
                     <a:lnL w="6350" cap="flat" cmpd="sng" algn="ctr">
                       <a:solidFill>
                         <a:srgbClr val="CBD5E1"/>
@@ -10549,7 +10797,7 @@
                     <a:bodyPr/>
                     <a:lstStyle/>
                     <a:p>
-                      <a:pPr indent="0" marL="0">
+                      <a:pPr marL="0" indent="0">
                         <a:buNone/>
                       </a:pPr>
                       <a:r>
@@ -10563,7 +10811,7 @@
                       <a:endParaRPr lang="en-US" sz="880" dirty="0"/>
                     </a:p>
                   </a:txBody>
-                  <a:tcPr marL="91440" marR="91440" marT="45720" marB="45720">
+                  <a:tcPr>
                     <a:lnL w="6350" cap="flat" cmpd="sng" algn="ctr">
                       <a:solidFill>
                         <a:srgbClr val="CBD5E1"/>
@@ -10610,7 +10858,7 @@
                     <a:bodyPr/>
                     <a:lstStyle/>
                     <a:p>
-                      <a:pPr indent="0" marL="0">
+                      <a:pPr marL="0" indent="0">
                         <a:buNone/>
                       </a:pPr>
                       <a:r>
@@ -10624,7 +10872,7 @@
                       <a:endParaRPr lang="en-US" sz="880" dirty="0"/>
                     </a:p>
                   </a:txBody>
-                  <a:tcPr marL="91440" marR="91440" marT="45720" marB="45720">
+                  <a:tcPr>
                     <a:lnL w="6350" cap="flat" cmpd="sng" algn="ctr">
                       <a:solidFill>
                         <a:srgbClr val="CBD5E1"/>
@@ -10666,6 +10914,11 @@
                     </a:solidFill>
                   </a:tcPr>
                 </a:tc>
+                <a:extLst>
+                  <a:ext uri="{0D108BD9-81ED-4DB2-BD59-A6C34878D82A}">
+                    <a16:rowId xmlns:a16="http://schemas.microsoft.com/office/drawing/2014/main" val="10011"/>
+                  </a:ext>
+                </a:extLst>
               </a:tr>
               <a:tr h="231458">
                 <a:tc>
@@ -10673,7 +10926,7 @@
                     <a:bodyPr/>
                     <a:lstStyle/>
                     <a:p>
-                      <a:pPr indent="0" marL="0">
+                      <a:pPr marL="0" indent="0">
                         <a:buNone/>
                       </a:pPr>
                       <a:r>
@@ -10687,7 +10940,7 @@
                       <a:endParaRPr lang="en-US" sz="880" dirty="0"/>
                     </a:p>
                   </a:txBody>
-                  <a:tcPr marL="91440" marR="91440" marT="45720" marB="45720">
+                  <a:tcPr>
                     <a:lnL w="6350" cap="flat" cmpd="sng" algn="ctr">
                       <a:solidFill>
                         <a:srgbClr val="CBD5E1"/>
@@ -10734,7 +10987,7 @@
                     <a:bodyPr/>
                     <a:lstStyle/>
                     <a:p>
-                      <a:pPr indent="0" marL="0">
+                      <a:pPr marL="0" indent="0">
                         <a:buNone/>
                       </a:pPr>
                       <a:r>
@@ -10748,7 +11001,7 @@
                       <a:endParaRPr lang="en-US" sz="880" dirty="0"/>
                     </a:p>
                   </a:txBody>
-                  <a:tcPr marL="91440" marR="91440" marT="45720" marB="45720">
+                  <a:tcPr>
                     <a:lnL w="6350" cap="flat" cmpd="sng" algn="ctr">
                       <a:solidFill>
                         <a:srgbClr val="CBD5E1"/>
@@ -10795,7 +11048,7 @@
                     <a:bodyPr/>
                     <a:lstStyle/>
                     <a:p>
-                      <a:pPr indent="0" marL="0">
+                      <a:pPr marL="0" indent="0">
                         <a:buNone/>
                       </a:pPr>
                       <a:r>
@@ -10809,7 +11062,7 @@
                       <a:endParaRPr lang="en-US" sz="880" dirty="0"/>
                     </a:p>
                   </a:txBody>
-                  <a:tcPr marL="91440" marR="91440" marT="45720" marB="45720">
+                  <a:tcPr>
                     <a:lnL w="6350" cap="flat" cmpd="sng" algn="ctr">
                       <a:solidFill>
                         <a:srgbClr val="CBD5E1"/>
@@ -10856,7 +11109,7 @@
                     <a:bodyPr/>
                     <a:lstStyle/>
                     <a:p>
-                      <a:pPr indent="0" marL="0">
+                      <a:pPr marL="0" indent="0">
                         <a:buNone/>
                       </a:pPr>
                       <a:r>
@@ -10870,7 +11123,7 @@
                       <a:endParaRPr lang="en-US" sz="880" dirty="0"/>
                     </a:p>
                   </a:txBody>
-                  <a:tcPr marL="91440" marR="91440" marT="45720" marB="45720">
+                  <a:tcPr>
                     <a:lnL w="6350" cap="flat" cmpd="sng" algn="ctr">
                       <a:solidFill>
                         <a:srgbClr val="CBD5E1"/>
@@ -10912,6 +11165,11 @@
                     </a:solidFill>
                   </a:tcPr>
                 </a:tc>
+                <a:extLst>
+                  <a:ext uri="{0D108BD9-81ED-4DB2-BD59-A6C34878D82A}">
+                    <a16:rowId xmlns:a16="http://schemas.microsoft.com/office/drawing/2014/main" val="10012"/>
+                  </a:ext>
+                </a:extLst>
               </a:tr>
               <a:tr h="231458">
                 <a:tc>
@@ -10919,7 +11177,7 @@
                     <a:bodyPr/>
                     <a:lstStyle/>
                     <a:p>
-                      <a:pPr indent="0" marL="0">
+                      <a:pPr marL="0" indent="0">
                         <a:buNone/>
                       </a:pPr>
                       <a:r>
@@ -10933,7 +11191,7 @@
                       <a:endParaRPr lang="en-US" sz="880" dirty="0"/>
                     </a:p>
                   </a:txBody>
-                  <a:tcPr marL="91440" marR="91440" marT="45720" marB="45720">
+                  <a:tcPr>
                     <a:lnL w="6350" cap="flat" cmpd="sng" algn="ctr">
                       <a:solidFill>
                         <a:srgbClr val="CBD5E1"/>
@@ -10980,7 +11238,7 @@
                     <a:bodyPr/>
                     <a:lstStyle/>
                     <a:p>
-                      <a:pPr indent="0" marL="0">
+                      <a:pPr marL="0" indent="0">
                         <a:buNone/>
                       </a:pPr>
                       <a:r>
@@ -10994,7 +11252,7 @@
                       <a:endParaRPr lang="en-US" sz="880" dirty="0"/>
                     </a:p>
                   </a:txBody>
-                  <a:tcPr marL="91440" marR="91440" marT="45720" marB="45720">
+                  <a:tcPr>
                     <a:lnL w="6350" cap="flat" cmpd="sng" algn="ctr">
                       <a:solidFill>
                         <a:srgbClr val="CBD5E1"/>
@@ -11041,7 +11299,7 @@
                     <a:bodyPr/>
                     <a:lstStyle/>
                     <a:p>
-                      <a:pPr indent="0" marL="0">
+                      <a:pPr marL="0" indent="0">
                         <a:buNone/>
                       </a:pPr>
                       <a:r>
@@ -11055,7 +11313,7 @@
                       <a:endParaRPr lang="en-US" sz="880" dirty="0"/>
                     </a:p>
                   </a:txBody>
-                  <a:tcPr marL="91440" marR="91440" marT="45720" marB="45720">
+                  <a:tcPr>
                     <a:lnL w="6350" cap="flat" cmpd="sng" algn="ctr">
                       <a:solidFill>
                         <a:srgbClr val="CBD5E1"/>
@@ -11102,7 +11360,7 @@
                     <a:bodyPr/>
                     <a:lstStyle/>
                     <a:p>
-                      <a:pPr indent="0" marL="0">
+                      <a:pPr marL="0" indent="0">
                         <a:buNone/>
                       </a:pPr>
                       <a:r>
@@ -11116,7 +11374,7 @@
                       <a:endParaRPr lang="en-US" sz="880" dirty="0"/>
                     </a:p>
                   </a:txBody>
-                  <a:tcPr marL="91440" marR="91440" marT="45720" marB="45720">
+                  <a:tcPr>
                     <a:lnL w="6350" cap="flat" cmpd="sng" algn="ctr">
                       <a:solidFill>
                         <a:srgbClr val="CBD5E1"/>
@@ -11158,6 +11416,11 @@
                     </a:solidFill>
                   </a:tcPr>
                 </a:tc>
+                <a:extLst>
+                  <a:ext uri="{0D108BD9-81ED-4DB2-BD59-A6C34878D82A}">
+                    <a16:rowId xmlns:a16="http://schemas.microsoft.com/office/drawing/2014/main" val="10013"/>
+                  </a:ext>
+                </a:extLst>
               </a:tr>
               <a:tr h="231458">
                 <a:tc>
@@ -11165,7 +11428,7 @@
                     <a:bodyPr/>
                     <a:lstStyle/>
                     <a:p>
-                      <a:pPr indent="0" marL="0">
+                      <a:pPr marL="0" indent="0">
                         <a:buNone/>
                       </a:pPr>
                       <a:r>
@@ -11179,7 +11442,7 @@
                       <a:endParaRPr lang="en-US" sz="880" dirty="0"/>
                     </a:p>
                   </a:txBody>
-                  <a:tcPr marL="91440" marR="91440" marT="45720" marB="45720">
+                  <a:tcPr>
                     <a:lnL w="6350" cap="flat" cmpd="sng" algn="ctr">
                       <a:solidFill>
                         <a:srgbClr val="CBD5E1"/>
@@ -11226,7 +11489,7 @@
                     <a:bodyPr/>
                     <a:lstStyle/>
                     <a:p>
-                      <a:pPr indent="0" marL="0">
+                      <a:pPr marL="0" indent="0">
                         <a:buNone/>
                       </a:pPr>
                       <a:r>
@@ -11240,7 +11503,7 @@
                       <a:endParaRPr lang="en-US" sz="880" dirty="0"/>
                     </a:p>
                   </a:txBody>
-                  <a:tcPr marL="91440" marR="91440" marT="45720" marB="45720">
+                  <a:tcPr>
                     <a:lnL w="6350" cap="flat" cmpd="sng" algn="ctr">
                       <a:solidFill>
                         <a:srgbClr val="CBD5E1"/>
@@ -11287,7 +11550,7 @@
                     <a:bodyPr/>
                     <a:lstStyle/>
                     <a:p>
-                      <a:pPr indent="0" marL="0">
+                      <a:pPr marL="0" indent="0">
                         <a:buNone/>
                       </a:pPr>
                       <a:r>
@@ -11301,7 +11564,7 @@
                       <a:endParaRPr lang="en-US" sz="880" dirty="0"/>
                     </a:p>
                   </a:txBody>
-                  <a:tcPr marL="91440" marR="91440" marT="45720" marB="45720">
+                  <a:tcPr>
                     <a:lnL w="6350" cap="flat" cmpd="sng" algn="ctr">
                       <a:solidFill>
                         <a:srgbClr val="CBD5E1"/>
@@ -11348,7 +11611,7 @@
                     <a:bodyPr/>
                     <a:lstStyle/>
                     <a:p>
-                      <a:pPr indent="0" marL="0">
+                      <a:pPr marL="0" indent="0">
                         <a:buNone/>
                       </a:pPr>
                       <a:r>
@@ -11362,7 +11625,7 @@
                       <a:endParaRPr lang="en-US" sz="880" dirty="0"/>
                     </a:p>
                   </a:txBody>
-                  <a:tcPr marL="91440" marR="91440" marT="45720" marB="45720">
+                  <a:tcPr>
                     <a:lnL w="6350" cap="flat" cmpd="sng" algn="ctr">
                       <a:solidFill>
                         <a:srgbClr val="CBD5E1"/>
@@ -11404,6 +11667,11 @@
                     </a:solidFill>
                   </a:tcPr>
                 </a:tc>
+                <a:extLst>
+                  <a:ext uri="{0D108BD9-81ED-4DB2-BD59-A6C34878D82A}">
+                    <a16:rowId xmlns:a16="http://schemas.microsoft.com/office/drawing/2014/main" val="10014"/>
+                  </a:ext>
+                </a:extLst>
               </a:tr>
               <a:tr h="231458">
                 <a:tc>
@@ -11411,7 +11679,7 @@
                     <a:bodyPr/>
                     <a:lstStyle/>
                     <a:p>
-                      <a:pPr indent="0" marL="0">
+                      <a:pPr marL="0" indent="0">
                         <a:buNone/>
                       </a:pPr>
                       <a:r>
@@ -11425,7 +11693,7 @@
                       <a:endParaRPr lang="en-US" sz="880" dirty="0"/>
                     </a:p>
                   </a:txBody>
-                  <a:tcPr marL="91440" marR="91440" marT="45720" marB="45720">
+                  <a:tcPr>
                     <a:lnL w="6350" cap="flat" cmpd="sng" algn="ctr">
                       <a:solidFill>
                         <a:srgbClr val="CBD5E1"/>
@@ -11472,7 +11740,7 @@
                     <a:bodyPr/>
                     <a:lstStyle/>
                     <a:p>
-                      <a:pPr indent="0" marL="0">
+                      <a:pPr marL="0" indent="0">
                         <a:buNone/>
                       </a:pPr>
                       <a:r>
@@ -11486,7 +11754,7 @@
                       <a:endParaRPr lang="en-US" sz="880" dirty="0"/>
                     </a:p>
                   </a:txBody>
-                  <a:tcPr marL="91440" marR="91440" marT="45720" marB="45720">
+                  <a:tcPr>
                     <a:lnL w="6350" cap="flat" cmpd="sng" algn="ctr">
                       <a:solidFill>
                         <a:srgbClr val="CBD5E1"/>
@@ -11533,7 +11801,7 @@
                     <a:bodyPr/>
                     <a:lstStyle/>
                     <a:p>
-                      <a:pPr indent="0" marL="0">
+                      <a:pPr marL="0" indent="0">
                         <a:buNone/>
                       </a:pPr>
                       <a:r>
@@ -11547,7 +11815,7 @@
                       <a:endParaRPr lang="en-US" sz="880" dirty="0"/>
                     </a:p>
                   </a:txBody>
-                  <a:tcPr marL="91440" marR="91440" marT="45720" marB="45720">
+                  <a:tcPr>
                     <a:lnL w="6350" cap="flat" cmpd="sng" algn="ctr">
                       <a:solidFill>
                         <a:srgbClr val="CBD5E1"/>
@@ -11594,7 +11862,7 @@
                     <a:bodyPr/>
                     <a:lstStyle/>
                     <a:p>
-                      <a:pPr indent="0" marL="0">
+                      <a:pPr marL="0" indent="0">
                         <a:buNone/>
                       </a:pPr>
                       <a:r>
@@ -11608,7 +11876,7 @@
                       <a:endParaRPr lang="en-US" sz="880" dirty="0"/>
                     </a:p>
                   </a:txBody>
-                  <a:tcPr marL="91440" marR="91440" marT="45720" marB="45720">
+                  <a:tcPr>
                     <a:lnL w="6350" cap="flat" cmpd="sng" algn="ctr">
                       <a:solidFill>
                         <a:srgbClr val="CBD5E1"/>
@@ -11650,6 +11918,11 @@
                     </a:solidFill>
                   </a:tcPr>
                 </a:tc>
+                <a:extLst>
+                  <a:ext uri="{0D108BD9-81ED-4DB2-BD59-A6C34878D82A}">
+                    <a16:rowId xmlns:a16="http://schemas.microsoft.com/office/drawing/2014/main" val="10015"/>
+                  </a:ext>
+                </a:extLst>
               </a:tr>
             </a:tbl>
           </a:graphicData>
@@ -11671,6 +11944,7 @@
         <a:solidFill>
           <a:srgbClr val="EFF6FF"/>
         </a:solidFill>
+        <a:effectLst/>
       </p:bgPr>
     </p:bg>
     <p:spTree>
@@ -11711,6 +11985,13 @@
             <a:prstDash val="solid"/>
           </a:ln>
         </p:spPr>
+        <p:txBody>
+          <a:bodyPr/>
+          <a:lstStyle/>
+          <a:p>
+            <a:endParaRPr lang="en-PK"/>
+          </a:p>
+        </p:txBody>
       </p:sp>
       <p:sp>
         <p:nvSpPr>
@@ -11733,11 +12014,11 @@
           <a:bodyPr wrap="square" lIns="0" tIns="0" rIns="0" bIns="0" rtlCol="0" anchor="ctr"/>
           <a:lstStyle/>
           <a:p>
-            <a:pPr algn="ctr" indent="0" marL="0">
+            <a:pPr marL="0" indent="0" algn="ctr">
               <a:buNone/>
             </a:pPr>
             <a:r>
-              <a:rPr lang="en-US" sz="850" b="1" spc="150" kern="0" dirty="0">
+              <a:rPr lang="en-US" sz="850" b="1" kern="0" spc="150" dirty="0">
                 <a:solidFill>
                   <a:srgbClr val="FFFFFF"/>
                 </a:solidFill>
@@ -11772,6 +12053,13 @@
             <a:prstDash val="solid"/>
           </a:ln>
         </p:spPr>
+        <p:txBody>
+          <a:bodyPr/>
+          <a:lstStyle/>
+          <a:p>
+            <a:endParaRPr lang="en-PK"/>
+          </a:p>
+        </p:txBody>
       </p:sp>
       <p:sp>
         <p:nvSpPr>
@@ -11794,7 +12082,7 @@
           <a:bodyPr wrap="square" lIns="0" tIns="0" rIns="0" bIns="0" rtlCol="0" anchor="ctr"/>
           <a:lstStyle/>
           <a:p>
-            <a:pPr algn="ctr" indent="0" marL="0">
+            <a:pPr marL="0" indent="0" algn="ctr">
               <a:buNone/>
             </a:pPr>
             <a:r>
@@ -11805,15 +12093,12 @@
               </a:rPr>
               <a:t>GitHub: </a:t>
             </a:r>
-            <a:pPr algn="ctr" indent="0" marL="0">
-              <a:buNone/>
-            </a:pPr>
             <a:r>
               <a:rPr lang="en-US" sz="850" u="sng" dirty="0">
                 <a:solidFill>
                   <a:srgbClr val="5BA4CF"/>
                 </a:solidFill>
-                <a:hlinkClick r:id="rId1" invalidUrl="" action="" tgtFrame="" tooltip="" history="1" highlightClick="0" endSnd="0">
+                <a:hlinkClick r:id="rId3">
                   <a:extLst>
                     <a:ext uri="{A12FA001-AC4F-418D-AE19-62706E023703}">
                       <ahyp:hlinkClr xmlns:ahyp="http://schemas.microsoft.com/office/drawing/2018/hyperlinkcolor" val="tx"/>
@@ -11851,6 +12136,13 @@
             <a:prstDash val="solid"/>
           </a:ln>
         </p:spPr>
+        <p:txBody>
+          <a:bodyPr/>
+          <a:lstStyle/>
+          <a:p>
+            <a:endParaRPr lang="en-PK"/>
+          </a:p>
+        </p:txBody>
       </p:sp>
       <p:sp>
         <p:nvSpPr>
@@ -11873,7 +12165,7 @@
           <a:bodyPr wrap="square" lIns="0" tIns="0" rIns="0" bIns="0" rtlCol="0" anchor="ctr"/>
           <a:lstStyle/>
           <a:p>
-            <a:pPr algn="ctr" indent="0" marL="0">
+            <a:pPr marL="0" indent="0" algn="ctr">
               <a:buNone/>
             </a:pPr>
             <a:r>
@@ -11912,6 +12204,13 @@
             <a:prstDash val="solid"/>
           </a:ln>
         </p:spPr>
+        <p:txBody>
+          <a:bodyPr/>
+          <a:lstStyle/>
+          <a:p>
+            <a:endParaRPr lang="en-PK"/>
+          </a:p>
+        </p:txBody>
       </p:sp>
       <p:sp>
         <p:nvSpPr>
@@ -11934,7 +12233,7 @@
           <a:bodyPr wrap="square" lIns="0" tIns="0" rIns="0" bIns="0" rtlCol="0" anchor="ctr"/>
           <a:lstStyle/>
           <a:p>
-            <a:pPr algn="l" indent="0" marL="0">
+            <a:pPr marL="0" indent="0" algn="l">
               <a:buNone/>
             </a:pPr>
             <a:r>
@@ -11970,7 +12269,7 @@
           <a:bodyPr wrap="square" lIns="0" tIns="0" rIns="0" bIns="0" rtlCol="0" anchor="t"/>
           <a:lstStyle/>
           <a:p>
-            <a:pPr algn="l" indent="0" marL="0">
+            <a:pPr marL="0" indent="0" algn="l">
               <a:buNone/>
             </a:pPr>
             <a:r>
@@ -12009,13 +12308,20 @@
             <a:prstDash val="solid"/>
           </a:ln>
           <a:effectLst>
-            <a:outerShdw sx="100000" sy="100000" kx="0" ky="0" algn="bl" rotWithShape="0" blurRad="76200" dist="12700" dir="8100000">
+            <a:outerShdw blurRad="76200" dist="12700" dir="8100000" algn="bl" rotWithShape="0">
               <a:srgbClr val="000000">
                 <a:alpha val="8000"/>
               </a:srgbClr>
             </a:outerShdw>
           </a:effectLst>
         </p:spPr>
+        <p:txBody>
+          <a:bodyPr/>
+          <a:lstStyle/>
+          <a:p>
+            <a:endParaRPr lang="en-PK"/>
+          </a:p>
+        </p:txBody>
       </p:sp>
       <p:sp>
         <p:nvSpPr>
@@ -12038,7 +12344,7 @@
           <a:bodyPr wrap="square" lIns="0" tIns="0" rIns="0" bIns="0" rtlCol="0" anchor="ctr"/>
           <a:lstStyle/>
           <a:p>
-            <a:pPr algn="l" indent="0" marL="0">
+            <a:pPr marL="0" indent="0" algn="l">
               <a:buNone/>
             </a:pPr>
             <a:r>
@@ -12074,7 +12380,7 @@
           <a:bodyPr wrap="square" lIns="0" tIns="0" rIns="0" bIns="0" rtlCol="0" anchor="t"/>
           <a:lstStyle/>
           <a:p>
-            <a:pPr algn="l" marL="342900" indent="-342900">
+            <a:pPr marL="342900" indent="-342900" algn="l">
               <a:spcAft>
                 <a:spcPts val="500"/>
               </a:spcAft>
@@ -12092,7 +12398,7 @@
             <a:endParaRPr lang="en-US" sz="1150" dirty="0"/>
           </a:p>
           <a:p>
-            <a:pPr algn="l" marL="342900" indent="-342900">
+            <a:pPr marL="342900" indent="-342900" algn="l">
               <a:spcAft>
                 <a:spcPts val="500"/>
               </a:spcAft>
@@ -12110,7 +12416,7 @@
             <a:endParaRPr lang="en-US" sz="1150" dirty="0"/>
           </a:p>
           <a:p>
-            <a:pPr algn="l" marL="342900" indent="-342900">
+            <a:pPr marL="342900" indent="-342900" algn="l">
               <a:spcAft>
                 <a:spcPts val="500"/>
               </a:spcAft>
@@ -12128,7 +12434,7 @@
             <a:endParaRPr lang="en-US" sz="1150" dirty="0"/>
           </a:p>
           <a:p>
-            <a:pPr algn="l" marL="342900" indent="-342900">
+            <a:pPr marL="342900" indent="-342900" algn="l">
               <a:spcAft>
                 <a:spcPts val="500"/>
               </a:spcAft>
@@ -12146,7 +12452,7 @@
             <a:endParaRPr lang="en-US" sz="1150" dirty="0"/>
           </a:p>
           <a:p>
-            <a:pPr algn="l" marL="342900" indent="-342900">
+            <a:pPr marL="342900" indent="-342900" algn="l">
               <a:buSzPct val="100000"/>
               <a:buChar char="•"/>
             </a:pPr>
@@ -12186,13 +12492,20 @@
             <a:prstDash val="solid"/>
           </a:ln>
           <a:effectLst>
-            <a:outerShdw sx="100000" sy="100000" kx="0" ky="0" algn="bl" rotWithShape="0" blurRad="76200" dist="12700" dir="8100000">
+            <a:outerShdw blurRad="76200" dist="12700" dir="8100000" algn="bl" rotWithShape="0">
               <a:srgbClr val="000000">
                 <a:alpha val="8000"/>
               </a:srgbClr>
             </a:outerShdw>
           </a:effectLst>
         </p:spPr>
+        <p:txBody>
+          <a:bodyPr/>
+          <a:lstStyle/>
+          <a:p>
+            <a:endParaRPr lang="en-PK"/>
+          </a:p>
+        </p:txBody>
       </p:sp>
       <p:sp>
         <p:nvSpPr>
@@ -12215,7 +12528,7 @@
           <a:bodyPr wrap="square" lIns="0" tIns="0" rIns="0" bIns="0" rtlCol="0" anchor="ctr"/>
           <a:lstStyle/>
           <a:p>
-            <a:pPr algn="l" indent="0" marL="0">
+            <a:pPr marL="0" indent="0" algn="l">
               <a:buNone/>
             </a:pPr>
             <a:r>
@@ -12232,7 +12545,7 @@
       </p:sp>
       <p:graphicFrame>
         <p:nvGraphicFramePr>
-          <p:cNvPr id="3" name="Table 0"/>
+          <p:cNvPr id="16" name="Table 0"/>
           <p:cNvGraphicFramePr>
             <a:graphicFrameLocks noGrp="1"/>
           </p:cNvGraphicFramePr>
@@ -12253,8 +12566,20 @@
             <a:tbl>
               <a:tblPr/>
               <a:tblGrid>
-                <a:gridCol w="960120"/>
-                <a:gridCol w="2185416"/>
+                <a:gridCol w="960120">
+                  <a:extLst>
+                    <a:ext uri="{9D8B030D-6E8A-4147-A177-3AD203B41FA5}">
+                      <a16:colId xmlns:a16="http://schemas.microsoft.com/office/drawing/2014/main" val="20000"/>
+                    </a:ext>
+                  </a:extLst>
+                </a:gridCol>
+                <a:gridCol w="2185416">
+                  <a:extLst>
+                    <a:ext uri="{9D8B030D-6E8A-4147-A177-3AD203B41FA5}">
+                      <a16:colId xmlns:a16="http://schemas.microsoft.com/office/drawing/2014/main" val="20001"/>
+                    </a:ext>
+                  </a:extLst>
+                </a:gridCol>
               </a:tblGrid>
               <a:tr h="524256">
                 <a:tc>
@@ -12262,7 +12587,7 @@
                     <a:bodyPr/>
                     <a:lstStyle/>
                     <a:p>
-                      <a:pPr indent="0" marL="0">
+                      <a:pPr marL="0" indent="0">
                         <a:buNone/>
                       </a:pPr>
                       <a:r>
@@ -12276,7 +12601,7 @@
                       <a:endParaRPr lang="en-US" sz="1050" dirty="0"/>
                     </a:p>
                   </a:txBody>
-                  <a:tcPr marL="91440" marR="91440" marT="45720" marB="45720">
+                  <a:tcPr>
                     <a:lnL w="6350" cap="flat" cmpd="sng" algn="ctr">
                       <a:solidFill>
                         <a:srgbClr val="CBD5E1"/>
@@ -12323,7 +12648,7 @@
                     <a:bodyPr/>
                     <a:lstStyle/>
                     <a:p>
-                      <a:pPr indent="0" marL="0">
+                      <a:pPr marL="0" indent="0">
                         <a:buNone/>
                       </a:pPr>
                       <a:r>
@@ -12337,7 +12662,7 @@
                       <a:endParaRPr lang="en-US" sz="1050" dirty="0"/>
                     </a:p>
                   </a:txBody>
-                  <a:tcPr marL="91440" marR="91440" marT="45720" marB="45720">
+                  <a:tcPr>
                     <a:lnL w="6350" cap="flat" cmpd="sng" algn="ctr">
                       <a:solidFill>
                         <a:srgbClr val="CBD5E1"/>
@@ -12379,6 +12704,11 @@
                     </a:solidFill>
                   </a:tcPr>
                 </a:tc>
+                <a:extLst>
+                  <a:ext uri="{0D108BD9-81ED-4DB2-BD59-A6C34878D82A}">
+                    <a16:rowId xmlns:a16="http://schemas.microsoft.com/office/drawing/2014/main" val="10000"/>
+                  </a:ext>
+                </a:extLst>
               </a:tr>
               <a:tr h="524256">
                 <a:tc>
@@ -12386,7 +12716,7 @@
                     <a:bodyPr/>
                     <a:lstStyle/>
                     <a:p>
-                      <a:pPr indent="0" marL="0">
+                      <a:pPr marL="0" indent="0">
                         <a:buNone/>
                       </a:pPr>
                       <a:r>
@@ -12400,7 +12730,7 @@
                       <a:endParaRPr lang="en-US" sz="1050" dirty="0"/>
                     </a:p>
                   </a:txBody>
-                  <a:tcPr marL="91440" marR="91440" marT="45720" marB="45720">
+                  <a:tcPr>
                     <a:lnL w="6350" cap="flat" cmpd="sng" algn="ctr">
                       <a:solidFill>
                         <a:srgbClr val="CBD5E1"/>
@@ -12447,7 +12777,7 @@
                     <a:bodyPr/>
                     <a:lstStyle/>
                     <a:p>
-                      <a:pPr indent="0" marL="0">
+                      <a:pPr marL="0" indent="0">
                         <a:buNone/>
                       </a:pPr>
                       <a:r>
@@ -12461,7 +12791,7 @@
                       <a:endParaRPr lang="en-US" sz="1050" dirty="0"/>
                     </a:p>
                   </a:txBody>
-                  <a:tcPr marL="91440" marR="91440" marT="45720" marB="45720">
+                  <a:tcPr>
                     <a:lnL w="6350" cap="flat" cmpd="sng" algn="ctr">
                       <a:solidFill>
                         <a:srgbClr val="CBD5E1"/>
@@ -12503,6 +12833,11 @@
                     </a:solidFill>
                   </a:tcPr>
                 </a:tc>
+                <a:extLst>
+                  <a:ext uri="{0D108BD9-81ED-4DB2-BD59-A6C34878D82A}">
+                    <a16:rowId xmlns:a16="http://schemas.microsoft.com/office/drawing/2014/main" val="10001"/>
+                  </a:ext>
+                </a:extLst>
               </a:tr>
               <a:tr h="524256">
                 <a:tc>
@@ -12510,7 +12845,7 @@
                     <a:bodyPr/>
                     <a:lstStyle/>
                     <a:p>
-                      <a:pPr indent="0" marL="0">
+                      <a:pPr marL="0" indent="0">
                         <a:buNone/>
                       </a:pPr>
                       <a:r>
@@ -12524,7 +12859,7 @@
                       <a:endParaRPr lang="en-US" sz="1050" dirty="0"/>
                     </a:p>
                   </a:txBody>
-                  <a:tcPr marL="91440" marR="91440" marT="45720" marB="45720">
+                  <a:tcPr>
                     <a:lnL w="6350" cap="flat" cmpd="sng" algn="ctr">
                       <a:solidFill>
                         <a:srgbClr val="CBD5E1"/>
@@ -12571,7 +12906,7 @@
                     <a:bodyPr/>
                     <a:lstStyle/>
                     <a:p>
-                      <a:pPr indent="0" marL="0">
+                      <a:pPr marL="0" indent="0">
                         <a:buNone/>
                       </a:pPr>
                       <a:r>
@@ -12585,7 +12920,7 @@
                       <a:endParaRPr lang="en-US" sz="1050" dirty="0"/>
                     </a:p>
                   </a:txBody>
-                  <a:tcPr marL="91440" marR="91440" marT="45720" marB="45720">
+                  <a:tcPr>
                     <a:lnL w="6350" cap="flat" cmpd="sng" algn="ctr">
                       <a:solidFill>
                         <a:srgbClr val="CBD5E1"/>
@@ -12627,6 +12962,11 @@
                     </a:solidFill>
                   </a:tcPr>
                 </a:tc>
+                <a:extLst>
+                  <a:ext uri="{0D108BD9-81ED-4DB2-BD59-A6C34878D82A}">
+                    <a16:rowId xmlns:a16="http://schemas.microsoft.com/office/drawing/2014/main" val="10002"/>
+                  </a:ext>
+                </a:extLst>
               </a:tr>
               <a:tr h="524256">
                 <a:tc>
@@ -12634,7 +12974,7 @@
                     <a:bodyPr/>
                     <a:lstStyle/>
                     <a:p>
-                      <a:pPr indent="0" marL="0">
+                      <a:pPr marL="0" indent="0">
                         <a:buNone/>
                       </a:pPr>
                       <a:r>
@@ -12648,7 +12988,7 @@
                       <a:endParaRPr lang="en-US" sz="1050" dirty="0"/>
                     </a:p>
                   </a:txBody>
-                  <a:tcPr marL="91440" marR="91440" marT="45720" marB="45720">
+                  <a:tcPr>
                     <a:lnL w="6350" cap="flat" cmpd="sng" algn="ctr">
                       <a:solidFill>
                         <a:srgbClr val="CBD5E1"/>
@@ -12695,7 +13035,7 @@
                     <a:bodyPr/>
                     <a:lstStyle/>
                     <a:p>
-                      <a:pPr indent="0" marL="0">
+                      <a:pPr marL="0" indent="0">
                         <a:buNone/>
                       </a:pPr>
                       <a:r>
@@ -12709,7 +13049,7 @@
                       <a:endParaRPr lang="en-US" sz="1050" dirty="0"/>
                     </a:p>
                   </a:txBody>
-                  <a:tcPr marL="91440" marR="91440" marT="45720" marB="45720">
+                  <a:tcPr>
                     <a:lnL w="6350" cap="flat" cmpd="sng" algn="ctr">
                       <a:solidFill>
                         <a:srgbClr val="CBD5E1"/>
@@ -12751,6 +13091,11 @@
                     </a:solidFill>
                   </a:tcPr>
                 </a:tc>
+                <a:extLst>
+                  <a:ext uri="{0D108BD9-81ED-4DB2-BD59-A6C34878D82A}">
+                    <a16:rowId xmlns:a16="http://schemas.microsoft.com/office/drawing/2014/main" val="10003"/>
+                  </a:ext>
+                </a:extLst>
               </a:tr>
               <a:tr h="524256">
                 <a:tc>
@@ -12758,7 +13103,7 @@
                     <a:bodyPr/>
                     <a:lstStyle/>
                     <a:p>
-                      <a:pPr indent="0" marL="0">
+                      <a:pPr marL="0" indent="0">
                         <a:buNone/>
                       </a:pPr>
                       <a:r>
@@ -12772,7 +13117,7 @@
                       <a:endParaRPr lang="en-US" sz="1050" dirty="0"/>
                     </a:p>
                   </a:txBody>
-                  <a:tcPr marL="91440" marR="91440" marT="45720" marB="45720">
+                  <a:tcPr>
                     <a:lnL w="6350" cap="flat" cmpd="sng" algn="ctr">
                       <a:solidFill>
                         <a:srgbClr val="CBD5E1"/>
@@ -12819,7 +13164,7 @@
                     <a:bodyPr/>
                     <a:lstStyle/>
                     <a:p>
-                      <a:pPr indent="0" marL="0">
+                      <a:pPr marL="0" indent="0">
                         <a:buNone/>
                       </a:pPr>
                       <a:r>
@@ -12833,7 +13178,7 @@
                       <a:endParaRPr lang="en-US" sz="1050" dirty="0"/>
                     </a:p>
                   </a:txBody>
-                  <a:tcPr marL="91440" marR="91440" marT="45720" marB="45720">
+                  <a:tcPr>
                     <a:lnL w="6350" cap="flat" cmpd="sng" algn="ctr">
                       <a:solidFill>
                         <a:srgbClr val="CBD5E1"/>
@@ -12875,6 +13220,11 @@
                     </a:solidFill>
                   </a:tcPr>
                 </a:tc>
+                <a:extLst>
+                  <a:ext uri="{0D108BD9-81ED-4DB2-BD59-A6C34878D82A}">
+                    <a16:rowId xmlns:a16="http://schemas.microsoft.com/office/drawing/2014/main" val="10004"/>
+                  </a:ext>
+                </a:extLst>
               </a:tr>
               <a:tr h="524256">
                 <a:tc>
@@ -12882,7 +13232,7 @@
                     <a:bodyPr/>
                     <a:lstStyle/>
                     <a:p>
-                      <a:pPr indent="0" marL="0">
+                      <a:pPr marL="0" indent="0">
                         <a:buNone/>
                       </a:pPr>
                       <a:r>
@@ -12896,7 +13246,7 @@
                       <a:endParaRPr lang="en-US" sz="1050" dirty="0"/>
                     </a:p>
                   </a:txBody>
-                  <a:tcPr marL="91440" marR="91440" marT="45720" marB="45720">
+                  <a:tcPr>
                     <a:lnL w="6350" cap="flat" cmpd="sng" algn="ctr">
                       <a:solidFill>
                         <a:srgbClr val="CBD5E1"/>
@@ -12943,7 +13293,7 @@
                     <a:bodyPr/>
                     <a:lstStyle/>
                     <a:p>
-                      <a:pPr indent="0" marL="0">
+                      <a:pPr marL="0" indent="0">
                         <a:buNone/>
                       </a:pPr>
                       <a:r>
@@ -12957,7 +13307,7 @@
                       <a:endParaRPr lang="en-US" sz="1050" dirty="0"/>
                     </a:p>
                   </a:txBody>
-                  <a:tcPr marL="91440" marR="91440" marT="45720" marB="45720">
+                  <a:tcPr>
                     <a:lnL w="6350" cap="flat" cmpd="sng" algn="ctr">
                       <a:solidFill>
                         <a:srgbClr val="CBD5E1"/>
@@ -12999,6 +13349,11 @@
                     </a:solidFill>
                   </a:tcPr>
                 </a:tc>
+                <a:extLst>
+                  <a:ext uri="{0D108BD9-81ED-4DB2-BD59-A6C34878D82A}">
+                    <a16:rowId xmlns:a16="http://schemas.microsoft.com/office/drawing/2014/main" val="10005"/>
+                  </a:ext>
+                </a:extLst>
               </a:tr>
             </a:tbl>
           </a:graphicData>
@@ -13020,6 +13375,7 @@
         <a:solidFill>
           <a:srgbClr val="EFF6FF"/>
         </a:solidFill>
+        <a:effectLst/>
       </p:bgPr>
     </p:bg>
     <p:spTree>
@@ -13060,6 +13416,13 @@
             <a:prstDash val="solid"/>
           </a:ln>
         </p:spPr>
+        <p:txBody>
+          <a:bodyPr/>
+          <a:lstStyle/>
+          <a:p>
+            <a:endParaRPr lang="en-PK"/>
+          </a:p>
+        </p:txBody>
       </p:sp>
       <p:sp>
         <p:nvSpPr>
@@ -13082,11 +13445,11 @@
           <a:bodyPr wrap="square" lIns="0" tIns="0" rIns="0" bIns="0" rtlCol="0" anchor="ctr"/>
           <a:lstStyle/>
           <a:p>
-            <a:pPr algn="ctr" indent="0" marL="0">
+            <a:pPr marL="0" indent="0" algn="ctr">
               <a:buNone/>
             </a:pPr>
             <a:r>
-              <a:rPr lang="en-US" sz="850" b="1" spc="150" kern="0" dirty="0">
+              <a:rPr lang="en-US" sz="850" b="1" kern="0" spc="150" dirty="0">
                 <a:solidFill>
                   <a:srgbClr val="FFFFFF"/>
                 </a:solidFill>
@@ -13121,6 +13484,13 @@
             <a:prstDash val="solid"/>
           </a:ln>
         </p:spPr>
+        <p:txBody>
+          <a:bodyPr/>
+          <a:lstStyle/>
+          <a:p>
+            <a:endParaRPr lang="en-PK"/>
+          </a:p>
+        </p:txBody>
       </p:sp>
       <p:sp>
         <p:nvSpPr>
@@ -13143,7 +13513,7 @@
           <a:bodyPr wrap="square" lIns="0" tIns="0" rIns="0" bIns="0" rtlCol="0" anchor="ctr"/>
           <a:lstStyle/>
           <a:p>
-            <a:pPr algn="ctr" indent="0" marL="0">
+            <a:pPr marL="0" indent="0" algn="ctr">
               <a:buNone/>
             </a:pPr>
             <a:r>
@@ -13154,15 +13524,12 @@
               </a:rPr>
               <a:t>GitHub: </a:t>
             </a:r>
-            <a:pPr algn="ctr" indent="0" marL="0">
-              <a:buNone/>
-            </a:pPr>
             <a:r>
               <a:rPr lang="en-US" sz="850" u="sng" dirty="0">
                 <a:solidFill>
                   <a:srgbClr val="5BA4CF"/>
                 </a:solidFill>
-                <a:hlinkClick r:id="rId1" invalidUrl="" action="" tgtFrame="" tooltip="" history="1" highlightClick="0" endSnd="0">
+                <a:hlinkClick r:id="rId3">
                   <a:extLst>
                     <a:ext uri="{A12FA001-AC4F-418D-AE19-62706E023703}">
                       <ahyp:hlinkClr xmlns:ahyp="http://schemas.microsoft.com/office/drawing/2018/hyperlinkcolor" val="tx"/>
@@ -13200,6 +13567,13 @@
             <a:prstDash val="solid"/>
           </a:ln>
         </p:spPr>
+        <p:txBody>
+          <a:bodyPr/>
+          <a:lstStyle/>
+          <a:p>
+            <a:endParaRPr lang="en-PK"/>
+          </a:p>
+        </p:txBody>
       </p:sp>
       <p:sp>
         <p:nvSpPr>
@@ -13222,7 +13596,7 @@
           <a:bodyPr wrap="square" lIns="0" tIns="0" rIns="0" bIns="0" rtlCol="0" anchor="ctr"/>
           <a:lstStyle/>
           <a:p>
-            <a:pPr algn="ctr" indent="0" marL="0">
+            <a:pPr marL="0" indent="0" algn="ctr">
               <a:buNone/>
             </a:pPr>
             <a:r>
@@ -13261,6 +13635,13 @@
             <a:prstDash val="solid"/>
           </a:ln>
         </p:spPr>
+        <p:txBody>
+          <a:bodyPr/>
+          <a:lstStyle/>
+          <a:p>
+            <a:endParaRPr lang="en-PK"/>
+          </a:p>
+        </p:txBody>
       </p:sp>
       <p:sp>
         <p:nvSpPr>
@@ -13283,7 +13664,7 @@
           <a:bodyPr wrap="square" lIns="0" tIns="0" rIns="0" bIns="0" rtlCol="0" anchor="ctr"/>
           <a:lstStyle/>
           <a:p>
-            <a:pPr algn="l" indent="0" marL="0">
+            <a:pPr marL="0" indent="0" algn="l">
               <a:buNone/>
             </a:pPr>
             <a:r>
@@ -13319,7 +13700,7 @@
           <a:bodyPr wrap="square" lIns="0" tIns="0" rIns="0" bIns="0" rtlCol="0" anchor="t"/>
           <a:lstStyle/>
           <a:p>
-            <a:pPr algn="l" indent="0" marL="0">
+            <a:pPr marL="0" indent="0" algn="l">
               <a:buNone/>
             </a:pPr>
             <a:r>
@@ -13358,13 +13739,20 @@
             <a:prstDash val="solid"/>
           </a:ln>
           <a:effectLst>
-            <a:outerShdw sx="100000" sy="100000" kx="0" ky="0" algn="bl" rotWithShape="0" blurRad="127000" dist="25400" dir="8100000">
+            <a:outerShdw blurRad="127000" dist="25400" dir="8100000" algn="bl" rotWithShape="0">
               <a:srgbClr val="000000">
                 <a:alpha val="13000"/>
               </a:srgbClr>
             </a:outerShdw>
           </a:effectLst>
         </p:spPr>
+        <p:txBody>
+          <a:bodyPr/>
+          <a:lstStyle/>
+          <a:p>
+            <a:endParaRPr lang="en-PK"/>
+          </a:p>
+        </p:txBody>
       </p:sp>
       <p:sp>
         <p:nvSpPr>
@@ -13390,6 +13778,13 @@
             <a:prstDash val="solid"/>
           </a:ln>
         </p:spPr>
+        <p:txBody>
+          <a:bodyPr/>
+          <a:lstStyle/>
+          <a:p>
+            <a:endParaRPr lang="en-PK"/>
+          </a:p>
+        </p:txBody>
       </p:sp>
       <p:sp>
         <p:nvSpPr>
@@ -13412,7 +13807,7 @@
           <a:bodyPr wrap="square" lIns="0" tIns="0" rIns="0" bIns="0" rtlCol="0" anchor="ctr"/>
           <a:lstStyle/>
           <a:p>
-            <a:pPr algn="ctr" indent="0" marL="0">
+            <a:pPr marL="0" indent="0" algn="ctr">
               <a:buNone/>
             </a:pPr>
             <a:r>
@@ -13448,7 +13843,7 @@
           <a:bodyPr wrap="square" lIns="0" tIns="0" rIns="0" bIns="0" rtlCol="0" anchor="ctr"/>
           <a:lstStyle/>
           <a:p>
-            <a:pPr algn="ctr" indent="0" marL="0">
+            <a:pPr marL="0" indent="0" algn="ctr">
               <a:buNone/>
             </a:pPr>
             <a:r>
@@ -13484,7 +13879,7 @@
           <a:bodyPr wrap="square" lIns="0" tIns="0" rIns="0" bIns="0" rtlCol="0" anchor="ctr"/>
           <a:lstStyle/>
           <a:p>
-            <a:pPr algn="ctr" indent="0" marL="0">
+            <a:pPr marL="0" indent="0" algn="ctr">
               <a:buNone/>
             </a:pPr>
             <a:r>
@@ -13523,13 +13918,20 @@
             <a:prstDash val="solid"/>
           </a:ln>
           <a:effectLst>
-            <a:outerShdw sx="100000" sy="100000" kx="0" ky="0" algn="bl" rotWithShape="0" blurRad="127000" dist="25400" dir="8100000">
+            <a:outerShdw blurRad="127000" dist="25400" dir="8100000" algn="bl" rotWithShape="0">
               <a:srgbClr val="000000">
                 <a:alpha val="13000"/>
               </a:srgbClr>
             </a:outerShdw>
           </a:effectLst>
         </p:spPr>
+        <p:txBody>
+          <a:bodyPr/>
+          <a:lstStyle/>
+          <a:p>
+            <a:endParaRPr lang="en-PK"/>
+          </a:p>
+        </p:txBody>
       </p:sp>
       <p:sp>
         <p:nvSpPr>
@@ -13555,6 +13957,13 @@
             <a:prstDash val="solid"/>
           </a:ln>
         </p:spPr>
+        <p:txBody>
+          <a:bodyPr/>
+          <a:lstStyle/>
+          <a:p>
+            <a:endParaRPr lang="en-PK"/>
+          </a:p>
+        </p:txBody>
       </p:sp>
       <p:sp>
         <p:nvSpPr>
@@ -13577,7 +13986,7 @@
           <a:bodyPr wrap="square" lIns="0" tIns="0" rIns="0" bIns="0" rtlCol="0" anchor="ctr"/>
           <a:lstStyle/>
           <a:p>
-            <a:pPr algn="ctr" indent="0" marL="0">
+            <a:pPr marL="0" indent="0" algn="ctr">
               <a:buNone/>
             </a:pPr>
             <a:r>
@@ -13613,7 +14022,7 @@
           <a:bodyPr wrap="square" lIns="0" tIns="0" rIns="0" bIns="0" rtlCol="0" anchor="ctr"/>
           <a:lstStyle/>
           <a:p>
-            <a:pPr algn="ctr" indent="0" marL="0">
+            <a:pPr marL="0" indent="0" algn="ctr">
               <a:buNone/>
             </a:pPr>
             <a:r>
@@ -13649,7 +14058,7 @@
           <a:bodyPr wrap="square" lIns="0" tIns="0" rIns="0" bIns="0" rtlCol="0" anchor="ctr"/>
           <a:lstStyle/>
           <a:p>
-            <a:pPr algn="ctr" indent="0" marL="0">
+            <a:pPr marL="0" indent="0" algn="ctr">
               <a:buNone/>
             </a:pPr>
             <a:r>
@@ -13688,13 +14097,20 @@
             <a:prstDash val="solid"/>
           </a:ln>
           <a:effectLst>
-            <a:outerShdw sx="100000" sy="100000" kx="0" ky="0" algn="bl" rotWithShape="0" blurRad="127000" dist="25400" dir="8100000">
+            <a:outerShdw blurRad="127000" dist="25400" dir="8100000" algn="bl" rotWithShape="0">
               <a:srgbClr val="000000">
                 <a:alpha val="13000"/>
               </a:srgbClr>
             </a:outerShdw>
           </a:effectLst>
         </p:spPr>
+        <p:txBody>
+          <a:bodyPr/>
+          <a:lstStyle/>
+          <a:p>
+            <a:endParaRPr lang="en-PK"/>
+          </a:p>
+        </p:txBody>
       </p:sp>
       <p:sp>
         <p:nvSpPr>
@@ -13720,6 +14136,13 @@
             <a:prstDash val="solid"/>
           </a:ln>
         </p:spPr>
+        <p:txBody>
+          <a:bodyPr/>
+          <a:lstStyle/>
+          <a:p>
+            <a:endParaRPr lang="en-PK"/>
+          </a:p>
+        </p:txBody>
       </p:sp>
       <p:sp>
         <p:nvSpPr>
@@ -13742,7 +14165,7 @@
           <a:bodyPr wrap="square" lIns="0" tIns="0" rIns="0" bIns="0" rtlCol="0" anchor="ctr"/>
           <a:lstStyle/>
           <a:p>
-            <a:pPr algn="ctr" indent="0" marL="0">
+            <a:pPr marL="0" indent="0" algn="ctr">
               <a:buNone/>
             </a:pPr>
             <a:r>
@@ -13778,7 +14201,7 @@
           <a:bodyPr wrap="square" lIns="0" tIns="0" rIns="0" bIns="0" rtlCol="0" anchor="ctr"/>
           <a:lstStyle/>
           <a:p>
-            <a:pPr algn="ctr" indent="0" marL="0">
+            <a:pPr marL="0" indent="0" algn="ctr">
               <a:buNone/>
             </a:pPr>
             <a:r>
@@ -13814,7 +14237,7 @@
           <a:bodyPr wrap="square" lIns="0" tIns="0" rIns="0" bIns="0" rtlCol="0" anchor="ctr"/>
           <a:lstStyle/>
           <a:p>
-            <a:pPr algn="ctr" indent="0" marL="0">
+            <a:pPr marL="0" indent="0" algn="ctr">
               <a:buNone/>
             </a:pPr>
             <a:r>
@@ -13850,7 +14273,7 @@
           <a:bodyPr wrap="square" lIns="0" tIns="0" rIns="0" bIns="0" rtlCol="0" anchor="ctr"/>
           <a:lstStyle/>
           <a:p>
-            <a:pPr indent="0" marL="0">
+            <a:pPr marL="0" indent="0">
               <a:buNone/>
             </a:pPr>
             <a:r>
@@ -13889,13 +14312,20 @@
             <a:prstDash val="solid"/>
           </a:ln>
           <a:effectLst>
-            <a:outerShdw sx="100000" sy="100000" kx="0" ky="0" algn="bl" rotWithShape="0" blurRad="76200" dist="12700" dir="8100000">
+            <a:outerShdw blurRad="76200" dist="12700" dir="8100000" algn="bl" rotWithShape="0">
               <a:srgbClr val="000000">
                 <a:alpha val="8000"/>
               </a:srgbClr>
             </a:outerShdw>
           </a:effectLst>
         </p:spPr>
+        <p:txBody>
+          <a:bodyPr/>
+          <a:lstStyle/>
+          <a:p>
+            <a:endParaRPr lang="en-PK"/>
+          </a:p>
+        </p:txBody>
       </p:sp>
       <p:sp>
         <p:nvSpPr>
@@ -13921,6 +14351,13 @@
             <a:prstDash val="solid"/>
           </a:ln>
         </p:spPr>
+        <p:txBody>
+          <a:bodyPr/>
+          <a:lstStyle/>
+          <a:p>
+            <a:endParaRPr lang="en-PK"/>
+          </a:p>
+        </p:txBody>
       </p:sp>
       <p:sp>
         <p:nvSpPr>
@@ -13943,7 +14380,7 @@
           <a:bodyPr wrap="square" lIns="0" tIns="0" rIns="0" bIns="0" rtlCol="0" anchor="ctr"/>
           <a:lstStyle/>
           <a:p>
-            <a:pPr algn="l" indent="0" marL="0">
+            <a:pPr marL="0" indent="0" algn="l">
               <a:buNone/>
             </a:pPr>
             <a:r>
@@ -13982,13 +14419,20 @@
             <a:prstDash val="solid"/>
           </a:ln>
           <a:effectLst>
-            <a:outerShdw sx="100000" sy="100000" kx="0" ky="0" algn="bl" rotWithShape="0" blurRad="76200" dist="12700" dir="8100000">
+            <a:outerShdw blurRad="76200" dist="12700" dir="8100000" algn="bl" rotWithShape="0">
               <a:srgbClr val="000000">
                 <a:alpha val="8000"/>
               </a:srgbClr>
             </a:outerShdw>
           </a:effectLst>
         </p:spPr>
+        <p:txBody>
+          <a:bodyPr/>
+          <a:lstStyle/>
+          <a:p>
+            <a:endParaRPr lang="en-PK"/>
+          </a:p>
+        </p:txBody>
       </p:sp>
       <p:sp>
         <p:nvSpPr>
@@ -14014,6 +14458,13 @@
             <a:prstDash val="solid"/>
           </a:ln>
         </p:spPr>
+        <p:txBody>
+          <a:bodyPr/>
+          <a:lstStyle/>
+          <a:p>
+            <a:endParaRPr lang="en-PK"/>
+          </a:p>
+        </p:txBody>
       </p:sp>
       <p:sp>
         <p:nvSpPr>
@@ -14036,7 +14487,7 @@
           <a:bodyPr wrap="square" lIns="0" tIns="0" rIns="0" bIns="0" rtlCol="0" anchor="ctr"/>
           <a:lstStyle/>
           <a:p>
-            <a:pPr algn="l" indent="0" marL="0">
+            <a:pPr marL="0" indent="0" algn="l">
               <a:buNone/>
             </a:pPr>
             <a:r>
@@ -14075,13 +14526,20 @@
             <a:prstDash val="solid"/>
           </a:ln>
           <a:effectLst>
-            <a:outerShdw sx="100000" sy="100000" kx="0" ky="0" algn="bl" rotWithShape="0" blurRad="76200" dist="12700" dir="8100000">
+            <a:outerShdw blurRad="76200" dist="12700" dir="8100000" algn="bl" rotWithShape="0">
               <a:srgbClr val="000000">
                 <a:alpha val="8000"/>
               </a:srgbClr>
             </a:outerShdw>
           </a:effectLst>
         </p:spPr>
+        <p:txBody>
+          <a:bodyPr/>
+          <a:lstStyle/>
+          <a:p>
+            <a:endParaRPr lang="en-PK"/>
+          </a:p>
+        </p:txBody>
       </p:sp>
       <p:sp>
         <p:nvSpPr>
@@ -14107,6 +14565,13 @@
             <a:prstDash val="solid"/>
           </a:ln>
         </p:spPr>
+        <p:txBody>
+          <a:bodyPr/>
+          <a:lstStyle/>
+          <a:p>
+            <a:endParaRPr lang="en-PK"/>
+          </a:p>
+        </p:txBody>
       </p:sp>
       <p:sp>
         <p:nvSpPr>
@@ -14129,7 +14594,7 @@
           <a:bodyPr wrap="square" lIns="0" tIns="0" rIns="0" bIns="0" rtlCol="0" anchor="ctr"/>
           <a:lstStyle/>
           <a:p>
-            <a:pPr algn="l" indent="0" marL="0">
+            <a:pPr marL="0" indent="0" algn="l">
               <a:buNone/>
             </a:pPr>
             <a:r>
@@ -14168,13 +14633,20 @@
             <a:prstDash val="solid"/>
           </a:ln>
           <a:effectLst>
-            <a:outerShdw sx="100000" sy="100000" kx="0" ky="0" algn="bl" rotWithShape="0" blurRad="76200" dist="12700" dir="8100000">
+            <a:outerShdw blurRad="76200" dist="12700" dir="8100000" algn="bl" rotWithShape="0">
               <a:srgbClr val="000000">
                 <a:alpha val="8000"/>
               </a:srgbClr>
             </a:outerShdw>
           </a:effectLst>
         </p:spPr>
+        <p:txBody>
+          <a:bodyPr/>
+          <a:lstStyle/>
+          <a:p>
+            <a:endParaRPr lang="en-PK"/>
+          </a:p>
+        </p:txBody>
       </p:sp>
       <p:sp>
         <p:nvSpPr>
@@ -14200,6 +14672,13 @@
             <a:prstDash val="solid"/>
           </a:ln>
         </p:spPr>
+        <p:txBody>
+          <a:bodyPr/>
+          <a:lstStyle/>
+          <a:p>
+            <a:endParaRPr lang="en-PK"/>
+          </a:p>
+        </p:txBody>
       </p:sp>
       <p:sp>
         <p:nvSpPr>
@@ -14222,7 +14701,7 @@
           <a:bodyPr wrap="square" lIns="0" tIns="0" rIns="0" bIns="0" rtlCol="0" anchor="ctr"/>
           <a:lstStyle/>
           <a:p>
-            <a:pPr algn="l" indent="0" marL="0">
+            <a:pPr marL="0" indent="0" algn="l">
               <a:buNone/>
             </a:pPr>
             <a:r>
@@ -14261,6 +14740,13 @@
             <a:prstDash val="solid"/>
           </a:ln>
         </p:spPr>
+        <p:txBody>
+          <a:bodyPr/>
+          <a:lstStyle/>
+          <a:p>
+            <a:endParaRPr lang="en-PK"/>
+          </a:p>
+        </p:txBody>
       </p:sp>
       <p:sp>
         <p:nvSpPr>
@@ -14283,7 +14769,7 @@
           <a:bodyPr wrap="square" lIns="0" tIns="0" rIns="0" bIns="0" rtlCol="0" anchor="ctr"/>
           <a:lstStyle/>
           <a:p>
-            <a:pPr algn="l" indent="0" marL="0">
+            <a:pPr marL="0" indent="0" algn="l">
               <a:buNone/>
             </a:pPr>
             <a:r>
@@ -14294,9 +14780,6 @@
               </a:rPr>
               <a:t>Our Goal: </a:t>
             </a:r>
-            <a:pPr algn="l" indent="0" marL="0">
-              <a:buNone/>
-            </a:pPr>
             <a:r>
               <a:rPr lang="en-US" sz="1300" dirty="0">
                 <a:solidFill>
@@ -14325,6 +14808,7 @@
         <a:solidFill>
           <a:srgbClr val="EFF6FF"/>
         </a:solidFill>
+        <a:effectLst/>
       </p:bgPr>
     </p:bg>
     <p:spTree>
@@ -14365,6 +14849,13 @@
             <a:prstDash val="solid"/>
           </a:ln>
         </p:spPr>
+        <p:txBody>
+          <a:bodyPr/>
+          <a:lstStyle/>
+          <a:p>
+            <a:endParaRPr lang="en-PK"/>
+          </a:p>
+        </p:txBody>
       </p:sp>
       <p:sp>
         <p:nvSpPr>
@@ -14387,11 +14878,11 @@
           <a:bodyPr wrap="square" lIns="0" tIns="0" rIns="0" bIns="0" rtlCol="0" anchor="ctr"/>
           <a:lstStyle/>
           <a:p>
-            <a:pPr algn="ctr" indent="0" marL="0">
+            <a:pPr marL="0" indent="0" algn="ctr">
               <a:buNone/>
             </a:pPr>
             <a:r>
-              <a:rPr lang="en-US" sz="850" b="1" spc="150" kern="0" dirty="0">
+              <a:rPr lang="en-US" sz="850" b="1" kern="0" spc="150" dirty="0">
                 <a:solidFill>
                   <a:srgbClr val="FFFFFF"/>
                 </a:solidFill>
@@ -14426,6 +14917,13 @@
             <a:prstDash val="solid"/>
           </a:ln>
         </p:spPr>
+        <p:txBody>
+          <a:bodyPr/>
+          <a:lstStyle/>
+          <a:p>
+            <a:endParaRPr lang="en-PK"/>
+          </a:p>
+        </p:txBody>
       </p:sp>
       <p:sp>
         <p:nvSpPr>
@@ -14448,7 +14946,7 @@
           <a:bodyPr wrap="square" lIns="0" tIns="0" rIns="0" bIns="0" rtlCol="0" anchor="ctr"/>
           <a:lstStyle/>
           <a:p>
-            <a:pPr algn="ctr" indent="0" marL="0">
+            <a:pPr marL="0" indent="0" algn="ctr">
               <a:buNone/>
             </a:pPr>
             <a:r>
@@ -14459,15 +14957,12 @@
               </a:rPr>
               <a:t>GitHub: </a:t>
             </a:r>
-            <a:pPr algn="ctr" indent="0" marL="0">
-              <a:buNone/>
-            </a:pPr>
             <a:r>
               <a:rPr lang="en-US" sz="850" u="sng" dirty="0">
                 <a:solidFill>
                   <a:srgbClr val="5BA4CF"/>
                 </a:solidFill>
-                <a:hlinkClick r:id="rId1" invalidUrl="" action="" tgtFrame="" tooltip="" history="1" highlightClick="0" endSnd="0">
+                <a:hlinkClick r:id="rId3">
                   <a:extLst>
                     <a:ext uri="{A12FA001-AC4F-418D-AE19-62706E023703}">
                       <ahyp:hlinkClr xmlns:ahyp="http://schemas.microsoft.com/office/drawing/2018/hyperlinkcolor" val="tx"/>
@@ -14505,6 +15000,13 @@
             <a:prstDash val="solid"/>
           </a:ln>
         </p:spPr>
+        <p:txBody>
+          <a:bodyPr/>
+          <a:lstStyle/>
+          <a:p>
+            <a:endParaRPr lang="en-PK"/>
+          </a:p>
+        </p:txBody>
       </p:sp>
       <p:sp>
         <p:nvSpPr>
@@ -14527,7 +15029,7 @@
           <a:bodyPr wrap="square" lIns="0" tIns="0" rIns="0" bIns="0" rtlCol="0" anchor="ctr"/>
           <a:lstStyle/>
           <a:p>
-            <a:pPr algn="ctr" indent="0" marL="0">
+            <a:pPr marL="0" indent="0" algn="ctr">
               <a:buNone/>
             </a:pPr>
             <a:r>
@@ -14566,6 +15068,13 @@
             <a:prstDash val="solid"/>
           </a:ln>
         </p:spPr>
+        <p:txBody>
+          <a:bodyPr/>
+          <a:lstStyle/>
+          <a:p>
+            <a:endParaRPr lang="en-PK"/>
+          </a:p>
+        </p:txBody>
       </p:sp>
       <p:sp>
         <p:nvSpPr>
@@ -14588,7 +15097,7 @@
           <a:bodyPr wrap="square" lIns="0" tIns="0" rIns="0" bIns="0" rtlCol="0" anchor="ctr"/>
           <a:lstStyle/>
           <a:p>
-            <a:pPr algn="l" indent="0" marL="0">
+            <a:pPr marL="0" indent="0" algn="l">
               <a:buNone/>
             </a:pPr>
             <a:r>
@@ -14624,7 +15133,7 @@
           <a:bodyPr wrap="square" lIns="0" tIns="0" rIns="0" bIns="0" rtlCol="0" anchor="t"/>
           <a:lstStyle/>
           <a:p>
-            <a:pPr algn="l" indent="0" marL="0">
+            <a:pPr marL="0" indent="0" algn="l">
               <a:buNone/>
             </a:pPr>
             <a:r>
@@ -14641,7 +15150,7 @@
       </p:sp>
       <p:graphicFrame>
         <p:nvGraphicFramePr>
-          <p:cNvPr id="5" name="Table 0"/>
+          <p:cNvPr id="11" name="Table 0"/>
           <p:cNvGraphicFramePr>
             <a:graphicFrameLocks noGrp="1"/>
           </p:cNvGraphicFramePr>
@@ -14655,16 +15164,34 @@
         </p:nvGraphicFramePr>
         <p:xfrm>
           <a:off x="320040" y="987552"/>
-          <a:ext cx="8503920" cy="3685032"/>
+          <a:ext cx="8503920" cy="3685038"/>
         </p:xfrm>
         <a:graphic>
           <a:graphicData uri="http://schemas.openxmlformats.org/drawingml/2006/table">
             <a:tbl>
               <a:tblPr/>
               <a:tblGrid>
-                <a:gridCol w="2240280"/>
-                <a:gridCol w="2788920"/>
-                <a:gridCol w="3474720"/>
+                <a:gridCol w="2240280">
+                  <a:extLst>
+                    <a:ext uri="{9D8B030D-6E8A-4147-A177-3AD203B41FA5}">
+                      <a16:colId xmlns:a16="http://schemas.microsoft.com/office/drawing/2014/main" val="20000"/>
+                    </a:ext>
+                  </a:extLst>
+                </a:gridCol>
+                <a:gridCol w="2788920">
+                  <a:extLst>
+                    <a:ext uri="{9D8B030D-6E8A-4147-A177-3AD203B41FA5}">
+                      <a16:colId xmlns:a16="http://schemas.microsoft.com/office/drawing/2014/main" val="20001"/>
+                    </a:ext>
+                  </a:extLst>
+                </a:gridCol>
+                <a:gridCol w="3474720">
+                  <a:extLst>
+                    <a:ext uri="{9D8B030D-6E8A-4147-A177-3AD203B41FA5}">
+                      <a16:colId xmlns:a16="http://schemas.microsoft.com/office/drawing/2014/main" val="20002"/>
+                    </a:ext>
+                  </a:extLst>
+                </a:gridCol>
               </a:tblGrid>
               <a:tr h="263217">
                 <a:tc>
@@ -14672,7 +15199,7 @@
                     <a:bodyPr/>
                     <a:lstStyle/>
                     <a:p>
-                      <a:pPr indent="0" marL="0">
+                      <a:pPr marL="0" indent="0">
                         <a:buNone/>
                       </a:pPr>
                       <a:r>
@@ -14686,7 +15213,7 @@
                       <a:endParaRPr lang="en-US" sz="930" dirty="0"/>
                     </a:p>
                   </a:txBody>
-                  <a:tcPr marL="91440" marR="91440" marT="45720" marB="45720">
+                  <a:tcPr>
                     <a:lnL w="6350" cap="flat" cmpd="sng" algn="ctr">
                       <a:solidFill>
                         <a:srgbClr val="CBD5E1"/>
@@ -14733,7 +15260,7 @@
                     <a:bodyPr/>
                     <a:lstStyle/>
                     <a:p>
-                      <a:pPr indent="0" marL="0">
+                      <a:pPr marL="0" indent="0">
                         <a:buNone/>
                       </a:pPr>
                       <a:r>
@@ -14747,7 +15274,7 @@
                       <a:endParaRPr lang="en-US" sz="930" dirty="0"/>
                     </a:p>
                   </a:txBody>
-                  <a:tcPr marL="91440" marR="91440" marT="45720" marB="45720">
+                  <a:tcPr>
                     <a:lnL w="6350" cap="flat" cmpd="sng" algn="ctr">
                       <a:solidFill>
                         <a:srgbClr val="CBD5E1"/>
@@ -14794,7 +15321,7 @@
                     <a:bodyPr/>
                     <a:lstStyle/>
                     <a:p>
-                      <a:pPr indent="0" marL="0">
+                      <a:pPr marL="0" indent="0">
                         <a:buNone/>
                       </a:pPr>
                       <a:r>
@@ -14808,7 +15335,7 @@
                       <a:endParaRPr lang="en-US" sz="930" dirty="0"/>
                     </a:p>
                   </a:txBody>
-                  <a:tcPr marL="91440" marR="91440" marT="45720" marB="45720">
+                  <a:tcPr>
                     <a:lnL w="6350" cap="flat" cmpd="sng" algn="ctr">
                       <a:solidFill>
                         <a:srgbClr val="CBD5E1"/>
@@ -14850,6 +15377,11 @@
                     </a:solidFill>
                   </a:tcPr>
                 </a:tc>
+                <a:extLst>
+                  <a:ext uri="{0D108BD9-81ED-4DB2-BD59-A6C34878D82A}">
+                    <a16:rowId xmlns:a16="http://schemas.microsoft.com/office/drawing/2014/main" val="10000"/>
+                  </a:ext>
+                </a:extLst>
               </a:tr>
               <a:tr h="263217">
                 <a:tc>
@@ -14857,7 +15389,7 @@
                     <a:bodyPr/>
                     <a:lstStyle/>
                     <a:p>
-                      <a:pPr indent="0" marL="0">
+                      <a:pPr marL="0" indent="0">
                         <a:buNone/>
                       </a:pPr>
                       <a:r>
@@ -14871,7 +15403,7 @@
                       <a:endParaRPr lang="en-US" sz="930" dirty="0"/>
                     </a:p>
                   </a:txBody>
-                  <a:tcPr marL="91440" marR="91440" marT="45720" marB="45720">
+                  <a:tcPr>
                     <a:lnL w="6350" cap="flat" cmpd="sng" algn="ctr">
                       <a:solidFill>
                         <a:srgbClr val="CBD5E1"/>
@@ -14918,7 +15450,7 @@
                     <a:bodyPr/>
                     <a:lstStyle/>
                     <a:p>
-                      <a:pPr indent="0" marL="0">
+                      <a:pPr marL="0" indent="0">
                         <a:buNone/>
                       </a:pPr>
                       <a:r>
@@ -14932,7 +15464,7 @@
                       <a:endParaRPr lang="en-US" sz="930" dirty="0"/>
                     </a:p>
                   </a:txBody>
-                  <a:tcPr marL="91440" marR="91440" marT="45720" marB="45720">
+                  <a:tcPr>
                     <a:lnL w="6350" cap="flat" cmpd="sng" algn="ctr">
                       <a:solidFill>
                         <a:srgbClr val="CBD5E1"/>
@@ -14979,7 +15511,7 @@
                     <a:bodyPr/>
                     <a:lstStyle/>
                     <a:p>
-                      <a:pPr indent="0" marL="0">
+                      <a:pPr marL="0" indent="0">
                         <a:buNone/>
                       </a:pPr>
                       <a:r>
@@ -14993,7 +15525,7 @@
                       <a:endParaRPr lang="en-US" sz="930" dirty="0"/>
                     </a:p>
                   </a:txBody>
-                  <a:tcPr marL="91440" marR="91440" marT="45720" marB="45720">
+                  <a:tcPr>
                     <a:lnL w="6350" cap="flat" cmpd="sng" algn="ctr">
                       <a:solidFill>
                         <a:srgbClr val="CBD5E1"/>
@@ -15035,6 +15567,11 @@
                     </a:solidFill>
                   </a:tcPr>
                 </a:tc>
+                <a:extLst>
+                  <a:ext uri="{0D108BD9-81ED-4DB2-BD59-A6C34878D82A}">
+                    <a16:rowId xmlns:a16="http://schemas.microsoft.com/office/drawing/2014/main" val="10001"/>
+                  </a:ext>
+                </a:extLst>
               </a:tr>
               <a:tr h="263217">
                 <a:tc>
@@ -15042,7 +15579,7 @@
                     <a:bodyPr/>
                     <a:lstStyle/>
                     <a:p>
-                      <a:pPr indent="0" marL="0">
+                      <a:pPr marL="0" indent="0">
                         <a:buNone/>
                       </a:pPr>
                       <a:r>
@@ -15056,7 +15593,7 @@
                       <a:endParaRPr lang="en-US" sz="930" dirty="0"/>
                     </a:p>
                   </a:txBody>
-                  <a:tcPr marL="91440" marR="91440" marT="45720" marB="45720">
+                  <a:tcPr>
                     <a:lnL w="6350" cap="flat" cmpd="sng" algn="ctr">
                       <a:solidFill>
                         <a:srgbClr val="CBD5E1"/>
@@ -15103,7 +15640,7 @@
                     <a:bodyPr/>
                     <a:lstStyle/>
                     <a:p>
-                      <a:pPr indent="0" marL="0">
+                      <a:pPr marL="0" indent="0">
                         <a:buNone/>
                       </a:pPr>
                       <a:r>
@@ -15117,7 +15654,7 @@
                       <a:endParaRPr lang="en-US" sz="930" dirty="0"/>
                     </a:p>
                   </a:txBody>
-                  <a:tcPr marL="91440" marR="91440" marT="45720" marB="45720">
+                  <a:tcPr>
                     <a:lnL w="6350" cap="flat" cmpd="sng" algn="ctr">
                       <a:solidFill>
                         <a:srgbClr val="CBD5E1"/>
@@ -15164,7 +15701,7 @@
                     <a:bodyPr/>
                     <a:lstStyle/>
                     <a:p>
-                      <a:pPr indent="0" marL="0">
+                      <a:pPr marL="0" indent="0">
                         <a:buNone/>
                       </a:pPr>
                       <a:r>
@@ -15178,7 +15715,7 @@
                       <a:endParaRPr lang="en-US" sz="930" dirty="0"/>
                     </a:p>
                   </a:txBody>
-                  <a:tcPr marL="91440" marR="91440" marT="45720" marB="45720">
+                  <a:tcPr>
                     <a:lnL w="6350" cap="flat" cmpd="sng" algn="ctr">
                       <a:solidFill>
                         <a:srgbClr val="CBD5E1"/>
@@ -15220,6 +15757,11 @@
                     </a:solidFill>
                   </a:tcPr>
                 </a:tc>
+                <a:extLst>
+                  <a:ext uri="{0D108BD9-81ED-4DB2-BD59-A6C34878D82A}">
+                    <a16:rowId xmlns:a16="http://schemas.microsoft.com/office/drawing/2014/main" val="10002"/>
+                  </a:ext>
+                </a:extLst>
               </a:tr>
               <a:tr h="263217">
                 <a:tc>
@@ -15227,7 +15769,7 @@
                     <a:bodyPr/>
                     <a:lstStyle/>
                     <a:p>
-                      <a:pPr indent="0" marL="0">
+                      <a:pPr marL="0" indent="0">
                         <a:buNone/>
                       </a:pPr>
                       <a:r>
@@ -15241,7 +15783,7 @@
                       <a:endParaRPr lang="en-US" sz="930" dirty="0"/>
                     </a:p>
                   </a:txBody>
-                  <a:tcPr marL="91440" marR="91440" marT="45720" marB="45720">
+                  <a:tcPr>
                     <a:lnL w="6350" cap="flat" cmpd="sng" algn="ctr">
                       <a:solidFill>
                         <a:srgbClr val="CBD5E1"/>
@@ -15288,7 +15830,7 @@
                     <a:bodyPr/>
                     <a:lstStyle/>
                     <a:p>
-                      <a:pPr indent="0" marL="0">
+                      <a:pPr marL="0" indent="0">
                         <a:buNone/>
                       </a:pPr>
                       <a:r>
@@ -15302,7 +15844,7 @@
                       <a:endParaRPr lang="en-US" sz="930" dirty="0"/>
                     </a:p>
                   </a:txBody>
-                  <a:tcPr marL="91440" marR="91440" marT="45720" marB="45720">
+                  <a:tcPr>
                     <a:lnL w="6350" cap="flat" cmpd="sng" algn="ctr">
                       <a:solidFill>
                         <a:srgbClr val="CBD5E1"/>
@@ -15349,7 +15891,7 @@
                     <a:bodyPr/>
                     <a:lstStyle/>
                     <a:p>
-                      <a:pPr indent="0" marL="0">
+                      <a:pPr marL="0" indent="0">
                         <a:buNone/>
                       </a:pPr>
                       <a:r>
@@ -15363,7 +15905,7 @@
                       <a:endParaRPr lang="en-US" sz="930" dirty="0"/>
                     </a:p>
                   </a:txBody>
-                  <a:tcPr marL="91440" marR="91440" marT="45720" marB="45720">
+                  <a:tcPr>
                     <a:lnL w="6350" cap="flat" cmpd="sng" algn="ctr">
                       <a:solidFill>
                         <a:srgbClr val="CBD5E1"/>
@@ -15405,6 +15947,11 @@
                     </a:solidFill>
                   </a:tcPr>
                 </a:tc>
+                <a:extLst>
+                  <a:ext uri="{0D108BD9-81ED-4DB2-BD59-A6C34878D82A}">
+                    <a16:rowId xmlns:a16="http://schemas.microsoft.com/office/drawing/2014/main" val="10003"/>
+                  </a:ext>
+                </a:extLst>
               </a:tr>
               <a:tr h="263217">
                 <a:tc>
@@ -15412,7 +15959,7 @@
                     <a:bodyPr/>
                     <a:lstStyle/>
                     <a:p>
-                      <a:pPr indent="0" marL="0">
+                      <a:pPr marL="0" indent="0">
                         <a:buNone/>
                       </a:pPr>
                       <a:r>
@@ -15426,7 +15973,7 @@
                       <a:endParaRPr lang="en-US" sz="930" dirty="0"/>
                     </a:p>
                   </a:txBody>
-                  <a:tcPr marL="91440" marR="91440" marT="45720" marB="45720">
+                  <a:tcPr>
                     <a:lnL w="6350" cap="flat" cmpd="sng" algn="ctr">
                       <a:solidFill>
                         <a:srgbClr val="CBD5E1"/>
@@ -15473,7 +16020,7 @@
                     <a:bodyPr/>
                     <a:lstStyle/>
                     <a:p>
-                      <a:pPr indent="0" marL="0">
+                      <a:pPr marL="0" indent="0">
                         <a:buNone/>
                       </a:pPr>
                       <a:r>
@@ -15487,7 +16034,7 @@
                       <a:endParaRPr lang="en-US" sz="930" dirty="0"/>
                     </a:p>
                   </a:txBody>
-                  <a:tcPr marL="91440" marR="91440" marT="45720" marB="45720">
+                  <a:tcPr>
                     <a:lnL w="6350" cap="flat" cmpd="sng" algn="ctr">
                       <a:solidFill>
                         <a:srgbClr val="CBD5E1"/>
@@ -15534,7 +16081,7 @@
                     <a:bodyPr/>
                     <a:lstStyle/>
                     <a:p>
-                      <a:pPr indent="0" marL="0">
+                      <a:pPr marL="0" indent="0">
                         <a:buNone/>
                       </a:pPr>
                       <a:r>
@@ -15548,7 +16095,7 @@
                       <a:endParaRPr lang="en-US" sz="930" dirty="0"/>
                     </a:p>
                   </a:txBody>
-                  <a:tcPr marL="91440" marR="91440" marT="45720" marB="45720">
+                  <a:tcPr>
                     <a:lnL w="6350" cap="flat" cmpd="sng" algn="ctr">
                       <a:solidFill>
                         <a:srgbClr val="CBD5E1"/>
@@ -15590,6 +16137,11 @@
                     </a:solidFill>
                   </a:tcPr>
                 </a:tc>
+                <a:extLst>
+                  <a:ext uri="{0D108BD9-81ED-4DB2-BD59-A6C34878D82A}">
+                    <a16:rowId xmlns:a16="http://schemas.microsoft.com/office/drawing/2014/main" val="10004"/>
+                  </a:ext>
+                </a:extLst>
               </a:tr>
               <a:tr h="263217">
                 <a:tc>
@@ -15597,7 +16149,7 @@
                     <a:bodyPr/>
                     <a:lstStyle/>
                     <a:p>
-                      <a:pPr indent="0" marL="0">
+                      <a:pPr marL="0" indent="0">
                         <a:buNone/>
                       </a:pPr>
                       <a:r>
@@ -15611,7 +16163,7 @@
                       <a:endParaRPr lang="en-US" sz="930" dirty="0"/>
                     </a:p>
                   </a:txBody>
-                  <a:tcPr marL="91440" marR="91440" marT="45720" marB="45720">
+                  <a:tcPr>
                     <a:lnL w="6350" cap="flat" cmpd="sng" algn="ctr">
                       <a:solidFill>
                         <a:srgbClr val="CBD5E1"/>
@@ -15658,7 +16210,7 @@
                     <a:bodyPr/>
                     <a:lstStyle/>
                     <a:p>
-                      <a:pPr indent="0" marL="0">
+                      <a:pPr marL="0" indent="0">
                         <a:buNone/>
                       </a:pPr>
                       <a:r>
@@ -15672,7 +16224,7 @@
                       <a:endParaRPr lang="en-US" sz="930" dirty="0"/>
                     </a:p>
                   </a:txBody>
-                  <a:tcPr marL="91440" marR="91440" marT="45720" marB="45720">
+                  <a:tcPr>
                     <a:lnL w="6350" cap="flat" cmpd="sng" algn="ctr">
                       <a:solidFill>
                         <a:srgbClr val="CBD5E1"/>
@@ -15719,7 +16271,7 @@
                     <a:bodyPr/>
                     <a:lstStyle/>
                     <a:p>
-                      <a:pPr indent="0" marL="0">
+                      <a:pPr marL="0" indent="0">
                         <a:buNone/>
                       </a:pPr>
                       <a:r>
@@ -15733,7 +16285,7 @@
                       <a:endParaRPr lang="en-US" sz="930" dirty="0"/>
                     </a:p>
                   </a:txBody>
-                  <a:tcPr marL="91440" marR="91440" marT="45720" marB="45720">
+                  <a:tcPr>
                     <a:lnL w="6350" cap="flat" cmpd="sng" algn="ctr">
                       <a:solidFill>
                         <a:srgbClr val="CBD5E1"/>
@@ -15775,6 +16327,11 @@
                     </a:solidFill>
                   </a:tcPr>
                 </a:tc>
+                <a:extLst>
+                  <a:ext uri="{0D108BD9-81ED-4DB2-BD59-A6C34878D82A}">
+                    <a16:rowId xmlns:a16="http://schemas.microsoft.com/office/drawing/2014/main" val="10005"/>
+                  </a:ext>
+                </a:extLst>
               </a:tr>
               <a:tr h="263217">
                 <a:tc>
@@ -15782,7 +16339,7 @@
                     <a:bodyPr/>
                     <a:lstStyle/>
                     <a:p>
-                      <a:pPr indent="0" marL="0">
+                      <a:pPr marL="0" indent="0">
                         <a:buNone/>
                       </a:pPr>
                       <a:r>
@@ -15796,7 +16353,7 @@
                       <a:endParaRPr lang="en-US" sz="930" dirty="0"/>
                     </a:p>
                   </a:txBody>
-                  <a:tcPr marL="91440" marR="91440" marT="45720" marB="45720">
+                  <a:tcPr>
                     <a:lnL w="6350" cap="flat" cmpd="sng" algn="ctr">
                       <a:solidFill>
                         <a:srgbClr val="CBD5E1"/>
@@ -15843,7 +16400,7 @@
                     <a:bodyPr/>
                     <a:lstStyle/>
                     <a:p>
-                      <a:pPr indent="0" marL="0">
+                      <a:pPr marL="0" indent="0">
                         <a:buNone/>
                       </a:pPr>
                       <a:r>
@@ -15857,7 +16414,7 @@
                       <a:endParaRPr lang="en-US" sz="930" dirty="0"/>
                     </a:p>
                   </a:txBody>
-                  <a:tcPr marL="91440" marR="91440" marT="45720" marB="45720">
+                  <a:tcPr>
                     <a:lnL w="6350" cap="flat" cmpd="sng" algn="ctr">
                       <a:solidFill>
                         <a:srgbClr val="CBD5E1"/>
@@ -15904,7 +16461,7 @@
                     <a:bodyPr/>
                     <a:lstStyle/>
                     <a:p>
-                      <a:pPr indent="0" marL="0">
+                      <a:pPr marL="0" indent="0">
                         <a:buNone/>
                       </a:pPr>
                       <a:r>
@@ -15918,7 +16475,7 @@
                       <a:endParaRPr lang="en-US" sz="930" dirty="0"/>
                     </a:p>
                   </a:txBody>
-                  <a:tcPr marL="91440" marR="91440" marT="45720" marB="45720">
+                  <a:tcPr>
                     <a:lnL w="6350" cap="flat" cmpd="sng" algn="ctr">
                       <a:solidFill>
                         <a:srgbClr val="CBD5E1"/>
@@ -15960,6 +16517,11 @@
                     </a:solidFill>
                   </a:tcPr>
                 </a:tc>
+                <a:extLst>
+                  <a:ext uri="{0D108BD9-81ED-4DB2-BD59-A6C34878D82A}">
+                    <a16:rowId xmlns:a16="http://schemas.microsoft.com/office/drawing/2014/main" val="10006"/>
+                  </a:ext>
+                </a:extLst>
               </a:tr>
               <a:tr h="263217">
                 <a:tc>
@@ -15967,7 +16529,7 @@
                     <a:bodyPr/>
                     <a:lstStyle/>
                     <a:p>
-                      <a:pPr indent="0" marL="0">
+                      <a:pPr marL="0" indent="0">
                         <a:buNone/>
                       </a:pPr>
                       <a:r>
@@ -15981,7 +16543,7 @@
                       <a:endParaRPr lang="en-US" sz="930" dirty="0"/>
                     </a:p>
                   </a:txBody>
-                  <a:tcPr marL="91440" marR="91440" marT="45720" marB="45720">
+                  <a:tcPr>
                     <a:lnL w="6350" cap="flat" cmpd="sng" algn="ctr">
                       <a:solidFill>
                         <a:srgbClr val="CBD5E1"/>
@@ -16028,7 +16590,7 @@
                     <a:bodyPr/>
                     <a:lstStyle/>
                     <a:p>
-                      <a:pPr indent="0" marL="0">
+                      <a:pPr marL="0" indent="0">
                         <a:buNone/>
                       </a:pPr>
                       <a:r>
@@ -16042,7 +16604,7 @@
                       <a:endParaRPr lang="en-US" sz="930" dirty="0"/>
                     </a:p>
                   </a:txBody>
-                  <a:tcPr marL="91440" marR="91440" marT="45720" marB="45720">
+                  <a:tcPr>
                     <a:lnL w="6350" cap="flat" cmpd="sng" algn="ctr">
                       <a:solidFill>
                         <a:srgbClr val="CBD5E1"/>
@@ -16089,7 +16651,7 @@
                     <a:bodyPr/>
                     <a:lstStyle/>
                     <a:p>
-                      <a:pPr indent="0" marL="0">
+                      <a:pPr marL="0" indent="0">
                         <a:buNone/>
                       </a:pPr>
                       <a:r>
@@ -16103,7 +16665,7 @@
                       <a:endParaRPr lang="en-US" sz="930" dirty="0"/>
                     </a:p>
                   </a:txBody>
-                  <a:tcPr marL="91440" marR="91440" marT="45720" marB="45720">
+                  <a:tcPr>
                     <a:lnL w="6350" cap="flat" cmpd="sng" algn="ctr">
                       <a:solidFill>
                         <a:srgbClr val="CBD5E1"/>
@@ -16145,6 +16707,11 @@
                     </a:solidFill>
                   </a:tcPr>
                 </a:tc>
+                <a:extLst>
+                  <a:ext uri="{0D108BD9-81ED-4DB2-BD59-A6C34878D82A}">
+                    <a16:rowId xmlns:a16="http://schemas.microsoft.com/office/drawing/2014/main" val="10007"/>
+                  </a:ext>
+                </a:extLst>
               </a:tr>
               <a:tr h="263217">
                 <a:tc>
@@ -16152,7 +16719,7 @@
                     <a:bodyPr/>
                     <a:lstStyle/>
                     <a:p>
-                      <a:pPr indent="0" marL="0">
+                      <a:pPr marL="0" indent="0">
                         <a:buNone/>
                       </a:pPr>
                       <a:r>
@@ -16166,7 +16733,7 @@
                       <a:endParaRPr lang="en-US" sz="930" dirty="0"/>
                     </a:p>
                   </a:txBody>
-                  <a:tcPr marL="91440" marR="91440" marT="45720" marB="45720">
+                  <a:tcPr>
                     <a:lnL w="6350" cap="flat" cmpd="sng" algn="ctr">
                       <a:solidFill>
                         <a:srgbClr val="CBD5E1"/>
@@ -16213,7 +16780,7 @@
                     <a:bodyPr/>
                     <a:lstStyle/>
                     <a:p>
-                      <a:pPr indent="0" marL="0">
+                      <a:pPr marL="0" indent="0">
                         <a:buNone/>
                       </a:pPr>
                       <a:r>
@@ -16227,7 +16794,7 @@
                       <a:endParaRPr lang="en-US" sz="930" dirty="0"/>
                     </a:p>
                   </a:txBody>
-                  <a:tcPr marL="91440" marR="91440" marT="45720" marB="45720">
+                  <a:tcPr>
                     <a:lnL w="6350" cap="flat" cmpd="sng" algn="ctr">
                       <a:solidFill>
                         <a:srgbClr val="CBD5E1"/>
@@ -16274,7 +16841,7 @@
                     <a:bodyPr/>
                     <a:lstStyle/>
                     <a:p>
-                      <a:pPr indent="0" marL="0">
+                      <a:pPr marL="0" indent="0">
                         <a:buNone/>
                       </a:pPr>
                       <a:r>
@@ -16288,7 +16855,7 @@
                       <a:endParaRPr lang="en-US" sz="930" dirty="0"/>
                     </a:p>
                   </a:txBody>
-                  <a:tcPr marL="91440" marR="91440" marT="45720" marB="45720">
+                  <a:tcPr>
                     <a:lnL w="6350" cap="flat" cmpd="sng" algn="ctr">
                       <a:solidFill>
                         <a:srgbClr val="CBD5E1"/>
@@ -16330,6 +16897,11 @@
                     </a:solidFill>
                   </a:tcPr>
                 </a:tc>
+                <a:extLst>
+                  <a:ext uri="{0D108BD9-81ED-4DB2-BD59-A6C34878D82A}">
+                    <a16:rowId xmlns:a16="http://schemas.microsoft.com/office/drawing/2014/main" val="10008"/>
+                  </a:ext>
+                </a:extLst>
               </a:tr>
               <a:tr h="263217">
                 <a:tc>
@@ -16337,7 +16909,7 @@
                     <a:bodyPr/>
                     <a:lstStyle/>
                     <a:p>
-                      <a:pPr indent="0" marL="0">
+                      <a:pPr marL="0" indent="0">
                         <a:buNone/>
                       </a:pPr>
                       <a:r>
@@ -16351,7 +16923,7 @@
                       <a:endParaRPr lang="en-US" sz="930" dirty="0"/>
                     </a:p>
                   </a:txBody>
-                  <a:tcPr marL="91440" marR="91440" marT="45720" marB="45720">
+                  <a:tcPr>
                     <a:lnL w="6350" cap="flat" cmpd="sng" algn="ctr">
                       <a:solidFill>
                         <a:srgbClr val="CBD5E1"/>
@@ -16398,7 +16970,7 @@
                     <a:bodyPr/>
                     <a:lstStyle/>
                     <a:p>
-                      <a:pPr indent="0" marL="0">
+                      <a:pPr marL="0" indent="0">
                         <a:buNone/>
                       </a:pPr>
                       <a:r>
@@ -16412,7 +16984,7 @@
                       <a:endParaRPr lang="en-US" sz="930" dirty="0"/>
                     </a:p>
                   </a:txBody>
-                  <a:tcPr marL="91440" marR="91440" marT="45720" marB="45720">
+                  <a:tcPr>
                     <a:lnL w="6350" cap="flat" cmpd="sng" algn="ctr">
                       <a:solidFill>
                         <a:srgbClr val="CBD5E1"/>
@@ -16459,7 +17031,7 @@
                     <a:bodyPr/>
                     <a:lstStyle/>
                     <a:p>
-                      <a:pPr indent="0" marL="0">
+                      <a:pPr marL="0" indent="0">
                         <a:buNone/>
                       </a:pPr>
                       <a:r>
@@ -16473,7 +17045,7 @@
                       <a:endParaRPr lang="en-US" sz="930" dirty="0"/>
                     </a:p>
                   </a:txBody>
-                  <a:tcPr marL="91440" marR="91440" marT="45720" marB="45720">
+                  <a:tcPr>
                     <a:lnL w="6350" cap="flat" cmpd="sng" algn="ctr">
                       <a:solidFill>
                         <a:srgbClr val="CBD5E1"/>
@@ -16515,6 +17087,11 @@
                     </a:solidFill>
                   </a:tcPr>
                 </a:tc>
+                <a:extLst>
+                  <a:ext uri="{0D108BD9-81ED-4DB2-BD59-A6C34878D82A}">
+                    <a16:rowId xmlns:a16="http://schemas.microsoft.com/office/drawing/2014/main" val="10009"/>
+                  </a:ext>
+                </a:extLst>
               </a:tr>
               <a:tr h="263217">
                 <a:tc>
@@ -16522,7 +17099,7 @@
                     <a:bodyPr/>
                     <a:lstStyle/>
                     <a:p>
-                      <a:pPr indent="0" marL="0">
+                      <a:pPr marL="0" indent="0">
                         <a:buNone/>
                       </a:pPr>
                       <a:r>
@@ -16536,7 +17113,7 @@
                       <a:endParaRPr lang="en-US" sz="930" dirty="0"/>
                     </a:p>
                   </a:txBody>
-                  <a:tcPr marL="91440" marR="91440" marT="45720" marB="45720">
+                  <a:tcPr>
                     <a:lnL w="6350" cap="flat" cmpd="sng" algn="ctr">
                       <a:solidFill>
                         <a:srgbClr val="CBD5E1"/>
@@ -16583,7 +17160,7 @@
                     <a:bodyPr/>
                     <a:lstStyle/>
                     <a:p>
-                      <a:pPr indent="0" marL="0">
+                      <a:pPr marL="0" indent="0">
                         <a:buNone/>
                       </a:pPr>
                       <a:r>
@@ -16597,7 +17174,7 @@
                       <a:endParaRPr lang="en-US" sz="930" dirty="0"/>
                     </a:p>
                   </a:txBody>
-                  <a:tcPr marL="91440" marR="91440" marT="45720" marB="45720">
+                  <a:tcPr>
                     <a:lnL w="6350" cap="flat" cmpd="sng" algn="ctr">
                       <a:solidFill>
                         <a:srgbClr val="CBD5E1"/>
@@ -16644,7 +17221,7 @@
                     <a:bodyPr/>
                     <a:lstStyle/>
                     <a:p>
-                      <a:pPr indent="0" marL="0">
+                      <a:pPr marL="0" indent="0">
                         <a:buNone/>
                       </a:pPr>
                       <a:r>
@@ -16658,7 +17235,7 @@
                       <a:endParaRPr lang="en-US" sz="930" dirty="0"/>
                     </a:p>
                   </a:txBody>
-                  <a:tcPr marL="91440" marR="91440" marT="45720" marB="45720">
+                  <a:tcPr>
                     <a:lnL w="6350" cap="flat" cmpd="sng" algn="ctr">
                       <a:solidFill>
                         <a:srgbClr val="CBD5E1"/>
@@ -16700,6 +17277,11 @@
                     </a:solidFill>
                   </a:tcPr>
                 </a:tc>
+                <a:extLst>
+                  <a:ext uri="{0D108BD9-81ED-4DB2-BD59-A6C34878D82A}">
+                    <a16:rowId xmlns:a16="http://schemas.microsoft.com/office/drawing/2014/main" val="10010"/>
+                  </a:ext>
+                </a:extLst>
               </a:tr>
               <a:tr h="263217">
                 <a:tc>
@@ -16707,7 +17289,7 @@
                     <a:bodyPr/>
                     <a:lstStyle/>
                     <a:p>
-                      <a:pPr indent="0" marL="0">
+                      <a:pPr marL="0" indent="0">
                         <a:buNone/>
                       </a:pPr>
                       <a:r>
@@ -16721,7 +17303,7 @@
                       <a:endParaRPr lang="en-US" sz="930" dirty="0"/>
                     </a:p>
                   </a:txBody>
-                  <a:tcPr marL="91440" marR="91440" marT="45720" marB="45720">
+                  <a:tcPr>
                     <a:lnL w="6350" cap="flat" cmpd="sng" algn="ctr">
                       <a:solidFill>
                         <a:srgbClr val="CBD5E1"/>
@@ -16768,7 +17350,7 @@
                     <a:bodyPr/>
                     <a:lstStyle/>
                     <a:p>
-                      <a:pPr indent="0" marL="0">
+                      <a:pPr marL="0" indent="0">
                         <a:buNone/>
                       </a:pPr>
                       <a:r>
@@ -16782,7 +17364,7 @@
                       <a:endParaRPr lang="en-US" sz="930" dirty="0"/>
                     </a:p>
                   </a:txBody>
-                  <a:tcPr marL="91440" marR="91440" marT="45720" marB="45720">
+                  <a:tcPr>
                     <a:lnL w="6350" cap="flat" cmpd="sng" algn="ctr">
                       <a:solidFill>
                         <a:srgbClr val="CBD5E1"/>
@@ -16829,7 +17411,7 @@
                     <a:bodyPr/>
                     <a:lstStyle/>
                     <a:p>
-                      <a:pPr indent="0" marL="0">
+                      <a:pPr marL="0" indent="0">
                         <a:buNone/>
                       </a:pPr>
                       <a:r>
@@ -16843,7 +17425,7 @@
                       <a:endParaRPr lang="en-US" sz="930" dirty="0"/>
                     </a:p>
                   </a:txBody>
-                  <a:tcPr marL="91440" marR="91440" marT="45720" marB="45720">
+                  <a:tcPr>
                     <a:lnL w="6350" cap="flat" cmpd="sng" algn="ctr">
                       <a:solidFill>
                         <a:srgbClr val="CBD5E1"/>
@@ -16885,6 +17467,11 @@
                     </a:solidFill>
                   </a:tcPr>
                 </a:tc>
+                <a:extLst>
+                  <a:ext uri="{0D108BD9-81ED-4DB2-BD59-A6C34878D82A}">
+                    <a16:rowId xmlns:a16="http://schemas.microsoft.com/office/drawing/2014/main" val="10011"/>
+                  </a:ext>
+                </a:extLst>
               </a:tr>
               <a:tr h="263217">
                 <a:tc>
@@ -16892,7 +17479,7 @@
                     <a:bodyPr/>
                     <a:lstStyle/>
                     <a:p>
-                      <a:pPr indent="0" marL="0">
+                      <a:pPr marL="0" indent="0">
                         <a:buNone/>
                       </a:pPr>
                       <a:r>
@@ -16906,7 +17493,7 @@
                       <a:endParaRPr lang="en-US" sz="930" dirty="0"/>
                     </a:p>
                   </a:txBody>
-                  <a:tcPr marL="91440" marR="91440" marT="45720" marB="45720">
+                  <a:tcPr>
                     <a:lnL w="6350" cap="flat" cmpd="sng" algn="ctr">
                       <a:solidFill>
                         <a:srgbClr val="CBD5E1"/>
@@ -16953,7 +17540,7 @@
                     <a:bodyPr/>
                     <a:lstStyle/>
                     <a:p>
-                      <a:pPr indent="0" marL="0">
+                      <a:pPr marL="0" indent="0">
                         <a:buNone/>
                       </a:pPr>
                       <a:r>
@@ -16967,7 +17554,7 @@
                       <a:endParaRPr lang="en-US" sz="930" dirty="0"/>
                     </a:p>
                   </a:txBody>
-                  <a:tcPr marL="91440" marR="91440" marT="45720" marB="45720">
+                  <a:tcPr>
                     <a:lnL w="6350" cap="flat" cmpd="sng" algn="ctr">
                       <a:solidFill>
                         <a:srgbClr val="CBD5E1"/>
@@ -17014,7 +17601,7 @@
                     <a:bodyPr/>
                     <a:lstStyle/>
                     <a:p>
-                      <a:pPr indent="0" marL="0">
+                      <a:pPr marL="0" indent="0">
                         <a:buNone/>
                       </a:pPr>
                       <a:r>
@@ -17028,7 +17615,7 @@
                       <a:endParaRPr lang="en-US" sz="930" dirty="0"/>
                     </a:p>
                   </a:txBody>
-                  <a:tcPr marL="91440" marR="91440" marT="45720" marB="45720">
+                  <a:tcPr>
                     <a:lnL w="6350" cap="flat" cmpd="sng" algn="ctr">
                       <a:solidFill>
                         <a:srgbClr val="CBD5E1"/>
@@ -17070,6 +17657,11 @@
                     </a:solidFill>
                   </a:tcPr>
                 </a:tc>
+                <a:extLst>
+                  <a:ext uri="{0D108BD9-81ED-4DB2-BD59-A6C34878D82A}">
+                    <a16:rowId xmlns:a16="http://schemas.microsoft.com/office/drawing/2014/main" val="10012"/>
+                  </a:ext>
+                </a:extLst>
               </a:tr>
               <a:tr h="263217">
                 <a:tc>
@@ -17077,7 +17669,7 @@
                     <a:bodyPr/>
                     <a:lstStyle/>
                     <a:p>
-                      <a:pPr indent="0" marL="0">
+                      <a:pPr marL="0" indent="0">
                         <a:buNone/>
                       </a:pPr>
                       <a:r>
@@ -17091,7 +17683,7 @@
                       <a:endParaRPr lang="en-US" sz="930" dirty="0"/>
                     </a:p>
                   </a:txBody>
-                  <a:tcPr marL="91440" marR="91440" marT="45720" marB="45720">
+                  <a:tcPr>
                     <a:lnL w="6350" cap="flat" cmpd="sng" algn="ctr">
                       <a:solidFill>
                         <a:srgbClr val="CBD5E1"/>
@@ -17138,7 +17730,7 @@
                     <a:bodyPr/>
                     <a:lstStyle/>
                     <a:p>
-                      <a:pPr indent="0" marL="0">
+                      <a:pPr marL="0" indent="0">
                         <a:buNone/>
                       </a:pPr>
                       <a:r>
@@ -17152,7 +17744,7 @@
                       <a:endParaRPr lang="en-US" sz="930" dirty="0"/>
                     </a:p>
                   </a:txBody>
-                  <a:tcPr marL="91440" marR="91440" marT="45720" marB="45720">
+                  <a:tcPr>
                     <a:lnL w="6350" cap="flat" cmpd="sng" algn="ctr">
                       <a:solidFill>
                         <a:srgbClr val="CBD5E1"/>
@@ -17199,7 +17791,7 @@
                     <a:bodyPr/>
                     <a:lstStyle/>
                     <a:p>
-                      <a:pPr indent="0" marL="0">
+                      <a:pPr marL="0" indent="0">
                         <a:buNone/>
                       </a:pPr>
                       <a:r>
@@ -17213,7 +17805,7 @@
                       <a:endParaRPr lang="en-US" sz="930" dirty="0"/>
                     </a:p>
                   </a:txBody>
-                  <a:tcPr marL="91440" marR="91440" marT="45720" marB="45720">
+                  <a:tcPr>
                     <a:lnL w="6350" cap="flat" cmpd="sng" algn="ctr">
                       <a:solidFill>
                         <a:srgbClr val="CBD5E1"/>
@@ -17255,6 +17847,11 @@
                     </a:solidFill>
                   </a:tcPr>
                 </a:tc>
+                <a:extLst>
+                  <a:ext uri="{0D108BD9-81ED-4DB2-BD59-A6C34878D82A}">
+                    <a16:rowId xmlns:a16="http://schemas.microsoft.com/office/drawing/2014/main" val="10013"/>
+                  </a:ext>
+                </a:extLst>
               </a:tr>
             </a:tbl>
           </a:graphicData>
@@ -17276,6 +17873,7 @@
         <a:solidFill>
           <a:srgbClr val="EFF6FF"/>
         </a:solidFill>
+        <a:effectLst/>
       </p:bgPr>
     </p:bg>
     <p:spTree>
@@ -17316,6 +17914,13 @@
             <a:prstDash val="solid"/>
           </a:ln>
         </p:spPr>
+        <p:txBody>
+          <a:bodyPr/>
+          <a:lstStyle/>
+          <a:p>
+            <a:endParaRPr lang="en-PK"/>
+          </a:p>
+        </p:txBody>
       </p:sp>
       <p:sp>
         <p:nvSpPr>
@@ -17338,11 +17943,11 @@
           <a:bodyPr wrap="square" lIns="0" tIns="0" rIns="0" bIns="0" rtlCol="0" anchor="ctr"/>
           <a:lstStyle/>
           <a:p>
-            <a:pPr algn="ctr" indent="0" marL="0">
+            <a:pPr marL="0" indent="0" algn="ctr">
               <a:buNone/>
             </a:pPr>
             <a:r>
-              <a:rPr lang="en-US" sz="850" b="1" spc="150" kern="0" dirty="0">
+              <a:rPr lang="en-US" sz="850" b="1" kern="0" spc="150" dirty="0">
                 <a:solidFill>
                   <a:srgbClr val="FFFFFF"/>
                 </a:solidFill>
@@ -17377,6 +17982,13 @@
             <a:prstDash val="solid"/>
           </a:ln>
         </p:spPr>
+        <p:txBody>
+          <a:bodyPr/>
+          <a:lstStyle/>
+          <a:p>
+            <a:endParaRPr lang="en-PK"/>
+          </a:p>
+        </p:txBody>
       </p:sp>
       <p:sp>
         <p:nvSpPr>
@@ -17399,7 +18011,7 @@
           <a:bodyPr wrap="square" lIns="0" tIns="0" rIns="0" bIns="0" rtlCol="0" anchor="ctr"/>
           <a:lstStyle/>
           <a:p>
-            <a:pPr algn="ctr" indent="0" marL="0">
+            <a:pPr marL="0" indent="0" algn="ctr">
               <a:buNone/>
             </a:pPr>
             <a:r>
@@ -17410,15 +18022,12 @@
               </a:rPr>
               <a:t>GitHub: </a:t>
             </a:r>
-            <a:pPr algn="ctr" indent="0" marL="0">
-              <a:buNone/>
-            </a:pPr>
             <a:r>
               <a:rPr lang="en-US" sz="850" u="sng" dirty="0">
                 <a:solidFill>
                   <a:srgbClr val="5BA4CF"/>
                 </a:solidFill>
-                <a:hlinkClick r:id="rId1" invalidUrl="" action="" tgtFrame="" tooltip="" history="1" highlightClick="0" endSnd="0">
+                <a:hlinkClick r:id="rId3">
                   <a:extLst>
                     <a:ext uri="{A12FA001-AC4F-418D-AE19-62706E023703}">
                       <ahyp:hlinkClr xmlns:ahyp="http://schemas.microsoft.com/office/drawing/2018/hyperlinkcolor" val="tx"/>
@@ -17456,6 +18065,13 @@
             <a:prstDash val="solid"/>
           </a:ln>
         </p:spPr>
+        <p:txBody>
+          <a:bodyPr/>
+          <a:lstStyle/>
+          <a:p>
+            <a:endParaRPr lang="en-PK"/>
+          </a:p>
+        </p:txBody>
       </p:sp>
       <p:sp>
         <p:nvSpPr>
@@ -17478,7 +18094,7 @@
           <a:bodyPr wrap="square" lIns="0" tIns="0" rIns="0" bIns="0" rtlCol="0" anchor="ctr"/>
           <a:lstStyle/>
           <a:p>
-            <a:pPr algn="ctr" indent="0" marL="0">
+            <a:pPr marL="0" indent="0" algn="ctr">
               <a:buNone/>
             </a:pPr>
             <a:r>
@@ -17517,6 +18133,13 @@
             <a:prstDash val="solid"/>
           </a:ln>
         </p:spPr>
+        <p:txBody>
+          <a:bodyPr/>
+          <a:lstStyle/>
+          <a:p>
+            <a:endParaRPr lang="en-PK"/>
+          </a:p>
+        </p:txBody>
       </p:sp>
       <p:sp>
         <p:nvSpPr>
@@ -17539,7 +18162,7 @@
           <a:bodyPr wrap="square" lIns="0" tIns="0" rIns="0" bIns="0" rtlCol="0" anchor="ctr"/>
           <a:lstStyle/>
           <a:p>
-            <a:pPr algn="l" indent="0" marL="0">
+            <a:pPr marL="0" indent="0" algn="l">
               <a:buNone/>
             </a:pPr>
             <a:r>
@@ -17575,7 +18198,7 @@
           <a:bodyPr wrap="square" lIns="0" tIns="0" rIns="0" bIns="0" rtlCol="0" anchor="t"/>
           <a:lstStyle/>
           <a:p>
-            <a:pPr algn="l" indent="0" marL="0">
+            <a:pPr marL="0" indent="0" algn="l">
               <a:buNone/>
             </a:pPr>
             <a:r>
@@ -17614,13 +18237,20 @@
             <a:prstDash val="solid"/>
           </a:ln>
           <a:effectLst>
-            <a:outerShdw sx="100000" sy="100000" kx="0" ky="0" algn="bl" rotWithShape="0" blurRad="76200" dist="12700" dir="8100000">
+            <a:outerShdw blurRad="76200" dist="12700" dir="8100000" algn="bl" rotWithShape="0">
               <a:srgbClr val="000000">
                 <a:alpha val="8000"/>
               </a:srgbClr>
             </a:outerShdw>
           </a:effectLst>
         </p:spPr>
+        <p:txBody>
+          <a:bodyPr/>
+          <a:lstStyle/>
+          <a:p>
+            <a:endParaRPr lang="en-PK"/>
+          </a:p>
+        </p:txBody>
       </p:sp>
       <p:sp>
         <p:nvSpPr>
@@ -17646,6 +18276,13 @@
             <a:prstDash val="solid"/>
           </a:ln>
         </p:spPr>
+        <p:txBody>
+          <a:bodyPr/>
+          <a:lstStyle/>
+          <a:p>
+            <a:endParaRPr lang="en-PK"/>
+          </a:p>
+        </p:txBody>
       </p:sp>
       <p:sp>
         <p:nvSpPr>
@@ -17668,7 +18305,7 @@
           <a:bodyPr wrap="square" lIns="0" tIns="0" rIns="0" bIns="0" rtlCol="0" anchor="t"/>
           <a:lstStyle/>
           <a:p>
-            <a:pPr algn="l" indent="0" marL="0">
+            <a:pPr marL="0" indent="0" algn="l">
               <a:buNone/>
             </a:pPr>
             <a:r>
@@ -17704,7 +18341,7 @@
           <a:bodyPr wrap="square" lIns="0" tIns="0" rIns="0" bIns="0" rtlCol="0" anchor="t"/>
           <a:lstStyle/>
           <a:p>
-            <a:pPr algn="l" indent="0" marL="0">
+            <a:pPr marL="0" indent="0" algn="l">
               <a:buNone/>
             </a:pPr>
             <a:r>
@@ -17715,9 +18352,6 @@
               </a:rPr>
               <a:t>✕  </a:t>
             </a:r>
-            <a:pPr algn="l" indent="0" marL="0">
-              <a:buNone/>
-            </a:pPr>
             <a:r>
               <a:rPr lang="en-US" sz="980" dirty="0">
                 <a:solidFill>
@@ -17751,7 +18385,7 @@
           <a:bodyPr wrap="square" lIns="0" tIns="0" rIns="0" bIns="0" rtlCol="0" anchor="t"/>
           <a:lstStyle/>
           <a:p>
-            <a:pPr algn="l" indent="0" marL="0">
+            <a:pPr marL="0" indent="0" algn="l">
               <a:buNone/>
             </a:pPr>
             <a:r>
@@ -17762,9 +18396,6 @@
               </a:rPr>
               <a:t>✔  </a:t>
             </a:r>
-            <a:pPr algn="l" indent="0" marL="0">
-              <a:buNone/>
-            </a:pPr>
             <a:r>
               <a:rPr lang="en-US" sz="980" dirty="0">
                 <a:solidFill>
@@ -17801,13 +18432,20 @@
             <a:prstDash val="solid"/>
           </a:ln>
           <a:effectLst>
-            <a:outerShdw sx="100000" sy="100000" kx="0" ky="0" algn="bl" rotWithShape="0" blurRad="76200" dist="12700" dir="8100000">
+            <a:outerShdw blurRad="76200" dist="12700" dir="8100000" algn="bl" rotWithShape="0">
               <a:srgbClr val="000000">
                 <a:alpha val="8000"/>
               </a:srgbClr>
             </a:outerShdw>
           </a:effectLst>
         </p:spPr>
+        <p:txBody>
+          <a:bodyPr/>
+          <a:lstStyle/>
+          <a:p>
+            <a:endParaRPr lang="en-PK"/>
+          </a:p>
+        </p:txBody>
       </p:sp>
       <p:sp>
         <p:nvSpPr>
@@ -17833,6 +18471,13 @@
             <a:prstDash val="solid"/>
           </a:ln>
         </p:spPr>
+        <p:txBody>
+          <a:bodyPr/>
+          <a:lstStyle/>
+          <a:p>
+            <a:endParaRPr lang="en-PK"/>
+          </a:p>
+        </p:txBody>
       </p:sp>
       <p:sp>
         <p:nvSpPr>
@@ -17855,7 +18500,7 @@
           <a:bodyPr wrap="square" lIns="0" tIns="0" rIns="0" bIns="0" rtlCol="0" anchor="t"/>
           <a:lstStyle/>
           <a:p>
-            <a:pPr algn="l" indent="0" marL="0">
+            <a:pPr marL="0" indent="0" algn="l">
               <a:buNone/>
             </a:pPr>
             <a:r>
@@ -17891,7 +18536,7 @@
           <a:bodyPr wrap="square" lIns="0" tIns="0" rIns="0" bIns="0" rtlCol="0" anchor="t"/>
           <a:lstStyle/>
           <a:p>
-            <a:pPr algn="l" indent="0" marL="0">
+            <a:pPr marL="0" indent="0" algn="l">
               <a:buNone/>
             </a:pPr>
             <a:r>
@@ -17902,9 +18547,6 @@
               </a:rPr>
               <a:t>✕  </a:t>
             </a:r>
-            <a:pPr algn="l" indent="0" marL="0">
-              <a:buNone/>
-            </a:pPr>
             <a:r>
               <a:rPr lang="en-US" sz="980" dirty="0">
                 <a:solidFill>
@@ -17938,7 +18580,7 @@
           <a:bodyPr wrap="square" lIns="0" tIns="0" rIns="0" bIns="0" rtlCol="0" anchor="t"/>
           <a:lstStyle/>
           <a:p>
-            <a:pPr algn="l" indent="0" marL="0">
+            <a:pPr marL="0" indent="0" algn="l">
               <a:buNone/>
             </a:pPr>
             <a:r>
@@ -17949,9 +18591,6 @@
               </a:rPr>
               <a:t>✔  </a:t>
             </a:r>
-            <a:pPr algn="l" indent="0" marL="0">
-              <a:buNone/>
-            </a:pPr>
             <a:r>
               <a:rPr lang="en-US" sz="980" dirty="0">
                 <a:solidFill>
@@ -17988,13 +18627,20 @@
             <a:prstDash val="solid"/>
           </a:ln>
           <a:effectLst>
-            <a:outerShdw sx="100000" sy="100000" kx="0" ky="0" algn="bl" rotWithShape="0" blurRad="76200" dist="12700" dir="8100000">
+            <a:outerShdw blurRad="76200" dist="12700" dir="8100000" algn="bl" rotWithShape="0">
               <a:srgbClr val="000000">
                 <a:alpha val="8000"/>
               </a:srgbClr>
             </a:outerShdw>
           </a:effectLst>
         </p:spPr>
+        <p:txBody>
+          <a:bodyPr/>
+          <a:lstStyle/>
+          <a:p>
+            <a:endParaRPr lang="en-PK"/>
+          </a:p>
+        </p:txBody>
       </p:sp>
       <p:sp>
         <p:nvSpPr>
@@ -18020,6 +18666,13 @@
             <a:prstDash val="solid"/>
           </a:ln>
         </p:spPr>
+        <p:txBody>
+          <a:bodyPr/>
+          <a:lstStyle/>
+          <a:p>
+            <a:endParaRPr lang="en-PK"/>
+          </a:p>
+        </p:txBody>
       </p:sp>
       <p:sp>
         <p:nvSpPr>
@@ -18042,7 +18695,7 @@
           <a:bodyPr wrap="square" lIns="0" tIns="0" rIns="0" bIns="0" rtlCol="0" anchor="t"/>
           <a:lstStyle/>
           <a:p>
-            <a:pPr algn="l" indent="0" marL="0">
+            <a:pPr marL="0" indent="0" algn="l">
               <a:buNone/>
             </a:pPr>
             <a:r>
@@ -18078,7 +18731,7 @@
           <a:bodyPr wrap="square" lIns="0" tIns="0" rIns="0" bIns="0" rtlCol="0" anchor="t"/>
           <a:lstStyle/>
           <a:p>
-            <a:pPr algn="l" indent="0" marL="0">
+            <a:pPr marL="0" indent="0" algn="l">
               <a:buNone/>
             </a:pPr>
             <a:r>
@@ -18089,9 +18742,6 @@
               </a:rPr>
               <a:t>✕  </a:t>
             </a:r>
-            <a:pPr algn="l" indent="0" marL="0">
-              <a:buNone/>
-            </a:pPr>
             <a:r>
               <a:rPr lang="en-US" sz="980" dirty="0">
                 <a:solidFill>
@@ -18125,7 +18775,7 @@
           <a:bodyPr wrap="square" lIns="0" tIns="0" rIns="0" bIns="0" rtlCol="0" anchor="t"/>
           <a:lstStyle/>
           <a:p>
-            <a:pPr algn="l" indent="0" marL="0">
+            <a:pPr marL="0" indent="0" algn="l">
               <a:buNone/>
             </a:pPr>
             <a:r>
@@ -18136,9 +18786,6 @@
               </a:rPr>
               <a:t>✔  </a:t>
             </a:r>
-            <a:pPr algn="l" indent="0" marL="0">
-              <a:buNone/>
-            </a:pPr>
             <a:r>
               <a:rPr lang="en-US" sz="980" dirty="0">
                 <a:solidFill>
@@ -18175,13 +18822,20 @@
             <a:prstDash val="solid"/>
           </a:ln>
           <a:effectLst>
-            <a:outerShdw sx="100000" sy="100000" kx="0" ky="0" algn="bl" rotWithShape="0" blurRad="76200" dist="12700" dir="8100000">
+            <a:outerShdw blurRad="76200" dist="12700" dir="8100000" algn="bl" rotWithShape="0">
               <a:srgbClr val="000000">
                 <a:alpha val="8000"/>
               </a:srgbClr>
             </a:outerShdw>
           </a:effectLst>
         </p:spPr>
+        <p:txBody>
+          <a:bodyPr/>
+          <a:lstStyle/>
+          <a:p>
+            <a:endParaRPr lang="en-PK"/>
+          </a:p>
+        </p:txBody>
       </p:sp>
       <p:sp>
         <p:nvSpPr>
@@ -18207,6 +18861,13 @@
             <a:prstDash val="solid"/>
           </a:ln>
         </p:spPr>
+        <p:txBody>
+          <a:bodyPr/>
+          <a:lstStyle/>
+          <a:p>
+            <a:endParaRPr lang="en-PK"/>
+          </a:p>
+        </p:txBody>
       </p:sp>
       <p:sp>
         <p:nvSpPr>
@@ -18229,7 +18890,7 @@
           <a:bodyPr wrap="square" lIns="0" tIns="0" rIns="0" bIns="0" rtlCol="0" anchor="t"/>
           <a:lstStyle/>
           <a:p>
-            <a:pPr algn="l" indent="0" marL="0">
+            <a:pPr marL="0" indent="0" algn="l">
               <a:buNone/>
             </a:pPr>
             <a:r>
@@ -18265,7 +18926,7 @@
           <a:bodyPr wrap="square" lIns="0" tIns="0" rIns="0" bIns="0" rtlCol="0" anchor="t"/>
           <a:lstStyle/>
           <a:p>
-            <a:pPr algn="l" indent="0" marL="0">
+            <a:pPr marL="0" indent="0" algn="l">
               <a:buNone/>
             </a:pPr>
             <a:r>
@@ -18276,9 +18937,6 @@
               </a:rPr>
               <a:t>✕  </a:t>
             </a:r>
-            <a:pPr algn="l" indent="0" marL="0">
-              <a:buNone/>
-            </a:pPr>
             <a:r>
               <a:rPr lang="en-US" sz="980" dirty="0">
                 <a:solidFill>
@@ -18312,7 +18970,7 @@
           <a:bodyPr wrap="square" lIns="0" tIns="0" rIns="0" bIns="0" rtlCol="0" anchor="t"/>
           <a:lstStyle/>
           <a:p>
-            <a:pPr algn="l" indent="0" marL="0">
+            <a:pPr marL="0" indent="0" algn="l">
               <a:buNone/>
             </a:pPr>
             <a:r>
@@ -18323,9 +18981,6 @@
               </a:rPr>
               <a:t>✔  </a:t>
             </a:r>
-            <a:pPr algn="l" indent="0" marL="0">
-              <a:buNone/>
-            </a:pPr>
             <a:r>
               <a:rPr lang="en-US" sz="980" dirty="0">
                 <a:solidFill>
@@ -18362,13 +19017,20 @@
             <a:prstDash val="solid"/>
           </a:ln>
           <a:effectLst>
-            <a:outerShdw sx="100000" sy="100000" kx="0" ky="0" algn="bl" rotWithShape="0" blurRad="76200" dist="12700" dir="8100000">
+            <a:outerShdw blurRad="76200" dist="12700" dir="8100000" algn="bl" rotWithShape="0">
               <a:srgbClr val="000000">
                 <a:alpha val="8000"/>
               </a:srgbClr>
             </a:outerShdw>
           </a:effectLst>
         </p:spPr>
+        <p:txBody>
+          <a:bodyPr/>
+          <a:lstStyle/>
+          <a:p>
+            <a:endParaRPr lang="en-PK"/>
+          </a:p>
+        </p:txBody>
       </p:sp>
       <p:sp>
         <p:nvSpPr>
@@ -18394,6 +19056,13 @@
             <a:prstDash val="solid"/>
           </a:ln>
         </p:spPr>
+        <p:txBody>
+          <a:bodyPr/>
+          <a:lstStyle/>
+          <a:p>
+            <a:endParaRPr lang="en-PK"/>
+          </a:p>
+        </p:txBody>
       </p:sp>
       <p:sp>
         <p:nvSpPr>
@@ -18416,7 +19085,7 @@
           <a:bodyPr wrap="square" lIns="0" tIns="0" rIns="0" bIns="0" rtlCol="0" anchor="t"/>
           <a:lstStyle/>
           <a:p>
-            <a:pPr algn="l" indent="0" marL="0">
+            <a:pPr marL="0" indent="0" algn="l">
               <a:buNone/>
             </a:pPr>
             <a:r>
@@ -18452,7 +19121,7 @@
           <a:bodyPr wrap="square" lIns="0" tIns="0" rIns="0" bIns="0" rtlCol="0" anchor="t"/>
           <a:lstStyle/>
           <a:p>
-            <a:pPr algn="l" indent="0" marL="0">
+            <a:pPr marL="0" indent="0" algn="l">
               <a:buNone/>
             </a:pPr>
             <a:r>
@@ -18463,9 +19132,6 @@
               </a:rPr>
               <a:t>✕  </a:t>
             </a:r>
-            <a:pPr algn="l" indent="0" marL="0">
-              <a:buNone/>
-            </a:pPr>
             <a:r>
               <a:rPr lang="en-US" sz="980" dirty="0">
                 <a:solidFill>
@@ -18499,7 +19165,7 @@
           <a:bodyPr wrap="square" lIns="0" tIns="0" rIns="0" bIns="0" rtlCol="0" anchor="t"/>
           <a:lstStyle/>
           <a:p>
-            <a:pPr algn="l" indent="0" marL="0">
+            <a:pPr marL="0" indent="0" algn="l">
               <a:buNone/>
             </a:pPr>
             <a:r>
@@ -18510,9 +19176,6 @@
               </a:rPr>
               <a:t>✔  </a:t>
             </a:r>
-            <a:pPr algn="l" indent="0" marL="0">
-              <a:buNone/>
-            </a:pPr>
             <a:r>
               <a:rPr lang="en-US" sz="980" dirty="0">
                 <a:solidFill>
@@ -18541,6 +19204,7 @@
         <a:solidFill>
           <a:srgbClr val="EFF6FF"/>
         </a:solidFill>
+        <a:effectLst/>
       </p:bgPr>
     </p:bg>
     <p:spTree>
@@ -18581,6 +19245,13 @@
             <a:prstDash val="solid"/>
           </a:ln>
         </p:spPr>
+        <p:txBody>
+          <a:bodyPr/>
+          <a:lstStyle/>
+          <a:p>
+            <a:endParaRPr lang="en-PK"/>
+          </a:p>
+        </p:txBody>
       </p:sp>
       <p:sp>
         <p:nvSpPr>
@@ -18603,11 +19274,11 @@
           <a:bodyPr wrap="square" lIns="0" tIns="0" rIns="0" bIns="0" rtlCol="0" anchor="ctr"/>
           <a:lstStyle/>
           <a:p>
-            <a:pPr algn="ctr" indent="0" marL="0">
+            <a:pPr marL="0" indent="0" algn="ctr">
               <a:buNone/>
             </a:pPr>
             <a:r>
-              <a:rPr lang="en-US" sz="850" b="1" spc="150" kern="0" dirty="0">
+              <a:rPr lang="en-US" sz="850" b="1" kern="0" spc="150" dirty="0">
                 <a:solidFill>
                   <a:srgbClr val="FFFFFF"/>
                 </a:solidFill>
@@ -18642,6 +19313,13 @@
             <a:prstDash val="solid"/>
           </a:ln>
         </p:spPr>
+        <p:txBody>
+          <a:bodyPr/>
+          <a:lstStyle/>
+          <a:p>
+            <a:endParaRPr lang="en-PK"/>
+          </a:p>
+        </p:txBody>
       </p:sp>
       <p:sp>
         <p:nvSpPr>
@@ -18664,7 +19342,7 @@
           <a:bodyPr wrap="square" lIns="0" tIns="0" rIns="0" bIns="0" rtlCol="0" anchor="ctr"/>
           <a:lstStyle/>
           <a:p>
-            <a:pPr algn="ctr" indent="0" marL="0">
+            <a:pPr marL="0" indent="0" algn="ctr">
               <a:buNone/>
             </a:pPr>
             <a:r>
@@ -18675,15 +19353,12 @@
               </a:rPr>
               <a:t>GitHub: </a:t>
             </a:r>
-            <a:pPr algn="ctr" indent="0" marL="0">
-              <a:buNone/>
-            </a:pPr>
             <a:r>
               <a:rPr lang="en-US" sz="850" u="sng" dirty="0">
                 <a:solidFill>
                   <a:srgbClr val="5BA4CF"/>
                 </a:solidFill>
-                <a:hlinkClick r:id="rId1" invalidUrl="" action="" tgtFrame="" tooltip="" history="1" highlightClick="0" endSnd="0">
+                <a:hlinkClick r:id="rId3">
                   <a:extLst>
                     <a:ext uri="{A12FA001-AC4F-418D-AE19-62706E023703}">
                       <ahyp:hlinkClr xmlns:ahyp="http://schemas.microsoft.com/office/drawing/2018/hyperlinkcolor" val="tx"/>
@@ -18721,6 +19396,13 @@
             <a:prstDash val="solid"/>
           </a:ln>
         </p:spPr>
+        <p:txBody>
+          <a:bodyPr/>
+          <a:lstStyle/>
+          <a:p>
+            <a:endParaRPr lang="en-PK"/>
+          </a:p>
+        </p:txBody>
       </p:sp>
       <p:sp>
         <p:nvSpPr>
@@ -18743,7 +19425,7 @@
           <a:bodyPr wrap="square" lIns="0" tIns="0" rIns="0" bIns="0" rtlCol="0" anchor="ctr"/>
           <a:lstStyle/>
           <a:p>
-            <a:pPr algn="ctr" indent="0" marL="0">
+            <a:pPr marL="0" indent="0" algn="ctr">
               <a:buNone/>
             </a:pPr>
             <a:r>
@@ -18782,6 +19464,13 @@
             <a:prstDash val="solid"/>
           </a:ln>
         </p:spPr>
+        <p:txBody>
+          <a:bodyPr/>
+          <a:lstStyle/>
+          <a:p>
+            <a:endParaRPr lang="en-PK"/>
+          </a:p>
+        </p:txBody>
       </p:sp>
       <p:sp>
         <p:nvSpPr>
@@ -18804,7 +19493,7 @@
           <a:bodyPr wrap="square" lIns="0" tIns="0" rIns="0" bIns="0" rtlCol="0" anchor="ctr"/>
           <a:lstStyle/>
           <a:p>
-            <a:pPr algn="l" indent="0" marL="0">
+            <a:pPr marL="0" indent="0" algn="l">
               <a:buNone/>
             </a:pPr>
             <a:r>
@@ -18840,7 +19529,7 @@
           <a:bodyPr wrap="square" lIns="0" tIns="0" rIns="0" bIns="0" rtlCol="0" anchor="t"/>
           <a:lstStyle/>
           <a:p>
-            <a:pPr algn="l" indent="0" marL="0">
+            <a:pPr marL="0" indent="0" algn="l">
               <a:buNone/>
             </a:pPr>
             <a:r>
@@ -18879,13 +19568,20 @@
             <a:prstDash val="solid"/>
           </a:ln>
           <a:effectLst>
-            <a:outerShdw sx="100000" sy="100000" kx="0" ky="0" algn="bl" rotWithShape="0" blurRad="127000" dist="25400" dir="8100000">
+            <a:outerShdw blurRad="127000" dist="25400" dir="8100000" algn="bl" rotWithShape="0">
               <a:srgbClr val="000000">
                 <a:alpha val="13000"/>
               </a:srgbClr>
             </a:outerShdw>
           </a:effectLst>
         </p:spPr>
+        <p:txBody>
+          <a:bodyPr/>
+          <a:lstStyle/>
+          <a:p>
+            <a:endParaRPr lang="en-PK"/>
+          </a:p>
+        </p:txBody>
       </p:sp>
       <p:sp>
         <p:nvSpPr>
@@ -18911,6 +19607,13 @@
             <a:prstDash val="solid"/>
           </a:ln>
         </p:spPr>
+        <p:txBody>
+          <a:bodyPr/>
+          <a:lstStyle/>
+          <a:p>
+            <a:endParaRPr lang="en-PK"/>
+          </a:p>
+        </p:txBody>
       </p:sp>
       <p:sp>
         <p:nvSpPr>
@@ -18933,7 +19636,7 @@
           <a:bodyPr wrap="square" lIns="0" tIns="0" rIns="0" bIns="0" rtlCol="0" anchor="ctr"/>
           <a:lstStyle/>
           <a:p>
-            <a:pPr algn="l" indent="0" marL="0">
+            <a:pPr marL="0" indent="0" algn="l">
               <a:buNone/>
             </a:pPr>
             <a:r>
@@ -18972,13 +19675,20 @@
             <a:prstDash val="solid"/>
           </a:ln>
           <a:effectLst>
-            <a:outerShdw sx="100000" sy="100000" kx="0" ky="0" algn="bl" rotWithShape="0" blurRad="76200" dist="12700" dir="8100000">
+            <a:outerShdw blurRad="76200" dist="12700" dir="8100000" algn="bl" rotWithShape="0">
               <a:srgbClr val="000000">
                 <a:alpha val="8000"/>
               </a:srgbClr>
             </a:outerShdw>
           </a:effectLst>
         </p:spPr>
+        <p:txBody>
+          <a:bodyPr/>
+          <a:lstStyle/>
+          <a:p>
+            <a:endParaRPr lang="en-PK"/>
+          </a:p>
+        </p:txBody>
       </p:sp>
       <p:sp>
         <p:nvSpPr>
@@ -19004,6 +19714,13 @@
             <a:prstDash val="solid"/>
           </a:ln>
         </p:spPr>
+        <p:txBody>
+          <a:bodyPr/>
+          <a:lstStyle/>
+          <a:p>
+            <a:endParaRPr lang="en-PK"/>
+          </a:p>
+        </p:txBody>
       </p:sp>
       <p:sp>
         <p:nvSpPr>
@@ -19029,6 +19746,13 @@
             <a:prstDash val="solid"/>
           </a:ln>
         </p:spPr>
+        <p:txBody>
+          <a:bodyPr/>
+          <a:lstStyle/>
+          <a:p>
+            <a:endParaRPr lang="en-PK"/>
+          </a:p>
+        </p:txBody>
       </p:sp>
       <p:sp>
         <p:nvSpPr>
@@ -19051,7 +19775,7 @@
           <a:bodyPr wrap="square" lIns="0" tIns="0" rIns="0" bIns="0" rtlCol="0" anchor="ctr"/>
           <a:lstStyle/>
           <a:p>
-            <a:pPr algn="ctr" indent="0" marL="0">
+            <a:pPr marL="0" indent="0" algn="ctr">
               <a:buNone/>
             </a:pPr>
             <a:r>
@@ -19087,7 +19811,7 @@
           <a:bodyPr wrap="square" lIns="0" tIns="0" rIns="0" bIns="0" rtlCol="0" anchor="ctr"/>
           <a:lstStyle/>
           <a:p>
-            <a:pPr algn="l" indent="0" marL="0">
+            <a:pPr marL="0" indent="0" algn="l">
               <a:buNone/>
             </a:pPr>
             <a:r>
@@ -19123,7 +19847,7 @@
           <a:bodyPr wrap="square" lIns="0" tIns="0" rIns="0" bIns="0" rtlCol="0" anchor="t"/>
           <a:lstStyle/>
           <a:p>
-            <a:pPr algn="l" indent="0" marL="0">
+            <a:pPr marL="0" indent="0" algn="l">
               <a:buNone/>
             </a:pPr>
             <a:r>
@@ -19137,7 +19861,7 @@
             <a:endParaRPr lang="en-US" sz="1100" dirty="0"/>
           </a:p>
           <a:p>
-            <a:pPr algn="l" indent="0" marL="0">
+            <a:pPr marL="0" indent="0" algn="l">
               <a:buNone/>
             </a:pPr>
             <a:r>
@@ -19151,7 +19875,7 @@
             <a:endParaRPr lang="en-US" sz="1100" dirty="0"/>
           </a:p>
           <a:p>
-            <a:pPr algn="l" indent="0" marL="0">
+            <a:pPr marL="0" indent="0" algn="l">
               <a:buNone/>
             </a:pPr>
             <a:r>
@@ -19190,13 +19914,20 @@
             <a:prstDash val="solid"/>
           </a:ln>
           <a:effectLst>
-            <a:outerShdw sx="100000" sy="100000" kx="0" ky="0" algn="bl" rotWithShape="0" blurRad="76200" dist="12700" dir="8100000">
+            <a:outerShdw blurRad="76200" dist="12700" dir="8100000" algn="bl" rotWithShape="0">
               <a:srgbClr val="000000">
                 <a:alpha val="8000"/>
               </a:srgbClr>
             </a:outerShdw>
           </a:effectLst>
         </p:spPr>
+        <p:txBody>
+          <a:bodyPr/>
+          <a:lstStyle/>
+          <a:p>
+            <a:endParaRPr lang="en-PK"/>
+          </a:p>
+        </p:txBody>
       </p:sp>
       <p:sp>
         <p:nvSpPr>
@@ -19222,6 +19953,13 @@
             <a:prstDash val="solid"/>
           </a:ln>
         </p:spPr>
+        <p:txBody>
+          <a:bodyPr/>
+          <a:lstStyle/>
+          <a:p>
+            <a:endParaRPr lang="en-PK"/>
+          </a:p>
+        </p:txBody>
       </p:sp>
       <p:sp>
         <p:nvSpPr>
@@ -19247,6 +19985,13 @@
             <a:prstDash val="solid"/>
           </a:ln>
         </p:spPr>
+        <p:txBody>
+          <a:bodyPr/>
+          <a:lstStyle/>
+          <a:p>
+            <a:endParaRPr lang="en-PK"/>
+          </a:p>
+        </p:txBody>
       </p:sp>
       <p:sp>
         <p:nvSpPr>
@@ -19269,7 +20014,7 @@
           <a:bodyPr wrap="square" lIns="0" tIns="0" rIns="0" bIns="0" rtlCol="0" anchor="ctr"/>
           <a:lstStyle/>
           <a:p>
-            <a:pPr algn="ctr" indent="0" marL="0">
+            <a:pPr marL="0" indent="0" algn="ctr">
               <a:buNone/>
             </a:pPr>
             <a:r>
@@ -19305,7 +20050,7 @@
           <a:bodyPr wrap="square" lIns="0" tIns="0" rIns="0" bIns="0" rtlCol="0" anchor="ctr"/>
           <a:lstStyle/>
           <a:p>
-            <a:pPr algn="l" indent="0" marL="0">
+            <a:pPr marL="0" indent="0" algn="l">
               <a:buNone/>
             </a:pPr>
             <a:r>
@@ -19341,7 +20086,7 @@
           <a:bodyPr wrap="square" lIns="0" tIns="0" rIns="0" bIns="0" rtlCol="0" anchor="t"/>
           <a:lstStyle/>
           <a:p>
-            <a:pPr algn="l" indent="0" marL="0">
+            <a:pPr marL="0" indent="0" algn="l">
               <a:buNone/>
             </a:pPr>
             <a:r>
@@ -19355,7 +20100,7 @@
             <a:endParaRPr lang="en-US" sz="1100" dirty="0"/>
           </a:p>
           <a:p>
-            <a:pPr algn="l" indent="0" marL="0">
+            <a:pPr marL="0" indent="0" algn="l">
               <a:buNone/>
             </a:pPr>
             <a:r>
@@ -19394,13 +20139,20 @@
             <a:prstDash val="solid"/>
           </a:ln>
           <a:effectLst>
-            <a:outerShdw sx="100000" sy="100000" kx="0" ky="0" algn="bl" rotWithShape="0" blurRad="76200" dist="12700" dir="8100000">
+            <a:outerShdw blurRad="76200" dist="12700" dir="8100000" algn="bl" rotWithShape="0">
               <a:srgbClr val="000000">
                 <a:alpha val="8000"/>
               </a:srgbClr>
             </a:outerShdw>
           </a:effectLst>
         </p:spPr>
+        <p:txBody>
+          <a:bodyPr/>
+          <a:lstStyle/>
+          <a:p>
+            <a:endParaRPr lang="en-PK"/>
+          </a:p>
+        </p:txBody>
       </p:sp>
       <p:sp>
         <p:nvSpPr>
@@ -19426,6 +20178,13 @@
             <a:prstDash val="solid"/>
           </a:ln>
         </p:spPr>
+        <p:txBody>
+          <a:bodyPr/>
+          <a:lstStyle/>
+          <a:p>
+            <a:endParaRPr lang="en-PK"/>
+          </a:p>
+        </p:txBody>
       </p:sp>
       <p:sp>
         <p:nvSpPr>
@@ -19451,6 +20210,13 @@
             <a:prstDash val="solid"/>
           </a:ln>
         </p:spPr>
+        <p:txBody>
+          <a:bodyPr/>
+          <a:lstStyle/>
+          <a:p>
+            <a:endParaRPr lang="en-PK"/>
+          </a:p>
+        </p:txBody>
       </p:sp>
       <p:sp>
         <p:nvSpPr>
@@ -19473,7 +20239,7 @@
           <a:bodyPr wrap="square" lIns="0" tIns="0" rIns="0" bIns="0" rtlCol="0" anchor="ctr"/>
           <a:lstStyle/>
           <a:p>
-            <a:pPr algn="ctr" indent="0" marL="0">
+            <a:pPr marL="0" indent="0" algn="ctr">
               <a:buNone/>
             </a:pPr>
             <a:r>
@@ -19509,7 +20275,7 @@
           <a:bodyPr wrap="square" lIns="0" tIns="0" rIns="0" bIns="0" rtlCol="0" anchor="ctr"/>
           <a:lstStyle/>
           <a:p>
-            <a:pPr algn="l" indent="0" marL="0">
+            <a:pPr marL="0" indent="0" algn="l">
               <a:buNone/>
             </a:pPr>
             <a:r>
@@ -19545,7 +20311,7 @@
           <a:bodyPr wrap="square" lIns="0" tIns="0" rIns="0" bIns="0" rtlCol="0" anchor="t"/>
           <a:lstStyle/>
           <a:p>
-            <a:pPr algn="l" indent="0" marL="0">
+            <a:pPr marL="0" indent="0" algn="l">
               <a:buNone/>
             </a:pPr>
             <a:r>
@@ -19559,7 +20325,7 @@
             <a:endParaRPr lang="en-US" sz="1100" dirty="0"/>
           </a:p>
           <a:p>
-            <a:pPr algn="l" indent="0" marL="0">
+            <a:pPr marL="0" indent="0" algn="l">
               <a:buNone/>
             </a:pPr>
             <a:r>
@@ -19573,7 +20339,7 @@
             <a:endParaRPr lang="en-US" sz="1100" dirty="0"/>
           </a:p>
           <a:p>
-            <a:pPr algn="l" indent="0" marL="0">
+            <a:pPr marL="0" indent="0" algn="l">
               <a:buNone/>
             </a:pPr>
             <a:r>
@@ -19612,6 +20378,13 @@
             <a:prstDash val="solid"/>
           </a:ln>
         </p:spPr>
+        <p:txBody>
+          <a:bodyPr/>
+          <a:lstStyle/>
+          <a:p>
+            <a:endParaRPr lang="en-PK"/>
+          </a:p>
+        </p:txBody>
       </p:sp>
       <p:sp>
         <p:nvSpPr>
@@ -19634,7 +20407,7 @@
           <a:bodyPr wrap="square" lIns="0" tIns="0" rIns="0" bIns="0" rtlCol="0" anchor="ctr"/>
           <a:lstStyle/>
           <a:p>
-            <a:pPr algn="l" indent="0" marL="0">
+            <a:pPr marL="0" indent="0" algn="l">
               <a:buNone/>
             </a:pPr>
             <a:r>
@@ -19645,9 +20418,6 @@
               </a:rPr>
               <a:t>Constraint: </a:t>
             </a:r>
-            <a:pPr algn="l" indent="0" marL="0">
-              <a:buNone/>
-            </a:pPr>
             <a:r>
               <a:rPr lang="en-US" sz="1150" dirty="0">
                 <a:solidFill>
@@ -19676,6 +20446,7 @@
         <a:solidFill>
           <a:srgbClr val="EFF6FF"/>
         </a:solidFill>
+        <a:effectLst/>
       </p:bgPr>
     </p:bg>
     <p:spTree>
@@ -19716,6 +20487,13 @@
             <a:prstDash val="solid"/>
           </a:ln>
         </p:spPr>
+        <p:txBody>
+          <a:bodyPr/>
+          <a:lstStyle/>
+          <a:p>
+            <a:endParaRPr lang="en-PK"/>
+          </a:p>
+        </p:txBody>
       </p:sp>
       <p:sp>
         <p:nvSpPr>
@@ -19738,11 +20516,11 @@
           <a:bodyPr wrap="square" lIns="0" tIns="0" rIns="0" bIns="0" rtlCol="0" anchor="ctr"/>
           <a:lstStyle/>
           <a:p>
-            <a:pPr algn="ctr" indent="0" marL="0">
+            <a:pPr marL="0" indent="0" algn="ctr">
               <a:buNone/>
             </a:pPr>
             <a:r>
-              <a:rPr lang="en-US" sz="850" b="1" spc="150" kern="0" dirty="0">
+              <a:rPr lang="en-US" sz="850" b="1" kern="0" spc="150" dirty="0">
                 <a:solidFill>
                   <a:srgbClr val="FFFFFF"/>
                 </a:solidFill>
@@ -19777,6 +20555,13 @@
             <a:prstDash val="solid"/>
           </a:ln>
         </p:spPr>
+        <p:txBody>
+          <a:bodyPr/>
+          <a:lstStyle/>
+          <a:p>
+            <a:endParaRPr lang="en-PK"/>
+          </a:p>
+        </p:txBody>
       </p:sp>
       <p:sp>
         <p:nvSpPr>
@@ -19799,7 +20584,7 @@
           <a:bodyPr wrap="square" lIns="0" tIns="0" rIns="0" bIns="0" rtlCol="0" anchor="ctr"/>
           <a:lstStyle/>
           <a:p>
-            <a:pPr algn="ctr" indent="0" marL="0">
+            <a:pPr marL="0" indent="0" algn="ctr">
               <a:buNone/>
             </a:pPr>
             <a:r>
@@ -19810,15 +20595,12 @@
               </a:rPr>
               <a:t>GitHub: </a:t>
             </a:r>
-            <a:pPr algn="ctr" indent="0" marL="0">
-              <a:buNone/>
-            </a:pPr>
             <a:r>
               <a:rPr lang="en-US" sz="850" u="sng" dirty="0">
                 <a:solidFill>
                   <a:srgbClr val="5BA4CF"/>
                 </a:solidFill>
-                <a:hlinkClick r:id="rId1" invalidUrl="" action="" tgtFrame="" tooltip="" history="1" highlightClick="0" endSnd="0">
+                <a:hlinkClick r:id="rId3">
                   <a:extLst>
                     <a:ext uri="{A12FA001-AC4F-418D-AE19-62706E023703}">
                       <ahyp:hlinkClr xmlns:ahyp="http://schemas.microsoft.com/office/drawing/2018/hyperlinkcolor" val="tx"/>
@@ -19856,6 +20638,13 @@
             <a:prstDash val="solid"/>
           </a:ln>
         </p:spPr>
+        <p:txBody>
+          <a:bodyPr/>
+          <a:lstStyle/>
+          <a:p>
+            <a:endParaRPr lang="en-PK"/>
+          </a:p>
+        </p:txBody>
       </p:sp>
       <p:sp>
         <p:nvSpPr>
@@ -19878,7 +20667,7 @@
           <a:bodyPr wrap="square" lIns="0" tIns="0" rIns="0" bIns="0" rtlCol="0" anchor="ctr"/>
           <a:lstStyle/>
           <a:p>
-            <a:pPr algn="ctr" indent="0" marL="0">
+            <a:pPr marL="0" indent="0" algn="ctr">
               <a:buNone/>
             </a:pPr>
             <a:r>
@@ -19917,6 +20706,13 @@
             <a:prstDash val="solid"/>
           </a:ln>
         </p:spPr>
+        <p:txBody>
+          <a:bodyPr/>
+          <a:lstStyle/>
+          <a:p>
+            <a:endParaRPr lang="en-PK"/>
+          </a:p>
+        </p:txBody>
       </p:sp>
       <p:sp>
         <p:nvSpPr>
@@ -19939,7 +20735,7 @@
           <a:bodyPr wrap="square" lIns="0" tIns="0" rIns="0" bIns="0" rtlCol="0" anchor="ctr"/>
           <a:lstStyle/>
           <a:p>
-            <a:pPr algn="l" indent="0" marL="0">
+            <a:pPr marL="0" indent="0" algn="l">
               <a:buNone/>
             </a:pPr>
             <a:r>
@@ -19975,7 +20771,7 @@
           <a:bodyPr wrap="square" lIns="0" tIns="0" rIns="0" bIns="0" rtlCol="0" anchor="t"/>
           <a:lstStyle/>
           <a:p>
-            <a:pPr algn="l" indent="0" marL="0">
+            <a:pPr marL="0" indent="0" algn="l">
               <a:buNone/>
             </a:pPr>
             <a:r>
@@ -19992,7 +20788,7 @@
       </p:sp>
       <p:graphicFrame>
         <p:nvGraphicFramePr>
-          <p:cNvPr id="8" name="Table 0"/>
+          <p:cNvPr id="11" name="Table 0"/>
           <p:cNvGraphicFramePr>
             <a:graphicFrameLocks noGrp="1"/>
           </p:cNvGraphicFramePr>
@@ -20013,11 +20809,41 @@
             <a:tbl>
               <a:tblPr/>
               <a:tblGrid>
-                <a:gridCol w="475488"/>
-                <a:gridCol w="2377440"/>
-                <a:gridCol w="2267712"/>
-                <a:gridCol w="1828800"/>
-                <a:gridCol w="1554480"/>
+                <a:gridCol w="475488">
+                  <a:extLst>
+                    <a:ext uri="{9D8B030D-6E8A-4147-A177-3AD203B41FA5}">
+                      <a16:colId xmlns:a16="http://schemas.microsoft.com/office/drawing/2014/main" val="20000"/>
+                    </a:ext>
+                  </a:extLst>
+                </a:gridCol>
+                <a:gridCol w="2377440">
+                  <a:extLst>
+                    <a:ext uri="{9D8B030D-6E8A-4147-A177-3AD203B41FA5}">
+                      <a16:colId xmlns:a16="http://schemas.microsoft.com/office/drawing/2014/main" val="20001"/>
+                    </a:ext>
+                  </a:extLst>
+                </a:gridCol>
+                <a:gridCol w="2267712">
+                  <a:extLst>
+                    <a:ext uri="{9D8B030D-6E8A-4147-A177-3AD203B41FA5}">
+                      <a16:colId xmlns:a16="http://schemas.microsoft.com/office/drawing/2014/main" val="20002"/>
+                    </a:ext>
+                  </a:extLst>
+                </a:gridCol>
+                <a:gridCol w="1828800">
+                  <a:extLst>
+                    <a:ext uri="{9D8B030D-6E8A-4147-A177-3AD203B41FA5}">
+                      <a16:colId xmlns:a16="http://schemas.microsoft.com/office/drawing/2014/main" val="20003"/>
+                    </a:ext>
+                  </a:extLst>
+                </a:gridCol>
+                <a:gridCol w="1554480">
+                  <a:extLst>
+                    <a:ext uri="{9D8B030D-6E8A-4147-A177-3AD203B41FA5}">
+                      <a16:colId xmlns:a16="http://schemas.microsoft.com/office/drawing/2014/main" val="20004"/>
+                    </a:ext>
+                  </a:extLst>
+                </a:gridCol>
               </a:tblGrid>
               <a:tr h="635508">
                 <a:tc>
@@ -20025,7 +20851,7 @@
                     <a:bodyPr/>
                     <a:lstStyle/>
                     <a:p>
-                      <a:pPr indent="0" marL="0">
+                      <a:pPr marL="0" indent="0">
                         <a:buNone/>
                       </a:pPr>
                       <a:r>
@@ -20039,7 +20865,7 @@
                       <a:endParaRPr lang="en-US" sz="1000" dirty="0"/>
                     </a:p>
                   </a:txBody>
-                  <a:tcPr marL="91440" marR="91440" marT="45720" marB="45720">
+                  <a:tcPr>
                     <a:lnL w="6350" cap="flat" cmpd="sng" algn="ctr">
                       <a:solidFill>
                         <a:srgbClr val="CBD5E1"/>
@@ -20086,7 +20912,7 @@
                     <a:bodyPr/>
                     <a:lstStyle/>
                     <a:p>
-                      <a:pPr indent="0" marL="0">
+                      <a:pPr marL="0" indent="0">
                         <a:buNone/>
                       </a:pPr>
                       <a:r>
@@ -20100,7 +20926,7 @@
                       <a:endParaRPr lang="en-US" sz="1000" dirty="0"/>
                     </a:p>
                   </a:txBody>
-                  <a:tcPr marL="91440" marR="91440" marT="45720" marB="45720">
+                  <a:tcPr>
                     <a:lnL w="6350" cap="flat" cmpd="sng" algn="ctr">
                       <a:solidFill>
                         <a:srgbClr val="CBD5E1"/>
@@ -20147,7 +20973,7 @@
                     <a:bodyPr/>
                     <a:lstStyle/>
                     <a:p>
-                      <a:pPr indent="0" marL="0">
+                      <a:pPr marL="0" indent="0">
                         <a:buNone/>
                       </a:pPr>
                       <a:r>
@@ -20161,7 +20987,7 @@
                       <a:endParaRPr lang="en-US" sz="1000" dirty="0"/>
                     </a:p>
                   </a:txBody>
-                  <a:tcPr marL="91440" marR="91440" marT="45720" marB="45720">
+                  <a:tcPr>
                     <a:lnL w="6350" cap="flat" cmpd="sng" algn="ctr">
                       <a:solidFill>
                         <a:srgbClr val="CBD5E1"/>
@@ -20208,7 +21034,7 @@
                     <a:bodyPr/>
                     <a:lstStyle/>
                     <a:p>
-                      <a:pPr indent="0" marL="0">
+                      <a:pPr marL="0" indent="0">
                         <a:buNone/>
                       </a:pPr>
                       <a:r>
@@ -20222,7 +21048,7 @@
                       <a:endParaRPr lang="en-US" sz="1000" dirty="0"/>
                     </a:p>
                   </a:txBody>
-                  <a:tcPr marL="91440" marR="91440" marT="45720" marB="45720">
+                  <a:tcPr>
                     <a:lnL w="6350" cap="flat" cmpd="sng" algn="ctr">
                       <a:solidFill>
                         <a:srgbClr val="CBD5E1"/>
@@ -20269,7 +21095,7 @@
                     <a:bodyPr/>
                     <a:lstStyle/>
                     <a:p>
-                      <a:pPr indent="0" marL="0">
+                      <a:pPr marL="0" indent="0">
                         <a:buNone/>
                       </a:pPr>
                       <a:r>
@@ -20283,7 +21109,7 @@
                       <a:endParaRPr lang="en-US" sz="1000" dirty="0"/>
                     </a:p>
                   </a:txBody>
-                  <a:tcPr marL="91440" marR="91440" marT="45720" marB="45720">
+                  <a:tcPr>
                     <a:lnL w="6350" cap="flat" cmpd="sng" algn="ctr">
                       <a:solidFill>
                         <a:srgbClr val="CBD5E1"/>
@@ -20325,6 +21151,11 @@
                     </a:solidFill>
                   </a:tcPr>
                 </a:tc>
+                <a:extLst>
+                  <a:ext uri="{0D108BD9-81ED-4DB2-BD59-A6C34878D82A}">
+                    <a16:rowId xmlns:a16="http://schemas.microsoft.com/office/drawing/2014/main" val="10000"/>
+                  </a:ext>
+                </a:extLst>
               </a:tr>
               <a:tr h="635508">
                 <a:tc>
@@ -20332,7 +21163,7 @@
                     <a:bodyPr/>
                     <a:lstStyle/>
                     <a:p>
-                      <a:pPr indent="0" marL="0">
+                      <a:pPr marL="0" indent="0">
                         <a:buNone/>
                       </a:pPr>
                       <a:r>
@@ -20346,7 +21177,7 @@
                       <a:endParaRPr lang="en-US" sz="1000" dirty="0"/>
                     </a:p>
                   </a:txBody>
-                  <a:tcPr marL="91440" marR="91440" marT="45720" marB="45720">
+                  <a:tcPr>
                     <a:lnL w="6350" cap="flat" cmpd="sng" algn="ctr">
                       <a:solidFill>
                         <a:srgbClr val="CBD5E1"/>
@@ -20393,7 +21224,7 @@
                     <a:bodyPr/>
                     <a:lstStyle/>
                     <a:p>
-                      <a:pPr indent="0" marL="0">
+                      <a:pPr marL="0" indent="0">
                         <a:buNone/>
                       </a:pPr>
                       <a:r>
@@ -20407,7 +21238,7 @@
                       <a:endParaRPr lang="en-US" sz="1000" dirty="0"/>
                     </a:p>
                   </a:txBody>
-                  <a:tcPr marL="91440" marR="91440" marT="45720" marB="45720">
+                  <a:tcPr>
                     <a:lnL w="6350" cap="flat" cmpd="sng" algn="ctr">
                       <a:solidFill>
                         <a:srgbClr val="CBD5E1"/>
@@ -20454,7 +21285,7 @@
                     <a:bodyPr/>
                     <a:lstStyle/>
                     <a:p>
-                      <a:pPr indent="0" marL="0">
+                      <a:pPr marL="0" indent="0">
                         <a:buNone/>
                       </a:pPr>
                       <a:r>
@@ -20468,7 +21299,7 @@
                       <a:endParaRPr lang="en-US" sz="1000" dirty="0"/>
                     </a:p>
                   </a:txBody>
-                  <a:tcPr marL="91440" marR="91440" marT="45720" marB="45720">
+                  <a:tcPr>
                     <a:lnL w="6350" cap="flat" cmpd="sng" algn="ctr">
                       <a:solidFill>
                         <a:srgbClr val="CBD5E1"/>
@@ -20515,7 +21346,7 @@
                     <a:bodyPr/>
                     <a:lstStyle/>
                     <a:p>
-                      <a:pPr indent="0" marL="0">
+                      <a:pPr marL="0" indent="0">
                         <a:buNone/>
                       </a:pPr>
                       <a:r>
@@ -20529,7 +21360,7 @@
                       <a:endParaRPr lang="en-US" sz="1000" dirty="0"/>
                     </a:p>
                   </a:txBody>
-                  <a:tcPr marL="91440" marR="91440" marT="45720" marB="45720">
+                  <a:tcPr>
                     <a:lnL w="6350" cap="flat" cmpd="sng" algn="ctr">
                       <a:solidFill>
                         <a:srgbClr val="CBD5E1"/>
@@ -20576,7 +21407,7 @@
                     <a:bodyPr/>
                     <a:lstStyle/>
                     <a:p>
-                      <a:pPr indent="0" marL="0">
+                      <a:pPr marL="0" indent="0">
                         <a:buNone/>
                       </a:pPr>
                       <a:r>
@@ -20590,7 +21421,7 @@
                       <a:endParaRPr lang="en-US" sz="1000" dirty="0"/>
                     </a:p>
                   </a:txBody>
-                  <a:tcPr marL="91440" marR="91440" marT="45720" marB="45720">
+                  <a:tcPr>
                     <a:lnL w="6350" cap="flat" cmpd="sng" algn="ctr">
                       <a:solidFill>
                         <a:srgbClr val="CBD5E1"/>
@@ -20632,6 +21463,11 @@
                     </a:solidFill>
                   </a:tcPr>
                 </a:tc>
+                <a:extLst>
+                  <a:ext uri="{0D108BD9-81ED-4DB2-BD59-A6C34878D82A}">
+                    <a16:rowId xmlns:a16="http://schemas.microsoft.com/office/drawing/2014/main" val="10001"/>
+                  </a:ext>
+                </a:extLst>
               </a:tr>
               <a:tr h="635508">
                 <a:tc>
@@ -20639,7 +21475,7 @@
                     <a:bodyPr/>
                     <a:lstStyle/>
                     <a:p>
-                      <a:pPr indent="0" marL="0">
+                      <a:pPr marL="0" indent="0">
                         <a:buNone/>
                       </a:pPr>
                       <a:r>
@@ -20653,7 +21489,7 @@
                       <a:endParaRPr lang="en-US" sz="1000" dirty="0"/>
                     </a:p>
                   </a:txBody>
-                  <a:tcPr marL="91440" marR="91440" marT="45720" marB="45720">
+                  <a:tcPr>
                     <a:lnL w="6350" cap="flat" cmpd="sng" algn="ctr">
                       <a:solidFill>
                         <a:srgbClr val="CBD5E1"/>
@@ -20700,7 +21536,7 @@
                     <a:bodyPr/>
                     <a:lstStyle/>
                     <a:p>
-                      <a:pPr indent="0" marL="0">
+                      <a:pPr marL="0" indent="0">
                         <a:buNone/>
                       </a:pPr>
                       <a:r>
@@ -20714,7 +21550,7 @@
                       <a:endParaRPr lang="en-US" sz="1000" dirty="0"/>
                     </a:p>
                   </a:txBody>
-                  <a:tcPr marL="91440" marR="91440" marT="45720" marB="45720">
+                  <a:tcPr>
                     <a:lnL w="6350" cap="flat" cmpd="sng" algn="ctr">
                       <a:solidFill>
                         <a:srgbClr val="CBD5E1"/>
@@ -20761,7 +21597,7 @@
                     <a:bodyPr/>
                     <a:lstStyle/>
                     <a:p>
-                      <a:pPr indent="0" marL="0">
+                      <a:pPr marL="0" indent="0">
                         <a:buNone/>
                       </a:pPr>
                       <a:r>
@@ -20775,7 +21611,7 @@
                       <a:endParaRPr lang="en-US" sz="1000" dirty="0"/>
                     </a:p>
                   </a:txBody>
-                  <a:tcPr marL="91440" marR="91440" marT="45720" marB="45720">
+                  <a:tcPr>
                     <a:lnL w="6350" cap="flat" cmpd="sng" algn="ctr">
                       <a:solidFill>
                         <a:srgbClr val="CBD5E1"/>
@@ -20822,7 +21658,7 @@
                     <a:bodyPr/>
                     <a:lstStyle/>
                     <a:p>
-                      <a:pPr indent="0" marL="0">
+                      <a:pPr marL="0" indent="0">
                         <a:buNone/>
                       </a:pPr>
                       <a:r>
@@ -20836,7 +21672,7 @@
                       <a:endParaRPr lang="en-US" sz="1000" dirty="0"/>
                     </a:p>
                   </a:txBody>
-                  <a:tcPr marL="91440" marR="91440" marT="45720" marB="45720">
+                  <a:tcPr>
                     <a:lnL w="6350" cap="flat" cmpd="sng" algn="ctr">
                       <a:solidFill>
                         <a:srgbClr val="CBD5E1"/>
@@ -20883,7 +21719,7 @@
                     <a:bodyPr/>
                     <a:lstStyle/>
                     <a:p>
-                      <a:pPr indent="0" marL="0">
+                      <a:pPr marL="0" indent="0">
                         <a:buNone/>
                       </a:pPr>
                       <a:r>
@@ -20897,7 +21733,7 @@
                       <a:endParaRPr lang="en-US" sz="1000" dirty="0"/>
                     </a:p>
                   </a:txBody>
-                  <a:tcPr marL="91440" marR="91440" marT="45720" marB="45720">
+                  <a:tcPr>
                     <a:lnL w="6350" cap="flat" cmpd="sng" algn="ctr">
                       <a:solidFill>
                         <a:srgbClr val="CBD5E1"/>
@@ -20939,6 +21775,11 @@
                     </a:solidFill>
                   </a:tcPr>
                 </a:tc>
+                <a:extLst>
+                  <a:ext uri="{0D108BD9-81ED-4DB2-BD59-A6C34878D82A}">
+                    <a16:rowId xmlns:a16="http://schemas.microsoft.com/office/drawing/2014/main" val="10002"/>
+                  </a:ext>
+                </a:extLst>
               </a:tr>
               <a:tr h="635508">
                 <a:tc>
@@ -20946,7 +21787,7 @@
                     <a:bodyPr/>
                     <a:lstStyle/>
                     <a:p>
-                      <a:pPr indent="0" marL="0">
+                      <a:pPr marL="0" indent="0">
                         <a:buNone/>
                       </a:pPr>
                       <a:r>
@@ -20960,7 +21801,7 @@
                       <a:endParaRPr lang="en-US" sz="1000" dirty="0"/>
                     </a:p>
                   </a:txBody>
-                  <a:tcPr marL="91440" marR="91440" marT="45720" marB="45720">
+                  <a:tcPr>
                     <a:lnL w="6350" cap="flat" cmpd="sng" algn="ctr">
                       <a:solidFill>
                         <a:srgbClr val="CBD5E1"/>
@@ -21007,7 +21848,7 @@
                     <a:bodyPr/>
                     <a:lstStyle/>
                     <a:p>
-                      <a:pPr indent="0" marL="0">
+                      <a:pPr marL="0" indent="0">
                         <a:buNone/>
                       </a:pPr>
                       <a:r>
@@ -21021,7 +21862,7 @@
                       <a:endParaRPr lang="en-US" sz="1000" dirty="0"/>
                     </a:p>
                   </a:txBody>
-                  <a:tcPr marL="91440" marR="91440" marT="45720" marB="45720">
+                  <a:tcPr>
                     <a:lnL w="6350" cap="flat" cmpd="sng" algn="ctr">
                       <a:solidFill>
                         <a:srgbClr val="CBD5E1"/>
@@ -21068,7 +21909,7 @@
                     <a:bodyPr/>
                     <a:lstStyle/>
                     <a:p>
-                      <a:pPr indent="0" marL="0">
+                      <a:pPr marL="0" indent="0">
                         <a:buNone/>
                       </a:pPr>
                       <a:r>
@@ -21082,7 +21923,7 @@
                       <a:endParaRPr lang="en-US" sz="1000" dirty="0"/>
                     </a:p>
                   </a:txBody>
-                  <a:tcPr marL="91440" marR="91440" marT="45720" marB="45720">
+                  <a:tcPr>
                     <a:lnL w="6350" cap="flat" cmpd="sng" algn="ctr">
                       <a:solidFill>
                         <a:srgbClr val="CBD5E1"/>
@@ -21129,7 +21970,7 @@
                     <a:bodyPr/>
                     <a:lstStyle/>
                     <a:p>
-                      <a:pPr indent="0" marL="0">
+                      <a:pPr marL="0" indent="0">
                         <a:buNone/>
                       </a:pPr>
                       <a:r>
@@ -21143,7 +21984,7 @@
                       <a:endParaRPr lang="en-US" sz="1000" dirty="0"/>
                     </a:p>
                   </a:txBody>
-                  <a:tcPr marL="91440" marR="91440" marT="45720" marB="45720">
+                  <a:tcPr>
                     <a:lnL w="6350" cap="flat" cmpd="sng" algn="ctr">
                       <a:solidFill>
                         <a:srgbClr val="CBD5E1"/>
@@ -21190,7 +22031,7 @@
                     <a:bodyPr/>
                     <a:lstStyle/>
                     <a:p>
-                      <a:pPr indent="0" marL="0">
+                      <a:pPr marL="0" indent="0">
                         <a:buNone/>
                       </a:pPr>
                       <a:r>
@@ -21204,7 +22045,7 @@
                       <a:endParaRPr lang="en-US" sz="1000" dirty="0"/>
                     </a:p>
                   </a:txBody>
-                  <a:tcPr marL="91440" marR="91440" marT="45720" marB="45720">
+                  <a:tcPr>
                     <a:lnL w="6350" cap="flat" cmpd="sng" algn="ctr">
                       <a:solidFill>
                         <a:srgbClr val="CBD5E1"/>
@@ -21246,6 +22087,11 @@
                     </a:solidFill>
                   </a:tcPr>
                 </a:tc>
+                <a:extLst>
+                  <a:ext uri="{0D108BD9-81ED-4DB2-BD59-A6C34878D82A}">
+                    <a16:rowId xmlns:a16="http://schemas.microsoft.com/office/drawing/2014/main" val="10003"/>
+                  </a:ext>
+                </a:extLst>
               </a:tr>
             </a:tbl>
           </a:graphicData>
@@ -21259,8 +22105,8 @@
         </p:nvSpPr>
         <p:spPr>
           <a:xfrm>
-            <a:off x="347472" y="3639312"/>
-            <a:ext cx="4572000" cy="256032"/>
+            <a:off x="347472" y="3529584"/>
+            <a:ext cx="4572000" cy="283464"/>
           </a:xfrm>
           <a:prstGeom prst="rect">
             <a:avLst/>
@@ -21272,7 +22118,7 @@
           <a:bodyPr wrap="square" lIns="0" tIns="0" rIns="0" bIns="0" rtlCol="0" anchor="ctr"/>
           <a:lstStyle/>
           <a:p>
-            <a:pPr indent="0" marL="0">
+            <a:pPr marL="0" indent="0">
               <a:buNone/>
             </a:pPr>
             <a:r>
@@ -21296,31 +22142,49 @@
           <p:nvPr>
             <p:extLst>
               <p:ext uri="{D42A27DB-BD31-4B8C-83A1-F6EECF244321}">
-                <p14:modId xmlns:p14="http://schemas.microsoft.com/office/powerpoint/2010/main" val="1579011935"/>
+                <p14:modId xmlns:p14="http://schemas.microsoft.com/office/powerpoint/2010/main" val="2421093400"/>
               </p:ext>
             </p:extLst>
           </p:nvPr>
         </p:nvGraphicFramePr>
         <p:xfrm>
-          <a:off x="320040" y="3931920"/>
-          <a:ext cx="8503920" cy="777240"/>
+          <a:off x="320040" y="3813048"/>
+          <a:ext cx="8503920" cy="975360"/>
         </p:xfrm>
         <a:graphic>
           <a:graphicData uri="http://schemas.openxmlformats.org/drawingml/2006/table">
             <a:tbl>
               <a:tblPr/>
               <a:tblGrid>
-                <a:gridCol w="658368"/>
-                <a:gridCol w="1051560"/>
-                <a:gridCol w="6793992"/>
+                <a:gridCol w="658368">
+                  <a:extLst>
+                    <a:ext uri="{9D8B030D-6E8A-4147-A177-3AD203B41FA5}">
+                      <a16:colId xmlns:a16="http://schemas.microsoft.com/office/drawing/2014/main" val="20000"/>
+                    </a:ext>
+                  </a:extLst>
+                </a:gridCol>
+                <a:gridCol w="1051560">
+                  <a:extLst>
+                    <a:ext uri="{9D8B030D-6E8A-4147-A177-3AD203B41FA5}">
+                      <a16:colId xmlns:a16="http://schemas.microsoft.com/office/drawing/2014/main" val="20001"/>
+                    </a:ext>
+                  </a:extLst>
+                </a:gridCol>
+                <a:gridCol w="6793992">
+                  <a:extLst>
+                    <a:ext uri="{9D8B030D-6E8A-4147-A177-3AD203B41FA5}">
+                      <a16:colId xmlns:a16="http://schemas.microsoft.com/office/drawing/2014/main" val="20002"/>
+                    </a:ext>
+                  </a:extLst>
+                </a:gridCol>
               </a:tblGrid>
-              <a:tr h="194310">
+              <a:tr h="231941">
                 <a:tc>
                   <a:txBody>
                     <a:bodyPr/>
                     <a:lstStyle/>
                     <a:p>
-                      <a:pPr indent="0" marL="0">
+                      <a:pPr marL="0" indent="0">
                         <a:buNone/>
                       </a:pPr>
                       <a:r>
@@ -21334,7 +22198,7 @@
                       <a:endParaRPr lang="en-US" sz="1000" dirty="0"/>
                     </a:p>
                   </a:txBody>
-                  <a:tcPr marL="91440" marR="91440" marT="45720" marB="45720">
+                  <a:tcPr>
                     <a:lnL w="6350" cap="flat" cmpd="sng" algn="ctr">
                       <a:solidFill>
                         <a:srgbClr val="CBD5E1"/>
@@ -21381,7 +22245,7 @@
                     <a:bodyPr/>
                     <a:lstStyle/>
                     <a:p>
-                      <a:pPr indent="0" marL="0">
+                      <a:pPr marL="0" indent="0">
                         <a:buNone/>
                       </a:pPr>
                       <a:r>
@@ -21395,7 +22259,7 @@
                       <a:endParaRPr lang="en-US" sz="1000" dirty="0"/>
                     </a:p>
                   </a:txBody>
-                  <a:tcPr marL="91440" marR="91440" marT="45720" marB="45720">
+                  <a:tcPr>
                     <a:lnL w="6350" cap="flat" cmpd="sng" algn="ctr">
                       <a:solidFill>
                         <a:srgbClr val="CBD5E1"/>
@@ -21442,7 +22306,7 @@
                     <a:bodyPr/>
                     <a:lstStyle/>
                     <a:p>
-                      <a:pPr indent="0" marL="0">
+                      <a:pPr marL="0" indent="0">
                         <a:buNone/>
                       </a:pPr>
                       <a:r>
@@ -21456,7 +22320,7 @@
                       <a:endParaRPr lang="en-US" sz="1000" dirty="0"/>
                     </a:p>
                   </a:txBody>
-                  <a:tcPr marL="91440" marR="91440" marT="45720" marB="45720">
+                  <a:tcPr>
                     <a:lnL w="6350" cap="flat" cmpd="sng" algn="ctr">
                       <a:solidFill>
                         <a:srgbClr val="CBD5E1"/>
@@ -21498,14 +22362,19 @@
                     </a:solidFill>
                   </a:tcPr>
                 </a:tc>
+                <a:extLst>
+                  <a:ext uri="{0D108BD9-81ED-4DB2-BD59-A6C34878D82A}">
+                    <a16:rowId xmlns:a16="http://schemas.microsoft.com/office/drawing/2014/main" val="10000"/>
+                  </a:ext>
+                </a:extLst>
               </a:tr>
-              <a:tr h="194310">
+              <a:tr h="231941">
                 <a:tc>
                   <a:txBody>
                     <a:bodyPr/>
                     <a:lstStyle/>
                     <a:p>
-                      <a:pPr indent="0" marL="0">
+                      <a:pPr marL="0" indent="0">
                         <a:buNone/>
                       </a:pPr>
                       <a:r>
@@ -21519,7 +22388,7 @@
                       <a:endParaRPr lang="en-US" sz="1000" dirty="0"/>
                     </a:p>
                   </a:txBody>
-                  <a:tcPr marL="91440" marR="91440" marT="45720" marB="45720">
+                  <a:tcPr>
                     <a:lnL w="6350" cap="flat" cmpd="sng" algn="ctr">
                       <a:solidFill>
                         <a:srgbClr val="CBD5E1"/>
@@ -21566,7 +22435,7 @@
                     <a:bodyPr/>
                     <a:lstStyle/>
                     <a:p>
-                      <a:pPr indent="0" marL="0">
+                      <a:pPr marL="0" indent="0">
                         <a:buNone/>
                       </a:pPr>
                       <a:r>
@@ -21580,7 +22449,7 @@
                       <a:endParaRPr lang="en-US" sz="1000" dirty="0"/>
                     </a:p>
                   </a:txBody>
-                  <a:tcPr marL="91440" marR="91440" marT="45720" marB="45720">
+                  <a:tcPr>
                     <a:lnL w="6350" cap="flat" cmpd="sng" algn="ctr">
                       <a:solidFill>
                         <a:srgbClr val="CBD5E1"/>
@@ -21627,7 +22496,7 @@
                     <a:bodyPr/>
                     <a:lstStyle/>
                     <a:p>
-                      <a:pPr indent="0" marL="0">
+                      <a:pPr marL="0" indent="0">
                         <a:buNone/>
                       </a:pPr>
                       <a:r>
@@ -21641,7 +22510,7 @@
                       <a:endParaRPr lang="en-US" sz="1000" dirty="0"/>
                     </a:p>
                   </a:txBody>
-                  <a:tcPr marL="91440" marR="91440" marT="45720" marB="45720">
+                  <a:tcPr>
                     <a:lnL w="6350" cap="flat" cmpd="sng" algn="ctr">
                       <a:solidFill>
                         <a:srgbClr val="CBD5E1"/>
@@ -21683,14 +22552,19 @@
                     </a:solidFill>
                   </a:tcPr>
                 </a:tc>
+                <a:extLst>
+                  <a:ext uri="{0D108BD9-81ED-4DB2-BD59-A6C34878D82A}">
+                    <a16:rowId xmlns:a16="http://schemas.microsoft.com/office/drawing/2014/main" val="10001"/>
+                  </a:ext>
+                </a:extLst>
               </a:tr>
-              <a:tr h="194310">
+              <a:tr h="231941">
                 <a:tc>
                   <a:txBody>
                     <a:bodyPr/>
                     <a:lstStyle/>
                     <a:p>
-                      <a:pPr indent="0" marL="0">
+                      <a:pPr marL="0" indent="0">
                         <a:buNone/>
                       </a:pPr>
                       <a:r>
@@ -21704,7 +22578,7 @@
                       <a:endParaRPr lang="en-US" sz="1000" dirty="0"/>
                     </a:p>
                   </a:txBody>
-                  <a:tcPr marL="91440" marR="91440" marT="45720" marB="45720">
+                  <a:tcPr>
                     <a:lnL w="6350" cap="flat" cmpd="sng" algn="ctr">
                       <a:solidFill>
                         <a:srgbClr val="CBD5E1"/>
@@ -21751,7 +22625,7 @@
                     <a:bodyPr/>
                     <a:lstStyle/>
                     <a:p>
-                      <a:pPr indent="0" marL="0">
+                      <a:pPr marL="0" indent="0">
                         <a:buNone/>
                       </a:pPr>
                       <a:r>
@@ -21765,7 +22639,7 @@
                       <a:endParaRPr lang="en-US" sz="1000" dirty="0"/>
                     </a:p>
                   </a:txBody>
-                  <a:tcPr marL="91440" marR="91440" marT="45720" marB="45720">
+                  <a:tcPr>
                     <a:lnL w="6350" cap="flat" cmpd="sng" algn="ctr">
                       <a:solidFill>
                         <a:srgbClr val="CBD5E1"/>
@@ -21812,7 +22686,7 @@
                     <a:bodyPr/>
                     <a:lstStyle/>
                     <a:p>
-                      <a:pPr indent="0" marL="0">
+                      <a:pPr marL="0" indent="0">
                         <a:buNone/>
                       </a:pPr>
                       <a:r>
@@ -21826,7 +22700,7 @@
                       <a:endParaRPr lang="en-US" sz="1000" dirty="0"/>
                     </a:p>
                   </a:txBody>
-                  <a:tcPr marL="91440" marR="91440" marT="45720" marB="45720">
+                  <a:tcPr>
                     <a:lnL w="6350" cap="flat" cmpd="sng" algn="ctr">
                       <a:solidFill>
                         <a:srgbClr val="CBD5E1"/>
@@ -21868,14 +22742,19 @@
                     </a:solidFill>
                   </a:tcPr>
                 </a:tc>
+                <a:extLst>
+                  <a:ext uri="{0D108BD9-81ED-4DB2-BD59-A6C34878D82A}">
+                    <a16:rowId xmlns:a16="http://schemas.microsoft.com/office/drawing/2014/main" val="10002"/>
+                  </a:ext>
+                </a:extLst>
               </a:tr>
-              <a:tr h="194310">
+              <a:tr h="231941">
                 <a:tc>
                   <a:txBody>
                     <a:bodyPr/>
                     <a:lstStyle/>
                     <a:p>
-                      <a:pPr indent="0" marL="0">
+                      <a:pPr marL="0" indent="0">
                         <a:buNone/>
                       </a:pPr>
                       <a:r>
@@ -21889,7 +22768,7 @@
                       <a:endParaRPr lang="en-US" sz="1000" dirty="0"/>
                     </a:p>
                   </a:txBody>
-                  <a:tcPr marL="91440" marR="91440" marT="45720" marB="45720">
+                  <a:tcPr>
                     <a:lnL w="6350" cap="flat" cmpd="sng" algn="ctr">
                       <a:solidFill>
                         <a:srgbClr val="CBD5E1"/>
@@ -21936,7 +22815,7 @@
                     <a:bodyPr/>
                     <a:lstStyle/>
                     <a:p>
-                      <a:pPr indent="0" marL="0">
+                      <a:pPr marL="0" indent="0">
                         <a:buNone/>
                       </a:pPr>
                       <a:r>
@@ -21950,7 +22829,7 @@
                       <a:endParaRPr lang="en-US" sz="1000" dirty="0"/>
                     </a:p>
                   </a:txBody>
-                  <a:tcPr marL="91440" marR="91440" marT="45720" marB="45720">
+                  <a:tcPr>
                     <a:lnL w="6350" cap="flat" cmpd="sng" algn="ctr">
                       <a:solidFill>
                         <a:srgbClr val="CBD5E1"/>
@@ -21997,7 +22876,7 @@
                     <a:bodyPr/>
                     <a:lstStyle/>
                     <a:p>
-                      <a:pPr indent="0" marL="0">
+                      <a:pPr marL="0" indent="0">
                         <a:buNone/>
                       </a:pPr>
                       <a:r>
@@ -22011,7 +22890,7 @@
                       <a:endParaRPr lang="en-US" sz="1000" dirty="0"/>
                     </a:p>
                   </a:txBody>
-                  <a:tcPr marL="91440" marR="91440" marT="45720" marB="45720">
+                  <a:tcPr>
                     <a:lnL w="6350" cap="flat" cmpd="sng" algn="ctr">
                       <a:solidFill>
                         <a:srgbClr val="CBD5E1"/>
@@ -22053,6 +22932,11 @@
                     </a:solidFill>
                   </a:tcPr>
                 </a:tc>
+                <a:extLst>
+                  <a:ext uri="{0D108BD9-81ED-4DB2-BD59-A6C34878D82A}">
+                    <a16:rowId xmlns:a16="http://schemas.microsoft.com/office/drawing/2014/main" val="10003"/>
+                  </a:ext>
+                </a:extLst>
               </a:tr>
             </a:tbl>
           </a:graphicData>
@@ -22074,6 +22958,7 @@
         <a:solidFill>
           <a:srgbClr val="F7FBFF"/>
         </a:solidFill>
+        <a:effectLst/>
       </p:bgPr>
     </p:bg>
     <p:spTree>
@@ -22114,6 +22999,13 @@
             <a:prstDash val="solid"/>
           </a:ln>
         </p:spPr>
+        <p:txBody>
+          <a:bodyPr/>
+          <a:lstStyle/>
+          <a:p>
+            <a:endParaRPr lang="en-PK"/>
+          </a:p>
+        </p:txBody>
       </p:sp>
       <p:sp>
         <p:nvSpPr>
@@ -22136,11 +23028,11 @@
           <a:bodyPr wrap="square" lIns="0" tIns="0" rIns="0" bIns="0" rtlCol="0" anchor="ctr"/>
           <a:lstStyle/>
           <a:p>
-            <a:pPr algn="ctr" indent="0" marL="0">
+            <a:pPr marL="0" indent="0" algn="ctr">
               <a:buNone/>
             </a:pPr>
             <a:r>
-              <a:rPr lang="en-US" sz="850" b="1" spc="150" kern="0" dirty="0">
+              <a:rPr lang="en-US" sz="850" b="1" kern="0" spc="150" dirty="0">
                 <a:solidFill>
                   <a:srgbClr val="FFFFFF"/>
                 </a:solidFill>
@@ -22175,6 +23067,13 @@
             <a:prstDash val="solid"/>
           </a:ln>
         </p:spPr>
+        <p:txBody>
+          <a:bodyPr/>
+          <a:lstStyle/>
+          <a:p>
+            <a:endParaRPr lang="en-PK"/>
+          </a:p>
+        </p:txBody>
       </p:sp>
       <p:sp>
         <p:nvSpPr>
@@ -22197,7 +23096,7 @@
           <a:bodyPr wrap="square" lIns="0" tIns="0" rIns="0" bIns="0" rtlCol="0" anchor="ctr"/>
           <a:lstStyle/>
           <a:p>
-            <a:pPr algn="ctr" indent="0" marL="0">
+            <a:pPr marL="0" indent="0" algn="ctr">
               <a:buNone/>
             </a:pPr>
             <a:r>
@@ -22208,15 +23107,12 @@
               </a:rPr>
               <a:t>GitHub: </a:t>
             </a:r>
-            <a:pPr algn="ctr" indent="0" marL="0">
-              <a:buNone/>
-            </a:pPr>
             <a:r>
               <a:rPr lang="en-US" sz="850" u="sng" dirty="0">
                 <a:solidFill>
                   <a:srgbClr val="5BA4CF"/>
                 </a:solidFill>
-                <a:hlinkClick r:id="rId1" invalidUrl="" action="" tgtFrame="" tooltip="" history="1" highlightClick="0" endSnd="0">
+                <a:hlinkClick r:id="rId3">
                   <a:extLst>
                     <a:ext uri="{A12FA001-AC4F-418D-AE19-62706E023703}">
                       <ahyp:hlinkClr xmlns:ahyp="http://schemas.microsoft.com/office/drawing/2018/hyperlinkcolor" val="tx"/>
@@ -22254,6 +23150,13 @@
             <a:prstDash val="solid"/>
           </a:ln>
         </p:spPr>
+        <p:txBody>
+          <a:bodyPr/>
+          <a:lstStyle/>
+          <a:p>
+            <a:endParaRPr lang="en-PK"/>
+          </a:p>
+        </p:txBody>
       </p:sp>
       <p:sp>
         <p:nvSpPr>
@@ -22276,7 +23179,7 @@
           <a:bodyPr wrap="square" lIns="0" tIns="0" rIns="0" bIns="0" rtlCol="0" anchor="ctr"/>
           <a:lstStyle/>
           <a:p>
-            <a:pPr algn="ctr" indent="0" marL="0">
+            <a:pPr marL="0" indent="0" algn="ctr">
               <a:buNone/>
             </a:pPr>
             <a:r>
@@ -22315,6 +23218,13 @@
             <a:prstDash val="solid"/>
           </a:ln>
         </p:spPr>
+        <p:txBody>
+          <a:bodyPr/>
+          <a:lstStyle/>
+          <a:p>
+            <a:endParaRPr lang="en-PK"/>
+          </a:p>
+        </p:txBody>
       </p:sp>
       <p:sp>
         <p:nvSpPr>
@@ -22337,7 +23247,7 @@
           <a:bodyPr wrap="square" lIns="0" tIns="0" rIns="0" bIns="0" rtlCol="0" anchor="ctr"/>
           <a:lstStyle/>
           <a:p>
-            <a:pPr algn="l" indent="0" marL="0">
+            <a:pPr marL="0" indent="0" algn="l">
               <a:buNone/>
             </a:pPr>
             <a:r>
@@ -22373,7 +23283,7 @@
           <a:bodyPr wrap="square" lIns="0" tIns="0" rIns="0" bIns="0" rtlCol="0" anchor="t"/>
           <a:lstStyle/>
           <a:p>
-            <a:pPr algn="l" indent="0" marL="0">
+            <a:pPr marL="0" indent="0" algn="l">
               <a:buNone/>
             </a:pPr>
             <a:r>
@@ -22390,26 +23300,26 @@
       </p:sp>
       <p:pic>
         <p:nvPicPr>
-          <p:cNvPr id="11" name="Image 0" descr="C:\Users\shaho\OneDrive - FAST National University\Attachments\@Fast\Semester 6\PDC + NLP\maor-equity\diagrams\06_pdc_nlp_flagship_diagram.svg">    </p:cNvPr>
+          <p:cNvPr id="11" name="Image 0" descr="C:\Users\shaho\OneDrive - FAST National University\Attachments\@Fast\Semester 6\PDC + NLP\maor-equity\diagrams\06_pdc_nlp_flagship_diagram.svg"/>
           <p:cNvPicPr>
             <a:picLocks noChangeAspect="1"/>
           </p:cNvPicPr>
           <p:nvPr/>
         </p:nvPicPr>
         <p:blipFill>
-          <a:blip r:embed="rId2">
+          <a:blip>
             <a:extLst>
               <a:ext uri="{96DAC541-7B7A-43D3-8B79-37D633B846F1}">
-                <asvg:svgBlip xmlns:asvg="http://schemas.microsoft.com/office/drawing/2016/SVG/main" r:embed="rId3"/>
+                <asvg:svgBlip xmlns:asvg="http://schemas.microsoft.com/office/drawing/2016/SVG/main" r:embed="rId4"/>
               </a:ext>
             </a:extLst>
           </a:blip>
-          <a:srcRect l="0" r="0" t="0" b="0"/>
+          <a:srcRect/>
           <a:stretch/>
         </p:blipFill>
         <p:spPr>
           <a:xfrm>
-            <a:off x="256032" y="987552"/>
+            <a:off x="512064" y="987552"/>
             <a:ext cx="8631936" cy="3730752"/>
           </a:xfrm>
           <a:prstGeom prst="rect">
@@ -22433,6 +23343,7 @@
         <a:solidFill>
           <a:srgbClr val="EFF6FF"/>
         </a:solidFill>
+        <a:effectLst/>
       </p:bgPr>
     </p:bg>
     <p:spTree>
@@ -22473,6 +23384,13 @@
             <a:prstDash val="solid"/>
           </a:ln>
         </p:spPr>
+        <p:txBody>
+          <a:bodyPr/>
+          <a:lstStyle/>
+          <a:p>
+            <a:endParaRPr lang="en-PK"/>
+          </a:p>
+        </p:txBody>
       </p:sp>
       <p:sp>
         <p:nvSpPr>
@@ -22495,11 +23413,11 @@
           <a:bodyPr wrap="square" lIns="0" tIns="0" rIns="0" bIns="0" rtlCol="0" anchor="ctr"/>
           <a:lstStyle/>
           <a:p>
-            <a:pPr algn="ctr" indent="0" marL="0">
+            <a:pPr marL="0" indent="0" algn="ctr">
               <a:buNone/>
             </a:pPr>
             <a:r>
-              <a:rPr lang="en-US" sz="850" b="1" spc="150" kern="0" dirty="0">
+              <a:rPr lang="en-US" sz="850" b="1" kern="0" spc="150" dirty="0">
                 <a:solidFill>
                   <a:srgbClr val="FFFFFF"/>
                 </a:solidFill>
@@ -22534,6 +23452,13 @@
             <a:prstDash val="solid"/>
           </a:ln>
         </p:spPr>
+        <p:txBody>
+          <a:bodyPr/>
+          <a:lstStyle/>
+          <a:p>
+            <a:endParaRPr lang="en-PK"/>
+          </a:p>
+        </p:txBody>
       </p:sp>
       <p:sp>
         <p:nvSpPr>
@@ -22556,7 +23481,7 @@
           <a:bodyPr wrap="square" lIns="0" tIns="0" rIns="0" bIns="0" rtlCol="0" anchor="ctr"/>
           <a:lstStyle/>
           <a:p>
-            <a:pPr algn="ctr" indent="0" marL="0">
+            <a:pPr marL="0" indent="0" algn="ctr">
               <a:buNone/>
             </a:pPr>
             <a:r>
@@ -22567,15 +23492,12 @@
               </a:rPr>
               <a:t>GitHub: </a:t>
             </a:r>
-            <a:pPr algn="ctr" indent="0" marL="0">
-              <a:buNone/>
-            </a:pPr>
             <a:r>
               <a:rPr lang="en-US" sz="850" u="sng" dirty="0">
                 <a:solidFill>
                   <a:srgbClr val="5BA4CF"/>
                 </a:solidFill>
-                <a:hlinkClick r:id="rId1" invalidUrl="" action="" tgtFrame="" tooltip="" history="1" highlightClick="0" endSnd="0">
+                <a:hlinkClick r:id="rId3">
                   <a:extLst>
                     <a:ext uri="{A12FA001-AC4F-418D-AE19-62706E023703}">
                       <ahyp:hlinkClr xmlns:ahyp="http://schemas.microsoft.com/office/drawing/2018/hyperlinkcolor" val="tx"/>
@@ -22613,6 +23535,13 @@
             <a:prstDash val="solid"/>
           </a:ln>
         </p:spPr>
+        <p:txBody>
+          <a:bodyPr/>
+          <a:lstStyle/>
+          <a:p>
+            <a:endParaRPr lang="en-PK"/>
+          </a:p>
+        </p:txBody>
       </p:sp>
       <p:sp>
         <p:nvSpPr>
@@ -22635,7 +23564,7 @@
           <a:bodyPr wrap="square" lIns="0" tIns="0" rIns="0" bIns="0" rtlCol="0" anchor="ctr"/>
           <a:lstStyle/>
           <a:p>
-            <a:pPr algn="ctr" indent="0" marL="0">
+            <a:pPr marL="0" indent="0" algn="ctr">
               <a:buNone/>
             </a:pPr>
             <a:r>
@@ -22674,6 +23603,13 @@
             <a:prstDash val="solid"/>
           </a:ln>
         </p:spPr>
+        <p:txBody>
+          <a:bodyPr/>
+          <a:lstStyle/>
+          <a:p>
+            <a:endParaRPr lang="en-PK"/>
+          </a:p>
+        </p:txBody>
       </p:sp>
       <p:sp>
         <p:nvSpPr>
@@ -22696,7 +23632,7 @@
           <a:bodyPr wrap="square" lIns="0" tIns="0" rIns="0" bIns="0" rtlCol="0" anchor="ctr"/>
           <a:lstStyle/>
           <a:p>
-            <a:pPr algn="l" indent="0" marL="0">
+            <a:pPr marL="0" indent="0" algn="l">
               <a:buNone/>
             </a:pPr>
             <a:r>
@@ -22732,7 +23668,7 @@
           <a:bodyPr wrap="square" lIns="0" tIns="0" rIns="0" bIns="0" rtlCol="0" anchor="t"/>
           <a:lstStyle/>
           <a:p>
-            <a:pPr algn="l" indent="0" marL="0">
+            <a:pPr marL="0" indent="0" algn="l">
               <a:buNone/>
             </a:pPr>
             <a:r>
@@ -22771,6 +23707,13 @@
             <a:prstDash val="solid"/>
           </a:ln>
         </p:spPr>
+        <p:txBody>
+          <a:bodyPr/>
+          <a:lstStyle/>
+          <a:p>
+            <a:endParaRPr lang="en-PK"/>
+          </a:p>
+        </p:txBody>
       </p:sp>
       <p:sp>
         <p:nvSpPr>
@@ -22793,7 +23736,7 @@
           <a:bodyPr wrap="square" lIns="0" tIns="0" rIns="0" bIns="0" rtlCol="0" anchor="ctr"/>
           <a:lstStyle/>
           <a:p>
-            <a:pPr algn="ctr" indent="0" marL="0">
+            <a:pPr marL="0" indent="0" algn="ctr">
               <a:buNone/>
             </a:pPr>
             <a:r>
@@ -22832,13 +23775,20 @@
             <a:prstDash val="solid"/>
           </a:ln>
           <a:effectLst>
-            <a:outerShdw sx="100000" sy="100000" kx="0" ky="0" algn="bl" rotWithShape="0" blurRad="76200" dist="12700" dir="8100000">
+            <a:outerShdw blurRad="76200" dist="12700" dir="8100000" algn="bl" rotWithShape="0">
               <a:srgbClr val="000000">
                 <a:alpha val="8000"/>
               </a:srgbClr>
             </a:outerShdw>
           </a:effectLst>
         </p:spPr>
+        <p:txBody>
+          <a:bodyPr/>
+          <a:lstStyle/>
+          <a:p>
+            <a:endParaRPr lang="en-PK"/>
+          </a:p>
+        </p:txBody>
       </p:sp>
       <p:sp>
         <p:nvSpPr>
@@ -22861,7 +23811,7 @@
           <a:bodyPr wrap="square" lIns="0" tIns="0" rIns="0" bIns="0" rtlCol="0" anchor="ctr"/>
           <a:lstStyle/>
           <a:p>
-            <a:pPr algn="ctr" indent="0" marL="0">
+            <a:pPr marL="0" indent="0" algn="ctr">
               <a:buNone/>
             </a:pPr>
             <a:r>
@@ -22897,7 +23847,7 @@
           <a:bodyPr wrap="square" lIns="0" tIns="0" rIns="0" bIns="0" rtlCol="0" anchor="ctr"/>
           <a:lstStyle/>
           <a:p>
-            <a:pPr algn="ctr" indent="0" marL="0">
+            <a:pPr marL="0" indent="0" algn="ctr">
               <a:buNone/>
             </a:pPr>
             <a:r>
@@ -22936,13 +23886,20 @@
             <a:prstDash val="solid"/>
           </a:ln>
           <a:effectLst>
-            <a:outerShdw sx="100000" sy="100000" kx="0" ky="0" algn="bl" rotWithShape="0" blurRad="76200" dist="12700" dir="8100000">
+            <a:outerShdw blurRad="76200" dist="12700" dir="8100000" algn="bl" rotWithShape="0">
               <a:srgbClr val="000000">
                 <a:alpha val="8000"/>
               </a:srgbClr>
             </a:outerShdw>
           </a:effectLst>
         </p:spPr>
+        <p:txBody>
+          <a:bodyPr/>
+          <a:lstStyle/>
+          <a:p>
+            <a:endParaRPr lang="en-PK"/>
+          </a:p>
+        </p:txBody>
       </p:sp>
       <p:sp>
         <p:nvSpPr>
@@ -22965,7 +23922,7 @@
           <a:bodyPr wrap="square" lIns="0" tIns="0" rIns="0" bIns="0" rtlCol="0" anchor="ctr"/>
           <a:lstStyle/>
           <a:p>
-            <a:pPr algn="ctr" indent="0" marL="0">
+            <a:pPr marL="0" indent="0" algn="ctr">
               <a:buNone/>
             </a:pPr>
             <a:r>
@@ -23001,7 +23958,7 @@
           <a:bodyPr wrap="square" lIns="0" tIns="0" rIns="0" bIns="0" rtlCol="0" anchor="ctr"/>
           <a:lstStyle/>
           <a:p>
-            <a:pPr algn="ctr" indent="0" marL="0">
+            <a:pPr marL="0" indent="0" algn="ctr">
               <a:buNone/>
             </a:pPr>
             <a:r>
@@ -23040,13 +23997,20 @@
             <a:prstDash val="solid"/>
           </a:ln>
           <a:effectLst>
-            <a:outerShdw sx="100000" sy="100000" kx="0" ky="0" algn="bl" rotWithShape="0" blurRad="76200" dist="12700" dir="8100000">
+            <a:outerShdw blurRad="76200" dist="12700" dir="8100000" algn="bl" rotWithShape="0">
               <a:srgbClr val="000000">
                 <a:alpha val="8000"/>
               </a:srgbClr>
             </a:outerShdw>
           </a:effectLst>
         </p:spPr>
+        <p:txBody>
+          <a:bodyPr/>
+          <a:lstStyle/>
+          <a:p>
+            <a:endParaRPr lang="en-PK"/>
+          </a:p>
+        </p:txBody>
       </p:sp>
       <p:sp>
         <p:nvSpPr>
@@ -23069,7 +24033,7 @@
           <a:bodyPr wrap="square" lIns="0" tIns="0" rIns="0" bIns="0" rtlCol="0" anchor="ctr"/>
           <a:lstStyle/>
           <a:p>
-            <a:pPr algn="ctr" indent="0" marL="0">
+            <a:pPr marL="0" indent="0" algn="ctr">
               <a:buNone/>
             </a:pPr>
             <a:r>
@@ -23105,7 +24069,7 @@
           <a:bodyPr wrap="square" lIns="0" tIns="0" rIns="0" bIns="0" rtlCol="0" anchor="ctr"/>
           <a:lstStyle/>
           <a:p>
-            <a:pPr algn="ctr" indent="0" marL="0">
+            <a:pPr marL="0" indent="0" algn="ctr">
               <a:buNone/>
             </a:pPr>
             <a:r>
@@ -23122,7 +24086,7 @@
       </p:sp>
       <p:graphicFrame>
         <p:nvGraphicFramePr>
-          <p:cNvPr id="10" name="Table 0"/>
+          <p:cNvPr id="22" name="Table 0"/>
           <p:cNvGraphicFramePr>
             <a:graphicFrameLocks noGrp="1"/>
           </p:cNvGraphicFramePr>
@@ -23143,11 +24107,41 @@
             <a:tbl>
               <a:tblPr/>
               <a:tblGrid>
-                <a:gridCol w="1417320"/>
-                <a:gridCol w="914400"/>
-                <a:gridCol w="1097280"/>
-                <a:gridCol w="914400"/>
-                <a:gridCol w="822960"/>
+                <a:gridCol w="1417320">
+                  <a:extLst>
+                    <a:ext uri="{9D8B030D-6E8A-4147-A177-3AD203B41FA5}">
+                      <a16:colId xmlns:a16="http://schemas.microsoft.com/office/drawing/2014/main" val="20000"/>
+                    </a:ext>
+                  </a:extLst>
+                </a:gridCol>
+                <a:gridCol w="914400">
+                  <a:extLst>
+                    <a:ext uri="{9D8B030D-6E8A-4147-A177-3AD203B41FA5}">
+                      <a16:colId xmlns:a16="http://schemas.microsoft.com/office/drawing/2014/main" val="20001"/>
+                    </a:ext>
+                  </a:extLst>
+                </a:gridCol>
+                <a:gridCol w="1097280">
+                  <a:extLst>
+                    <a:ext uri="{9D8B030D-6E8A-4147-A177-3AD203B41FA5}">
+                      <a16:colId xmlns:a16="http://schemas.microsoft.com/office/drawing/2014/main" val="20002"/>
+                    </a:ext>
+                  </a:extLst>
+                </a:gridCol>
+                <a:gridCol w="914400">
+                  <a:extLst>
+                    <a:ext uri="{9D8B030D-6E8A-4147-A177-3AD203B41FA5}">
+                      <a16:colId xmlns:a16="http://schemas.microsoft.com/office/drawing/2014/main" val="20003"/>
+                    </a:ext>
+                  </a:extLst>
+                </a:gridCol>
+                <a:gridCol w="822960">
+                  <a:extLst>
+                    <a:ext uri="{9D8B030D-6E8A-4147-A177-3AD203B41FA5}">
+                      <a16:colId xmlns:a16="http://schemas.microsoft.com/office/drawing/2014/main" val="20004"/>
+                    </a:ext>
+                  </a:extLst>
+                </a:gridCol>
               </a:tblGrid>
               <a:tr h="268224">
                 <a:tc>
@@ -23155,7 +24149,7 @@
                     <a:bodyPr/>
                     <a:lstStyle/>
                     <a:p>
-                      <a:pPr indent="0" marL="0">
+                      <a:pPr marL="0" indent="0">
                         <a:buNone/>
                       </a:pPr>
                       <a:r>
@@ -23169,7 +24163,7 @@
                       <a:endParaRPr lang="en-US" sz="1100" dirty="0"/>
                     </a:p>
                   </a:txBody>
-                  <a:tcPr marL="91440" marR="91440" marT="45720" marB="45720">
+                  <a:tcPr>
                     <a:lnL w="6350" cap="flat" cmpd="sng" algn="ctr">
                       <a:solidFill>
                         <a:srgbClr val="CBD5E1"/>
@@ -23216,7 +24210,7 @@
                     <a:bodyPr/>
                     <a:lstStyle/>
                     <a:p>
-                      <a:pPr indent="0" marL="0">
+                      <a:pPr marL="0" indent="0">
                         <a:buNone/>
                       </a:pPr>
                       <a:r>
@@ -23230,7 +24224,7 @@
                       <a:endParaRPr lang="en-US" sz="1100" dirty="0"/>
                     </a:p>
                   </a:txBody>
-                  <a:tcPr marL="91440" marR="91440" marT="45720" marB="45720">
+                  <a:tcPr>
                     <a:lnL w="6350" cap="flat" cmpd="sng" algn="ctr">
                       <a:solidFill>
                         <a:srgbClr val="CBD5E1"/>
@@ -23277,7 +24271,7 @@
                     <a:bodyPr/>
                     <a:lstStyle/>
                     <a:p>
-                      <a:pPr indent="0" marL="0">
+                      <a:pPr marL="0" indent="0">
                         <a:buNone/>
                       </a:pPr>
                       <a:r>
@@ -23291,7 +24285,7 @@
                       <a:endParaRPr lang="en-US" sz="1100" dirty="0"/>
                     </a:p>
                   </a:txBody>
-                  <a:tcPr marL="91440" marR="91440" marT="45720" marB="45720">
+                  <a:tcPr>
                     <a:lnL w="6350" cap="flat" cmpd="sng" algn="ctr">
                       <a:solidFill>
                         <a:srgbClr val="CBD5E1"/>
@@ -23338,7 +24332,7 @@
                     <a:bodyPr/>
                     <a:lstStyle/>
                     <a:p>
-                      <a:pPr indent="0" marL="0">
+                      <a:pPr marL="0" indent="0">
                         <a:buNone/>
                       </a:pPr>
                       <a:r>
@@ -23352,7 +24346,7 @@
                       <a:endParaRPr lang="en-US" sz="1100" dirty="0"/>
                     </a:p>
                   </a:txBody>
-                  <a:tcPr marL="91440" marR="91440" marT="45720" marB="45720">
+                  <a:tcPr>
                     <a:lnL w="6350" cap="flat" cmpd="sng" algn="ctr">
                       <a:solidFill>
                         <a:srgbClr val="CBD5E1"/>
@@ -23399,7 +24393,7 @@
                     <a:bodyPr/>
                     <a:lstStyle/>
                     <a:p>
-                      <a:pPr indent="0" marL="0">
+                      <a:pPr marL="0" indent="0">
                         <a:buNone/>
                       </a:pPr>
                       <a:r>
@@ -23413,7 +24407,7 @@
                       <a:endParaRPr lang="en-US" sz="1100" dirty="0"/>
                     </a:p>
                   </a:txBody>
-                  <a:tcPr marL="91440" marR="91440" marT="45720" marB="45720">
+                  <a:tcPr>
                     <a:lnL w="6350" cap="flat" cmpd="sng" algn="ctr">
                       <a:solidFill>
                         <a:srgbClr val="CBD5E1"/>
@@ -23455,6 +24449,11 @@
                     </a:solidFill>
                   </a:tcPr>
                 </a:tc>
+                <a:extLst>
+                  <a:ext uri="{0D108BD9-81ED-4DB2-BD59-A6C34878D82A}">
+                    <a16:rowId xmlns:a16="http://schemas.microsoft.com/office/drawing/2014/main" val="10000"/>
+                  </a:ext>
+                </a:extLst>
               </a:tr>
               <a:tr h="268224">
                 <a:tc>
@@ -23462,7 +24461,7 @@
                     <a:bodyPr/>
                     <a:lstStyle/>
                     <a:p>
-                      <a:pPr indent="0" marL="0">
+                      <a:pPr marL="0" indent="0">
                         <a:buNone/>
                       </a:pPr>
                       <a:r>
@@ -23476,7 +24475,7 @@
                       <a:endParaRPr lang="en-US" sz="1100" dirty="0"/>
                     </a:p>
                   </a:txBody>
-                  <a:tcPr marL="91440" marR="91440" marT="45720" marB="45720">
+                  <a:tcPr>
                     <a:lnL w="6350" cap="flat" cmpd="sng" algn="ctr">
                       <a:solidFill>
                         <a:srgbClr val="CBD5E1"/>
@@ -23523,7 +24522,7 @@
                     <a:bodyPr/>
                     <a:lstStyle/>
                     <a:p>
-                      <a:pPr indent="0" marL="0">
+                      <a:pPr marL="0" indent="0">
                         <a:buNone/>
                       </a:pPr>
                       <a:r>
@@ -23537,7 +24536,7 @@
                       <a:endParaRPr lang="en-US" sz="1100" dirty="0"/>
                     </a:p>
                   </a:txBody>
-                  <a:tcPr marL="91440" marR="91440" marT="45720" marB="45720">
+                  <a:tcPr>
                     <a:lnL w="6350" cap="flat" cmpd="sng" algn="ctr">
                       <a:solidFill>
                         <a:srgbClr val="CBD5E1"/>
@@ -23584,7 +24583,7 @@
                     <a:bodyPr/>
                     <a:lstStyle/>
                     <a:p>
-                      <a:pPr indent="0" marL="0">
+                      <a:pPr marL="0" indent="0">
                         <a:buNone/>
                       </a:pPr>
                       <a:r>
@@ -23598,7 +24597,7 @@
                       <a:endParaRPr lang="en-US" sz="1100" dirty="0"/>
                     </a:p>
                   </a:txBody>
-                  <a:tcPr marL="91440" marR="91440" marT="45720" marB="45720">
+                  <a:tcPr>
                     <a:lnL w="6350" cap="flat" cmpd="sng" algn="ctr">
                       <a:solidFill>
                         <a:srgbClr val="CBD5E1"/>
@@ -23645,7 +24644,7 @@
                     <a:bodyPr/>
                     <a:lstStyle/>
                     <a:p>
-                      <a:pPr indent="0" marL="0">
+                      <a:pPr marL="0" indent="0">
                         <a:buNone/>
                       </a:pPr>
                       <a:r>
@@ -23659,7 +24658,7 @@
                       <a:endParaRPr lang="en-US" sz="1100" dirty="0"/>
                     </a:p>
                   </a:txBody>
-                  <a:tcPr marL="91440" marR="91440" marT="45720" marB="45720">
+                  <a:tcPr>
                     <a:lnL w="6350" cap="flat" cmpd="sng" algn="ctr">
                       <a:solidFill>
                         <a:srgbClr val="CBD5E1"/>
@@ -23706,7 +24705,7 @@
                     <a:bodyPr/>
                     <a:lstStyle/>
                     <a:p>
-                      <a:pPr indent="0" marL="0">
+                      <a:pPr marL="0" indent="0">
                         <a:buNone/>
                       </a:pPr>
                       <a:r>
@@ -23720,7 +24719,7 @@
                       <a:endParaRPr lang="en-US" sz="1100" dirty="0"/>
                     </a:p>
                   </a:txBody>
-                  <a:tcPr marL="91440" marR="91440" marT="45720" marB="45720">
+                  <a:tcPr>
                     <a:lnL w="6350" cap="flat" cmpd="sng" algn="ctr">
                       <a:solidFill>
                         <a:srgbClr val="CBD5E1"/>
@@ -23762,6 +24761,11 @@
                     </a:solidFill>
                   </a:tcPr>
                 </a:tc>
+                <a:extLst>
+                  <a:ext uri="{0D108BD9-81ED-4DB2-BD59-A6C34878D82A}">
+                    <a16:rowId xmlns:a16="http://schemas.microsoft.com/office/drawing/2014/main" val="10001"/>
+                  </a:ext>
+                </a:extLst>
               </a:tr>
               <a:tr h="268224">
                 <a:tc>
@@ -23769,7 +24773,7 @@
                     <a:bodyPr/>
                     <a:lstStyle/>
                     <a:p>
-                      <a:pPr indent="0" marL="0">
+                      <a:pPr marL="0" indent="0">
                         <a:buNone/>
                       </a:pPr>
                       <a:r>
@@ -23783,7 +24787,7 @@
                       <a:endParaRPr lang="en-US" sz="1100" dirty="0"/>
                     </a:p>
                   </a:txBody>
-                  <a:tcPr marL="91440" marR="91440" marT="45720" marB="45720">
+                  <a:tcPr>
                     <a:lnL w="6350" cap="flat" cmpd="sng" algn="ctr">
                       <a:solidFill>
                         <a:srgbClr val="CBD5E1"/>
@@ -23830,7 +24834,7 @@
                     <a:bodyPr/>
                     <a:lstStyle/>
                     <a:p>
-                      <a:pPr indent="0" marL="0">
+                      <a:pPr marL="0" indent="0">
                         <a:buNone/>
                       </a:pPr>
                       <a:r>
@@ -23844,7 +24848,7 @@
                       <a:endParaRPr lang="en-US" sz="1100" dirty="0"/>
                     </a:p>
                   </a:txBody>
-                  <a:tcPr marL="91440" marR="91440" marT="45720" marB="45720">
+                  <a:tcPr>
                     <a:lnL w="6350" cap="flat" cmpd="sng" algn="ctr">
                       <a:solidFill>
                         <a:srgbClr val="CBD5E1"/>
@@ -23891,7 +24895,7 @@
                     <a:bodyPr/>
                     <a:lstStyle/>
                     <a:p>
-                      <a:pPr indent="0" marL="0">
+                      <a:pPr marL="0" indent="0">
                         <a:buNone/>
                       </a:pPr>
                       <a:r>
@@ -23905,7 +24909,7 @@
                       <a:endParaRPr lang="en-US" sz="1100" dirty="0"/>
                     </a:p>
                   </a:txBody>
-                  <a:tcPr marL="91440" marR="91440" marT="45720" marB="45720">
+                  <a:tcPr>
                     <a:lnL w="6350" cap="flat" cmpd="sng" algn="ctr">
                       <a:solidFill>
                         <a:srgbClr val="CBD5E1"/>
@@ -23952,7 +24956,7 @@
                     <a:bodyPr/>
                     <a:lstStyle/>
                     <a:p>
-                      <a:pPr indent="0" marL="0">
+                      <a:pPr marL="0" indent="0">
                         <a:buNone/>
                       </a:pPr>
                       <a:r>
@@ -23966,7 +24970,7 @@
                       <a:endParaRPr lang="en-US" sz="1100" dirty="0"/>
                     </a:p>
                   </a:txBody>
-                  <a:tcPr marL="91440" marR="91440" marT="45720" marB="45720">
+                  <a:tcPr>
                     <a:lnL w="6350" cap="flat" cmpd="sng" algn="ctr">
                       <a:solidFill>
                         <a:srgbClr val="CBD5E1"/>
@@ -24013,7 +25017,7 @@
                     <a:bodyPr/>
                     <a:lstStyle/>
                     <a:p>
-                      <a:pPr indent="0" marL="0">
+                      <a:pPr marL="0" indent="0">
                         <a:buNone/>
                       </a:pPr>
                       <a:r>
@@ -24027,7 +25031,7 @@
                       <a:endParaRPr lang="en-US" sz="1100" dirty="0"/>
                     </a:p>
                   </a:txBody>
-                  <a:tcPr marL="91440" marR="91440" marT="45720" marB="45720">
+                  <a:tcPr>
                     <a:lnL w="6350" cap="flat" cmpd="sng" algn="ctr">
                       <a:solidFill>
                         <a:srgbClr val="CBD5E1"/>
@@ -24069,6 +25073,11 @@
                     </a:solidFill>
                   </a:tcPr>
                 </a:tc>
+                <a:extLst>
+                  <a:ext uri="{0D108BD9-81ED-4DB2-BD59-A6C34878D82A}">
+                    <a16:rowId xmlns:a16="http://schemas.microsoft.com/office/drawing/2014/main" val="10002"/>
+                  </a:ext>
+                </a:extLst>
               </a:tr>
             </a:tbl>
           </a:graphicData>
@@ -24095,7 +25104,7 @@
           <a:bodyPr wrap="square" lIns="0" tIns="0" rIns="0" bIns="0" rtlCol="0" anchor="ctr"/>
           <a:lstStyle/>
           <a:p>
-            <a:pPr indent="0" marL="0">
+            <a:pPr marL="0" indent="0">
               <a:buNone/>
             </a:pPr>
             <a:r>
@@ -24112,7 +25121,7 @@
       </p:sp>
       <p:graphicFrame>
         <p:nvGraphicFramePr>
-          <p:cNvPr id="19" name="Table 1"/>
+          <p:cNvPr id="24" name="Table 1"/>
           <p:cNvGraphicFramePr>
             <a:graphicFrameLocks noGrp="1"/>
           </p:cNvGraphicFramePr>
@@ -24126,15 +25135,27 @@
         </p:nvGraphicFramePr>
         <p:xfrm>
           <a:off x="347472" y="3383280"/>
-          <a:ext cx="5166360" cy="1261872"/>
+          <a:ext cx="5166360" cy="1405736"/>
         </p:xfrm>
         <a:graphic>
           <a:graphicData uri="http://schemas.openxmlformats.org/drawingml/2006/table">
             <a:tbl>
               <a:tblPr/>
               <a:tblGrid>
-                <a:gridCol w="3703320"/>
-                <a:gridCol w="1463040"/>
+                <a:gridCol w="3703320">
+                  <a:extLst>
+                    <a:ext uri="{9D8B030D-6E8A-4147-A177-3AD203B41FA5}">
+                      <a16:colId xmlns:a16="http://schemas.microsoft.com/office/drawing/2014/main" val="20000"/>
+                    </a:ext>
+                  </a:extLst>
+                </a:gridCol>
+                <a:gridCol w="1463040">
+                  <a:extLst>
+                    <a:ext uri="{9D8B030D-6E8A-4147-A177-3AD203B41FA5}">
+                      <a16:colId xmlns:a16="http://schemas.microsoft.com/office/drawing/2014/main" val="20001"/>
+                    </a:ext>
+                  </a:extLst>
+                </a:gridCol>
               </a:tblGrid>
               <a:tr h="252374">
                 <a:tc>
@@ -24142,7 +25163,7 @@
                     <a:bodyPr/>
                     <a:lstStyle/>
                     <a:p>
-                      <a:pPr indent="0" marL="0">
+                      <a:pPr marL="0" indent="0">
                         <a:buNone/>
                       </a:pPr>
                       <a:r>
@@ -24156,7 +25177,7 @@
                       <a:endParaRPr lang="en-US" sz="1000" dirty="0"/>
                     </a:p>
                   </a:txBody>
-                  <a:tcPr marL="91440" marR="91440" marT="45720" marB="45720">
+                  <a:tcPr>
                     <a:lnL w="6350" cap="flat" cmpd="sng" algn="ctr">
                       <a:solidFill>
                         <a:srgbClr val="CBD5E1"/>
@@ -24203,7 +25224,7 @@
                     <a:bodyPr/>
                     <a:lstStyle/>
                     <a:p>
-                      <a:pPr indent="0" marL="0">
+                      <a:pPr marL="0" indent="0">
                         <a:buNone/>
                       </a:pPr>
                       <a:r>
@@ -24217,7 +25238,7 @@
                       <a:endParaRPr lang="en-US" sz="1000" dirty="0"/>
                     </a:p>
                   </a:txBody>
-                  <a:tcPr marL="91440" marR="91440" marT="45720" marB="45720">
+                  <a:tcPr>
                     <a:lnL w="6350" cap="flat" cmpd="sng" algn="ctr">
                       <a:solidFill>
                         <a:srgbClr val="CBD5E1"/>
@@ -24259,6 +25280,11 @@
                     </a:solidFill>
                   </a:tcPr>
                 </a:tc>
+                <a:extLst>
+                  <a:ext uri="{0D108BD9-81ED-4DB2-BD59-A6C34878D82A}">
+                    <a16:rowId xmlns:a16="http://schemas.microsoft.com/office/drawing/2014/main" val="10000"/>
+                  </a:ext>
+                </a:extLst>
               </a:tr>
               <a:tr h="252374">
                 <a:tc>
@@ -24266,7 +25292,7 @@
                     <a:bodyPr/>
                     <a:lstStyle/>
                     <a:p>
-                      <a:pPr indent="0" marL="0">
+                      <a:pPr marL="0" indent="0">
                         <a:buNone/>
                       </a:pPr>
                       <a:r>
@@ -24280,7 +25306,7 @@
                       <a:endParaRPr lang="en-US" sz="1000" dirty="0"/>
                     </a:p>
                   </a:txBody>
-                  <a:tcPr marL="91440" marR="91440" marT="45720" marB="45720">
+                  <a:tcPr>
                     <a:lnL w="6350" cap="flat" cmpd="sng" algn="ctr">
                       <a:solidFill>
                         <a:srgbClr val="CBD5E1"/>
@@ -24327,7 +25353,7 @@
                     <a:bodyPr/>
                     <a:lstStyle/>
                     <a:p>
-                      <a:pPr indent="0" marL="0">
+                      <a:pPr marL="0" indent="0">
                         <a:buNone/>
                       </a:pPr>
                       <a:r>
@@ -24341,7 +25367,7 @@
                       <a:endParaRPr lang="en-US" sz="1000" dirty="0"/>
                     </a:p>
                   </a:txBody>
-                  <a:tcPr marL="91440" marR="91440" marT="45720" marB="45720">
+                  <a:tcPr>
                     <a:lnL w="6350" cap="flat" cmpd="sng" algn="ctr">
                       <a:solidFill>
                         <a:srgbClr val="CBD5E1"/>
@@ -24383,6 +25409,11 @@
                     </a:solidFill>
                   </a:tcPr>
                 </a:tc>
+                <a:extLst>
+                  <a:ext uri="{0D108BD9-81ED-4DB2-BD59-A6C34878D82A}">
+                    <a16:rowId xmlns:a16="http://schemas.microsoft.com/office/drawing/2014/main" val="10001"/>
+                  </a:ext>
+                </a:extLst>
               </a:tr>
               <a:tr h="252374">
                 <a:tc>
@@ -24390,7 +25421,7 @@
                     <a:bodyPr/>
                     <a:lstStyle/>
                     <a:p>
-                      <a:pPr indent="0" marL="0">
+                      <a:pPr marL="0" indent="0">
                         <a:buNone/>
                       </a:pPr>
                       <a:r>
@@ -24404,7 +25435,7 @@
                       <a:endParaRPr lang="en-US" sz="1000" dirty="0"/>
                     </a:p>
                   </a:txBody>
-                  <a:tcPr marL="91440" marR="91440" marT="45720" marB="45720">
+                  <a:tcPr>
                     <a:lnL w="6350" cap="flat" cmpd="sng" algn="ctr">
                       <a:solidFill>
                         <a:srgbClr val="CBD5E1"/>
@@ -24451,7 +25482,7 @@
                     <a:bodyPr/>
                     <a:lstStyle/>
                     <a:p>
-                      <a:pPr indent="0" marL="0">
+                      <a:pPr marL="0" indent="0">
                         <a:buNone/>
                       </a:pPr>
                       <a:r>
@@ -24465,7 +25496,7 @@
                       <a:endParaRPr lang="en-US" sz="1000" dirty="0"/>
                     </a:p>
                   </a:txBody>
-                  <a:tcPr marL="91440" marR="91440" marT="45720" marB="45720">
+                  <a:tcPr>
                     <a:lnL w="6350" cap="flat" cmpd="sng" algn="ctr">
                       <a:solidFill>
                         <a:srgbClr val="CBD5E1"/>
@@ -24507,6 +25538,11 @@
                     </a:solidFill>
                   </a:tcPr>
                 </a:tc>
+                <a:extLst>
+                  <a:ext uri="{0D108BD9-81ED-4DB2-BD59-A6C34878D82A}">
+                    <a16:rowId xmlns:a16="http://schemas.microsoft.com/office/drawing/2014/main" val="10002"/>
+                  </a:ext>
+                </a:extLst>
               </a:tr>
               <a:tr h="252374">
                 <a:tc>
@@ -24514,7 +25550,7 @@
                     <a:bodyPr/>
                     <a:lstStyle/>
                     <a:p>
-                      <a:pPr indent="0" marL="0">
+                      <a:pPr marL="0" indent="0">
                         <a:buNone/>
                       </a:pPr>
                       <a:r>
@@ -24528,7 +25564,7 @@
                       <a:endParaRPr lang="en-US" sz="1000" dirty="0"/>
                     </a:p>
                   </a:txBody>
-                  <a:tcPr marL="91440" marR="91440" marT="45720" marB="45720">
+                  <a:tcPr>
                     <a:lnL w="6350" cap="flat" cmpd="sng" algn="ctr">
                       <a:solidFill>
                         <a:srgbClr val="CBD5E1"/>
@@ -24575,7 +25611,7 @@
                     <a:bodyPr/>
                     <a:lstStyle/>
                     <a:p>
-                      <a:pPr indent="0" marL="0">
+                      <a:pPr marL="0" indent="0">
                         <a:buNone/>
                       </a:pPr>
                       <a:r>
@@ -24589,7 +25625,7 @@
                       <a:endParaRPr lang="en-US" sz="1000" dirty="0"/>
                     </a:p>
                   </a:txBody>
-                  <a:tcPr marL="91440" marR="91440" marT="45720" marB="45720">
+                  <a:tcPr>
                     <a:lnL w="6350" cap="flat" cmpd="sng" algn="ctr">
                       <a:solidFill>
                         <a:srgbClr val="CBD5E1"/>
@@ -24631,6 +25667,11 @@
                     </a:solidFill>
                   </a:tcPr>
                 </a:tc>
+                <a:extLst>
+                  <a:ext uri="{0D108BD9-81ED-4DB2-BD59-A6C34878D82A}">
+                    <a16:rowId xmlns:a16="http://schemas.microsoft.com/office/drawing/2014/main" val="10003"/>
+                  </a:ext>
+                </a:extLst>
               </a:tr>
               <a:tr h="252374">
                 <a:tc>
@@ -24638,7 +25679,7 @@
                     <a:bodyPr/>
                     <a:lstStyle/>
                     <a:p>
-                      <a:pPr indent="0" marL="0">
+                      <a:pPr marL="0" indent="0">
                         <a:buNone/>
                       </a:pPr>
                       <a:r>
@@ -24652,7 +25693,7 @@
                       <a:endParaRPr lang="en-US" sz="1000" dirty="0"/>
                     </a:p>
                   </a:txBody>
-                  <a:tcPr marL="91440" marR="91440" marT="45720" marB="45720">
+                  <a:tcPr>
                     <a:lnL w="6350" cap="flat" cmpd="sng" algn="ctr">
                       <a:solidFill>
                         <a:srgbClr val="CBD5E1"/>
@@ -24699,7 +25740,7 @@
                     <a:bodyPr/>
                     <a:lstStyle/>
                     <a:p>
-                      <a:pPr indent="0" marL="0">
+                      <a:pPr marL="0" indent="0">
                         <a:buNone/>
                       </a:pPr>
                       <a:r>
@@ -24713,7 +25754,7 @@
                       <a:endParaRPr lang="en-US" sz="1000" dirty="0"/>
                     </a:p>
                   </a:txBody>
-                  <a:tcPr marL="91440" marR="91440" marT="45720" marB="45720">
+                  <a:tcPr>
                     <a:lnL w="6350" cap="flat" cmpd="sng" algn="ctr">
                       <a:solidFill>
                         <a:srgbClr val="CBD5E1"/>
@@ -24755,6 +25796,11 @@
                     </a:solidFill>
                   </a:tcPr>
                 </a:tc>
+                <a:extLst>
+                  <a:ext uri="{0D108BD9-81ED-4DB2-BD59-A6C34878D82A}">
+                    <a16:rowId xmlns:a16="http://schemas.microsoft.com/office/drawing/2014/main" val="10004"/>
+                  </a:ext>
+                </a:extLst>
               </a:tr>
             </a:tbl>
           </a:graphicData>
@@ -24762,15 +25808,15 @@
       </p:graphicFrame>
       <p:pic>
         <p:nvPicPr>
-          <p:cNvPr id="25" name="Image 0" descr="C:\Users\shaho\OneDrive - FAST National University\Attachments\@Fast\Semester 6\PDC + NLP\maor-equity\figures\fig7_amdahl.png">    </p:cNvPr>
+          <p:cNvPr id="25" name="Image 0" descr="C:\Users\shaho\OneDrive - FAST National University\Attachments\@Fast\Semester 6\PDC + NLP\maor-equity\figures\fig7_amdahl.png"/>
           <p:cNvPicPr>
             <a:picLocks noChangeAspect="1"/>
           </p:cNvPicPr>
           <p:nvPr/>
         </p:nvPicPr>
         <p:blipFill>
-          <a:blip r:embed="rId2"/>
-          <a:srcRect l="0" r="0" t="0" b="0"/>
+          <a:blip r:embed="rId4"/>
+          <a:srcRect/>
           <a:stretch/>
         </p:blipFill>
         <p:spPr>
@@ -25084,4 +26130,319 @@
     </a:ext>
   </a:extLst>
 </a:theme>
+</file>
+
+<file path=ppt/theme/theme2.xml><?xml version="1.0" encoding="utf-8"?>
+<a:theme xmlns:a="http://schemas.openxmlformats.org/drawingml/2006/main" name="Office Theme">
+  <a:themeElements>
+    <a:clrScheme name="Office">
+      <a:dk1>
+        <a:sysClr val="windowText" lastClr="000000"/>
+      </a:dk1>
+      <a:lt1>
+        <a:sysClr val="window" lastClr="FFFFFF"/>
+      </a:lt1>
+      <a:dk2>
+        <a:srgbClr val="0E2841"/>
+      </a:dk2>
+      <a:lt2>
+        <a:srgbClr val="E8E8E8"/>
+      </a:lt2>
+      <a:accent1>
+        <a:srgbClr val="156082"/>
+      </a:accent1>
+      <a:accent2>
+        <a:srgbClr val="E97132"/>
+      </a:accent2>
+      <a:accent3>
+        <a:srgbClr val="196B24"/>
+      </a:accent3>
+      <a:accent4>
+        <a:srgbClr val="0F9ED5"/>
+      </a:accent4>
+      <a:accent5>
+        <a:srgbClr val="A02B93"/>
+      </a:accent5>
+      <a:accent6>
+        <a:srgbClr val="4EA72E"/>
+      </a:accent6>
+      <a:hlink>
+        <a:srgbClr val="467886"/>
+      </a:hlink>
+      <a:folHlink>
+        <a:srgbClr val="96607D"/>
+      </a:folHlink>
+    </a:clrScheme>
+    <a:fontScheme name="Office">
+      <a:majorFont>
+        <a:latin typeface="Aptos Display" panose="02110004020202020204"/>
+        <a:ea typeface=""/>
+        <a:cs typeface=""/>
+        <a:font script="Jpan" typeface="游ゴシック Light"/>
+        <a:font script="Hang" typeface="맑은 고딕"/>
+        <a:font script="Hans" typeface="等线 Light"/>
+        <a:font script="Hant" typeface="新細明體"/>
+        <a:font script="Arab" typeface="Times New Roman"/>
+        <a:font script="Hebr" typeface="Times New Roman"/>
+        <a:font script="Thai" typeface="Angsana New"/>
+        <a:font script="Ethi" typeface="Nyala"/>
+        <a:font script="Beng" typeface="Vrinda"/>
+        <a:font script="Gujr" typeface="Shruti"/>
+        <a:font script="Khmr" typeface="MoolBoran"/>
+        <a:font script="Knda" typeface="Tunga"/>
+        <a:font script="Guru" typeface="Raavi"/>
+        <a:font script="Cans" typeface="Euphemia"/>
+        <a:font script="Cher" typeface="Plantagenet Cherokee"/>
+        <a:font script="Yiii" typeface="Microsoft Yi Baiti"/>
+        <a:font script="Tibt" typeface="Microsoft Himalaya"/>
+        <a:font script="Thaa" typeface="MV Boli"/>
+        <a:font script="Deva" typeface="Mangal"/>
+        <a:font script="Telu" typeface="Gautami"/>
+        <a:font script="Taml" typeface="Latha"/>
+        <a:font script="Syrc" typeface="Estrangelo Edessa"/>
+        <a:font script="Orya" typeface="Kalinga"/>
+        <a:font script="Mlym" typeface="Kartika"/>
+        <a:font script="Laoo" typeface="DokChampa"/>
+        <a:font script="Sinh" typeface="Iskoola Pota"/>
+        <a:font script="Mong" typeface="Mongolian Baiti"/>
+        <a:font script="Viet" typeface="Times New Roman"/>
+        <a:font script="Uigh" typeface="Microsoft Uighur"/>
+        <a:font script="Geor" typeface="Sylfaen"/>
+        <a:font script="Armn" typeface="Arial"/>
+        <a:font script="Bugi" typeface="Leelawadee UI"/>
+        <a:font script="Bopo" typeface="Microsoft JhengHei"/>
+        <a:font script="Java" typeface="Javanese Text"/>
+        <a:font script="Lisu" typeface="Segoe UI"/>
+        <a:font script="Mymr" typeface="Myanmar Text"/>
+        <a:font script="Nkoo" typeface="Ebrima"/>
+        <a:font script="Olck" typeface="Nirmala UI"/>
+        <a:font script="Osma" typeface="Ebrima"/>
+        <a:font script="Phag" typeface="Phagspa"/>
+        <a:font script="Syrn" typeface="Estrangelo Edessa"/>
+        <a:font script="Syrj" typeface="Estrangelo Edessa"/>
+        <a:font script="Syre" typeface="Estrangelo Edessa"/>
+        <a:font script="Sora" typeface="Nirmala UI"/>
+        <a:font script="Tale" typeface="Microsoft Tai Le"/>
+        <a:font script="Talu" typeface="Microsoft New Tai Lue"/>
+        <a:font script="Tfng" typeface="Ebrima"/>
+      </a:majorFont>
+      <a:minorFont>
+        <a:latin typeface="Aptos" panose="02110004020202020204"/>
+        <a:ea typeface=""/>
+        <a:cs typeface=""/>
+        <a:font script="Jpan" typeface="游ゴシック"/>
+        <a:font script="Hang" typeface="맑은 고딕"/>
+        <a:font script="Hans" typeface="等线"/>
+        <a:font script="Hant" typeface="新細明體"/>
+        <a:font script="Arab" typeface="Arial"/>
+        <a:font script="Hebr" typeface="Arial"/>
+        <a:font script="Thai" typeface="Cordia New"/>
+        <a:font script="Ethi" typeface="Nyala"/>
+        <a:font script="Beng" typeface="Vrinda"/>
+        <a:font script="Gujr" typeface="Shruti"/>
+        <a:font script="Khmr" typeface="DaunPenh"/>
+        <a:font script="Knda" typeface="Tunga"/>
+        <a:font script="Guru" typeface="Raavi"/>
+        <a:font script="Cans" typeface="Euphemia"/>
+        <a:font script="Cher" typeface="Plantagenet Cherokee"/>
+        <a:font script="Yiii" typeface="Microsoft Yi Baiti"/>
+        <a:font script="Tibt" typeface="Microsoft Himalaya"/>
+        <a:font script="Thaa" typeface="MV Boli"/>
+        <a:font script="Deva" typeface="Mangal"/>
+        <a:font script="Telu" typeface="Gautami"/>
+        <a:font script="Taml" typeface="Latha"/>
+        <a:font script="Syrc" typeface="Estrangelo Edessa"/>
+        <a:font script="Orya" typeface="Kalinga"/>
+        <a:font script="Mlym" typeface="Kartika"/>
+        <a:font script="Laoo" typeface="DokChampa"/>
+        <a:font script="Sinh" typeface="Iskoola Pota"/>
+        <a:font script="Mong" typeface="Mongolian Baiti"/>
+        <a:font script="Viet" typeface="Arial"/>
+        <a:font script="Uigh" typeface="Microsoft Uighur"/>
+        <a:font script="Geor" typeface="Sylfaen"/>
+        <a:font script="Armn" typeface="Arial"/>
+        <a:font script="Bugi" typeface="Leelawadee UI"/>
+        <a:font script="Bopo" typeface="Microsoft JhengHei"/>
+        <a:font script="Java" typeface="Javanese Text"/>
+        <a:font script="Lisu" typeface="Segoe UI"/>
+        <a:font script="Mymr" typeface="Myanmar Text"/>
+        <a:font script="Nkoo" typeface="Ebrima"/>
+        <a:font script="Olck" typeface="Nirmala UI"/>
+        <a:font script="Osma" typeface="Ebrima"/>
+        <a:font script="Phag" typeface="Phagspa"/>
+        <a:font script="Syrn" typeface="Estrangelo Edessa"/>
+        <a:font script="Syrj" typeface="Estrangelo Edessa"/>
+        <a:font script="Syre" typeface="Estrangelo Edessa"/>
+        <a:font script="Sora" typeface="Nirmala UI"/>
+        <a:font script="Tale" typeface="Microsoft Tai Le"/>
+        <a:font script="Talu" typeface="Microsoft New Tai Lue"/>
+        <a:font script="Tfng" typeface="Ebrima"/>
+      </a:minorFont>
+    </a:fontScheme>
+    <a:fmtScheme name="Office">
+      <a:fillStyleLst>
+        <a:solidFill>
+          <a:schemeClr val="phClr"/>
+        </a:solidFill>
+        <a:gradFill rotWithShape="1">
+          <a:gsLst>
+            <a:gs pos="0">
+              <a:schemeClr val="phClr">
+                <a:lumMod val="110000"/>
+                <a:satMod val="105000"/>
+                <a:tint val="67000"/>
+              </a:schemeClr>
+            </a:gs>
+            <a:gs pos="50000">
+              <a:schemeClr val="phClr">
+                <a:lumMod val="105000"/>
+                <a:satMod val="103000"/>
+                <a:tint val="73000"/>
+              </a:schemeClr>
+            </a:gs>
+            <a:gs pos="100000">
+              <a:schemeClr val="phClr">
+                <a:lumMod val="105000"/>
+                <a:satMod val="109000"/>
+                <a:tint val="81000"/>
+              </a:schemeClr>
+            </a:gs>
+          </a:gsLst>
+          <a:lin ang="5400000" scaled="0"/>
+        </a:gradFill>
+        <a:gradFill rotWithShape="1">
+          <a:gsLst>
+            <a:gs pos="0">
+              <a:schemeClr val="phClr">
+                <a:satMod val="103000"/>
+                <a:lumMod val="102000"/>
+                <a:tint val="94000"/>
+              </a:schemeClr>
+            </a:gs>
+            <a:gs pos="50000">
+              <a:schemeClr val="phClr">
+                <a:satMod val="110000"/>
+                <a:lumMod val="100000"/>
+                <a:shade val="100000"/>
+              </a:schemeClr>
+            </a:gs>
+            <a:gs pos="100000">
+              <a:schemeClr val="phClr">
+                <a:lumMod val="99000"/>
+                <a:satMod val="120000"/>
+                <a:shade val="78000"/>
+              </a:schemeClr>
+            </a:gs>
+          </a:gsLst>
+          <a:lin ang="5400000" scaled="0"/>
+        </a:gradFill>
+      </a:fillStyleLst>
+      <a:lnStyleLst>
+        <a:ln w="12700" cap="flat" cmpd="sng" algn="ctr">
+          <a:solidFill>
+            <a:schemeClr val="phClr"/>
+          </a:solidFill>
+          <a:prstDash val="solid"/>
+          <a:miter lim="800000"/>
+        </a:ln>
+        <a:ln w="19050" cap="flat" cmpd="sng" algn="ctr">
+          <a:solidFill>
+            <a:schemeClr val="phClr"/>
+          </a:solidFill>
+          <a:prstDash val="solid"/>
+          <a:miter lim="800000"/>
+        </a:ln>
+        <a:ln w="25400" cap="flat" cmpd="sng" algn="ctr">
+          <a:solidFill>
+            <a:schemeClr val="phClr"/>
+          </a:solidFill>
+          <a:prstDash val="solid"/>
+          <a:miter lim="800000"/>
+        </a:ln>
+      </a:lnStyleLst>
+      <a:effectStyleLst>
+        <a:effectStyle>
+          <a:effectLst/>
+        </a:effectStyle>
+        <a:effectStyle>
+          <a:effectLst/>
+        </a:effectStyle>
+        <a:effectStyle>
+          <a:effectLst>
+            <a:outerShdw blurRad="57150" dist="19050" dir="5400000" algn="ctr" rotWithShape="0">
+              <a:srgbClr val="000000">
+                <a:alpha val="63000"/>
+              </a:srgbClr>
+            </a:outerShdw>
+          </a:effectLst>
+        </a:effectStyle>
+      </a:effectStyleLst>
+      <a:bgFillStyleLst>
+        <a:solidFill>
+          <a:schemeClr val="phClr"/>
+        </a:solidFill>
+        <a:solidFill>
+          <a:schemeClr val="phClr">
+            <a:tint val="95000"/>
+            <a:satMod val="170000"/>
+          </a:schemeClr>
+        </a:solidFill>
+        <a:gradFill rotWithShape="1">
+          <a:gsLst>
+            <a:gs pos="0">
+              <a:schemeClr val="phClr">
+                <a:tint val="93000"/>
+                <a:satMod val="150000"/>
+                <a:shade val="98000"/>
+                <a:lumMod val="102000"/>
+              </a:schemeClr>
+            </a:gs>
+            <a:gs pos="50000">
+              <a:schemeClr val="phClr">
+                <a:tint val="98000"/>
+                <a:satMod val="130000"/>
+                <a:shade val="90000"/>
+                <a:lumMod val="103000"/>
+              </a:schemeClr>
+            </a:gs>
+            <a:gs pos="100000">
+              <a:schemeClr val="phClr">
+                <a:shade val="63000"/>
+                <a:satMod val="120000"/>
+              </a:schemeClr>
+            </a:gs>
+          </a:gsLst>
+          <a:lin ang="5400000" scaled="0"/>
+        </a:gradFill>
+      </a:bgFillStyleLst>
+    </a:fmtScheme>
+  </a:themeElements>
+  <a:objectDefaults>
+    <a:lnDef>
+      <a:spPr/>
+      <a:bodyPr/>
+      <a:lstStyle/>
+      <a:style>
+        <a:lnRef idx="2">
+          <a:schemeClr val="accent1"/>
+        </a:lnRef>
+        <a:fillRef idx="0">
+          <a:schemeClr val="accent1"/>
+        </a:fillRef>
+        <a:effectRef idx="1">
+          <a:schemeClr val="accent1"/>
+        </a:effectRef>
+        <a:fontRef idx="minor">
+          <a:schemeClr val="tx1"/>
+        </a:fontRef>
+      </a:style>
+    </a:lnDef>
+  </a:objectDefaults>
+  <a:extraClrSchemeLst/>
+  <a:extLst>
+    <a:ext uri="{05A4C25C-085E-4340-85A3-A5531E510DB2}">
+      <thm15:themeFamily xmlns:thm15="http://schemas.microsoft.com/office/thememl/2012/main" name="Office Theme" id="{2E142A2C-CD16-42D6-873A-C26D2A0506FA}" vid="{1BDDFF52-6CD6-40A5-AB3C-68EB2F1E4D0A}"/>
+    </a:ext>
+  </a:extLst>
+</a:theme>
 </file>
--- a/presentation/MAOR_EQUITY_Presentation.pptx
+++ b/presentation/MAOR_EQUITY_Presentation.pptx
@@ -128,7 +128,7 @@
   <pc:docChgLst>
     <pc:chgData name="Shahoud Shahid" userId="3c9cab93-14e5-4819-b0da-9c888b27567f" providerId="ADAL" clId="{F3DB6A94-22EA-4126-B191-698C38F207E8}"/>
     <pc:docChg chg="undo custSel modSld">
-      <pc:chgData name="Shahoud Shahid" userId="3c9cab93-14e5-4819-b0da-9c888b27567f" providerId="ADAL" clId="{F3DB6A94-22EA-4126-B191-698C38F207E8}" dt="2026-05-02T17:15:24.893" v="41" actId="21"/>
+      <pc:chgData name="Shahoud Shahid" userId="3c9cab93-14e5-4819-b0da-9c888b27567f" providerId="ADAL" clId="{F3DB6A94-22EA-4126-B191-698C38F207E8}" dt="2026-05-03T16:07:20.258" v="54" actId="14100"/>
       <pc:docMkLst>
         <pc:docMk/>
       </pc:docMkLst>
@@ -156,13 +156,13 @@
         </pc:graphicFrameChg>
       </pc:sldChg>
       <pc:sldChg chg="addSp delSp modSp mod">
-        <pc:chgData name="Shahoud Shahid" userId="3c9cab93-14e5-4819-b0da-9c888b27567f" providerId="ADAL" clId="{F3DB6A94-22EA-4126-B191-698C38F207E8}" dt="2026-05-02T17:15:24.893" v="41" actId="21"/>
+        <pc:chgData name="Shahoud Shahid" userId="3c9cab93-14e5-4819-b0da-9c888b27567f" providerId="ADAL" clId="{F3DB6A94-22EA-4126-B191-698C38F207E8}" dt="2026-05-03T16:07:20.258" v="54" actId="14100"/>
         <pc:sldMkLst>
           <pc:docMk/>
           <pc:sldMk cId="0" sldId="263"/>
         </pc:sldMkLst>
         <pc:picChg chg="add del mod">
-          <ac:chgData name="Shahoud Shahid" userId="3c9cab93-14e5-4819-b0da-9c888b27567f" providerId="ADAL" clId="{F3DB6A94-22EA-4126-B191-698C38F207E8}" dt="2026-05-02T17:15:24.893" v="41" actId="21"/>
+          <ac:chgData name="Shahoud Shahid" userId="3c9cab93-14e5-4819-b0da-9c888b27567f" providerId="ADAL" clId="{F3DB6A94-22EA-4126-B191-698C38F207E8}" dt="2026-05-03T16:05:59.864" v="42" actId="21"/>
           <ac:picMkLst>
             <pc:docMk/>
             <pc:sldMk cId="0" sldId="263"/>
@@ -175,6 +175,14 @@
             <pc:docMk/>
             <pc:sldMk cId="0" sldId="263"/>
             <ac:picMk id="13" creationId="{9FA184D3-D7B4-5F99-2D7A-E2A4821ADFD1}"/>
+          </ac:picMkLst>
+        </pc:picChg>
+        <pc:picChg chg="add mod">
+          <ac:chgData name="Shahoud Shahid" userId="3c9cab93-14e5-4819-b0da-9c888b27567f" providerId="ADAL" clId="{F3DB6A94-22EA-4126-B191-698C38F207E8}" dt="2026-05-03T16:07:20.258" v="54" actId="14100"/>
+          <ac:picMkLst>
+            <pc:docMk/>
+            <pc:sldMk cId="0" sldId="263"/>
+            <ac:picMk id="13" creationId="{A98E543F-5DA6-F063-A548-44F6D7C61A9F}"/>
           </ac:picMkLst>
         </pc:picChg>
       </pc:sldChg>
@@ -23300,7 +23308,13 @@
       </p:sp>
       <p:pic>
         <p:nvPicPr>
-          <p:cNvPr id="11" name="Image 0" descr="C:\Users\shaho\OneDrive - FAST National University\Attachments\@Fast\Semester 6\PDC + NLP\maor-equity\diagrams\06_pdc_nlp_flagship_diagram.svg"/>
+          <p:cNvPr id="13" name="Graphic 12">
+            <a:extLst>
+              <a:ext uri="{FF2B5EF4-FFF2-40B4-BE49-F238E27FC236}">
+                <a16:creationId xmlns:a16="http://schemas.microsoft.com/office/drawing/2014/main" id="{A98E543F-5DA6-F063-A548-44F6D7C61A9F}"/>
+              </a:ext>
+            </a:extLst>
+          </p:cNvPr>
           <p:cNvPicPr>
             <a:picLocks noChangeAspect="1"/>
           </p:cNvPicPr>
@@ -23314,13 +23328,14 @@
               </a:ext>
             </a:extLst>
           </a:blip>
-          <a:srcRect/>
-          <a:stretch/>
+          <a:stretch>
+            <a:fillRect/>
+          </a:stretch>
         </p:blipFill>
         <p:spPr>
           <a:xfrm>
-            <a:off x="512064" y="987552"/>
-            <a:ext cx="8631936" cy="3730752"/>
+            <a:off x="220159" y="905256"/>
+            <a:ext cx="8923841" cy="3945636"/>
           </a:xfrm>
           <a:prstGeom prst="rect">
             <a:avLst/>
